--- a/presentations/powerpoint/arch-patterns-part2.pptx
+++ b/presentations/powerpoint/arch-patterns-part2.pptx
@@ -24,29 +24,6 @@
     <p:sldId id="272" r:id="rId22"/>
     <p:sldId id="273" r:id="rId23"/>
     <p:sldId id="274" r:id="rId24"/>
-    <p:sldId id="275" r:id="rId25"/>
-    <p:sldId id="276" r:id="rId26"/>
-    <p:sldId id="277" r:id="rId27"/>
-    <p:sldId id="278" r:id="rId28"/>
-    <p:sldId id="279" r:id="rId29"/>
-    <p:sldId id="280" r:id="rId30"/>
-    <p:sldId id="281" r:id="rId31"/>
-    <p:sldId id="282" r:id="rId32"/>
-    <p:sldId id="283" r:id="rId33"/>
-    <p:sldId id="284" r:id="rId34"/>
-    <p:sldId id="285" r:id="rId35"/>
-    <p:sldId id="286" r:id="rId36"/>
-    <p:sldId id="287" r:id="rId37"/>
-    <p:sldId id="288" r:id="rId38"/>
-    <p:sldId id="289" r:id="rId39"/>
-    <p:sldId id="290" r:id="rId40"/>
-    <p:sldId id="291" r:id="rId41"/>
-    <p:sldId id="292" r:id="rId42"/>
-    <p:sldId id="293" r:id="rId43"/>
-    <p:sldId id="294" r:id="rId44"/>
-    <p:sldId id="295" r:id="rId45"/>
-    <p:sldId id="296" r:id="rId46"/>
-    <p:sldId id="297" r:id="rId47"/>
   </p:sldIdLst>
   <p:sldSz cx="12192000" cy="6858000"/>
   <p:notesSz cx="6858000" cy="9144000"/>
@@ -4321,7 +4298,7 @@
           <a:lstStyle/>
           <a:p>
             <a:r>
-              <a:t>Architectural Patterns - PART 2</a:t>
+              <a:t>Architectural Patterns - Part 2</a:t>
             </a:r>
           </a:p>
         </p:txBody>
@@ -4381,7 +4358,7 @@
           <a:lstStyle/>
           <a:p>
             <a:r>
-              <a:t>CQRS - Query Side - Implementation</a:t>
+              <a:t>Saga Pattern Types</a:t>
             </a:r>
           </a:p>
         </p:txBody>
@@ -4402,80 +4379,105 @@
           <a:lstStyle/>
           <a:p>
             <a:pPr>
-              <a:defRPr sz="1400">
-                <a:latin typeface="Consolas"/>
-              </a:defRPr>
+              <a:lnSpc>
+                <a:spcPct val="100000"/>
+              </a:lnSpc>
+              <a:spcBef>
+                <a:spcPts val="0"/>
+              </a:spcBef>
+              <a:spcAft>
+                <a:spcPts val="0"/>
+              </a:spcAft>
             </a:pPr>
             <a:r>
-              <a:t>java</a:t>
-            </a:r>
-            <a:br/>
-            <a:r>
-              <a:t>// Query Side: Builder + Strategy Pattern  </a:t>
-            </a:r>
-            <a:br/>
-            <a:r>
-              <a:t>@Component</a:t>
-            </a:r>
-            <a:br/>
-            <a:r>
-              <a:t>public class DeviceQueryService {</a:t>
-            </a:r>
-            <a:br/>
-            <a:r>
-              <a:t>    public DeviceView getDeviceOverview(String deviceId) {</a:t>
-            </a:r>
-            <a:br/>
-            <a:r>
-              <a:t>        return DeviceView.builder()</a:t>
-            </a:r>
-            <a:br/>
-            <a:r>
-              <a:t>            .basicInfo(deviceRepo.findBasicInfo(deviceId))</a:t>
-            </a:r>
-            <a:br/>
-            <a:r>
-              <a:t>            .currentConfig(configRepo.findCurrent(deviceId))</a:t>
-            </a:r>
-            <a:br/>
-            <a:r>
-              <a:t>            .metrics(metricsRepo.findLatest(deviceId))</a:t>
-            </a:r>
-            <a:br/>
-            <a:r>
-              <a:t>            .alerts(alertRepo.findActive(deviceId))</a:t>
-            </a:r>
-            <a:br/>
-            <a:r>
-              <a:t>            .build();</a:t>
-            </a:r>
-            <a:br/>
-            <a:r>
-              <a:t>    }</a:t>
-            </a:r>
-            <a:br/>
-            <a:r>
-              <a:t>    </a:t>
-            </a:r>
-            <a:br/>
-            <a:r>
-              <a:t>    public List&lt;DeviceView&gt; search(DeviceQuery query) {</a:t>
-            </a:r>
-            <a:br/>
-            <a:r>
-              <a:t>        QueryStrategy strategy = queryStrategies.get(query.getType());</a:t>
-            </a:r>
-            <a:br/>
-            <a:r>
-              <a:t>        return strategy.execute(query);</a:t>
-            </a:r>
-            <a:br/>
-            <a:r>
-              <a:t>    }</a:t>
-            </a:r>
-            <a:br/>
-            <a:r>
-              <a:t>}</a:t>
+              <a:rPr sz="900">
+                <a:latin typeface="Consolas"/>
+              </a:rPr>
+              <a:t>Choreography Saga:           Orchestration Saga:</a:t>
+            </a:r>
+            <a:br/>
+            <a:r>
+              <a:rPr sz="900">
+                <a:latin typeface="Consolas"/>
+              </a:rPr>
+              <a:t>                            </a:t>
+            </a:r>
+            <a:br/>
+            <a:r>
+              <a:rPr sz="900">
+                <a:latin typeface="Consolas"/>
+              </a:rPr>
+              <a:t>Service A ──&gt; Service B       ┌─────────────────┐</a:t>
+            </a:r>
+            <a:br/>
+            <a:r>
+              <a:rPr sz="900">
+                <a:latin typeface="Consolas"/>
+              </a:rPr>
+              <a:t>    │             │          │ Saga Manager   │</a:t>
+            </a:r>
+            <a:br/>
+            <a:r>
+              <a:rPr sz="900">
+                <a:latin typeface="Consolas"/>
+              </a:rPr>
+              <a:t>    ▼             ▼          │                 │</a:t>
+            </a:r>
+            <a:br/>
+            <a:r>
+              <a:rPr sz="900">
+                <a:latin typeface="Consolas"/>
+              </a:rPr>
+              <a:t>Service C ──&gt; Service D      │ 1. Service A    │</a:t>
+            </a:r>
+            <a:br/>
+            <a:r>
+              <a:rPr sz="900">
+                <a:latin typeface="Consolas"/>
+              </a:rPr>
+              <a:t>                             │ 2. Service B    │</a:t>
+            </a:r>
+            <a:br/>
+            <a:r>
+              <a:rPr sz="900">
+                <a:latin typeface="Consolas"/>
+              </a:rPr>
+              <a:t>Event-driven,                │ 3. Service C    │</a:t>
+            </a:r>
+            <a:br/>
+            <a:r>
+              <a:rPr sz="900">
+                <a:latin typeface="Consolas"/>
+              </a:rPr>
+              <a:t>Distributed control          │ 4. Rollback?    │</a:t>
+            </a:r>
+            <a:br/>
+            <a:r>
+              <a:rPr sz="900">
+                <a:latin typeface="Consolas"/>
+              </a:rPr>
+              <a:t>                             └─────────────────┘</a:t>
+            </a:r>
+            <a:br/>
+            <a:r>
+              <a:rPr sz="900">
+                <a:latin typeface="Consolas"/>
+              </a:rPr>
+              <a:t>                             </a:t>
+            </a:r>
+            <a:br/>
+            <a:r>
+              <a:rPr sz="900">
+                <a:latin typeface="Consolas"/>
+              </a:rPr>
+              <a:t>                             Centralized control,</a:t>
+            </a:r>
+            <a:br/>
+            <a:r>
+              <a:rPr sz="900">
+                <a:latin typeface="Consolas"/>
+              </a:rPr>
+              <a:t>                             Explicit workflow</a:t>
             </a:r>
           </a:p>
         </p:txBody>
@@ -4514,7 +4516,7 @@
           <a:lstStyle/>
           <a:p>
             <a:r>
-              <a:t>CQRS Trade-offs</a:t>
+              <a:t>API Gateway Pattern</a:t>
             </a:r>
           </a:p>
         </p:txBody>
@@ -4570,7 +4572,7 @@
           <a:lstStyle/>
           <a:p>
             <a:r>
-              <a:t>CQRS Trade-offs</a:t>
+              <a:t>API Gateway Architecture</a:t>
             </a:r>
           </a:p>
         </p:txBody>
@@ -4591,84 +4593,147 @@
           <a:lstStyle/>
           <a:p>
             <a:pPr>
-              <a:defRPr b="1" sz="1800"/>
+              <a:lnSpc>
+                <a:spcPct val="100000"/>
+              </a:lnSpc>
+              <a:spcBef>
+                <a:spcPts val="0"/>
+              </a:spcBef>
+              <a:spcAft>
+                <a:spcPts val="0"/>
+              </a:spcAft>
             </a:pPr>
             <a:r>
-              <a:t>Vorteile</a:t>
-            </a:r>
-          </a:p>
-          <a:p>
-            <a:r>
-              <a:t>• Performance: Optimized Data Models für Read/Write Operations</a:t>
-            </a:r>
-          </a:p>
-          <a:p>
-            <a:r>
-              <a:t>• Skalierung: Read/Write Operations unabhängig skalierbar</a:t>
-            </a:r>
-          </a:p>
-          <a:p>
-            <a:r>
-              <a:t>• Complex Queries: Performance durch denormalized Read Models</a:t>
-            </a:r>
-          </a:p>
-          <a:p>
-            <a:r>
-              <a:t>• Event Sourcing Integration: Natürliche Kombination möglich</a:t>
-            </a:r>
-          </a:p>
-          <a:p>
-            <a:pPr>
-              <a:defRPr b="1" sz="1800"/>
-            </a:pPr>
-            <a:r>
-              <a:t>Nachteile</a:t>
-            </a:r>
-          </a:p>
-          <a:p>
-            <a:r>
-              <a:t>• Eventual Consistency: zwischen Read/Write Models</a:t>
-            </a:r>
-          </a:p>
-          <a:p>
-            <a:r>
-              <a:t>• Maintenance: Doppelte Data Models erhöhen Aufwand</a:t>
-            </a:r>
-          </a:p>
-          <a:p>
-            <a:r>
-              <a:t>• Synchronization: Event Sync zwischen Models komplex</a:t>
-            </a:r>
-          </a:p>
-          <a:p>
-            <a:r>
-              <a:t>• Over-Engineering: für simple CRUD Applications</a:t>
-            </a:r>
-          </a:p>
-          <a:p>
-            <a:pPr>
-              <a:defRPr b="1" sz="1800"/>
-            </a:pPr>
-            <a:r>
-              <a:t>Production Considerations</a:t>
-            </a:r>
-          </a:p>
-          <a:p>
-            <a:pPr lvl="1"/>
-            <a:r>
-              <a:t>Event Store für reliable Command/Query Sync</a:t>
-            </a:r>
-          </a:p>
-          <a:p>
-            <a:pPr lvl="1"/>
-            <a:r>
-              <a:t>Read Model Rebuild Strategy bei Schema Changes</a:t>
-            </a:r>
-          </a:p>
-          <a:p>
-            <a:pPr lvl="1"/>
-            <a:r>
-              <a:t>Monitoring von Read/Write Model Sync Lag</a:t>
+              <a:rPr sz="900">
+                <a:latin typeface="Consolas"/>
+              </a:rPr>
+              <a:t>Client Requests</a:t>
+            </a:r>
+            <a:br/>
+            <a:r>
+              <a:rPr sz="900">
+                <a:latin typeface="Consolas"/>
+              </a:rPr>
+              <a:t>               │</a:t>
+            </a:r>
+            <a:br/>
+            <a:r>
+              <a:rPr sz="900">
+                <a:latin typeface="Consolas"/>
+              </a:rPr>
+              <a:t>               ▼</a:t>
+            </a:r>
+            <a:br/>
+            <a:r>
+              <a:rPr sz="900">
+                <a:latin typeface="Consolas"/>
+              </a:rPr>
+              <a:t>    ┌─────────────────────┐</a:t>
+            </a:r>
+            <a:br/>
+            <a:r>
+              <a:rPr sz="900">
+                <a:latin typeface="Consolas"/>
+              </a:rPr>
+              <a:t>    │   API Gateway       │</a:t>
+            </a:r>
+            <a:br/>
+            <a:r>
+              <a:rPr sz="900">
+                <a:latin typeface="Consolas"/>
+              </a:rPr>
+              <a:t>    │                     │</a:t>
+            </a:r>
+            <a:br/>
+            <a:r>
+              <a:rPr sz="900">
+                <a:latin typeface="Consolas"/>
+              </a:rPr>
+              <a:t>    │ - Authentication    │</a:t>
+            </a:r>
+            <a:br/>
+            <a:r>
+              <a:rPr sz="900">
+                <a:latin typeface="Consolas"/>
+              </a:rPr>
+              <a:t>    │ - Authorization     │</a:t>
+            </a:r>
+            <a:br/>
+            <a:r>
+              <a:rPr sz="900">
+                <a:latin typeface="Consolas"/>
+              </a:rPr>
+              <a:t>    │ - Rate Limiting     │</a:t>
+            </a:r>
+            <a:br/>
+            <a:r>
+              <a:rPr sz="900">
+                <a:latin typeface="Consolas"/>
+              </a:rPr>
+              <a:t>    │ - Load Balancing    │</a:t>
+            </a:r>
+            <a:br/>
+            <a:r>
+              <a:rPr sz="900">
+                <a:latin typeface="Consolas"/>
+              </a:rPr>
+              <a:t>    │ - Request Routing   │</a:t>
+            </a:r>
+            <a:br/>
+            <a:r>
+              <a:rPr sz="900">
+                <a:latin typeface="Consolas"/>
+              </a:rPr>
+              <a:t>    │ - Response Caching  │</a:t>
+            </a:r>
+            <a:br/>
+            <a:r>
+              <a:rPr sz="900">
+                <a:latin typeface="Consolas"/>
+              </a:rPr>
+              <a:t>    │ - Monitoring        │</a:t>
+            </a:r>
+            <a:br/>
+            <a:r>
+              <a:rPr sz="900">
+                <a:latin typeface="Consolas"/>
+              </a:rPr>
+              <a:t>    └─────────────────────┘</a:t>
+            </a:r>
+            <a:br/>
+            <a:r>
+              <a:rPr sz="900">
+                <a:latin typeface="Consolas"/>
+              </a:rPr>
+              <a:t>               │</a:t>
+            </a:r>
+            <a:br/>
+            <a:r>
+              <a:rPr sz="900">
+                <a:latin typeface="Consolas"/>
+              </a:rPr>
+              <a:t>               ▼</a:t>
+            </a:r>
+            <a:br/>
+            <a:r>
+              <a:rPr sz="900">
+                <a:latin typeface="Consolas"/>
+              </a:rPr>
+              <a:t>    ┌─────────┬─────────┬─────────┐</a:t>
+            </a:r>
+            <a:br/>
+            <a:r>
+              <a:rPr sz="900">
+                <a:latin typeface="Consolas"/>
+              </a:rPr>
+              <a:t>    │Service A│Service B│Service C│</a:t>
+            </a:r>
+            <a:br/>
+            <a:r>
+              <a:rPr sz="900">
+                <a:latin typeface="Consolas"/>
+              </a:rPr>
+              <a:t>    └─────────┴─────────┴─────────┘</a:t>
             </a:r>
           </a:p>
         </p:txBody>
@@ -4707,7 +4772,7 @@
           <a:lstStyle/>
           <a:p>
             <a:r>
-              <a:t>Event Sourcing</a:t>
+              <a:t>Service Mesh</a:t>
             </a:r>
           </a:p>
         </p:txBody>
@@ -4763,7 +4828,7 @@
           <a:lstStyle/>
           <a:p>
             <a:r>
-              <a:t>Event Sourcing</a:t>
+              <a:t>Service Mesh Architecture (Istio)</a:t>
             </a:r>
           </a:p>
         </p:txBody>
@@ -4784,42 +4849,148 @@
           <a:lstStyle/>
           <a:p>
             <a:pPr>
-              <a:defRPr b="1" sz="1800"/>
+              <a:lnSpc>
+                <a:spcPct val="100000"/>
+              </a:lnSpc>
+              <a:spcBef>
+                <a:spcPts val="0"/>
+              </a:spcBef>
+              <a:spcAft>
+                <a:spcPts val="0"/>
+              </a:spcAft>
             </a:pPr>
             <a:r>
-              <a:t>Problem</a:t>
-            </a:r>
-          </a:p>
-          <a:p>
-            <a:pPr lvl="1"/>
-            <a:r>
-              <a:t>Traditionelle CRUD: Aktueller State, Historie verloren</a:t>
-            </a:r>
-          </a:p>
-          <a:p>
-            <a:pPr lvl="1"/>
-            <a:r>
-              <a:t>Audit Trail für Compliance Requirements</a:t>
-            </a:r>
-          </a:p>
-          <a:p>
-            <a:pPr lvl="1"/>
-            <a:r>
-              <a:t>Debugging: "Wie kam das System in diesen Zustand?"</a:t>
-            </a:r>
-          </a:p>
-          <a:p>
-            <a:pPr lvl="1"/>
-            <a:r>
-              <a:t>Rollback und Time-Travel schwierig</a:t>
-            </a:r>
-          </a:p>
-          <a:p>
-            <a:pPr>
-              <a:defRPr b="1" sz="1800"/>
-            </a:pPr>
-            <a:r>
-              <a:t>Event Sourcing Konzept</a:t>
+              <a:rPr sz="900">
+                <a:latin typeface="Consolas"/>
+              </a:rPr>
+              <a:t>┌──────────────────────────────────────────────────────┐</a:t>
+            </a:r>
+            <a:br/>
+            <a:r>
+              <a:rPr sz="900">
+                <a:latin typeface="Consolas"/>
+              </a:rPr>
+              <a:t>│                Control Plane                         │</a:t>
+            </a:r>
+            <a:br/>
+            <a:r>
+              <a:rPr sz="900">
+                <a:latin typeface="Consolas"/>
+              </a:rPr>
+              <a:t>│ ┌─────────────┐ ┌─────────────┐ ┌─────────────┐      │</a:t>
+            </a:r>
+            <a:br/>
+            <a:r>
+              <a:rPr sz="900">
+                <a:latin typeface="Consolas"/>
+              </a:rPr>
+              <a:t>│ │   Pilot     │ │   Citadel   │ │   Mixer     │      │</a:t>
+            </a:r>
+            <a:br/>
+            <a:r>
+              <a:rPr sz="900">
+                <a:latin typeface="Consolas"/>
+              </a:rPr>
+              <a:t>│ │ (Discovery) │ │ (Security)  │ │ (Telemetry) │      │</a:t>
+            </a:r>
+            <a:br/>
+            <a:r>
+              <a:rPr sz="900">
+                <a:latin typeface="Consolas"/>
+              </a:rPr>
+              <a:t>│ └─────────────┘ └─────────────┘ └─────────────┘      │</a:t>
+            </a:r>
+            <a:br/>
+            <a:r>
+              <a:rPr sz="900">
+                <a:latin typeface="Consolas"/>
+              </a:rPr>
+              <a:t>└──────────────────────────────────────────────────────┘</a:t>
+            </a:r>
+            <a:br/>
+            <a:r>
+              <a:rPr sz="900">
+                <a:latin typeface="Consolas"/>
+              </a:rPr>
+              <a:t>                        │</a:t>
+            </a:r>
+            <a:br/>
+            <a:r>
+              <a:rPr sz="900">
+                <a:latin typeface="Consolas"/>
+              </a:rPr>
+              <a:t>                        ▼ (Configuration)</a:t>
+            </a:r>
+            <a:br/>
+            <a:r>
+              <a:rPr sz="900">
+                <a:latin typeface="Consolas"/>
+              </a:rPr>
+              <a:t>┌─────────────┐     ┌─────────────┐     ┌─────────────┐</a:t>
+            </a:r>
+            <a:br/>
+            <a:r>
+              <a:rPr sz="900">
+                <a:latin typeface="Consolas"/>
+              </a:rPr>
+              <a:t>│ Service A   │     │ Service B   │     │ Service C   │</a:t>
+            </a:r>
+            <a:br/>
+            <a:r>
+              <a:rPr sz="900">
+                <a:latin typeface="Consolas"/>
+              </a:rPr>
+              <a:t>│             │     │             │     │             │</a:t>
+            </a:r>
+            <a:br/>
+            <a:r>
+              <a:rPr sz="900">
+                <a:latin typeface="Consolas"/>
+              </a:rPr>
+              <a:t>│ ┌─────────┐ │◄────┤ ┌─────────┐ │◄────┤ ┌─────────┐ │</a:t>
+            </a:r>
+            <a:br/>
+            <a:r>
+              <a:rPr sz="900">
+                <a:latin typeface="Consolas"/>
+              </a:rPr>
+              <a:t>│ │ Proxy   │ │     │ │ Proxy   │ │     │ │ Proxy   │ │</a:t>
+            </a:r>
+            <a:br/>
+            <a:r>
+              <a:rPr sz="900">
+                <a:latin typeface="Consolas"/>
+              </a:rPr>
+              <a:t>│ │(Envoy)  │ │     │ │(Envoy)  │ │     │ │(Envoy)  │ │</a:t>
+            </a:r>
+            <a:br/>
+            <a:r>
+              <a:rPr sz="900">
+                <a:latin typeface="Consolas"/>
+              </a:rPr>
+              <a:t>│ └─────────┘ │     │ └─────────┘ │     │ └─────────┘ │</a:t>
+            </a:r>
+            <a:br/>
+            <a:r>
+              <a:rPr sz="900">
+                <a:latin typeface="Consolas"/>
+              </a:rPr>
+              <a:t>└─────────────┘     └─────────────┘     └─────────────┘</a:t>
+            </a:r>
+            <a:br/>
+            <a:br/>
+            <a:r>
+              <a:rPr sz="900">
+                <a:latin typeface="Consolas"/>
+              </a:rPr>
+              <a:t>Data Plane: Envoy Proxies handle all traffic</a:t>
+            </a:r>
+            <a:br/>
+            <a:r>
+              <a:rPr sz="900">
+                <a:latin typeface="Consolas"/>
+              </a:rPr>
+              <a:t>Control Plane: Configures and monitors proxies</a:t>
             </a:r>
           </a:p>
         </p:txBody>
@@ -4849,7 +5020,7 @@
             <a:spLocks noGrp="1"/>
           </p:cNvSpPr>
           <p:nvPr>
-            <p:ph type="title"/>
+            <p:ph type="ctrTitle"/>
           </p:nvPr>
         </p:nvSpPr>
         <p:spPr/>
@@ -4858,71 +5029,26 @@
           <a:lstStyle/>
           <a:p>
             <a:r>
-              <a:t>Event Sourcing - Implementation</a:t>
-            </a:r>
-          </a:p>
-        </p:txBody>
-      </p:sp>
-      <p:sp>
-        <p:nvSpPr>
-          <p:cNvPr id="3" name="Content Placeholder 2"/>
-          <p:cNvSpPr>
-            <a:spLocks noGrp="1"/>
-          </p:cNvSpPr>
-          <p:nvPr>
-            <p:ph idx="1"/>
+              <a:t>Bulkhead Pattern</a:t>
+            </a:r>
+          </a:p>
+        </p:txBody>
+      </p:sp>
+      <p:sp>
+        <p:nvSpPr>
+          <p:cNvPr id="3" name="Subtitle 2"/>
+          <p:cNvSpPr>
+            <a:spLocks noGrp="1"/>
+          </p:cNvSpPr>
+          <p:nvPr>
+            <p:ph type="subTitle" idx="1"/>
           </p:nvPr>
         </p:nvSpPr>
         <p:spPr/>
         <p:txBody>
           <a:bodyPr/>
           <a:lstStyle/>
-          <a:p>
-            <a:pPr>
-              <a:defRPr sz="1400">
-                <a:latin typeface="Consolas"/>
-              </a:defRPr>
-            </a:pPr>
-            <a:r>
-              <a:t>Commands            Events               Current State</a:t>
-            </a:r>
-            <a:br/>
-            <a:r>
-              <a:t>┌───────────┐    ┌─────────────┐      ┌─────────────────┐</a:t>
-            </a:r>
-            <a:br/>
-            <a:r>
-              <a:t>│ Create    │───&gt;│ DeviceCreated│───&gt; │                 │</a:t>
-            </a:r>
-            <a:br/>
-            <a:r>
-              <a:t>│ Device    │    │   Event     │     │     Current     │</a:t>
-            </a:r>
-            <a:br/>
-            <a:r>
-              <a:t>└───────────┘    └─────────────┘     │      State      │</a:t>
-            </a:r>
-            <a:br/>
-            <a:r>
-              <a:t>                                     │                 │</a:t>
-            </a:r>
-            <a:br/>
-            <a:r>
-              <a:t>┌───────────┐    ┌─────────────┐     │   (Projection   │</a:t>
-            </a:r>
-            <a:br/>
-            <a:r>
-              <a:t>│ Configure │───&gt;│ConfigChanged│───&gt; │   from Events)  │</a:t>
-            </a:r>
-            <a:br/>
-            <a:r>
-              <a:t>│ Device    │    │   Event     │     │                 │</a:t>
-            </a:r>
-            <a:br/>
-            <a:r>
-              <a:t>└───────────┘    └─────────────┘     └─────────────────┘</a:t>
-            </a:r>
-          </a:p>
+          <a:p/>
         </p:txBody>
       </p:sp>
     </p:spTree>
@@ -4950,7 +5076,7 @@
             <a:spLocks noGrp="1"/>
           </p:cNvSpPr>
           <p:nvPr>
-            <p:ph type="ctrTitle"/>
+            <p:ph type="title"/>
           </p:nvPr>
         </p:nvSpPr>
         <p:spPr/>
@@ -4959,26 +5085,129 @@
           <a:lstStyle/>
           <a:p>
             <a:r>
-              <a:t>Event Sourcing - Implementation</a:t>
-            </a:r>
-          </a:p>
-        </p:txBody>
-      </p:sp>
-      <p:sp>
-        <p:nvSpPr>
-          <p:cNvPr id="3" name="Subtitle 2"/>
-          <p:cNvSpPr>
-            <a:spLocks noGrp="1"/>
-          </p:cNvSpPr>
-          <p:nvPr>
-            <p:ph type="subTitle" idx="1"/>
+              <a:t>Bulkhead Pattern - Resource Isolation</a:t>
+            </a:r>
+          </a:p>
+        </p:txBody>
+      </p:sp>
+      <p:sp>
+        <p:nvSpPr>
+          <p:cNvPr id="3" name="Content Placeholder 2"/>
+          <p:cNvSpPr>
+            <a:spLocks noGrp="1"/>
+          </p:cNvSpPr>
+          <p:nvPr>
+            <p:ph idx="1"/>
           </p:nvPr>
         </p:nvSpPr>
         <p:spPr/>
         <p:txBody>
           <a:bodyPr/>
           <a:lstStyle/>
-          <a:p/>
+          <a:p>
+            <a:pPr>
+              <a:lnSpc>
+                <a:spcPct val="100000"/>
+              </a:lnSpc>
+              <a:spcBef>
+                <a:spcPts val="0"/>
+              </a:spcBef>
+              <a:spcAft>
+                <a:spcPts val="0"/>
+              </a:spcAft>
+            </a:pPr>
+            <a:r>
+              <a:rPr sz="900">
+                <a:latin typeface="Consolas"/>
+              </a:rPr>
+              <a:t>Thread Pools per Client Type:</a:t>
+            </a:r>
+            <a:br/>
+            <a:r>
+              <a:rPr sz="900">
+                <a:latin typeface="Consolas"/>
+              </a:rPr>
+              <a:t>┌─────────────────────────────────────────────────┐</a:t>
+            </a:r>
+            <a:br/>
+            <a:r>
+              <a:rPr sz="900">
+                <a:latin typeface="Consolas"/>
+              </a:rPr>
+              <a:t>│                Service                          │</a:t>
+            </a:r>
+            <a:br/>
+            <a:r>
+              <a:rPr sz="900">
+                <a:latin typeface="Consolas"/>
+              </a:rPr>
+              <a:t>│                                                 │</a:t>
+            </a:r>
+            <a:br/>
+            <a:r>
+              <a:rPr sz="900">
+                <a:latin typeface="Consolas"/>
+              </a:rPr>
+              <a:t>│ ┌─────────────┐ ┌─────────────┐ ┌─────────────┐ │</a:t>
+            </a:r>
+            <a:br/>
+            <a:r>
+              <a:rPr sz="900">
+                <a:latin typeface="Consolas"/>
+              </a:rPr>
+              <a:t>│ │Premium      │ │Standard     │ │Basic        │ │</a:t>
+            </a:r>
+            <a:br/>
+            <a:r>
+              <a:rPr sz="900">
+                <a:latin typeface="Consolas"/>
+              </a:rPr>
+              <a:t>│ │Clients      │ │Clients      │ │Clients      │ │</a:t>
+            </a:r>
+            <a:br/>
+            <a:r>
+              <a:rPr sz="900">
+                <a:latin typeface="Consolas"/>
+              </a:rPr>
+              <a:t>│ │             │ │             │ │             │ │</a:t>
+            </a:r>
+            <a:br/>
+            <a:r>
+              <a:rPr sz="900">
+                <a:latin typeface="Consolas"/>
+              </a:rPr>
+              <a:t>│ │Thread Pool  │ │Thread Pool  │ │Thread Pool  │ │</a:t>
+            </a:r>
+            <a:br/>
+            <a:r>
+              <a:rPr sz="900">
+                <a:latin typeface="Consolas"/>
+              </a:rPr>
+              <a:t>│ │Size: 50     │ │Size: 30     │ │Size: 20     │ │</a:t>
+            </a:r>
+            <a:br/>
+            <a:r>
+              <a:rPr sz="900">
+                <a:latin typeface="Consolas"/>
+              </a:rPr>
+              <a:t>│ └─────────────┘ └─────────────┘ └─────────────┘ │</a:t>
+            </a:r>
+            <a:br/>
+            <a:r>
+              <a:rPr sz="900">
+                <a:latin typeface="Consolas"/>
+              </a:rPr>
+              <a:t>└─────────────────────────────────────────────────┘</a:t>
+            </a:r>
+            <a:br/>
+            <a:br/>
+            <a:r>
+              <a:rPr sz="900">
+                <a:latin typeface="Consolas"/>
+              </a:rPr>
+              <a:t>Benefit: Basic clients cannot starve Premium clients</a:t>
+            </a:r>
+          </a:p>
         </p:txBody>
       </p:sp>
     </p:spTree>
@@ -5006,7 +5235,7 @@
             <a:spLocks noGrp="1"/>
           </p:cNvSpPr>
           <p:nvPr>
-            <p:ph type="title"/>
+            <p:ph type="ctrTitle"/>
           </p:nvPr>
         </p:nvSpPr>
         <p:spPr/>
@@ -5015,33 +5244,26 @@
           <a:lstStyle/>
           <a:p>
             <a:r>
-              <a:t>Event Sourcing - Implementation</a:t>
-            </a:r>
-          </a:p>
-        </p:txBody>
-      </p:sp>
-      <p:sp>
-        <p:nvSpPr>
-          <p:cNvPr id="3" name="Content Placeholder 2"/>
-          <p:cNvSpPr>
-            <a:spLocks noGrp="1"/>
-          </p:cNvSpPr>
-          <p:nvPr>
-            <p:ph idx="1"/>
+              <a:t>Domain-Driven Design (DDD)</a:t>
+            </a:r>
+          </a:p>
+        </p:txBody>
+      </p:sp>
+      <p:sp>
+        <p:nvSpPr>
+          <p:cNvPr id="3" name="Subtitle 2"/>
+          <p:cNvSpPr>
+            <a:spLocks noGrp="1"/>
+          </p:cNvSpPr>
+          <p:nvPr>
+            <p:ph type="subTitle" idx="1"/>
           </p:nvPr>
         </p:nvSpPr>
         <p:spPr/>
         <p:txBody>
           <a:bodyPr/>
           <a:lstStyle/>
-          <a:p>
-            <a:pPr>
-              <a:defRPr b="1" sz="1800"/>
-            </a:pPr>
-            <a:r>
-              <a:t>Event Store Pattern</a:t>
-            </a:r>
-          </a:p>
+          <a:p/>
         </p:txBody>
       </p:sp>
     </p:spTree>
@@ -5078,7 +5300,7 @@
           <a:lstStyle/>
           <a:p>
             <a:r>
-              <a:t>Event Sourcing - Implementation - Implementation</a:t>
+              <a:t>DDD Bounded Contexts - Telekom</a:t>
             </a:r>
           </a:p>
         </p:txBody>
@@ -5099,81 +5321,99 @@
           <a:lstStyle/>
           <a:p>
             <a:pPr>
-              <a:defRPr sz="1400">
-                <a:latin typeface="Consolas"/>
-              </a:defRPr>
+              <a:lnSpc>
+                <a:spcPct val="100000"/>
+              </a:lnSpc>
+              <a:spcBef>
+                <a:spcPts val="0"/>
+              </a:spcBef>
+              <a:spcAft>
+                <a:spcPts val="0"/>
+              </a:spcAft>
             </a:pPr>
             <a:r>
-              <a:t>Event Sourcing Pattern:</a:t>
-            </a:r>
-            <a:br/>
-            <a:br/>
-            <a:r>
-              <a:t>  Commands            Events               Projections</a:t>
-            </a:r>
-            <a:br/>
-            <a:r>
-              <a:t>┌───────────┐      ┌─────────────────┐      ┌──────────────────┐</a:t>
-            </a:r>
-            <a:br/>
-            <a:r>
-              <a:t>│ Commands  │────&gt; │ Event Store    │────&gt; │ Current State   │</a:t>
-            </a:r>
-            <a:br/>
-            <a:r>
-              <a:t>│           │      │                 │      │ Projection      │</a:t>
-            </a:r>
-            <a:br/>
-            <a:r>
-              <a:t>│           │      │ Immutable       │      │                 │</a:t>
-            </a:r>
-            <a:br/>
-            <a:r>
-              <a:t>│           │      │ Append-Only     │      │                 │</a:t>
-            </a:r>
-            <a:br/>
-            <a:r>
-              <a:t>└───────────┘      │ Event Log       │      └──────────────────┘</a:t>
-            </a:r>
-            <a:br/>
-            <a:r>
-              <a:t>                   └─────────────────┘              ▲</a:t>
-            </a:r>
-            <a:br/>
-            <a:r>
-              <a:t>                                                    │</a:t>
-            </a:r>
-            <a:br/>
-            <a:r>
-              <a:t>                                       ┌──────────────────┐</a:t>
-            </a:r>
-            <a:br/>
-            <a:r>
-              <a:t>                                       │ History         │</a:t>
-            </a:r>
-            <a:br/>
-            <a:r>
-              <a:t>                                       │ Projection      │</a:t>
-            </a:r>
-            <a:br/>
-            <a:r>
-              <a:t>                                       │                 │</a:t>
-            </a:r>
-            <a:br/>
-            <a:r>
-              <a:t>                                       │ Time Travel:    │</a:t>
-            </a:r>
-            <a:br/>
-            <a:r>
-              <a:t>                                       │ State at T =    │</a:t>
-            </a:r>
-            <a:br/>
-            <a:r>
-              <a:t>                                       │ f(Events until T)│</a:t>
-            </a:r>
-            <a:br/>
-            <a:r>
-              <a:t>                                       └──────────────────┘</a:t>
+              <a:rPr sz="900">
+                <a:latin typeface="Consolas"/>
+              </a:rPr>
+              <a:t>┌─────────────────┐    ┌─────────────────┐    ┌─────────────────┐</a:t>
+            </a:r>
+            <a:br/>
+            <a:r>
+              <a:rPr sz="900">
+                <a:latin typeface="Consolas"/>
+              </a:rPr>
+              <a:t>│ Customer        │    │ Billing         │    │ Network         │</a:t>
+            </a:r>
+            <a:br/>
+            <a:r>
+              <a:rPr sz="900">
+                <a:latin typeface="Consolas"/>
+              </a:rPr>
+              <a:t>│ Management      │    │ Context         │    │ Operations      │</a:t>
+            </a:r>
+            <a:br/>
+            <a:r>
+              <a:rPr sz="900">
+                <a:latin typeface="Consolas"/>
+              </a:rPr>
+              <a:t>│                 │    │                 │    │                 │</a:t>
+            </a:r>
+            <a:br/>
+            <a:r>
+              <a:rPr sz="900">
+                <a:latin typeface="Consolas"/>
+              </a:rPr>
+              <a:t>│ - Customer      │◄──►│ - Invoice       │◄──►│ - Device        │</a:t>
+            </a:r>
+            <a:br/>
+            <a:r>
+              <a:rPr sz="900">
+                <a:latin typeface="Consolas"/>
+              </a:rPr>
+              <a:t>│ - Contract      │    │ - Payment       │    │ - Configuration │</a:t>
+            </a:r>
+            <a:br/>
+            <a:r>
+              <a:rPr sz="900">
+                <a:latin typeface="Consolas"/>
+              </a:rPr>
+              <a:t>│ - Profile       │    │ - Tariff        │    │ - Monitoring    │</a:t>
+            </a:r>
+            <a:br/>
+            <a:r>
+              <a:rPr sz="900">
+                <a:latin typeface="Consolas"/>
+              </a:rPr>
+              <a:t>└─────────────────┘    └─────────────────┘    └─────────────────┘</a:t>
+            </a:r>
+            <a:br/>
+            <a:br/>
+            <a:r>
+              <a:rPr sz="900">
+                <a:latin typeface="Consolas"/>
+              </a:rPr>
+              <a:t>Relationships:</a:t>
+            </a:r>
+            <a:br/>
+            <a:r>
+              <a:rPr sz="900">
+                <a:latin typeface="Consolas"/>
+              </a:rPr>
+              <a:t>◄──► Anti-Corruption Layer (ACL)</a:t>
+            </a:r>
+            <a:br/>
+            <a:r>
+              <a:rPr sz="900">
+                <a:latin typeface="Consolas"/>
+              </a:rPr>
+              <a:t>═══► Shared Kernel</a:t>
+            </a:r>
+            <a:br/>
+            <a:r>
+              <a:rPr sz="900">
+                <a:latin typeface="Consolas"/>
+              </a:rPr>
+              <a:t>───► Customer-Supplier</a:t>
             </a:r>
           </a:p>
         </p:txBody>
@@ -5203,7 +5443,7 @@
             <a:spLocks noGrp="1"/>
           </p:cNvSpPr>
           <p:nvPr>
-            <p:ph type="ctrTitle"/>
+            <p:ph type="title"/>
           </p:nvPr>
         </p:nvSpPr>
         <p:spPr/>
@@ -5212,26 +5452,109 @@
           <a:lstStyle/>
           <a:p>
             <a:r>
-              <a:t>Event Sourcing - Telekom Use Case</a:t>
-            </a:r>
-          </a:p>
-        </p:txBody>
-      </p:sp>
-      <p:sp>
-        <p:nvSpPr>
-          <p:cNvPr id="3" name="Subtitle 2"/>
-          <p:cNvSpPr>
-            <a:spLocks noGrp="1"/>
-          </p:cNvSpPr>
-          <p:nvPr>
-            <p:ph type="subTitle" idx="1"/>
+              <a:t>Zusammenfassung - Part 2</a:t>
+            </a:r>
+          </a:p>
+        </p:txBody>
+      </p:sp>
+      <p:sp>
+        <p:nvSpPr>
+          <p:cNvPr id="3" name="Content Placeholder 2"/>
+          <p:cNvSpPr>
+            <a:spLocks noGrp="1"/>
+          </p:cNvSpPr>
+          <p:nvPr>
+            <p:ph idx="1"/>
           </p:nvPr>
         </p:nvSpPr>
         <p:spPr/>
         <p:txBody>
           <a:bodyPr/>
           <a:lstStyle/>
-          <a:p/>
+          <a:p>
+            <a:pPr/>
+            <a:r>
+              <a:t>**Pattern-Kombinationen nutzen:**</a:t>
+            </a:r>
+          </a:p>
+          <a:p>
+            <a:pPr lvl="1"/>
+            <a:r>
+              <a:t>• CQRS + Event Sourcing: Für Audit und Performance</a:t>
+            </a:r>
+          </a:p>
+          <a:p>
+            <a:pPr lvl="1"/>
+            <a:r>
+              <a:t>• Microservices + Service Mesh: Für Infrastructure Concerns</a:t>
+            </a:r>
+          </a:p>
+          <a:p>
+            <a:pPr lvl="1"/>
+            <a:r>
+              <a:t>• Circuit Breaker + Bulkhead: Für System Resilience</a:t>
+            </a:r>
+          </a:p>
+          <a:p>
+            <a:pPr lvl="1"/>
+            <a:r>
+              <a:t>• API Gateway + DDD: Für Business-oriented APIs</a:t>
+            </a:r>
+          </a:p>
+          <a:p>
+            <a:pPr/>
+            <a:r>
+              <a:t>**Evolution über Revolution:**</a:t>
+            </a:r>
+          </a:p>
+          <a:p>
+            <a:pPr lvl="1"/>
+            <a:r>
+              <a:t>• Start Simple: Layered Architecture für Prototypen</a:t>
+            </a:r>
+          </a:p>
+          <a:p>
+            <a:pPr lvl="1"/>
+            <a:r>
+              <a:t>• Scale Systematically: Microservices für große Teams</a:t>
+            </a:r>
+          </a:p>
+          <a:p>
+            <a:pPr lvl="1"/>
+            <a:r>
+              <a:t>• Optimize Specifically: CQRS/Event Sourcing für Performance</a:t>
+            </a:r>
+          </a:p>
+          <a:p>
+            <a:pPr/>
+            <a:r>
+              <a:t>**Telekom-spezifische Guidance:**</a:t>
+            </a:r>
+          </a:p>
+          <a:p>
+            <a:pPr/>
+            <a:r>
+              <a:t>✅ Network Operations: Event-Driven + CQRS</a:t>
+            </a:r>
+          </a:p>
+          <a:p>
+            <a:pPr/>
+            <a:r>
+              <a:t>✅ Customer Management: DDD + Event Sourcing</a:t>
+            </a:r>
+          </a:p>
+          <a:p>
+            <a:pPr/>
+            <a:r>
+              <a:t>✅ Billing Systems: Saga Pattern</a:t>
+            </a:r>
+          </a:p>
+          <a:p>
+            <a:pPr/>
+            <a:r>
+              <a:t>✅ Legacy Integration: Strangler Fig Pattern</a:t>
+            </a:r>
+          </a:p>
         </p:txBody>
       </p:sp>
     </p:spTree>
@@ -5298,946 +5621,6 @@
 </p:sld>
 </file>
 
-<file path=ppt/slides/slide20.xml><?xml version="1.0" encoding="utf-8"?>
-<p:sld xmlns:a="http://schemas.openxmlformats.org/drawingml/2006/main" xmlns:p="http://schemas.openxmlformats.org/presentationml/2006/main" xmlns:r="http://schemas.openxmlformats.org/officeDocument/2006/relationships">
-  <p:cSld>
-    <p:spTree>
-      <p:nvGrpSpPr>
-        <p:cNvPr id="1" name=""/>
-        <p:cNvGrpSpPr/>
-        <p:nvPr/>
-      </p:nvGrpSpPr>
-      <p:grpSpPr/>
-      <p:sp>
-        <p:nvSpPr>
-          <p:cNvPr id="2" name="Title 1"/>
-          <p:cNvSpPr>
-            <a:spLocks noGrp="1"/>
-          </p:cNvSpPr>
-          <p:nvPr>
-            <p:ph type="title"/>
-          </p:nvPr>
-        </p:nvSpPr>
-        <p:spPr/>
-        <p:txBody>
-          <a:bodyPr/>
-          <a:lstStyle/>
-          <a:p>
-            <a:r>
-              <a:t>Event Sourcing - Telekom Use Case</a:t>
-            </a:r>
-          </a:p>
-        </p:txBody>
-      </p:sp>
-      <p:sp>
-        <p:nvSpPr>
-          <p:cNvPr id="3" name="Content Placeholder 2"/>
-          <p:cNvSpPr>
-            <a:spLocks noGrp="1"/>
-          </p:cNvSpPr>
-          <p:nvPr>
-            <p:ph idx="1"/>
-          </p:nvPr>
-        </p:nvSpPr>
-        <p:spPr/>
-        <p:txBody>
-          <a:bodyPr/>
-          <a:lstStyle/>
-          <a:p>
-            <a:pPr>
-              <a:defRPr b="1" sz="1800"/>
-            </a:pPr>
-            <a:r>
-              <a:t>Network Configuration Audit System</a:t>
-            </a:r>
-          </a:p>
-          <a:p>
-            <a:pPr lvl="1"/>
-            <a:r>
-              <a:t>Events: Configuration changes, device assignments, policy updates</a:t>
-            </a:r>
-          </a:p>
-          <a:p>
-            <a:pPr lvl="1"/>
-            <a:r>
-              <a:t>Event Store: Immutable log of all network changes</a:t>
-            </a:r>
-          </a:p>
-          <a:p>
-            <a:pPr lvl="1"/>
-            <a:r>
-              <a:t>Projections: Current network state, compliance reports, change history</a:t>
-            </a:r>
-          </a:p>
-          <a:p>
-            <a:pPr lvl="1"/>
-            <a:r>
-              <a:t>Benefits: Full audit trail, time-travel debugging, rollback capability</a:t>
-            </a:r>
-          </a:p>
-          <a:p>
-            <a:pPr>
-              <a:defRPr b="1" sz="1800"/>
-            </a:pPr>
-            <a:r>
-              <a:t>Implementation</a:t>
-            </a:r>
-          </a:p>
-        </p:txBody>
-      </p:sp>
-    </p:spTree>
-  </p:cSld>
-  <p:clrMapOvr>
-    <a:masterClrMapping/>
-  </p:clrMapOvr>
-</p:sld>
-</file>
-
-<file path=ppt/slides/slide21.xml><?xml version="1.0" encoding="utf-8"?>
-<p:sld xmlns:a="http://schemas.openxmlformats.org/drawingml/2006/main" xmlns:p="http://schemas.openxmlformats.org/presentationml/2006/main" xmlns:r="http://schemas.openxmlformats.org/officeDocument/2006/relationships">
-  <p:cSld>
-    <p:spTree>
-      <p:nvGrpSpPr>
-        <p:cNvPr id="1" name=""/>
-        <p:cNvGrpSpPr/>
-        <p:nvPr/>
-      </p:nvGrpSpPr>
-      <p:grpSpPr/>
-      <p:sp>
-        <p:nvSpPr>
-          <p:cNvPr id="2" name="Title 1"/>
-          <p:cNvSpPr>
-            <a:spLocks noGrp="1"/>
-          </p:cNvSpPr>
-          <p:nvPr>
-            <p:ph type="title"/>
-          </p:nvPr>
-        </p:nvSpPr>
-        <p:spPr/>
-        <p:txBody>
-          <a:bodyPr/>
-          <a:lstStyle/>
-          <a:p>
-            <a:r>
-              <a:t>Event Sourcing - Telekom Use Case - Implementation</a:t>
-            </a:r>
-          </a:p>
-        </p:txBody>
-      </p:sp>
-      <p:sp>
-        <p:nvSpPr>
-          <p:cNvPr id="3" name="Content Placeholder 2"/>
-          <p:cNvSpPr>
-            <a:spLocks noGrp="1"/>
-          </p:cNvSpPr>
-          <p:nvPr>
-            <p:ph idx="1"/>
-          </p:nvPr>
-        </p:nvSpPr>
-        <p:spPr/>
-        <p:txBody>
-          <a:bodyPr/>
-          <a:lstStyle/>
-          <a:p>
-            <a:pPr>
-              <a:defRPr sz="1400">
-                <a:latin typeface="Consolas"/>
-              </a:defRPr>
-            </a:pPr>
-            <a:r>
-              <a:t>java</a:t>
-            </a:r>
-            <a:br/>
-            <a:r>
-              <a:t>@Repository</a:t>
-            </a:r>
-            <a:br/>
-            <a:r>
-              <a:t>public class EventStore {</a:t>
-            </a:r>
-            <a:br/>
-            <a:r>
-              <a:t>    public List&lt;DomainEvent&gt; loadEvents(String aggregateId, long fromVersion) {</a:t>
-            </a:r>
-            <a:br/>
-            <a:r>
-              <a:t>        return eventStream.iterator(aggregateId)</a:t>
-            </a:r>
-            <a:br/>
-            <a:r>
-              <a:t>            .skip(fromVersion)</a:t>
-            </a:r>
-            <a:br/>
-            <a:r>
-              <a:t>            .collect(toList());</a:t>
-            </a:r>
-            <a:br/>
-            <a:r>
-              <a:t>    }</a:t>
-            </a:r>
-            <a:br/>
-            <a:r>
-              <a:t>    </a:t>
-            </a:r>
-            <a:br/>
-            <a:r>
-              <a:t>    public void saveSnapshot(String aggregateId, AggregateSnapshot snapshot) {</a:t>
-            </a:r>
-            <a:br/>
-            <a:r>
-              <a:t>        // Memento pattern for aggregate snapshots</a:t>
-            </a:r>
-            <a:br/>
-            <a:r>
-              <a:t>        snapshotRepository.save(aggregateId, snapshot.getMemento());</a:t>
-            </a:r>
-            <a:br/>
-            <a:r>
-              <a:t>    }</a:t>
-            </a:r>
-            <a:br/>
-            <a:r>
-              <a:t>}</a:t>
-            </a:r>
-          </a:p>
-        </p:txBody>
-      </p:sp>
-    </p:spTree>
-  </p:cSld>
-  <p:clrMapOvr>
-    <a:masterClrMapping/>
-  </p:clrMapOvr>
-</p:sld>
-</file>
-
-<file path=ppt/slides/slide22.xml><?xml version="1.0" encoding="utf-8"?>
-<p:sld xmlns:a="http://schemas.openxmlformats.org/drawingml/2006/main" xmlns:p="http://schemas.openxmlformats.org/presentationml/2006/main" xmlns:r="http://schemas.openxmlformats.org/officeDocument/2006/relationships">
-  <p:cSld>
-    <p:spTree>
-      <p:nvGrpSpPr>
-        <p:cNvPr id="1" name=""/>
-        <p:cNvGrpSpPr/>
-        <p:nvPr/>
-      </p:nvGrpSpPr>
-      <p:grpSpPr/>
-      <p:sp>
-        <p:nvSpPr>
-          <p:cNvPr id="2" name="Title 1"/>
-          <p:cNvSpPr>
-            <a:spLocks noGrp="1"/>
-          </p:cNvSpPr>
-          <p:nvPr>
-            <p:ph type="ctrTitle"/>
-          </p:nvPr>
-        </p:nvSpPr>
-        <p:spPr/>
-        <p:txBody>
-          <a:bodyPr/>
-          <a:lstStyle/>
-          <a:p>
-            <a:r>
-              <a:t>Event Sourcing Trade-offs</a:t>
-            </a:r>
-          </a:p>
-        </p:txBody>
-      </p:sp>
-      <p:sp>
-        <p:nvSpPr>
-          <p:cNvPr id="3" name="Subtitle 2"/>
-          <p:cNvSpPr>
-            <a:spLocks noGrp="1"/>
-          </p:cNvSpPr>
-          <p:nvPr>
-            <p:ph type="subTitle" idx="1"/>
-          </p:nvPr>
-        </p:nvSpPr>
-        <p:spPr/>
-        <p:txBody>
-          <a:bodyPr/>
-          <a:lstStyle/>
-          <a:p/>
-        </p:txBody>
-      </p:sp>
-    </p:spTree>
-  </p:cSld>
-  <p:clrMapOvr>
-    <a:masterClrMapping/>
-  </p:clrMapOvr>
-</p:sld>
-</file>
-
-<file path=ppt/slides/slide23.xml><?xml version="1.0" encoding="utf-8"?>
-<p:sld xmlns:a="http://schemas.openxmlformats.org/drawingml/2006/main" xmlns:p="http://schemas.openxmlformats.org/presentationml/2006/main" xmlns:r="http://schemas.openxmlformats.org/officeDocument/2006/relationships">
-  <p:cSld>
-    <p:spTree>
-      <p:nvGrpSpPr>
-        <p:cNvPr id="1" name=""/>
-        <p:cNvGrpSpPr/>
-        <p:nvPr/>
-      </p:nvGrpSpPr>
-      <p:grpSpPr/>
-      <p:sp>
-        <p:nvSpPr>
-          <p:cNvPr id="2" name="Title 1"/>
-          <p:cNvSpPr>
-            <a:spLocks noGrp="1"/>
-          </p:cNvSpPr>
-          <p:nvPr>
-            <p:ph type="title"/>
-          </p:nvPr>
-        </p:nvSpPr>
-        <p:spPr/>
-        <p:txBody>
-          <a:bodyPr/>
-          <a:lstStyle/>
-          <a:p>
-            <a:r>
-              <a:t>Event Sourcing Trade-offs</a:t>
-            </a:r>
-          </a:p>
-        </p:txBody>
-      </p:sp>
-      <p:sp>
-        <p:nvSpPr>
-          <p:cNvPr id="3" name="Content Placeholder 2"/>
-          <p:cNvSpPr>
-            <a:spLocks noGrp="1"/>
-          </p:cNvSpPr>
-          <p:nvPr>
-            <p:ph idx="1"/>
-          </p:nvPr>
-        </p:nvSpPr>
-        <p:spPr/>
-        <p:txBody>
-          <a:bodyPr/>
-          <a:lstStyle/>
-          <a:p>
-            <a:pPr>
-              <a:defRPr b="1" sz="1800"/>
-            </a:pPr>
-            <a:r>
-              <a:t>Vorteile</a:t>
-            </a:r>
-          </a:p>
-          <a:p>
-            <a:r>
-              <a:t>• Complete Audit Trail: für Compliance</a:t>
-            </a:r>
-          </a:p>
-          <a:p>
-            <a:r>
-              <a:t>• Time Travel: für Debugging und Analysis</a:t>
-            </a:r>
-          </a:p>
-          <a:p>
-            <a:r>
-              <a:t>• Event Replay: für verschiedene Projections</a:t>
-            </a:r>
-          </a:p>
-          <a:p>
-            <a:r>
-              <a:t>• Natural fit: für Event-Driven Architecture</a:t>
-            </a:r>
-          </a:p>
-          <a:p>
-            <a:pPr>
-              <a:defRPr b="1" sz="1800"/>
-            </a:pPr>
-            <a:r>
-              <a:t>Nachteile</a:t>
-            </a:r>
-          </a:p>
-          <a:p>
-            <a:r>
-              <a:t>• Storage Requirements: wachsen monoton</a:t>
-            </a:r>
-          </a:p>
-          <a:p>
-            <a:r>
-              <a:t>• Event Schema Evolution: challenging</a:t>
-            </a:r>
-          </a:p>
-          <a:p>
-            <a:r>
-              <a:t>• Query Performance: für Complex Projections</a:t>
-            </a:r>
-          </a:p>
-          <a:p>
-            <a:r>
-              <a:t>• Learning Curve: für Traditional SQL Developers</a:t>
-            </a:r>
-          </a:p>
-          <a:p>
-            <a:pPr>
-              <a:defRPr b="1" sz="1800"/>
-            </a:pPr>
-            <a:r>
-              <a:t>Production Considerations</a:t>
-            </a:r>
-          </a:p>
-          <a:p>
-            <a:pPr lvl="1"/>
-            <a:r>
-              <a:t>Event Store Snapshots für Performance</a:t>
-            </a:r>
-          </a:p>
-          <a:p>
-            <a:pPr lvl="1"/>
-            <a:r>
-              <a:t>Event Schema Versioning Strategy</a:t>
-            </a:r>
-          </a:p>
-          <a:p>
-            <a:pPr lvl="1"/>
-            <a:r>
-              <a:t>Projection Rebuild für Schema Changes</a:t>
-            </a:r>
-          </a:p>
-          <a:p>
-            <a:pPr lvl="1"/>
-            <a:r>
-              <a:t>Event Store Backup und Recovery</a:t>
-            </a:r>
-          </a:p>
-        </p:txBody>
-      </p:sp>
-    </p:spTree>
-  </p:cSld>
-  <p:clrMapOvr>
-    <a:masterClrMapping/>
-  </p:clrMapOvr>
-</p:sld>
-</file>
-
-<file path=ppt/slides/slide24.xml><?xml version="1.0" encoding="utf-8"?>
-<p:sld xmlns:a="http://schemas.openxmlformats.org/drawingml/2006/main" xmlns:p="http://schemas.openxmlformats.org/presentationml/2006/main" xmlns:r="http://schemas.openxmlformats.org/officeDocument/2006/relationships">
-  <p:cSld>
-    <p:spTree>
-      <p:nvGrpSpPr>
-        <p:cNvPr id="1" name=""/>
-        <p:cNvGrpSpPr/>
-        <p:nvPr/>
-      </p:nvGrpSpPr>
-      <p:grpSpPr/>
-      <p:sp>
-        <p:nvSpPr>
-          <p:cNvPr id="2" name="Title 1"/>
-          <p:cNvSpPr>
-            <a:spLocks noGrp="1"/>
-          </p:cNvSpPr>
-          <p:nvPr>
-            <p:ph type="ctrTitle"/>
-          </p:nvPr>
-        </p:nvSpPr>
-        <p:spPr/>
-        <p:txBody>
-          <a:bodyPr/>
-          <a:lstStyle/>
-          <a:p>
-            <a:r>
-              <a:t>Circuit Breaker Pattern</a:t>
-            </a:r>
-          </a:p>
-        </p:txBody>
-      </p:sp>
-      <p:sp>
-        <p:nvSpPr>
-          <p:cNvPr id="3" name="Subtitle 2"/>
-          <p:cNvSpPr>
-            <a:spLocks noGrp="1"/>
-          </p:cNvSpPr>
-          <p:nvPr>
-            <p:ph type="subTitle" idx="1"/>
-          </p:nvPr>
-        </p:nvSpPr>
-        <p:spPr/>
-        <p:txBody>
-          <a:bodyPr/>
-          <a:lstStyle/>
-          <a:p/>
-        </p:txBody>
-      </p:sp>
-    </p:spTree>
-  </p:cSld>
-  <p:clrMapOvr>
-    <a:masterClrMapping/>
-  </p:clrMapOvr>
-</p:sld>
-</file>
-
-<file path=ppt/slides/slide25.xml><?xml version="1.0" encoding="utf-8"?>
-<p:sld xmlns:a="http://schemas.openxmlformats.org/drawingml/2006/main" xmlns:p="http://schemas.openxmlformats.org/presentationml/2006/main" xmlns:r="http://schemas.openxmlformats.org/officeDocument/2006/relationships">
-  <p:cSld>
-    <p:spTree>
-      <p:nvGrpSpPr>
-        <p:cNvPr id="1" name=""/>
-        <p:cNvGrpSpPr/>
-        <p:nvPr/>
-      </p:nvGrpSpPr>
-      <p:grpSpPr/>
-      <p:sp>
-        <p:nvSpPr>
-          <p:cNvPr id="2" name="Title 1"/>
-          <p:cNvSpPr>
-            <a:spLocks noGrp="1"/>
-          </p:cNvSpPr>
-          <p:nvPr>
-            <p:ph type="title"/>
-          </p:nvPr>
-        </p:nvSpPr>
-        <p:spPr/>
-        <p:txBody>
-          <a:bodyPr/>
-          <a:lstStyle/>
-          <a:p>
-            <a:r>
-              <a:t>Circuit Breaker Pattern</a:t>
-            </a:r>
-          </a:p>
-        </p:txBody>
-      </p:sp>
-      <p:sp>
-        <p:nvSpPr>
-          <p:cNvPr id="3" name="Content Placeholder 2"/>
-          <p:cNvSpPr>
-            <a:spLocks noGrp="1"/>
-          </p:cNvSpPr>
-          <p:nvPr>
-            <p:ph idx="1"/>
-          </p:nvPr>
-        </p:nvSpPr>
-        <p:spPr/>
-        <p:txBody>
-          <a:bodyPr/>
-          <a:lstStyle/>
-          <a:p>
-            <a:pPr>
-              <a:defRPr b="1" sz="1800"/>
-            </a:pPr>
-            <a:r>
-              <a:t>Problem</a:t>
-            </a:r>
-          </a:p>
-          <a:p>
-            <a:pPr lvl="1"/>
-            <a:r>
-              <a:t>External Services können ausfallen</a:t>
-            </a:r>
-          </a:p>
-          <a:p>
-            <a:pPr lvl="1"/>
-            <a:r>
-              <a:t>Cascading Failures vermeiden</a:t>
-            </a:r>
-          </a:p>
-          <a:p>
-            <a:pPr lvl="1"/>
-            <a:r>
-              <a:t>Graceful Degradation statt Totalausfall</a:t>
-            </a:r>
-          </a:p>
-          <a:p>
-            <a:pPr lvl="1"/>
-            <a:r>
-              <a:t>System Resilience verbessern</a:t>
-            </a:r>
-          </a:p>
-          <a:p>
-            <a:pPr>
-              <a:defRPr b="1" sz="1800"/>
-            </a:pPr>
-            <a:r>
-              <a:t>Circuit Breaker States</a:t>
-            </a:r>
-          </a:p>
-        </p:txBody>
-      </p:sp>
-    </p:spTree>
-  </p:cSld>
-  <p:clrMapOvr>
-    <a:masterClrMapping/>
-  </p:clrMapOvr>
-</p:sld>
-</file>
-
-<file path=ppt/slides/slide26.xml><?xml version="1.0" encoding="utf-8"?>
-<p:sld xmlns:a="http://schemas.openxmlformats.org/drawingml/2006/main" xmlns:p="http://schemas.openxmlformats.org/presentationml/2006/main" xmlns:r="http://schemas.openxmlformats.org/officeDocument/2006/relationships">
-  <p:cSld>
-    <p:spTree>
-      <p:nvGrpSpPr>
-        <p:cNvPr id="1" name=""/>
-        <p:cNvGrpSpPr/>
-        <p:nvPr/>
-      </p:nvGrpSpPr>
-      <p:grpSpPr/>
-      <p:sp>
-        <p:nvSpPr>
-          <p:cNvPr id="2" name="Title 1"/>
-          <p:cNvSpPr>
-            <a:spLocks noGrp="1"/>
-          </p:cNvSpPr>
-          <p:nvPr>
-            <p:ph type="title"/>
-          </p:nvPr>
-        </p:nvSpPr>
-        <p:spPr/>
-        <p:txBody>
-          <a:bodyPr/>
-          <a:lstStyle/>
-          <a:p>
-            <a:r>
-              <a:t>Circuit Breaker Pattern - Implementation</a:t>
-            </a:r>
-          </a:p>
-        </p:txBody>
-      </p:sp>
-      <p:sp>
-        <p:nvSpPr>
-          <p:cNvPr id="3" name="Content Placeholder 2"/>
-          <p:cNvSpPr>
-            <a:spLocks noGrp="1"/>
-          </p:cNvSpPr>
-          <p:nvPr>
-            <p:ph idx="1"/>
-          </p:nvPr>
-        </p:nvSpPr>
-        <p:spPr/>
-        <p:txBody>
-          <a:bodyPr/>
-          <a:lstStyle/>
-          <a:p>
-            <a:pPr>
-              <a:defRPr sz="1400">
-                <a:latin typeface="Consolas"/>
-              </a:defRPr>
-            </a:pPr>
-            <a:r>
-              <a:t>Circuit Breaker State Machine:</a:t>
-            </a:r>
-            <a:br/>
-            <a:br/>
-            <a:r>
-              <a:t>    CLOSED                    OPEN                    HALF-OPEN</a:t>
-            </a:r>
-            <a:br/>
-            <a:r>
-              <a:t>┌─────────────────┐      ┌─────────────────┐      ┌─────────────────┐</a:t>
-            </a:r>
-            <a:br/>
-            <a:r>
-              <a:t>│ Normal          │      │ Service Down    │      │ Testing         │</a:t>
-            </a:r>
-            <a:br/>
-            <a:r>
-              <a:t>│ Operation       │─────&gt;│ Fast Fail       │─────&gt;│ Recovery        │</a:t>
-            </a:r>
-            <a:br/>
-            <a:r>
-              <a:t>│                 │      │                 │      │                 │</a:t>
-            </a:r>
-            <a:br/>
-            <a:r>
-              <a:t>│ Success Rate    │      │ Timeout Period  │      │ Limited Calls   │</a:t>
-            </a:r>
-            <a:br/>
-            <a:r>
-              <a:t>│ &gt; Threshold     │      │ Elapsed         │      │                 │</a:t>
-            </a:r>
-            <a:br/>
-            <a:r>
-              <a:t>└─────────────────┘      └─────────────────┘      └─────────────────┘</a:t>
-            </a:r>
-            <a:br/>
-            <a:r>
-              <a:t>         ▲                                                  │</a:t>
-            </a:r>
-            <a:br/>
-            <a:r>
-              <a:t>         └──────────────────────────────────────────────────┘</a:t>
-            </a:r>
-            <a:br/>
-            <a:r>
-              <a:t>                         Success Rate &gt; Threshold</a:t>
-            </a:r>
-          </a:p>
-        </p:txBody>
-      </p:sp>
-    </p:spTree>
-  </p:cSld>
-  <p:clrMapOvr>
-    <a:masterClrMapping/>
-  </p:clrMapOvr>
-</p:sld>
-</file>
-
-<file path=ppt/slides/slide27.xml><?xml version="1.0" encoding="utf-8"?>
-<p:sld xmlns:a="http://schemas.openxmlformats.org/drawingml/2006/main" xmlns:p="http://schemas.openxmlformats.org/presentationml/2006/main" xmlns:r="http://schemas.openxmlformats.org/officeDocument/2006/relationships">
-  <p:cSld>
-    <p:spTree>
-      <p:nvGrpSpPr>
-        <p:cNvPr id="1" name=""/>
-        <p:cNvGrpSpPr/>
-        <p:nvPr/>
-      </p:nvGrpSpPr>
-      <p:grpSpPr/>
-      <p:sp>
-        <p:nvSpPr>
-          <p:cNvPr id="2" name="Title 1"/>
-          <p:cNvSpPr>
-            <a:spLocks noGrp="1"/>
-          </p:cNvSpPr>
-          <p:nvPr>
-            <p:ph type="ctrTitle"/>
-          </p:nvPr>
-        </p:nvSpPr>
-        <p:spPr/>
-        <p:txBody>
-          <a:bodyPr/>
-          <a:lstStyle/>
-          <a:p>
-            <a:r>
-              <a:t>Circuit Breaker - Implementation</a:t>
-            </a:r>
-          </a:p>
-        </p:txBody>
-      </p:sp>
-      <p:sp>
-        <p:nvSpPr>
-          <p:cNvPr id="3" name="Subtitle 2"/>
-          <p:cNvSpPr>
-            <a:spLocks noGrp="1"/>
-          </p:cNvSpPr>
-          <p:nvPr>
-            <p:ph type="subTitle" idx="1"/>
-          </p:nvPr>
-        </p:nvSpPr>
-        <p:spPr/>
-        <p:txBody>
-          <a:bodyPr/>
-          <a:lstStyle/>
-          <a:p/>
-        </p:txBody>
-      </p:sp>
-    </p:spTree>
-  </p:cSld>
-  <p:clrMapOvr>
-    <a:masterClrMapping/>
-  </p:clrMapOvr>
-</p:sld>
-</file>
-
-<file path=ppt/slides/slide28.xml><?xml version="1.0" encoding="utf-8"?>
-<p:sld xmlns:a="http://schemas.openxmlformats.org/drawingml/2006/main" xmlns:p="http://schemas.openxmlformats.org/presentationml/2006/main" xmlns:r="http://schemas.openxmlformats.org/officeDocument/2006/relationships">
-  <p:cSld>
-    <p:spTree>
-      <p:nvGrpSpPr>
-        <p:cNvPr id="1" name=""/>
-        <p:cNvGrpSpPr/>
-        <p:nvPr/>
-      </p:nvGrpSpPr>
-      <p:grpSpPr/>
-      <p:sp>
-        <p:nvSpPr>
-          <p:cNvPr id="2" name="Title 1"/>
-          <p:cNvSpPr>
-            <a:spLocks noGrp="1"/>
-          </p:cNvSpPr>
-          <p:nvPr>
-            <p:ph type="title"/>
-          </p:nvPr>
-        </p:nvSpPr>
-        <p:spPr/>
-        <p:txBody>
-          <a:bodyPr/>
-          <a:lstStyle/>
-          <a:p>
-            <a:r>
-              <a:t>Circuit Breaker - Implementation</a:t>
-            </a:r>
-          </a:p>
-        </p:txBody>
-      </p:sp>
-      <p:sp>
-        <p:nvSpPr>
-          <p:cNvPr id="3" name="Content Placeholder 2"/>
-          <p:cNvSpPr>
-            <a:spLocks noGrp="1"/>
-          </p:cNvSpPr>
-          <p:nvPr>
-            <p:ph idx="1"/>
-          </p:nvPr>
-        </p:nvSpPr>
-        <p:spPr/>
-        <p:txBody>
-          <a:bodyPr/>
-          <a:lstStyle/>
-          <a:p>
-            <a:pPr>
-              <a:defRPr b="1" sz="1800"/>
-            </a:pPr>
-            <a:r>
-              <a:t>Resilient Service Integration</a:t>
-            </a:r>
-          </a:p>
-        </p:txBody>
-      </p:sp>
-    </p:spTree>
-  </p:cSld>
-  <p:clrMapOvr>
-    <a:masterClrMapping/>
-  </p:clrMapOvr>
-</p:sld>
-</file>
-
-<file path=ppt/slides/slide29.xml><?xml version="1.0" encoding="utf-8"?>
-<p:sld xmlns:a="http://schemas.openxmlformats.org/drawingml/2006/main" xmlns:p="http://schemas.openxmlformats.org/presentationml/2006/main" xmlns:r="http://schemas.openxmlformats.org/officeDocument/2006/relationships">
-  <p:cSld>
-    <p:spTree>
-      <p:nvGrpSpPr>
-        <p:cNvPr id="1" name=""/>
-        <p:cNvGrpSpPr/>
-        <p:nvPr/>
-      </p:nvGrpSpPr>
-      <p:grpSpPr/>
-      <p:sp>
-        <p:nvSpPr>
-          <p:cNvPr id="2" name="Title 1"/>
-          <p:cNvSpPr>
-            <a:spLocks noGrp="1"/>
-          </p:cNvSpPr>
-          <p:nvPr>
-            <p:ph type="title"/>
-          </p:nvPr>
-        </p:nvSpPr>
-        <p:spPr/>
-        <p:txBody>
-          <a:bodyPr/>
-          <a:lstStyle/>
-          <a:p>
-            <a:r>
-              <a:t>Circuit Breaker - Implementation - Implementation</a:t>
-            </a:r>
-          </a:p>
-        </p:txBody>
-      </p:sp>
-      <p:sp>
-        <p:nvSpPr>
-          <p:cNvPr id="3" name="Content Placeholder 2"/>
-          <p:cNvSpPr>
-            <a:spLocks noGrp="1"/>
-          </p:cNvSpPr>
-          <p:nvPr>
-            <p:ph idx="1"/>
-          </p:nvPr>
-        </p:nvSpPr>
-        <p:spPr/>
-        <p:txBody>
-          <a:bodyPr/>
-          <a:lstStyle/>
-          <a:p>
-            <a:pPr>
-              <a:defRPr sz="1400">
-                <a:latin typeface="Consolas"/>
-              </a:defRPr>
-            </a:pPr>
-            <a:r>
-              <a:t>java</a:t>
-            </a:r>
-            <a:br/>
-            <a:r>
-              <a:t>@Component</a:t>
-            </a:r>
-            <a:br/>
-            <a:r>
-              <a:t>public class ResilientPaymentProvider implements PaymentProvider {</a:t>
-            </a:r>
-            <a:br/>
-            <a:r>
-              <a:t>    private final PaymentProvider delegate;</a:t>
-            </a:r>
-            <a:br/>
-            <a:r>
-              <a:t>    private final CircuitBreaker circuitBreaker;</a:t>
-            </a:r>
-            <a:br/>
-            <a:r>
-              <a:t>    </a:t>
-            </a:r>
-            <a:br/>
-            <a:r>
-              <a:t>    public ResilientPaymentProvider(PaymentProvider delegate) {</a:t>
-            </a:r>
-            <a:br/>
-            <a:r>
-              <a:t>        this.delegate = delegate;</a:t>
-            </a:r>
-            <a:br/>
-            <a:r>
-              <a:t>        this.circuitBreaker = CircuitBreaker.ofDefaults("payment");</a:t>
-            </a:r>
-            <a:br/>
-            <a:r>
-              <a:t>    }</a:t>
-            </a:r>
-            <a:br/>
-            <a:r>
-              <a:t>    </a:t>
-            </a:r>
-            <a:br/>
-            <a:r>
-              <a:t>    @Override</a:t>
-            </a:r>
-            <a:br/>
-            <a:r>
-              <a:t>    public PaymentResult processPayment(PaymentRequest request) {</a:t>
-            </a:r>
-            <a:br/>
-            <a:r>
-              <a:t>        return circuitBreaker.executeSupplier(() -&gt; {</a:t>
-            </a:r>
-            <a:br/>
-            <a:r>
-              <a:t>            try {</a:t>
-            </a:r>
-            <a:br/>
-            <a:r>
-              <a:t>                return delegate.processPayment(request);</a:t>
-            </a:r>
-            <a:br/>
-            <a:r>
-              <a:t>            } catch (Exception e) {</a:t>
-            </a:r>
-            <a:br/>
-            <a:r>
-              <a:t>                throw new PaymentProviderException("Provider temporarily unavailable", e);</a:t>
-            </a:r>
-            <a:br/>
-            <a:r>
-              <a:t>            }</a:t>
-            </a:r>
-            <a:br/>
-            <a:r>
-              <a:t>        });</a:t>
-            </a:r>
-            <a:br/>
-            <a:r>
-              <a:t>    }</a:t>
-            </a:r>
-            <a:br/>
-            <a:r>
-              <a:t>}</a:t>
-            </a:r>
-          </a:p>
-        </p:txBody>
-      </p:sp>
-    </p:spTree>
-  </p:cSld>
-  <p:clrMapOvr>
-    <a:masterClrMapping/>
-  </p:clrMapOvr>
-</p:sld>
-</file>
-
 <file path=ppt/slides/slide3.xml><?xml version="1.0" encoding="utf-8"?>
 <p:sld xmlns:a="http://schemas.openxmlformats.org/drawingml/2006/main" xmlns:p="http://schemas.openxmlformats.org/presentationml/2006/main" xmlns:r="http://schemas.openxmlformats.org/officeDocument/2006/relationships">
   <p:cSld>
@@ -6264,7 +5647,7 @@
           <a:lstStyle/>
           <a:p>
             <a:r>
-              <a:t>CQRS (Command Query Responsibility Segregation)</a:t>
+              <a:t>CQRS Pattern</a:t>
             </a:r>
           </a:p>
         </p:txBody>
@@ -6285,901 +5668,70 @@
           <a:lstStyle/>
           <a:p>
             <a:pPr>
-              <a:defRPr b="1" sz="1800"/>
+              <a:lnSpc>
+                <a:spcPct val="100000"/>
+              </a:lnSpc>
+              <a:spcBef>
+                <a:spcPts val="0"/>
+              </a:spcBef>
+              <a:spcAft>
+                <a:spcPts val="0"/>
+              </a:spcAft>
             </a:pPr>
             <a:r>
-              <a:t>Problem</a:t>
-            </a:r>
-          </a:p>
-          <a:p>
-            <a:pPr lvl="1"/>
-            <a:r>
-              <a:t>Read- und Write-Operationen haben unterschiedliche Performance-Anforderungen</a:t>
-            </a:r>
-          </a:p>
-          <a:p>
-            <a:pPr lvl="1"/>
-            <a:r>
-              <a:t>Complex Queries bei hohem Write Throughput problematisch</a:t>
-            </a:r>
-          </a:p>
-          <a:p>
-            <a:pPr lvl="1"/>
-            <a:r>
-              <a:t>Ein Model für alle Use Cases führt zu Kompromissen</a:t>
-            </a:r>
-          </a:p>
-          <a:p>
-            <a:pPr>
-              <a:defRPr b="1" sz="1800"/>
-            </a:pPr>
-            <a:r>
-              <a:t>CQRS Pattern</a:t>
-            </a:r>
-          </a:p>
-        </p:txBody>
-      </p:sp>
-    </p:spTree>
-  </p:cSld>
-  <p:clrMapOvr>
-    <a:masterClrMapping/>
-  </p:clrMapOvr>
-</p:sld>
-</file>
-
-<file path=ppt/slides/slide30.xml><?xml version="1.0" encoding="utf-8"?>
-<p:sld xmlns:a="http://schemas.openxmlformats.org/drawingml/2006/main" xmlns:p="http://schemas.openxmlformats.org/presentationml/2006/main" xmlns:r="http://schemas.openxmlformats.org/officeDocument/2006/relationships">
-  <p:cSld>
-    <p:spTree>
-      <p:nvGrpSpPr>
-        <p:cNvPr id="1" name=""/>
-        <p:cNvGrpSpPr/>
-        <p:nvPr/>
-      </p:nvGrpSpPr>
-      <p:grpSpPr/>
-      <p:sp>
-        <p:nvSpPr>
-          <p:cNvPr id="2" name="Title 1"/>
-          <p:cNvSpPr>
-            <a:spLocks noGrp="1"/>
-          </p:cNvSpPr>
-          <p:nvPr>
-            <p:ph type="title"/>
-          </p:nvPr>
-        </p:nvSpPr>
-        <p:spPr/>
-        <p:txBody>
-          <a:bodyPr/>
-          <a:lstStyle/>
-          <a:p>
-            <a:r>
-              <a:t>Saga Pattern</a:t>
-            </a:r>
-          </a:p>
-        </p:txBody>
-      </p:sp>
-      <p:sp>
-        <p:nvSpPr>
-          <p:cNvPr id="3" name="Content Placeholder 2"/>
-          <p:cNvSpPr>
-            <a:spLocks noGrp="1"/>
-          </p:cNvSpPr>
-          <p:nvPr>
-            <p:ph idx="1"/>
-          </p:nvPr>
-        </p:nvSpPr>
-        <p:spPr/>
-        <p:txBody>
-          <a:bodyPr/>
-          <a:lstStyle/>
-          <a:p>
-            <a:pPr>
-              <a:defRPr b="1" sz="1800"/>
-            </a:pPr>
-            <a:r>
-              <a:t>Problem</a:t>
-            </a:r>
-          </a:p>
-          <a:p>
-            <a:pPr lvl="1"/>
-            <a:r>
-              <a:t>Transaktionen über Service-Grenzen hinweg</a:t>
-            </a:r>
-          </a:p>
-          <a:p>
-            <a:pPr lvl="1"/>
-            <a:r>
-              <a:t>ACID properties in Microservices schwierig</a:t>
-            </a:r>
-          </a:p>
-          <a:p>
-            <a:pPr lvl="1"/>
-            <a:r>
-              <a:t>Rollback-Strategien für verteilte Operationen</a:t>
-            </a:r>
-          </a:p>
-          <a:p>
-            <a:pPr lvl="1"/>
-            <a:r>
-              <a:t>Data Consistency ohne 2-Phase-Commit</a:t>
-            </a:r>
-          </a:p>
-          <a:p>
-            <a:pPr>
-              <a:defRPr b="1" sz="1800"/>
-            </a:pPr>
-            <a:r>
-              <a:t>Saga Pattern Types</a:t>
-            </a:r>
-          </a:p>
-        </p:txBody>
-      </p:sp>
-    </p:spTree>
-  </p:cSld>
-  <p:clrMapOvr>
-    <a:masterClrMapping/>
-  </p:clrMapOvr>
-</p:sld>
-</file>
-
-<file path=ppt/slides/slide31.xml><?xml version="1.0" encoding="utf-8"?>
-<p:sld xmlns:a="http://schemas.openxmlformats.org/drawingml/2006/main" xmlns:p="http://schemas.openxmlformats.org/presentationml/2006/main" xmlns:r="http://schemas.openxmlformats.org/officeDocument/2006/relationships">
-  <p:cSld>
-    <p:spTree>
-      <p:nvGrpSpPr>
-        <p:cNvPr id="1" name=""/>
-        <p:cNvGrpSpPr/>
-        <p:nvPr/>
-      </p:nvGrpSpPr>
-      <p:grpSpPr/>
-      <p:sp>
-        <p:nvSpPr>
-          <p:cNvPr id="2" name="Title 1"/>
-          <p:cNvSpPr>
-            <a:spLocks noGrp="1"/>
-          </p:cNvSpPr>
-          <p:nvPr>
-            <p:ph type="title"/>
-          </p:nvPr>
-        </p:nvSpPr>
-        <p:spPr/>
-        <p:txBody>
-          <a:bodyPr/>
-          <a:lstStyle/>
-          <a:p>
-            <a:r>
-              <a:t>Saga Pattern - Telekom Use Case</a:t>
-            </a:r>
-          </a:p>
-        </p:txBody>
-      </p:sp>
-      <p:sp>
-        <p:nvSpPr>
-          <p:cNvPr id="3" name="Content Placeholder 2"/>
-          <p:cNvSpPr>
-            <a:spLocks noGrp="1"/>
-          </p:cNvSpPr>
-          <p:nvPr>
-            <p:ph idx="1"/>
-          </p:nvPr>
-        </p:nvSpPr>
-        <p:spPr/>
-        <p:txBody>
-          <a:bodyPr/>
-          <a:lstStyle/>
-          <a:p>
-            <a:pPr>
-              <a:defRPr b="1" sz="1800"/>
-            </a:pPr>
-            <a:r>
-              <a:t>Network Configuration Deployment</a:t>
-            </a:r>
-          </a:p>
-        </p:txBody>
-      </p:sp>
-    </p:spTree>
-  </p:cSld>
-  <p:clrMapOvr>
-    <a:masterClrMapping/>
-  </p:clrMapOvr>
-</p:sld>
-</file>
-
-<file path=ppt/slides/slide32.xml><?xml version="1.0" encoding="utf-8"?>
-<p:sld xmlns:a="http://schemas.openxmlformats.org/drawingml/2006/main" xmlns:p="http://schemas.openxmlformats.org/presentationml/2006/main" xmlns:r="http://schemas.openxmlformats.org/officeDocument/2006/relationships">
-  <p:cSld>
-    <p:spTree>
-      <p:nvGrpSpPr>
-        <p:cNvPr id="1" name=""/>
-        <p:cNvGrpSpPr/>
-        <p:nvPr/>
-      </p:nvGrpSpPr>
-      <p:grpSpPr/>
-      <p:sp>
-        <p:nvSpPr>
-          <p:cNvPr id="2" name="Title 1"/>
-          <p:cNvSpPr>
-            <a:spLocks noGrp="1"/>
-          </p:cNvSpPr>
-          <p:nvPr>
-            <p:ph type="title"/>
-          </p:nvPr>
-        </p:nvSpPr>
-        <p:spPr/>
-        <p:txBody>
-          <a:bodyPr/>
-          <a:lstStyle/>
-          <a:p>
-            <a:r>
-              <a:t>API Gateway Pattern</a:t>
-            </a:r>
-          </a:p>
-        </p:txBody>
-      </p:sp>
-      <p:sp>
-        <p:nvSpPr>
-          <p:cNvPr id="3" name="Content Placeholder 2"/>
-          <p:cNvSpPr>
-            <a:spLocks noGrp="1"/>
-          </p:cNvSpPr>
-          <p:nvPr>
-            <p:ph idx="1"/>
-          </p:nvPr>
-        </p:nvSpPr>
-        <p:spPr/>
-        <p:txBody>
-          <a:bodyPr/>
-          <a:lstStyle/>
-          <a:p>
-            <a:pPr>
-              <a:defRPr b="1" sz="1800"/>
-            </a:pPr>
-            <a:r>
-              <a:t>Problem</a:t>
-            </a:r>
-          </a:p>
-          <a:p>
-            <a:pPr lvl="1"/>
-            <a:r>
-              <a:t>Clients müssen viele Services direkt ansprechen</a:t>
-            </a:r>
-          </a:p>
-          <a:p>
-            <a:pPr lvl="1"/>
-            <a:r>
-              <a:t>Cross-cutting Concerns (Auth, Logging, Rate Limiting) verteilt</a:t>
-            </a:r>
-          </a:p>
-          <a:p>
-            <a:pPr lvl="1"/>
-            <a:r>
-              <a:t>Service Discovery Complexity für Clients</a:t>
-            </a:r>
-          </a:p>
-          <a:p>
-            <a:pPr lvl="1"/>
-            <a:r>
-              <a:t>API Versioning und Evolution</a:t>
-            </a:r>
-          </a:p>
-          <a:p>
-            <a:pPr>
-              <a:defRPr b="1" sz="1800"/>
-            </a:pPr>
-            <a:r>
-              <a:t>API Gateway Architecture</a:t>
-            </a:r>
-          </a:p>
-        </p:txBody>
-      </p:sp>
-    </p:spTree>
-  </p:cSld>
-  <p:clrMapOvr>
-    <a:masterClrMapping/>
-  </p:clrMapOvr>
-</p:sld>
-</file>
-
-<file path=ppt/slides/slide33.xml><?xml version="1.0" encoding="utf-8"?>
-<p:sld xmlns:a="http://schemas.openxmlformats.org/drawingml/2006/main" xmlns:p="http://schemas.openxmlformats.org/presentationml/2006/main" xmlns:r="http://schemas.openxmlformats.org/officeDocument/2006/relationships">
-  <p:cSld>
-    <p:spTree>
-      <p:nvGrpSpPr>
-        <p:cNvPr id="1" name=""/>
-        <p:cNvGrpSpPr/>
-        <p:nvPr/>
-      </p:nvGrpSpPr>
-      <p:grpSpPr/>
-      <p:sp>
-        <p:nvSpPr>
-          <p:cNvPr id="2" name="Title 1"/>
-          <p:cNvSpPr>
-            <a:spLocks noGrp="1"/>
-          </p:cNvSpPr>
-          <p:nvPr>
-            <p:ph type="title"/>
-          </p:nvPr>
-        </p:nvSpPr>
-        <p:spPr/>
-        <p:txBody>
-          <a:bodyPr/>
-          <a:lstStyle/>
-          <a:p>
-            <a:r>
-              <a:t>API Gateway - Implementation</a:t>
-            </a:r>
-          </a:p>
-        </p:txBody>
-      </p:sp>
-      <p:sp>
-        <p:nvSpPr>
-          <p:cNvPr id="3" name="Content Placeholder 2"/>
-          <p:cNvSpPr>
-            <a:spLocks noGrp="1"/>
-          </p:cNvSpPr>
-          <p:nvPr>
-            <p:ph idx="1"/>
-          </p:nvPr>
-        </p:nvSpPr>
-        <p:spPr/>
-        <p:txBody>
-          <a:bodyPr/>
-          <a:lstStyle/>
-          <a:p>
-            <a:pPr>
-              <a:defRPr b="1" sz="1800"/>
-            </a:pPr>
-            <a:r>
-              <a:t>Gateway Features</a:t>
-            </a:r>
-          </a:p>
-        </p:txBody>
-      </p:sp>
-    </p:spTree>
-  </p:cSld>
-  <p:clrMapOvr>
-    <a:masterClrMapping/>
-  </p:clrMapOvr>
-</p:sld>
-</file>
-
-<file path=ppt/slides/slide34.xml><?xml version="1.0" encoding="utf-8"?>
-<p:sld xmlns:a="http://schemas.openxmlformats.org/drawingml/2006/main" xmlns:p="http://schemas.openxmlformats.org/presentationml/2006/main" xmlns:r="http://schemas.openxmlformats.org/officeDocument/2006/relationships">
-  <p:cSld>
-    <p:spTree>
-      <p:nvGrpSpPr>
-        <p:cNvPr id="1" name=""/>
-        <p:cNvGrpSpPr/>
-        <p:nvPr/>
-      </p:nvGrpSpPr>
-      <p:grpSpPr/>
-      <p:sp>
-        <p:nvSpPr>
-          <p:cNvPr id="2" name="Title 1"/>
-          <p:cNvSpPr>
-            <a:spLocks noGrp="1"/>
-          </p:cNvSpPr>
-          <p:nvPr>
-            <p:ph type="title"/>
-          </p:nvPr>
-        </p:nvSpPr>
-        <p:spPr/>
-        <p:txBody>
-          <a:bodyPr/>
-          <a:lstStyle/>
-          <a:p>
-            <a:r>
-              <a:t>Service Mesh</a:t>
-            </a:r>
-          </a:p>
-        </p:txBody>
-      </p:sp>
-      <p:sp>
-        <p:nvSpPr>
-          <p:cNvPr id="3" name="Content Placeholder 2"/>
-          <p:cNvSpPr>
-            <a:spLocks noGrp="1"/>
-          </p:cNvSpPr>
-          <p:nvPr>
-            <p:ph idx="1"/>
-          </p:nvPr>
-        </p:nvSpPr>
-        <p:spPr/>
-        <p:txBody>
-          <a:bodyPr/>
-          <a:lstStyle/>
-          <a:p>
-            <a:pPr>
-              <a:defRPr b="1" sz="1800"/>
-            </a:pPr>
-            <a:r>
-              <a:t>Problem</a:t>
-            </a:r>
-          </a:p>
-          <a:p>
-            <a:pPr lvl="1"/>
-            <a:r>
-              <a:t>Service-to-Service Communication Complexity</a:t>
-            </a:r>
-          </a:p>
-          <a:p>
-            <a:pPr lvl="1"/>
-            <a:r>
-              <a:t>Distributed System Concerns (Circuit Breaker, Retry, etc.)</a:t>
-            </a:r>
-          </a:p>
-          <a:p>
-            <a:pPr lvl="1"/>
-            <a:r>
-              <a:t>Observability über Service-Grenzen hinweg</a:t>
-            </a:r>
-          </a:p>
-          <a:p>
-            <a:pPr lvl="1"/>
-            <a:r>
-              <a:t>Security Policies zwischen Services</a:t>
-            </a:r>
-          </a:p>
-          <a:p>
-            <a:pPr>
-              <a:defRPr b="1" sz="1800"/>
-            </a:pPr>
-            <a:r>
-              <a:t>Service Mesh Architecture</a:t>
-            </a:r>
-          </a:p>
-        </p:txBody>
-      </p:sp>
-    </p:spTree>
-  </p:cSld>
-  <p:clrMapOvr>
-    <a:masterClrMapping/>
-  </p:clrMapOvr>
-</p:sld>
-</file>
-
-<file path=ppt/slides/slide35.xml><?xml version="1.0" encoding="utf-8"?>
-<p:sld xmlns:a="http://schemas.openxmlformats.org/drawingml/2006/main" xmlns:p="http://schemas.openxmlformats.org/presentationml/2006/main" xmlns:r="http://schemas.openxmlformats.org/officeDocument/2006/relationships">
-  <p:cSld>
-    <p:spTree>
-      <p:nvGrpSpPr>
-        <p:cNvPr id="1" name=""/>
-        <p:cNvGrpSpPr/>
-        <p:nvPr/>
-      </p:nvGrpSpPr>
-      <p:grpSpPr/>
-      <p:sp>
-        <p:nvSpPr>
-          <p:cNvPr id="2" name="Title 1"/>
-          <p:cNvSpPr>
-            <a:spLocks noGrp="1"/>
-          </p:cNvSpPr>
-          <p:nvPr>
-            <p:ph type="title"/>
-          </p:nvPr>
-        </p:nvSpPr>
-        <p:spPr/>
-        <p:txBody>
-          <a:bodyPr/>
-          <a:lstStyle/>
-          <a:p>
-            <a:r>
-              <a:t>Service Mesh - Benefits</a:t>
-            </a:r>
-          </a:p>
-        </p:txBody>
-      </p:sp>
-      <p:sp>
-        <p:nvSpPr>
-          <p:cNvPr id="3" name="Content Placeholder 2"/>
-          <p:cNvSpPr>
-            <a:spLocks noGrp="1"/>
-          </p:cNvSpPr>
-          <p:nvPr>
-            <p:ph idx="1"/>
-          </p:nvPr>
-        </p:nvSpPr>
-        <p:spPr/>
-        <p:txBody>
-          <a:bodyPr/>
-          <a:lstStyle/>
-          <a:p>
-            <a:pPr>
-              <a:defRPr b="1" sz="1800"/>
-            </a:pPr>
-            <a:r>
-              <a:t>Infrastructure Concerns</a:t>
-            </a:r>
-          </a:p>
-          <a:p>
-            <a:pPr lvl="1"/>
-            <a:r>
-              <a:t>Traffic Management: Load balancing, routing, circuit breaking</a:t>
-            </a:r>
-          </a:p>
-          <a:p>
-            <a:pPr lvl="1"/>
-            <a:r>
-              <a:t>Security: mTLS, RBAC, service-to-service authentication</a:t>
-            </a:r>
-          </a:p>
-          <a:p>
-            <a:pPr lvl="1"/>
-            <a:r>
-              <a:t>Observability: Distributed tracing, metrics, logging</a:t>
-            </a:r>
-          </a:p>
-          <a:p>
-            <a:pPr lvl="1"/>
-            <a:r>
-              <a:t>Policy Enforcement: Rate limiting, access control</a:t>
-            </a:r>
-          </a:p>
-          <a:p>
-            <a:pPr>
-              <a:defRPr b="1" sz="1800"/>
-            </a:pPr>
-            <a:r>
-              <a:t>Service Discovery with Service Mesh</a:t>
-            </a:r>
-          </a:p>
-        </p:txBody>
-      </p:sp>
-    </p:spTree>
-  </p:cSld>
-  <p:clrMapOvr>
-    <a:masterClrMapping/>
-  </p:clrMapOvr>
-</p:sld>
-</file>
-
-<file path=ppt/slides/slide36.xml><?xml version="1.0" encoding="utf-8"?>
-<p:sld xmlns:a="http://schemas.openxmlformats.org/drawingml/2006/main" xmlns:p="http://schemas.openxmlformats.org/presentationml/2006/main" xmlns:r="http://schemas.openxmlformats.org/officeDocument/2006/relationships">
-  <p:cSld>
-    <p:spTree>
-      <p:nvGrpSpPr>
-        <p:cNvPr id="1" name=""/>
-        <p:cNvGrpSpPr/>
-        <p:nvPr/>
-      </p:nvGrpSpPr>
-      <p:grpSpPr/>
-      <p:sp>
-        <p:nvSpPr>
-          <p:cNvPr id="2" name="Title 1"/>
-          <p:cNvSpPr>
-            <a:spLocks noGrp="1"/>
-          </p:cNvSpPr>
-          <p:nvPr>
-            <p:ph type="title"/>
-          </p:nvPr>
-        </p:nvSpPr>
-        <p:spPr/>
-        <p:txBody>
-          <a:bodyPr/>
-          <a:lstStyle/>
-          <a:p>
-            <a:r>
-              <a:t>Bulkhead Pattern</a:t>
-            </a:r>
-          </a:p>
-        </p:txBody>
-      </p:sp>
-      <p:sp>
-        <p:nvSpPr>
-          <p:cNvPr id="3" name="Content Placeholder 2"/>
-          <p:cNvSpPr>
-            <a:spLocks noGrp="1"/>
-          </p:cNvSpPr>
-          <p:nvPr>
-            <p:ph idx="1"/>
-          </p:nvPr>
-        </p:nvSpPr>
-        <p:spPr/>
-        <p:txBody>
-          <a:bodyPr/>
-          <a:lstStyle/>
-          <a:p>
-            <a:pPr>
-              <a:defRPr b="1" sz="1800"/>
-            </a:pPr>
-            <a:r>
-              <a:t>Problem</a:t>
-            </a:r>
-          </a:p>
-          <a:p>
-            <a:pPr lvl="1"/>
-            <a:r>
-              <a:t>Ein überlasteter Service kann andere Services beeinträchtigen</a:t>
-            </a:r>
-          </a:p>
-          <a:p>
-            <a:pPr lvl="1"/>
-            <a:r>
-              <a:t>Resource Starvation durch einen problematischen Client</a:t>
-            </a:r>
-          </a:p>
-          <a:p>
-            <a:pPr lvl="1"/>
-            <a:r>
-              <a:t>System Resilience durch Resource Isolation</a:t>
-            </a:r>
-          </a:p>
-          <a:p>
-            <a:pPr>
-              <a:defRPr b="1" sz="1800"/>
-            </a:pPr>
-            <a:r>
-              <a:t>Bulkhead Implementation</a:t>
-            </a:r>
-          </a:p>
-        </p:txBody>
-      </p:sp>
-    </p:spTree>
-  </p:cSld>
-  <p:clrMapOvr>
-    <a:masterClrMapping/>
-  </p:clrMapOvr>
-</p:sld>
-</file>
-
-<file path=ppt/slides/slide37.xml><?xml version="1.0" encoding="utf-8"?>
-<p:sld xmlns:a="http://schemas.openxmlformats.org/drawingml/2006/main" xmlns:p="http://schemas.openxmlformats.org/presentationml/2006/main" xmlns:r="http://schemas.openxmlformats.org/officeDocument/2006/relationships">
-  <p:cSld>
-    <p:spTree>
-      <p:nvGrpSpPr>
-        <p:cNvPr id="1" name=""/>
-        <p:cNvGrpSpPr/>
-        <p:nvPr/>
-      </p:nvGrpSpPr>
-      <p:grpSpPr/>
-      <p:sp>
-        <p:nvSpPr>
-          <p:cNvPr id="2" name="Title 1"/>
-          <p:cNvSpPr>
-            <a:spLocks noGrp="1"/>
-          </p:cNvSpPr>
-          <p:nvPr>
-            <p:ph type="title"/>
-          </p:nvPr>
-        </p:nvSpPr>
-        <p:spPr/>
-        <p:txBody>
-          <a:bodyPr/>
-          <a:lstStyle/>
-          <a:p>
-            <a:r>
-              <a:t>Domain-Driven Design (DDD) Patterns</a:t>
-            </a:r>
-          </a:p>
-        </p:txBody>
-      </p:sp>
-      <p:sp>
-        <p:nvSpPr>
-          <p:cNvPr id="3" name="Content Placeholder 2"/>
-          <p:cNvSpPr>
-            <a:spLocks noGrp="1"/>
-          </p:cNvSpPr>
-          <p:nvPr>
-            <p:ph idx="1"/>
-          </p:nvPr>
-        </p:nvSpPr>
-        <p:spPr/>
-        <p:txBody>
-          <a:bodyPr/>
-          <a:lstStyle/>
-          <a:p>
-            <a:pPr>
-              <a:defRPr b="1" sz="1800"/>
-            </a:pPr>
-            <a:r>
-              <a:t>Core DDD Concepts</a:t>
-            </a:r>
-          </a:p>
-          <a:p>
-            <a:pPr lvl="1"/>
-            <a:r>
-              <a:t>Ubiquitous Language: Gemeinsame Sprache zwischen Business und Tech</a:t>
-            </a:r>
-          </a:p>
-          <a:p>
-            <a:pPr lvl="1"/>
-            <a:r>
-              <a:t>Bounded Context: Klar abgegrenzte Domänen-Bereiche</a:t>
-            </a:r>
-          </a:p>
-          <a:p>
-            <a:pPr lvl="1"/>
-            <a:r>
-              <a:t>Aggregates: Transaktional konsistente Einheiten</a:t>
-            </a:r>
-          </a:p>
-          <a:p>
-            <a:pPr lvl="1"/>
-            <a:r>
-              <a:t>Domain Services: Domain Logic ohne natürliches Entity Home</a:t>
-            </a:r>
-          </a:p>
-          <a:p>
-            <a:pPr>
-              <a:defRPr b="1" sz="1800"/>
-            </a:pPr>
-            <a:r>
-              <a:t>Bounded Context Mapping</a:t>
-            </a:r>
-          </a:p>
-        </p:txBody>
-      </p:sp>
-    </p:spTree>
-  </p:cSld>
-  <p:clrMapOvr>
-    <a:masterClrMapping/>
-  </p:clrMapOvr>
-</p:sld>
-</file>
-
-<file path=ppt/slides/slide38.xml><?xml version="1.0" encoding="utf-8"?>
-<p:sld xmlns:a="http://schemas.openxmlformats.org/drawingml/2006/main" xmlns:p="http://schemas.openxmlformats.org/presentationml/2006/main" xmlns:r="http://schemas.openxmlformats.org/officeDocument/2006/relationships">
-  <p:cSld>
-    <p:spTree>
-      <p:nvGrpSpPr>
-        <p:cNvPr id="1" name=""/>
-        <p:cNvGrpSpPr/>
-        <p:nvPr/>
-      </p:nvGrpSpPr>
-      <p:grpSpPr/>
-      <p:sp>
-        <p:nvSpPr>
-          <p:cNvPr id="2" name="Title 1"/>
-          <p:cNvSpPr>
-            <a:spLocks noGrp="1"/>
-          </p:cNvSpPr>
-          <p:nvPr>
-            <p:ph type="title"/>
-          </p:nvPr>
-        </p:nvSpPr>
-        <p:spPr/>
-        <p:txBody>
-          <a:bodyPr/>
-          <a:lstStyle/>
-          <a:p>
-            <a:r>
-              <a:t>Architecture Decision Framework</a:t>
-            </a:r>
-          </a:p>
-        </p:txBody>
-      </p:sp>
-      <p:sp>
-        <p:nvSpPr>
-          <p:cNvPr id="3" name="Content Placeholder 2"/>
-          <p:cNvSpPr>
-            <a:spLocks noGrp="1"/>
-          </p:cNvSpPr>
-          <p:nvPr>
-            <p:ph idx="1"/>
-          </p:nvPr>
-        </p:nvSpPr>
-        <p:spPr/>
-        <p:txBody>
-          <a:bodyPr/>
-          <a:lstStyle/>
-          <a:p>
-            <a:pPr>
-              <a:defRPr b="1" sz="1800"/>
-            </a:pPr>
-            <a:r>
-              <a:t>Decision Matrix</a:t>
-            </a:r>
-          </a:p>
-          <a:p>
-            <a:pPr>
-              <a:defRPr b="1" sz="1800"/>
-            </a:pPr>
-            <a:r>
-              <a:t>Pattern Selection Criteria</a:t>
-            </a:r>
-          </a:p>
-          <a:p>
-            <a:pPr/>
-            <a:r>
-              <a:t>| Criteria | Microservices | Event-Driven | CQRS | Event Sourcing |</a:t>
-            </a:r>
-          </a:p>
-          <a:p>
-            <a:r>
-              <a:t>|----------|---------------|--------------|------|----------------|</a:t>
-            </a:r>
-          </a:p>
-          <a:p>
-            <a:pPr/>
-            <a:r>
-              <a:t>| Team Size | 5+ | 3-8 | 4-10 | 6-12 |</a:t>
-            </a:r>
-          </a:p>
-          <a:p>
-            <a:pPr/>
-            <a:r>
-              <a:t>| Scalability | High | High | Very High | High |</a:t>
-            </a:r>
-          </a:p>
-          <a:p>
-            <a:pPr/>
-            <a:r>
-              <a:t>| Complexity | Very High | Medium | High | Very High |</a:t>
-            </a:r>
-          </a:p>
-          <a:p>
-            <a:pPr/>
-            <a:r>
-              <a:t>| Performance | Variable | High | Very High | Medium |</a:t>
-            </a:r>
-          </a:p>
-          <a:p>
-            <a:pPr/>
-            <a:r>
-              <a:t>| Audit Requirements | Medium | Medium | High | Very High |</a:t>
-            </a:r>
-          </a:p>
-        </p:txBody>
-      </p:sp>
-    </p:spTree>
-  </p:cSld>
-  <p:clrMapOvr>
-    <a:masterClrMapping/>
-  </p:clrMapOvr>
-</p:sld>
-</file>
-
-<file path=ppt/slides/slide39.xml><?xml version="1.0" encoding="utf-8"?>
-<p:sld xmlns:a="http://schemas.openxmlformats.org/drawingml/2006/main" xmlns:p="http://schemas.openxmlformats.org/presentationml/2006/main" xmlns:r="http://schemas.openxmlformats.org/officeDocument/2006/relationships">
-  <p:cSld>
-    <p:spTree>
-      <p:nvGrpSpPr>
-        <p:cNvPr id="1" name=""/>
-        <p:cNvGrpSpPr/>
-        <p:nvPr/>
-      </p:nvGrpSpPr>
-      <p:grpSpPr/>
-      <p:sp>
-        <p:nvSpPr>
-          <p:cNvPr id="2" name="Title 1"/>
-          <p:cNvSpPr>
-            <a:spLocks noGrp="1"/>
-          </p:cNvSpPr>
-          <p:nvPr>
-            <p:ph type="title"/>
-          </p:nvPr>
-        </p:nvSpPr>
-        <p:spPr/>
-        <p:txBody>
-          <a:bodyPr/>
-          <a:lstStyle/>
-          <a:p>
-            <a:r>
-              <a:t>Migration Strategies</a:t>
-            </a:r>
-          </a:p>
-        </p:txBody>
-      </p:sp>
-      <p:sp>
-        <p:nvSpPr>
-          <p:cNvPr id="3" name="Content Placeholder 2"/>
-          <p:cNvSpPr>
-            <a:spLocks noGrp="1"/>
-          </p:cNvSpPr>
-          <p:nvPr>
-            <p:ph idx="1"/>
-          </p:nvPr>
-        </p:nvSpPr>
-        <p:spPr/>
-        <p:txBody>
-          <a:bodyPr/>
-          <a:lstStyle/>
-          <a:p>
-            <a:pPr>
-              <a:defRPr b="1" sz="1800"/>
-            </a:pPr>
-            <a:r>
-              <a:t>Strangler Fig Pattern</a:t>
+              <a:rPr sz="900">
+                <a:latin typeface="Consolas"/>
+              </a:rPr>
+              <a:t>Command Side              Event Store           Query Side</a:t>
+            </a:r>
+            <a:br/>
+            <a:r>
+              <a:rPr sz="900">
+                <a:latin typeface="Consolas"/>
+              </a:rPr>
+              <a:t>┌──────────────────────┐  ┌─────────────────┐  ┌──────────────────────┐</a:t>
+            </a:r>
+            <a:br/>
+            <a:r>
+              <a:rPr sz="900">
+                <a:latin typeface="Consolas"/>
+              </a:rPr>
+              <a:t>│ Write Model          │  │   Events       │  │ Read Model         │</a:t>
+            </a:r>
+            <a:br/>
+            <a:r>
+              <a:rPr sz="900">
+                <a:latin typeface="Consolas"/>
+              </a:rPr>
+              <a:t>│                      │  │                 │  │                    │</a:t>
+            </a:r>
+            <a:br/>
+            <a:r>
+              <a:rPr sz="900">
+                <a:latin typeface="Consolas"/>
+              </a:rPr>
+              <a:t>│ - Normalized         │─&gt;│ Event Bus      │─&gt;│ - Denormalized     │</a:t>
+            </a:r>
+            <a:br/>
+            <a:r>
+              <a:rPr sz="900">
+                <a:latin typeface="Consolas"/>
+              </a:rPr>
+              <a:t>│ - PostgreSQL         │  │ Command/Query  │  │ - Elasticsearch    │</a:t>
+            </a:r>
+            <a:br/>
+            <a:r>
+              <a:rPr sz="900">
+                <a:latin typeface="Consolas"/>
+              </a:rPr>
+              <a:t>│ - ACID Transactions  │  │ Sync           │  │ - Read Optimized   │</a:t>
+            </a:r>
+            <a:br/>
+            <a:r>
+              <a:rPr sz="900">
+                <a:latin typeface="Consolas"/>
+              </a:rPr>
+              <a:t>└──────────────────────┘  └─────────────────┘  └──────────────────────┘</a:t>
             </a:r>
           </a:p>
         </p:txBody>
@@ -7218,7 +5770,7 @@
           <a:lstStyle/>
           <a:p>
             <a:r>
-              <a:t>CQRS (Command Query Responsibility Segregation) - Implementation</a:t>
+              <a:t>CQRS - Trade-offs</a:t>
             </a:r>
           </a:p>
         </p:txBody>
@@ -7230,7 +5782,7 @@
             <a:spLocks noGrp="1"/>
           </p:cNvSpPr>
           <p:nvPr>
-            <p:ph idx="1"/>
+            <p:ph idx="1" sz="half"/>
           </p:nvPr>
         </p:nvSpPr>
         <p:spPr/>
@@ -7239,70 +5791,62 @@
           <a:lstStyle/>
           <a:p>
             <a:pPr>
-              <a:defRPr sz="1400">
-                <a:latin typeface="Consolas"/>
-              </a:defRPr>
+              <a:defRPr b="1" sz="1600"/>
             </a:pPr>
             <a:r>
-              <a:t>Command Side              Event Store           Query Side</a:t>
-            </a:r>
-            <a:br/>
-            <a:r>
-              <a:t>┌──────────────────────┐  ┌─────────────────┐  ┌──────────────────────┐</a:t>
-            </a:r>
-            <a:br/>
-            <a:r>
-              <a:t>│ Write Model          │  │   Events       │  │ Read Model         │</a:t>
-            </a:r>
-            <a:br/>
-            <a:r>
-              <a:t>│                      │  │                 │  │                    │</a:t>
-            </a:r>
-            <a:br/>
-            <a:r>
-              <a:t>│ - Normalized         │─&gt;│ Event Bus      │─&gt;│ - Denormalized     │</a:t>
-            </a:r>
-            <a:br/>
-            <a:r>
-              <a:t>│ - PostgreSQL         │  │ Command/Query  │  │ - Elasticsearch    │</a:t>
-            </a:r>
-            <a:br/>
-            <a:r>
-              <a:t>│ - ACID Transactions  │  │ Sync           │  │ - Read Optimized   │</a:t>
-            </a:r>
-            <a:br/>
-            <a:r>
-              <a:t>└──────────────────────┘  └─────────────────┘  └──────────────────────┘</a:t>
-            </a:r>
-          </a:p>
-        </p:txBody>
-      </p:sp>
-    </p:spTree>
-  </p:cSld>
-  <p:clrMapOvr>
-    <a:masterClrMapping/>
-  </p:clrMapOvr>
-</p:sld>
-</file>
-
-<file path=ppt/slides/slide40.xml><?xml version="1.0" encoding="utf-8"?>
-<p:sld xmlns:a="http://schemas.openxmlformats.org/drawingml/2006/main" xmlns:p="http://schemas.openxmlformats.org/presentationml/2006/main" xmlns:r="http://schemas.openxmlformats.org/officeDocument/2006/relationships">
-  <p:cSld>
-    <p:spTree>
-      <p:nvGrpSpPr>
-        <p:cNvPr id="1" name=""/>
-        <p:cNvGrpSpPr/>
-        <p:nvPr/>
-      </p:nvGrpSpPr>
-      <p:grpSpPr/>
-      <p:sp>
-        <p:nvSpPr>
-          <p:cNvPr id="2" name="Title 1"/>
-          <p:cNvSpPr>
-            <a:spLocks noGrp="1"/>
-          </p:cNvSpPr>
-          <p:nvPr>
-            <p:ph type="title"/>
+              <a:t>Vorteile ✅</a:t>
+            </a:r>
+          </a:p>
+          <a:p>
+            <a:pPr>
+              <a:spcAft>
+                <a:spcPts val="600"/>
+              </a:spcAft>
+            </a:pPr>
+            <a:r>
+              <a:t>• Performance: Optimized Data Models für Read/Write</a:t>
+            </a:r>
+          </a:p>
+          <a:p>
+            <a:pPr>
+              <a:spcAft>
+                <a:spcPts val="600"/>
+              </a:spcAft>
+            </a:pPr>
+            <a:r>
+              <a:t>• Skalierung: Read/Write Operations unabhängig skalierbar</a:t>
+            </a:r>
+          </a:p>
+          <a:p>
+            <a:pPr>
+              <a:spcAft>
+                <a:spcPts val="600"/>
+              </a:spcAft>
+            </a:pPr>
+            <a:r>
+              <a:t>• Complex Queries: Performance durch denormalized Read Models</a:t>
+            </a:r>
+          </a:p>
+          <a:p>
+            <a:pPr>
+              <a:spcAft>
+                <a:spcPts val="600"/>
+              </a:spcAft>
+            </a:pPr>
+            <a:r>
+              <a:t>• Event Sourcing Integration: Natürliche Kombination möglich</a:t>
+            </a:r>
+          </a:p>
+        </p:txBody>
+      </p:sp>
+      <p:sp>
+        <p:nvSpPr>
+          <p:cNvPr id="4" name="Content Placeholder 3"/>
+          <p:cNvSpPr>
+            <a:spLocks noGrp="1"/>
+          </p:cNvSpPr>
+          <p:nvPr>
+            <p:ph idx="2" sz="half"/>
           </p:nvPr>
         </p:nvSpPr>
         <p:spPr/>
@@ -7310,362 +5854,51 @@
           <a:bodyPr/>
           <a:lstStyle/>
           <a:p>
-            <a:r>
-              <a:t>Architecture Evolution Path</a:t>
-            </a:r>
-          </a:p>
-        </p:txBody>
-      </p:sp>
-      <p:sp>
-        <p:nvSpPr>
-          <p:cNvPr id="3" name="Content Placeholder 2"/>
-          <p:cNvSpPr>
-            <a:spLocks noGrp="1"/>
-          </p:cNvSpPr>
-          <p:nvPr>
-            <p:ph idx="1"/>
-          </p:nvPr>
-        </p:nvSpPr>
-        <p:spPr/>
-        <p:txBody>
-          <a:bodyPr/>
-          <a:lstStyle/>
-          <a:p>
             <a:pPr>
-              <a:defRPr b="1" sz="1800"/>
+              <a:defRPr b="1" sz="1600"/>
             </a:pPr>
             <a:r>
-              <a:t>Evolution Journey</a:t>
+              <a:t>Nachteile ❌</a:t>
             </a:r>
           </a:p>
           <a:p>
             <a:pPr>
-              <a:defRPr b="1" sz="1800"/>
+              <a:spcAft>
+                <a:spcPts val="600"/>
+              </a:spcAft>
             </a:pPr>
             <a:r>
-              <a:t>Use Case Mapping</a:t>
-            </a:r>
-          </a:p>
-          <a:p>
-            <a:pPr lvl="1"/>
-            <a:r>
-              <a:t>Event-Driven für Real-time Monitoring</a:t>
-            </a:r>
-          </a:p>
-          <a:p>
-            <a:pPr lvl="1"/>
-            <a:r>
-              <a:t>CQRS für High-Performance Dashboards</a:t>
-            </a:r>
-          </a:p>
-          <a:p>
-            <a:pPr lvl="1"/>
-            <a:r>
-              <a:t>Circuit Breaker für External Dependencies</a:t>
-            </a:r>
-          </a:p>
-          <a:p>
-            <a:pPr lvl="1"/>
-            <a:r>
-              <a:t>Domain-Driven Design für Complex Business Logic</a:t>
-            </a:r>
-          </a:p>
-          <a:p>
-            <a:pPr lvl="1"/>
-            <a:r>
-              <a:t>Event Sourcing für Audit Requirements</a:t>
-            </a:r>
-          </a:p>
-          <a:p>
-            <a:pPr lvl="1"/>
-            <a:r>
-              <a:t>Saga Pattern für Multi-Service Transactions</a:t>
-            </a:r>
-          </a:p>
-        </p:txBody>
-      </p:sp>
-    </p:spTree>
-  </p:cSld>
-  <p:clrMapOvr>
-    <a:masterClrMapping/>
-  </p:clrMapOvr>
-</p:sld>
-</file>
-
-<file path=ppt/slides/slide41.xml><?xml version="1.0" encoding="utf-8"?>
-<p:sld xmlns:a="http://schemas.openxmlformats.org/drawingml/2006/main" xmlns:p="http://schemas.openxmlformats.org/presentationml/2006/main" xmlns:r="http://schemas.openxmlformats.org/officeDocument/2006/relationships">
-  <p:cSld>
-    <p:spTree>
-      <p:nvGrpSpPr>
-        <p:cNvPr id="1" name=""/>
-        <p:cNvGrpSpPr/>
-        <p:nvPr/>
-      </p:nvGrpSpPr>
-      <p:grpSpPr/>
-      <p:sp>
-        <p:nvSpPr>
-          <p:cNvPr id="2" name="Title 1"/>
-          <p:cNvSpPr>
-            <a:spLocks noGrp="1"/>
-          </p:cNvSpPr>
-          <p:nvPr>
-            <p:ph type="title"/>
-          </p:nvPr>
-        </p:nvSpPr>
-        <p:spPr/>
-        <p:txBody>
-          <a:bodyPr/>
-          <a:lstStyle/>
-          <a:p>
-            <a:r>
-              <a:t>Anti-Patterns vermeiden</a:t>
-            </a:r>
-          </a:p>
-        </p:txBody>
-      </p:sp>
-      <p:sp>
-        <p:nvSpPr>
-          <p:cNvPr id="3" name="Content Placeholder 2"/>
-          <p:cNvSpPr>
-            <a:spLocks noGrp="1"/>
-          </p:cNvSpPr>
-          <p:nvPr>
-            <p:ph idx="1"/>
-          </p:nvPr>
-        </p:nvSpPr>
-        <p:spPr/>
-        <p:txBody>
-          <a:bodyPr/>
-          <a:lstStyle/>
+              <a:t>• Eventual Consistency: zwischen Read/Write Models</a:t>
+            </a:r>
+          </a:p>
           <a:p>
             <a:pPr>
-              <a:defRPr b="1" sz="1800"/>
+              <a:spcAft>
+                <a:spcPts val="600"/>
+              </a:spcAft>
             </a:pPr>
             <a:r>
-              <a:t>Microservices Anti-Patterns</a:t>
-            </a:r>
-          </a:p>
-          <a:p>
-            <a:pPr lvl="1"/>
-            <a:r>
-              <a:t>Distributed Monolith: Services zu gekoppelt</a:t>
-            </a:r>
-          </a:p>
-          <a:p>
-            <a:pPr lvl="1"/>
-            <a:r>
-              <a:t>Chatty Services: Zu viele Service-to-Service Calls</a:t>
-            </a:r>
-          </a:p>
-          <a:p>
-            <a:pPr lvl="1"/>
-            <a:r>
-              <a:t>Shared Database: Verletzt Service-Autonomie</a:t>
-            </a:r>
-          </a:p>
-          <a:p>
-            <a:pPr lvl="1"/>
-            <a:r>
-              <a:t>Synchronous Coupling: Services blockieren sich gegenseitig</a:t>
+              <a:t>• Maintenance: Doppelte Data Models erhöhen Aufwand</a:t>
             </a:r>
           </a:p>
           <a:p>
             <a:pPr>
-              <a:defRPr b="1" sz="1800"/>
+              <a:spcAft>
+                <a:spcPts val="600"/>
+              </a:spcAft>
             </a:pPr>
             <a:r>
-              <a:t>Event Sourcing Anti-Patterns</a:t>
-            </a:r>
-          </a:p>
-          <a:p>
-            <a:pPr lvl="1"/>
-            <a:r>
-              <a:t>Event as State: Events enthalten kompletten State statt Änderung</a:t>
-            </a:r>
-          </a:p>
-          <a:p>
-            <a:pPr lvl="1"/>
-            <a:r>
-              <a:t>Big Events: Events sind zu groß und enthalten zu viel Information</a:t>
-            </a:r>
-          </a:p>
-          <a:p>
-            <a:pPr lvl="1"/>
-            <a:r>
-              <a:t>Schema Evolution Ignorance: Keine Versioning-Strategie für Events</a:t>
+              <a:t>• Synchronization: Event Sync zwischen Models komplex</a:t>
             </a:r>
           </a:p>
           <a:p>
             <a:pPr>
-              <a:defRPr b="1" sz="1800"/>
+              <a:spcAft>
+                <a:spcPts val="600"/>
+              </a:spcAft>
             </a:pPr>
             <a:r>
-              <a:t>CQRS Anti-Patterns</a:t>
-            </a:r>
-          </a:p>
-          <a:p>
-            <a:pPr lvl="1"/>
-            <a:r>
-              <a:t>CQRS Everywhere: CQRS für einfache CRUD-Operations</a:t>
-            </a:r>
-          </a:p>
-          <a:p>
-            <a:pPr lvl="1"/>
-            <a:r>
-              <a:t>Complex Queries on Write Side: Query-Logic im Write Model</a:t>
-            </a:r>
-          </a:p>
-          <a:p>
-            <a:pPr lvl="1"/>
-            <a:r>
-              <a:t>Synchronous Read Model Updates: Blocking Updates der Read Models</a:t>
-            </a:r>
-          </a:p>
-        </p:txBody>
-      </p:sp>
-    </p:spTree>
-  </p:cSld>
-  <p:clrMapOvr>
-    <a:masterClrMapping/>
-  </p:clrMapOvr>
-</p:sld>
-</file>
-
-<file path=ppt/slides/slide42.xml><?xml version="1.0" encoding="utf-8"?>
-<p:sld xmlns:a="http://schemas.openxmlformats.org/drawingml/2006/main" xmlns:p="http://schemas.openxmlformats.org/presentationml/2006/main" xmlns:r="http://schemas.openxmlformats.org/officeDocument/2006/relationships">
-  <p:cSld>
-    <p:spTree>
-      <p:nvGrpSpPr>
-        <p:cNvPr id="1" name=""/>
-        <p:cNvGrpSpPr/>
-        <p:nvPr/>
-      </p:nvGrpSpPr>
-      <p:grpSpPr/>
-      <p:sp>
-        <p:nvSpPr>
-          <p:cNvPr id="2" name="Title 1"/>
-          <p:cNvSpPr>
-            <a:spLocks noGrp="1"/>
-          </p:cNvSpPr>
-          <p:nvPr>
-            <p:ph type="title"/>
-          </p:nvPr>
-        </p:nvSpPr>
-        <p:spPr/>
-        <p:txBody>
-          <a:bodyPr/>
-          <a:lstStyle/>
-          <a:p>
-            <a:r>
-              <a:t>Zusammenfassung</a:t>
-            </a:r>
-          </a:p>
-        </p:txBody>
-      </p:sp>
-      <p:sp>
-        <p:nvSpPr>
-          <p:cNvPr id="3" name="Content Placeholder 2"/>
-          <p:cNvSpPr>
-            <a:spLocks noGrp="1"/>
-          </p:cNvSpPr>
-          <p:nvPr>
-            <p:ph idx="1"/>
-          </p:nvPr>
-        </p:nvSpPr>
-        <p:spPr/>
-        <p:txBody>
-          <a:bodyPr/>
-          <a:lstStyle/>
-          <a:p>
-            <a:pPr>
-              <a:defRPr b="1" sz="1800"/>
-            </a:pPr>
-            <a:r>
-              <a:t>Pattern-Kombinationen nutzen</a:t>
-            </a:r>
-          </a:p>
-          <a:p>
-            <a:pPr lvl="1"/>
-            <a:r>
-              <a:t>CQRS + Event Sourcing: Für Audit und Performance</a:t>
-            </a:r>
-          </a:p>
-          <a:p>
-            <a:pPr lvl="1"/>
-            <a:r>
-              <a:t>Microservices + Service Mesh: Für Infrastructure Concerns</a:t>
-            </a:r>
-          </a:p>
-          <a:p>
-            <a:pPr lvl="1"/>
-            <a:r>
-              <a:t>Circuit Breaker + Bulkhead: Für System Resilience</a:t>
-            </a:r>
-          </a:p>
-          <a:p>
-            <a:pPr lvl="1"/>
-            <a:r>
-              <a:t>API Gateway + DDD: Für Business-oriented APIs</a:t>
-            </a:r>
-          </a:p>
-          <a:p>
-            <a:pPr>
-              <a:defRPr b="1" sz="1800"/>
-            </a:pPr>
-            <a:r>
-              <a:t>Evolution über Revolution</a:t>
-            </a:r>
-          </a:p>
-          <a:p>
-            <a:pPr lvl="1"/>
-            <a:r>
-              <a:t>Start Simple: Layered Architecture für Prototypen</a:t>
-            </a:r>
-          </a:p>
-          <a:p>
-            <a:pPr lvl="1"/>
-            <a:r>
-              <a:t>Scale Systematically: Microservices für große Teams</a:t>
-            </a:r>
-          </a:p>
-          <a:p>
-            <a:pPr lvl="1"/>
-            <a:r>
-              <a:t>Optimize Specifically: CQRS/Event Sourcing für Performance</a:t>
-            </a:r>
-          </a:p>
-          <a:p>
-            <a:pPr lvl="1"/>
-            <a:r>
-              <a:t>Design for Change: Patterns als Evolution Path nutzen</a:t>
-            </a:r>
-          </a:p>
-          <a:p>
-            <a:pPr>
-              <a:defRPr b="1" sz="1800"/>
-            </a:pPr>
-            <a:r>
-              <a:t>Telekom-spezifische Guidance</a:t>
-            </a:r>
-          </a:p>
-          <a:p>
-            <a:r>
-              <a:t>• Network Operations: Event-Driven + CQRS für Real-time Performance</a:t>
-            </a:r>
-          </a:p>
-          <a:p>
-            <a:r>
-              <a:t>• Customer Management: DDD + Event Sourcing für Compliance</a:t>
-            </a:r>
-          </a:p>
-          <a:p>
-            <a:r>
-              <a:t>• Billing Systems: Saga Pattern für Distributed Transactions</a:t>
-            </a:r>
-          </a:p>
-          <a:p>
-            <a:r>
-              <a:t>• Legacy Integration: Strangler Fig für graduelle Migration</a:t>
+              <a:t>• Over-Engineering: für simple CRUD Applications</a:t>
             </a:r>
           </a:p>
         </p:txBody>
@@ -7704,7 +5937,7 @@
           <a:lstStyle/>
           <a:p>
             <a:r>
-              <a:t>CQRS - Telekom Use Case</a:t>
+              <a:t>Event Sourcing</a:t>
             </a:r>
           </a:p>
         </p:txBody>
@@ -7760,7 +5993,7 @@
           <a:lstStyle/>
           <a:p>
             <a:r>
-              <a:t>CQRS - Telekom Use Case</a:t>
+              <a:t>Event Sourcing Pattern</a:t>
             </a:r>
           </a:p>
         </p:txBody>
@@ -7781,42 +6014,84 @@
           <a:lstStyle/>
           <a:p>
             <a:pPr>
-              <a:defRPr b="1" sz="1800"/>
+              <a:lnSpc>
+                <a:spcPct val="100000"/>
+              </a:lnSpc>
+              <a:spcBef>
+                <a:spcPts val="0"/>
+              </a:spcBef>
+              <a:spcAft>
+                <a:spcPts val="0"/>
+              </a:spcAft>
             </a:pPr>
             <a:r>
-              <a:t>Network Device Management System</a:t>
-            </a:r>
-          </a:p>
-          <a:p>
-            <a:pPr lvl="1"/>
-            <a:r>
-              <a:t>Commands: Add device, update configuration, assign to network</a:t>
-            </a:r>
-          </a:p>
-          <a:p>
-            <a:pPr lvl="1"/>
-            <a:r>
-              <a:t>Queries: Device list, configuration history, network topology</a:t>
-            </a:r>
-          </a:p>
-          <a:p>
-            <a:pPr lvl="1"/>
-            <a:r>
-              <a:t>Write Model: Normalized device tables, configuration audit</a:t>
-            </a:r>
-          </a:p>
-          <a:p>
-            <a:pPr lvl="1"/>
-            <a:r>
-              <a:t>Read Model: Denormalized views für Dashboard, reports</a:t>
-            </a:r>
-          </a:p>
-          <a:p>
-            <a:pPr>
-              <a:defRPr b="1" sz="1800"/>
-            </a:pPr>
-            <a:r>
-              <a:t>Implementation</a:t>
+              <a:rPr sz="900">
+                <a:latin typeface="Consolas"/>
+              </a:rPr>
+              <a:t>Commands            Events               Current State</a:t>
+            </a:r>
+            <a:br/>
+            <a:r>
+              <a:rPr sz="900">
+                <a:latin typeface="Consolas"/>
+              </a:rPr>
+              <a:t>┌───────────┐    ┌─────────────┐      ┌─────────────────┐</a:t>
+            </a:r>
+            <a:br/>
+            <a:r>
+              <a:rPr sz="900">
+                <a:latin typeface="Consolas"/>
+              </a:rPr>
+              <a:t>│ Create    │───&gt;│ DeviceCreated│───&gt; │                 │</a:t>
+            </a:r>
+            <a:br/>
+            <a:r>
+              <a:rPr sz="900">
+                <a:latin typeface="Consolas"/>
+              </a:rPr>
+              <a:t>│ Device    │    │   Event     │     │     Current     │</a:t>
+            </a:r>
+            <a:br/>
+            <a:r>
+              <a:rPr sz="900">
+                <a:latin typeface="Consolas"/>
+              </a:rPr>
+              <a:t>└───────────┘    └─────────────┘     │      State      │</a:t>
+            </a:r>
+            <a:br/>
+            <a:r>
+              <a:rPr sz="900">
+                <a:latin typeface="Consolas"/>
+              </a:rPr>
+              <a:t>                                     │                 │</a:t>
+            </a:r>
+            <a:br/>
+            <a:r>
+              <a:rPr sz="900">
+                <a:latin typeface="Consolas"/>
+              </a:rPr>
+              <a:t>┌───────────┐    ┌─────────────┐     │   (Projection   │</a:t>
+            </a:r>
+            <a:br/>
+            <a:r>
+              <a:rPr sz="900">
+                <a:latin typeface="Consolas"/>
+              </a:rPr>
+              <a:t>│ Configure │───&gt;│ConfigChanged│───&gt; │   from Events)  │</a:t>
+            </a:r>
+            <a:br/>
+            <a:r>
+              <a:rPr sz="900">
+                <a:latin typeface="Consolas"/>
+              </a:rPr>
+              <a:t>│ Device    │    │   Event     │     │                 │</a:t>
+            </a:r>
+            <a:br/>
+            <a:r>
+              <a:rPr sz="900">
+                <a:latin typeface="Consolas"/>
+              </a:rPr>
+              <a:t>└───────────┘    └─────────────┘     └─────────────────┘</a:t>
             </a:r>
           </a:p>
         </p:txBody>
@@ -7846,7 +6121,7 @@
             <a:spLocks noGrp="1"/>
           </p:cNvSpPr>
           <p:nvPr>
-            <p:ph type="title"/>
+            <p:ph type="ctrTitle"/>
           </p:nvPr>
         </p:nvSpPr>
         <p:spPr/>
@@ -7855,83 +6130,26 @@
           <a:lstStyle/>
           <a:p>
             <a:r>
-              <a:t>CQRS - Telekom Use Case - Implementation</a:t>
-            </a:r>
-          </a:p>
-        </p:txBody>
-      </p:sp>
-      <p:sp>
-        <p:nvSpPr>
-          <p:cNvPr id="3" name="Content Placeholder 2"/>
-          <p:cNvSpPr>
-            <a:spLocks noGrp="1"/>
-          </p:cNvSpPr>
-          <p:nvPr>
-            <p:ph idx="1"/>
+              <a:t>Circuit Breaker Pattern</a:t>
+            </a:r>
+          </a:p>
+        </p:txBody>
+      </p:sp>
+      <p:sp>
+        <p:nvSpPr>
+          <p:cNvPr id="3" name="Subtitle 2"/>
+          <p:cNvSpPr>
+            <a:spLocks noGrp="1"/>
+          </p:cNvSpPr>
+          <p:nvPr>
+            <p:ph type="subTitle" idx="1"/>
           </p:nvPr>
         </p:nvSpPr>
         <p:spPr/>
         <p:txBody>
           <a:bodyPr/>
           <a:lstStyle/>
-          <a:p>
-            <a:pPr>
-              <a:defRPr sz="1400">
-                <a:latin typeface="Consolas"/>
-              </a:defRPr>
-            </a:pPr>
-            <a:r>
-              <a:t>java</a:t>
-            </a:r>
-            <a:br/>
-            <a:r>
-              <a:t>// Command Side: Command + Factory Pattern</a:t>
-            </a:r>
-            <a:br/>
-            <a:r>
-              <a:t>@Component</a:t>
-            </a:r>
-            <a:br/>
-            <a:r>
-              <a:t>public class ConfigurationCommandHandler {</a:t>
-            </a:r>
-            <a:br/>
-            <a:r>
-              <a:t>    public CommandResult handle(ApplyConfigurationCommand command) {</a:t>
-            </a:r>
-            <a:br/>
-            <a:r>
-              <a:t>        DeviceAggregate aggregate = aggregateFactory.load(command.getDeviceId());</a:t>
-            </a:r>
-            <a:br/>
-            <a:r>
-              <a:t>        aggregate.applyConfiguration(command.getConfiguration());</a:t>
-            </a:r>
-            <a:br/>
-            <a:r>
-              <a:t>        </a:t>
-            </a:r>
-            <a:br/>
-            <a:r>
-              <a:t>        List&lt;DomainEvent&gt; events = aggregate.getUncommittedEvents();</a:t>
-            </a:r>
-            <a:br/>
-            <a:r>
-              <a:t>        eventStore.save(events);</a:t>
-            </a:r>
-            <a:br/>
-            <a:r>
-              <a:t>        return CommandResult.success();</a:t>
-            </a:r>
-            <a:br/>
-            <a:r>
-              <a:t>    }</a:t>
-            </a:r>
-            <a:br/>
-            <a:r>
-              <a:t>}</a:t>
-            </a:r>
-          </a:p>
+          <a:p/>
         </p:txBody>
       </p:sp>
     </p:spTree>
@@ -7959,7 +6177,7 @@
             <a:spLocks noGrp="1"/>
           </p:cNvSpPr>
           <p:nvPr>
-            <p:ph type="ctrTitle"/>
+            <p:ph type="title"/>
           </p:nvPr>
         </p:nvSpPr>
         <p:spPr/>
@@ -7968,26 +6186,114 @@
           <a:lstStyle/>
           <a:p>
             <a:r>
-              <a:t>CQRS - Query Side</a:t>
-            </a:r>
-          </a:p>
-        </p:txBody>
-      </p:sp>
-      <p:sp>
-        <p:nvSpPr>
-          <p:cNvPr id="3" name="Subtitle 2"/>
-          <p:cNvSpPr>
-            <a:spLocks noGrp="1"/>
-          </p:cNvSpPr>
-          <p:nvPr>
-            <p:ph type="subTitle" idx="1"/>
+              <a:t>Circuit Breaker State Machine</a:t>
+            </a:r>
+          </a:p>
+        </p:txBody>
+      </p:sp>
+      <p:sp>
+        <p:nvSpPr>
+          <p:cNvPr id="3" name="Content Placeholder 2"/>
+          <p:cNvSpPr>
+            <a:spLocks noGrp="1"/>
+          </p:cNvSpPr>
+          <p:nvPr>
+            <p:ph idx="1"/>
           </p:nvPr>
         </p:nvSpPr>
         <p:spPr/>
         <p:txBody>
           <a:bodyPr/>
           <a:lstStyle/>
-          <a:p/>
+          <a:p>
+            <a:pPr>
+              <a:lnSpc>
+                <a:spcPct val="100000"/>
+              </a:lnSpc>
+              <a:spcBef>
+                <a:spcPts val="0"/>
+              </a:spcBef>
+              <a:spcAft>
+                <a:spcPts val="0"/>
+              </a:spcAft>
+            </a:pPr>
+            <a:r>
+              <a:rPr sz="900">
+                <a:latin typeface="Consolas"/>
+              </a:rPr>
+              <a:t>CLOSED                    OPEN                    HALF-OPEN</a:t>
+            </a:r>
+            <a:br/>
+            <a:r>
+              <a:rPr sz="900">
+                <a:latin typeface="Consolas"/>
+              </a:rPr>
+              <a:t>┌─────────────────┐      ┌─────────────────┐      ┌─────────────────┐</a:t>
+            </a:r>
+            <a:br/>
+            <a:r>
+              <a:rPr sz="900">
+                <a:latin typeface="Consolas"/>
+              </a:rPr>
+              <a:t>│ Normal          │      │ Service Down    │      │ Testing         │</a:t>
+            </a:r>
+            <a:br/>
+            <a:r>
+              <a:rPr sz="900">
+                <a:latin typeface="Consolas"/>
+              </a:rPr>
+              <a:t>│ Operation       │─────&gt;│ Fast Fail       │─────&gt;│ Recovery        │</a:t>
+            </a:r>
+            <a:br/>
+            <a:r>
+              <a:rPr sz="900">
+                <a:latin typeface="Consolas"/>
+              </a:rPr>
+              <a:t>│                 │      │                 │      │                 │</a:t>
+            </a:r>
+            <a:br/>
+            <a:r>
+              <a:rPr sz="900">
+                <a:latin typeface="Consolas"/>
+              </a:rPr>
+              <a:t>│ Success Rate    │      │ Timeout Period  │      │ Limited Calls   │</a:t>
+            </a:r>
+            <a:br/>
+            <a:r>
+              <a:rPr sz="900">
+                <a:latin typeface="Consolas"/>
+              </a:rPr>
+              <a:t>│ &gt; Threshold     │      │ Elapsed         │      │                 │</a:t>
+            </a:r>
+            <a:br/>
+            <a:r>
+              <a:rPr sz="900">
+                <a:latin typeface="Consolas"/>
+              </a:rPr>
+              <a:t>└─────────────────┘      └─────────────────┘      └─────────────────┘</a:t>
+            </a:r>
+            <a:br/>
+            <a:r>
+              <a:rPr sz="900">
+                <a:latin typeface="Consolas"/>
+              </a:rPr>
+              <a:t>         ▲                                                  │</a:t>
+            </a:r>
+            <a:br/>
+            <a:r>
+              <a:rPr sz="900">
+                <a:latin typeface="Consolas"/>
+              </a:rPr>
+              <a:t>         └──────────────────────────────────────────────────┘</a:t>
+            </a:r>
+            <a:br/>
+            <a:r>
+              <a:rPr sz="900">
+                <a:latin typeface="Consolas"/>
+              </a:rPr>
+              <a:t>                         Success Rate &gt; Threshold</a:t>
+            </a:r>
+          </a:p>
         </p:txBody>
       </p:sp>
     </p:spTree>
@@ -8015,7 +6321,7 @@
             <a:spLocks noGrp="1"/>
           </p:cNvSpPr>
           <p:nvPr>
-            <p:ph type="title"/>
+            <p:ph type="ctrTitle"/>
           </p:nvPr>
         </p:nvSpPr>
         <p:spPr/>
@@ -8024,33 +6330,26 @@
           <a:lstStyle/>
           <a:p>
             <a:r>
-              <a:t>CQRS - Query Side</a:t>
-            </a:r>
-          </a:p>
-        </p:txBody>
-      </p:sp>
-      <p:sp>
-        <p:nvSpPr>
-          <p:cNvPr id="3" name="Content Placeholder 2"/>
-          <p:cNvSpPr>
-            <a:spLocks noGrp="1"/>
-          </p:cNvSpPr>
-          <p:nvPr>
-            <p:ph idx="1"/>
+              <a:t>Saga Pattern</a:t>
+            </a:r>
+          </a:p>
+        </p:txBody>
+      </p:sp>
+      <p:sp>
+        <p:nvSpPr>
+          <p:cNvPr id="3" name="Subtitle 2"/>
+          <p:cNvSpPr>
+            <a:spLocks noGrp="1"/>
+          </p:cNvSpPr>
+          <p:nvPr>
+            <p:ph type="subTitle" idx="1"/>
           </p:nvPr>
         </p:nvSpPr>
         <p:spPr/>
         <p:txBody>
           <a:bodyPr/>
           <a:lstStyle/>
-          <a:p>
-            <a:pPr>
-              <a:defRPr b="1" sz="1800"/>
-            </a:pPr>
-            <a:r>
-              <a:t>Optimized Read Models</a:t>
-            </a:r>
-          </a:p>
+          <a:p/>
         </p:txBody>
       </p:sp>
     </p:spTree>

--- a/presentations/powerpoint/arch-patterns-part2.pptx
+++ b/presentations/powerpoint/arch-patterns-part2.pptx
@@ -5,25 +5,31 @@
     <p:sldMasterId id="2147483661" r:id="rId1"/>
   </p:sldMasterIdLst>
   <p:sldIdLst>
-    <p:sldId id="256" r:id="rId6"/>
-    <p:sldId id="257" r:id="rId7"/>
-    <p:sldId id="258" r:id="rId8"/>
-    <p:sldId id="259" r:id="rId9"/>
-    <p:sldId id="260" r:id="rId10"/>
-    <p:sldId id="261" r:id="rId11"/>
-    <p:sldId id="262" r:id="rId12"/>
-    <p:sldId id="263" r:id="rId13"/>
-    <p:sldId id="264" r:id="rId14"/>
-    <p:sldId id="265" r:id="rId15"/>
-    <p:sldId id="266" r:id="rId16"/>
-    <p:sldId id="267" r:id="rId17"/>
-    <p:sldId id="268" r:id="rId18"/>
-    <p:sldId id="269" r:id="rId19"/>
-    <p:sldId id="270" r:id="rId20"/>
-    <p:sldId id="271" r:id="rId21"/>
-    <p:sldId id="272" r:id="rId22"/>
+    <p:sldId id="256" r:id="rId2"/>
+    <p:sldId id="257" r:id="rId3"/>
+    <p:sldId id="258" r:id="rId4"/>
+    <p:sldId id="259" r:id="rId5"/>
+    <p:sldId id="260" r:id="rId6"/>
+    <p:sldId id="261" r:id="rId7"/>
+    <p:sldId id="262" r:id="rId8"/>
+    <p:sldId id="263" r:id="rId9"/>
+    <p:sldId id="264" r:id="rId10"/>
+    <p:sldId id="265" r:id="rId11"/>
+    <p:sldId id="266" r:id="rId12"/>
+    <p:sldId id="267" r:id="rId13"/>
+    <p:sldId id="268" r:id="rId14"/>
+    <p:sldId id="269" r:id="rId15"/>
+    <p:sldId id="270" r:id="rId16"/>
+    <p:sldId id="271" r:id="rId17"/>
+    <p:sldId id="272" r:id="rId18"/>
     <p:sldId id="273" r:id="rId23"/>
     <p:sldId id="274" r:id="rId24"/>
+    <p:sldId id="275" r:id="rId26"/>
+    <p:sldId id="276" r:id="rId27"/>
+    <p:sldId id="277" r:id="rId28"/>
+    <p:sldId id="278" r:id="rId29"/>
+    <p:sldId id="279" r:id="rId30"/>
+    <p:sldId id="280" r:id="rId31"/>
   </p:sldIdLst>
   <p:sldSz cx="12192000" cy="6858000"/>
   <p:notesSz cx="6858000" cy="9144000"/>
@@ -128,6 +134,2106 @@
     </p:ext>
   </p:extLst>
 </p:presentation>
+</file>
+
+<file path=ppt/notesMasters/notesMaster1.xml><?xml version="1.0" encoding="utf-8"?>
+<p:notesMaster xmlns:a="http://schemas.openxmlformats.org/drawingml/2006/main" xmlns:p="http://schemas.openxmlformats.org/presentationml/2006/main" xmlns:r="http://schemas.openxmlformats.org/officeDocument/2006/relationships">
+  <p:cSld>
+    <p:bg>
+      <p:bgRef idx="1001">
+        <a:schemeClr val="bg1"/>
+      </p:bgRef>
+    </p:bg>
+    <p:spTree>
+      <p:nvGrpSpPr>
+        <p:cNvPr id="1" name=""/>
+        <p:cNvGrpSpPr/>
+        <p:nvPr/>
+      </p:nvGrpSpPr>
+      <p:grpSpPr>
+        <a:xfrm>
+          <a:off x="0" y="0"/>
+          <a:ext cx="0" cy="0"/>
+          <a:chOff x="0" y="0"/>
+          <a:chExt cx="0" cy="0"/>
+        </a:xfrm>
+      </p:grpSpPr>
+      <p:sp>
+        <p:nvSpPr>
+          <p:cNvPr id="2" name="Header Placeholder 1"/>
+          <p:cNvSpPr>
+            <a:spLocks noGrp="1"/>
+          </p:cNvSpPr>
+          <p:nvPr>
+            <p:ph type="hdr" sz="quarter"/>
+          </p:nvPr>
+        </p:nvSpPr>
+        <p:spPr>
+          <a:xfrm>
+            <a:off x="0" y="0"/>
+            <a:ext cx="2971800" cy="457200"/>
+          </a:xfrm>
+          <a:prstGeom prst="rect">
+            <a:avLst/>
+          </a:prstGeom>
+        </p:spPr>
+        <p:txBody>
+          <a:bodyPr vert="horz" lIns="91440" tIns="45720" rIns="91440" bIns="45720" rtlCol="0"/>
+          <a:lstStyle>
+            <a:lvl1pPr algn="l">
+              <a:defRPr sz="1200"/>
+            </a:lvl1pPr>
+          </a:lstStyle>
+          <a:p>
+            <a:endParaRPr lang="en-US"/>
+          </a:p>
+        </p:txBody>
+      </p:sp>
+      <p:sp>
+        <p:nvSpPr>
+          <p:cNvPr id="3" name="Date Placeholder 2"/>
+          <p:cNvSpPr>
+            <a:spLocks noGrp="1"/>
+          </p:cNvSpPr>
+          <p:nvPr>
+            <p:ph type="dt" idx="1"/>
+          </p:nvPr>
+        </p:nvSpPr>
+        <p:spPr>
+          <a:xfrm>
+            <a:off x="3884613" y="0"/>
+            <a:ext cx="2971800" cy="457200"/>
+          </a:xfrm>
+          <a:prstGeom prst="rect">
+            <a:avLst/>
+          </a:prstGeom>
+        </p:spPr>
+        <p:txBody>
+          <a:bodyPr vert="horz" lIns="91440" tIns="45720" rIns="91440" bIns="45720" rtlCol="0"/>
+          <a:lstStyle>
+            <a:lvl1pPr algn="r">
+              <a:defRPr sz="1200"/>
+            </a:lvl1pPr>
+          </a:lstStyle>
+          <a:p>
+            <a:fld id="{0F89C1C7-3DCD-1040-A9CF-14679D8B5DDD}" type="datetimeFigureOut">
+              <a:rPr lang="en-US" smtClean="0"/>
+              <a:t>10/17/16</a:t>
+            </a:fld>
+            <a:endParaRPr lang="en-US"/>
+          </a:p>
+        </p:txBody>
+      </p:sp>
+      <p:sp>
+        <p:nvSpPr>
+          <p:cNvPr id="4" name="Slide Image Placeholder 3"/>
+          <p:cNvSpPr>
+            <a:spLocks noGrp="1" noRot="1" noChangeAspect="1"/>
+          </p:cNvSpPr>
+          <p:nvPr>
+            <p:ph type="sldImg" idx="2"/>
+          </p:nvPr>
+        </p:nvSpPr>
+        <p:spPr>
+          <a:xfrm>
+            <a:off x="1143000" y="685800"/>
+            <a:ext cx="4572000" cy="3429000"/>
+          </a:xfrm>
+          <a:prstGeom prst="rect">
+            <a:avLst/>
+          </a:prstGeom>
+          <a:noFill/>
+          <a:ln w="12700">
+            <a:solidFill>
+              <a:prstClr val="black"/>
+            </a:solidFill>
+          </a:ln>
+        </p:spPr>
+        <p:txBody>
+          <a:bodyPr vert="horz" lIns="91440" tIns="45720" rIns="91440" bIns="45720" rtlCol="0" anchor="ctr"/>
+          <a:lstStyle/>
+          <a:p>
+            <a:endParaRPr lang="en-US"/>
+          </a:p>
+        </p:txBody>
+      </p:sp>
+      <p:sp>
+        <p:nvSpPr>
+          <p:cNvPr id="5" name="Notes Placeholder 4"/>
+          <p:cNvSpPr>
+            <a:spLocks noGrp="1"/>
+          </p:cNvSpPr>
+          <p:nvPr>
+            <p:ph type="body" sz="quarter" idx="3"/>
+          </p:nvPr>
+        </p:nvSpPr>
+        <p:spPr>
+          <a:xfrm>
+            <a:off x="685800" y="4343400"/>
+            <a:ext cx="5486400" cy="4114800"/>
+          </a:xfrm>
+          <a:prstGeom prst="rect">
+            <a:avLst/>
+          </a:prstGeom>
+        </p:spPr>
+        <p:txBody>
+          <a:bodyPr vert="horz" lIns="91440" tIns="45720" rIns="91440" bIns="45720" rtlCol="0"/>
+          <a:lstStyle/>
+          <a:p>
+            <a:pPr lvl="0"/>
+            <a:r>
+              <a:rPr lang="en-US" smtClean="0"/>
+              <a:t>Click to edit Master text styles</a:t>
+            </a:r>
+          </a:p>
+          <a:p>
+            <a:pPr lvl="1"/>
+            <a:r>
+              <a:rPr lang="en-US" smtClean="0"/>
+              <a:t>Second level</a:t>
+            </a:r>
+          </a:p>
+          <a:p>
+            <a:pPr lvl="2"/>
+            <a:r>
+              <a:rPr lang="en-US" smtClean="0"/>
+              <a:t>Third level</a:t>
+            </a:r>
+          </a:p>
+          <a:p>
+            <a:pPr lvl="3"/>
+            <a:r>
+              <a:rPr lang="en-US" smtClean="0"/>
+              <a:t>Fourth level</a:t>
+            </a:r>
+          </a:p>
+          <a:p>
+            <a:pPr lvl="4"/>
+            <a:r>
+              <a:rPr lang="en-US" smtClean="0"/>
+              <a:t>Fifth level</a:t>
+            </a:r>
+            <a:endParaRPr lang="en-US"/>
+          </a:p>
+        </p:txBody>
+      </p:sp>
+      <p:sp>
+        <p:nvSpPr>
+          <p:cNvPr id="6" name="Footer Placeholder 5"/>
+          <p:cNvSpPr>
+            <a:spLocks noGrp="1"/>
+          </p:cNvSpPr>
+          <p:nvPr>
+            <p:ph type="ftr" sz="quarter" idx="4"/>
+          </p:nvPr>
+        </p:nvSpPr>
+        <p:spPr>
+          <a:xfrm>
+            <a:off x="0" y="8685213"/>
+            <a:ext cx="2971800" cy="457200"/>
+          </a:xfrm>
+          <a:prstGeom prst="rect">
+            <a:avLst/>
+          </a:prstGeom>
+        </p:spPr>
+        <p:txBody>
+          <a:bodyPr vert="horz" lIns="91440" tIns="45720" rIns="91440" bIns="45720" rtlCol="0" anchor="b"/>
+          <a:lstStyle>
+            <a:lvl1pPr algn="l">
+              <a:defRPr sz="1200"/>
+            </a:lvl1pPr>
+          </a:lstStyle>
+          <a:p>
+            <a:endParaRPr lang="en-US"/>
+          </a:p>
+        </p:txBody>
+      </p:sp>
+      <p:sp>
+        <p:nvSpPr>
+          <p:cNvPr id="7" name="Slide Number Placeholder 6"/>
+          <p:cNvSpPr>
+            <a:spLocks noGrp="1"/>
+          </p:cNvSpPr>
+          <p:nvPr>
+            <p:ph type="sldNum" sz="quarter" idx="5"/>
+          </p:nvPr>
+        </p:nvSpPr>
+        <p:spPr>
+          <a:xfrm>
+            <a:off x="3884613" y="8685213"/>
+            <a:ext cx="2971800" cy="457200"/>
+          </a:xfrm>
+          <a:prstGeom prst="rect">
+            <a:avLst/>
+          </a:prstGeom>
+        </p:spPr>
+        <p:txBody>
+          <a:bodyPr vert="horz" lIns="91440" tIns="45720" rIns="91440" bIns="45720" rtlCol="0" anchor="b"/>
+          <a:lstStyle>
+            <a:lvl1pPr algn="r">
+              <a:defRPr sz="1200"/>
+            </a:lvl1pPr>
+          </a:lstStyle>
+          <a:p>
+            <a:fld id="{BB5E49A5-4136-284D-997B-48E1D791AD67}" type="slidenum">
+              <a:rPr lang="en-US" smtClean="0"/>
+              <a:t>‹#›</a:t>
+            </a:fld>
+            <a:endParaRPr lang="en-US"/>
+          </a:p>
+        </p:txBody>
+      </p:sp>
+    </p:spTree>
+    <p:extLst>
+      <p:ext uri="{BB962C8B-B14F-4D97-AF65-F5344CB8AC3E}">
+        <p14:creationId xmlns:p14="http://schemas.microsoft.com/office/powerpoint/2010/main" val="2623252185"/>
+      </p:ext>
+    </p:extLst>
+  </p:cSld>
+  <p:clrMap bg1="lt1" tx1="dk1" bg2="lt2" tx2="dk2" accent1="accent1" accent2="accent2" accent3="accent3" accent4="accent4" accent5="accent5" accent6="accent6" hlink="hlink" folHlink="folHlink"/>
+  <p:notesStyle>
+    <a:lvl1pPr marL="0" algn="l" defTabSz="457200" rtl="0" eaLnBrk="1" latinLnBrk="0" hangingPunct="1">
+      <a:defRPr sz="1200" kern="1200">
+        <a:solidFill>
+          <a:schemeClr val="tx1"/>
+        </a:solidFill>
+        <a:latin typeface="+mn-lt"/>
+        <a:ea typeface="+mn-ea"/>
+        <a:cs typeface="+mn-cs"/>
+      </a:defRPr>
+    </a:lvl1pPr>
+    <a:lvl2pPr marL="457200" algn="l" defTabSz="457200" rtl="0" eaLnBrk="1" latinLnBrk="0" hangingPunct="1">
+      <a:defRPr sz="1200" kern="1200">
+        <a:solidFill>
+          <a:schemeClr val="tx1"/>
+        </a:solidFill>
+        <a:latin typeface="+mn-lt"/>
+        <a:ea typeface="+mn-ea"/>
+        <a:cs typeface="+mn-cs"/>
+      </a:defRPr>
+    </a:lvl2pPr>
+    <a:lvl3pPr marL="914400" algn="l" defTabSz="457200" rtl="0" eaLnBrk="1" latinLnBrk="0" hangingPunct="1">
+      <a:defRPr sz="1200" kern="1200">
+        <a:solidFill>
+          <a:schemeClr val="tx1"/>
+        </a:solidFill>
+        <a:latin typeface="+mn-lt"/>
+        <a:ea typeface="+mn-ea"/>
+        <a:cs typeface="+mn-cs"/>
+      </a:defRPr>
+    </a:lvl3pPr>
+    <a:lvl4pPr marL="1371600" algn="l" defTabSz="457200" rtl="0" eaLnBrk="1" latinLnBrk="0" hangingPunct="1">
+      <a:defRPr sz="1200" kern="1200">
+        <a:solidFill>
+          <a:schemeClr val="tx1"/>
+        </a:solidFill>
+        <a:latin typeface="+mn-lt"/>
+        <a:ea typeface="+mn-ea"/>
+        <a:cs typeface="+mn-cs"/>
+      </a:defRPr>
+    </a:lvl4pPr>
+    <a:lvl5pPr marL="1828800" algn="l" defTabSz="457200" rtl="0" eaLnBrk="1" latinLnBrk="0" hangingPunct="1">
+      <a:defRPr sz="1200" kern="1200">
+        <a:solidFill>
+          <a:schemeClr val="tx1"/>
+        </a:solidFill>
+        <a:latin typeface="+mn-lt"/>
+        <a:ea typeface="+mn-ea"/>
+        <a:cs typeface="+mn-cs"/>
+      </a:defRPr>
+    </a:lvl5pPr>
+    <a:lvl6pPr marL="2286000" algn="l" defTabSz="457200" rtl="0" eaLnBrk="1" latinLnBrk="0" hangingPunct="1">
+      <a:defRPr sz="1200" kern="1200">
+        <a:solidFill>
+          <a:schemeClr val="tx1"/>
+        </a:solidFill>
+        <a:latin typeface="+mn-lt"/>
+        <a:ea typeface="+mn-ea"/>
+        <a:cs typeface="+mn-cs"/>
+      </a:defRPr>
+    </a:lvl6pPr>
+    <a:lvl7pPr marL="2743200" algn="l" defTabSz="457200" rtl="0" eaLnBrk="1" latinLnBrk="0" hangingPunct="1">
+      <a:defRPr sz="1200" kern="1200">
+        <a:solidFill>
+          <a:schemeClr val="tx1"/>
+        </a:solidFill>
+        <a:latin typeface="+mn-lt"/>
+        <a:ea typeface="+mn-ea"/>
+        <a:cs typeface="+mn-cs"/>
+      </a:defRPr>
+    </a:lvl7pPr>
+    <a:lvl8pPr marL="3200400" algn="l" defTabSz="457200" rtl="0" eaLnBrk="1" latinLnBrk="0" hangingPunct="1">
+      <a:defRPr sz="1200" kern="1200">
+        <a:solidFill>
+          <a:schemeClr val="tx1"/>
+        </a:solidFill>
+        <a:latin typeface="+mn-lt"/>
+        <a:ea typeface="+mn-ea"/>
+        <a:cs typeface="+mn-cs"/>
+      </a:defRPr>
+    </a:lvl8pPr>
+    <a:lvl9pPr marL="3657600" algn="l" defTabSz="457200" rtl="0" eaLnBrk="1" latinLnBrk="0" hangingPunct="1">
+      <a:defRPr sz="1200" kern="1200">
+        <a:solidFill>
+          <a:schemeClr val="tx1"/>
+        </a:solidFill>
+        <a:latin typeface="+mn-lt"/>
+        <a:ea typeface="+mn-ea"/>
+        <a:cs typeface="+mn-cs"/>
+      </a:defRPr>
+    </a:lvl9pPr>
+  </p:notesStyle>
+</p:notesMaster>
+</file>
+
+<file path=ppt/notesSlides/notesSlide1.xml><?xml version="1.0" encoding="utf-8"?>
+<p:notes xmlns:a="http://schemas.openxmlformats.org/drawingml/2006/main" xmlns:p="http://schemas.openxmlformats.org/presentationml/2006/main" xmlns:r="http://schemas.openxmlformats.org/officeDocument/2006/relationships">
+  <p:cSld>
+    <p:spTree>
+      <p:nvGrpSpPr>
+        <p:cNvPr id="1" name=""/>
+        <p:cNvGrpSpPr/>
+        <p:nvPr/>
+      </p:nvGrpSpPr>
+      <p:grpSpPr>
+        <a:xfrm>
+          <a:off x="0" y="0"/>
+          <a:ext cx="0" cy="0"/>
+          <a:chOff x="0" y="0"/>
+          <a:chExt cx="0" cy="0"/>
+        </a:xfrm>
+      </p:grpSpPr>
+      <p:sp>
+        <p:nvSpPr>
+          <p:cNvPr id="2" name="Slide Image Placeholder 1"/>
+          <p:cNvSpPr>
+            <a:spLocks noGrp="1"/>
+          </p:cNvSpPr>
+          <p:nvPr>
+            <p:ph type="sldImg" idx="2"/>
+          </p:nvPr>
+        </p:nvSpPr>
+        <p:spPr/>
+      </p:sp>
+      <p:sp>
+        <p:nvSpPr>
+          <p:cNvPr id="3" name="Notes Placeholder 2"/>
+          <p:cNvSpPr>
+            <a:spLocks noGrp="1"/>
+          </p:cNvSpPr>
+          <p:nvPr>
+            <p:ph type="body" idx="3" sz="quarter"/>
+          </p:nvPr>
+        </p:nvSpPr>
+        <p:spPr/>
+        <p:txBody>
+          <a:bodyPr/>
+          <a:lstStyle/>
+          <a:p>
+            <a:r>
+              <a:t>*Enterprise Architecture Patterns für Skalierbarkeit und Integration*</a:t>
+            </a:r>
+          </a:p>
+        </p:txBody>
+      </p:sp>
+      <p:sp>
+        <p:nvSpPr>
+          <p:cNvPr id="4" name="Slide Number Placeholder 3"/>
+          <p:cNvSpPr>
+            <a:spLocks noGrp="1"/>
+          </p:cNvSpPr>
+          <p:nvPr>
+            <p:ph type="sldNum" idx="5" sz="quarter"/>
+          </p:nvPr>
+        </p:nvSpPr>
+        <p:spPr/>
+      </p:sp>
+    </p:spTree>
+  </p:cSld>
+  <p:clrMapOvr>
+    <a:masterClrMapping/>
+  </p:clrMapOvr>
+</p:notes>
+</file>
+
+<file path=ppt/notesSlides/notesSlide10.xml><?xml version="1.0" encoding="utf-8"?>
+<p:notes xmlns:a="http://schemas.openxmlformats.org/drawingml/2006/main" xmlns:p="http://schemas.openxmlformats.org/presentationml/2006/main" xmlns:r="http://schemas.openxmlformats.org/officeDocument/2006/relationships">
+  <p:cSld>
+    <p:spTree>
+      <p:nvGrpSpPr>
+        <p:cNvPr id="1" name=""/>
+        <p:cNvGrpSpPr/>
+        <p:nvPr/>
+      </p:nvGrpSpPr>
+      <p:grpSpPr>
+        <a:xfrm>
+          <a:off x="0" y="0"/>
+          <a:ext cx="0" cy="0"/>
+          <a:chOff x="0" y="0"/>
+          <a:chExt cx="0" cy="0"/>
+        </a:xfrm>
+      </p:grpSpPr>
+      <p:sp>
+        <p:nvSpPr>
+          <p:cNvPr id="2" name="Slide Image Placeholder 1"/>
+          <p:cNvSpPr>
+            <a:spLocks noGrp="1"/>
+          </p:cNvSpPr>
+          <p:nvPr>
+            <p:ph type="sldImg" idx="2"/>
+          </p:nvPr>
+        </p:nvSpPr>
+        <p:spPr/>
+      </p:sp>
+      <p:sp>
+        <p:nvSpPr>
+          <p:cNvPr id="3" name="Notes Placeholder 2"/>
+          <p:cNvSpPr>
+            <a:spLocks noGrp="1"/>
+          </p:cNvSpPr>
+          <p:nvPr>
+            <p:ph type="body" idx="3" sz="quarter"/>
+          </p:nvPr>
+        </p:nvSpPr>
+        <p:spPr/>
+        <p:txBody>
+          <a:bodyPr/>
+          <a:lstStyle/>
+          <a:p>
+            <a:r>
+              <a:t>*Fault Tolerance für External Service Dependencies*</a:t>
+            </a:r>
+          </a:p>
+        </p:txBody>
+      </p:sp>
+      <p:sp>
+        <p:nvSpPr>
+          <p:cNvPr id="4" name="Slide Number Placeholder 3"/>
+          <p:cNvSpPr>
+            <a:spLocks noGrp="1"/>
+          </p:cNvSpPr>
+          <p:nvPr>
+            <p:ph type="sldNum" idx="5" sz="quarter"/>
+          </p:nvPr>
+        </p:nvSpPr>
+        <p:spPr/>
+      </p:sp>
+    </p:spTree>
+  </p:cSld>
+  <p:clrMapOvr>
+    <a:masterClrMapping/>
+  </p:clrMapOvr>
+</p:notes>
+</file>
+
+<file path=ppt/notesSlides/notesSlide11.xml><?xml version="1.0" encoding="utf-8"?>
+<p:notes xmlns:a="http://schemas.openxmlformats.org/drawingml/2006/main" xmlns:p="http://schemas.openxmlformats.org/presentationml/2006/main" xmlns:r="http://schemas.openxmlformats.org/officeDocument/2006/relationships">
+  <p:cSld>
+    <p:spTree>
+      <p:nvGrpSpPr>
+        <p:cNvPr id="1" name=""/>
+        <p:cNvGrpSpPr/>
+        <p:nvPr/>
+      </p:nvGrpSpPr>
+      <p:grpSpPr>
+        <a:xfrm>
+          <a:off x="0" y="0"/>
+          <a:ext cx="0" cy="0"/>
+          <a:chOff x="0" y="0"/>
+          <a:chExt cx="0" cy="0"/>
+        </a:xfrm>
+      </p:grpSpPr>
+      <p:sp>
+        <p:nvSpPr>
+          <p:cNvPr id="2" name="Slide Image Placeholder 1"/>
+          <p:cNvSpPr>
+            <a:spLocks noGrp="1"/>
+          </p:cNvSpPr>
+          <p:nvPr>
+            <p:ph type="sldImg" idx="2"/>
+          </p:nvPr>
+        </p:nvSpPr>
+        <p:spPr/>
+      </p:sp>
+      <p:sp>
+        <p:nvSpPr>
+          <p:cNvPr id="3" name="Notes Placeholder 2"/>
+          <p:cNvSpPr>
+            <a:spLocks noGrp="1"/>
+          </p:cNvSpPr>
+          <p:nvPr>
+            <p:ph type="body" idx="3" sz="quarter"/>
+          </p:nvPr>
+        </p:nvSpPr>
+        <p:spPr/>
+        <p:txBody>
+          <a:bodyPr/>
+          <a:lstStyle/>
+          <a:p>
+            <a:r>
+              <a:t>*Fault Tolerance für External Service Dependencies*</a:t>
+            </a:r>
+          </a:p>
+        </p:txBody>
+      </p:sp>
+      <p:sp>
+        <p:nvSpPr>
+          <p:cNvPr id="4" name="Slide Number Placeholder 3"/>
+          <p:cNvSpPr>
+            <a:spLocks noGrp="1"/>
+          </p:cNvSpPr>
+          <p:nvPr>
+            <p:ph type="sldNum" idx="5" sz="quarter"/>
+          </p:nvPr>
+        </p:nvSpPr>
+        <p:spPr/>
+      </p:sp>
+    </p:spTree>
+  </p:cSld>
+  <p:clrMapOvr>
+    <a:masterClrMapping/>
+  </p:clrMapOvr>
+</p:notes>
+</file>
+
+<file path=ppt/notesSlides/notesSlide12.xml><?xml version="1.0" encoding="utf-8"?>
+<p:notes xmlns:a="http://schemas.openxmlformats.org/drawingml/2006/main" xmlns:p="http://schemas.openxmlformats.org/presentationml/2006/main" xmlns:r="http://schemas.openxmlformats.org/officeDocument/2006/relationships">
+  <p:cSld>
+    <p:spTree>
+      <p:nvGrpSpPr>
+        <p:cNvPr id="1" name=""/>
+        <p:cNvGrpSpPr/>
+        <p:nvPr/>
+      </p:nvGrpSpPr>
+      <p:grpSpPr>
+        <a:xfrm>
+          <a:off x="0" y="0"/>
+          <a:ext cx="0" cy="0"/>
+          <a:chOff x="0" y="0"/>
+          <a:chExt cx="0" cy="0"/>
+        </a:xfrm>
+      </p:grpSpPr>
+      <p:sp>
+        <p:nvSpPr>
+          <p:cNvPr id="2" name="Slide Image Placeholder 1"/>
+          <p:cNvSpPr>
+            <a:spLocks noGrp="1"/>
+          </p:cNvSpPr>
+          <p:nvPr>
+            <p:ph type="sldImg" idx="2"/>
+          </p:nvPr>
+        </p:nvSpPr>
+        <p:spPr/>
+      </p:sp>
+      <p:sp>
+        <p:nvSpPr>
+          <p:cNvPr id="3" name="Notes Placeholder 2"/>
+          <p:cNvSpPr>
+            <a:spLocks noGrp="1"/>
+          </p:cNvSpPr>
+          <p:nvPr>
+            <p:ph type="body" idx="3" sz="quarter"/>
+          </p:nvPr>
+        </p:nvSpPr>
+        <p:spPr/>
+        <p:txBody>
+          <a:bodyPr/>
+          <a:lstStyle/>
+          <a:p>
+            <a:r>
+              <a:t>*Unified Entry Point für Microservices*</a:t>
+            </a:r>
+          </a:p>
+        </p:txBody>
+      </p:sp>
+      <p:sp>
+        <p:nvSpPr>
+          <p:cNvPr id="4" name="Slide Number Placeholder 3"/>
+          <p:cNvSpPr>
+            <a:spLocks noGrp="1"/>
+          </p:cNvSpPr>
+          <p:nvPr>
+            <p:ph type="sldNum" idx="5" sz="quarter"/>
+          </p:nvPr>
+        </p:nvSpPr>
+        <p:spPr/>
+      </p:sp>
+    </p:spTree>
+  </p:cSld>
+  <p:clrMapOvr>
+    <a:masterClrMapping/>
+  </p:clrMapOvr>
+</p:notes>
+</file>
+
+<file path=ppt/notesSlides/notesSlide13.xml><?xml version="1.0" encoding="utf-8"?>
+<p:notes xmlns:a="http://schemas.openxmlformats.org/drawingml/2006/main" xmlns:p="http://schemas.openxmlformats.org/presentationml/2006/main" xmlns:r="http://schemas.openxmlformats.org/officeDocument/2006/relationships">
+  <p:cSld>
+    <p:spTree>
+      <p:nvGrpSpPr>
+        <p:cNvPr id="1" name=""/>
+        <p:cNvGrpSpPr/>
+        <p:nvPr/>
+      </p:nvGrpSpPr>
+      <p:grpSpPr>
+        <a:xfrm>
+          <a:off x="0" y="0"/>
+          <a:ext cx="0" cy="0"/>
+          <a:chOff x="0" y="0"/>
+          <a:chExt cx="0" cy="0"/>
+        </a:xfrm>
+      </p:grpSpPr>
+      <p:sp>
+        <p:nvSpPr>
+          <p:cNvPr id="2" name="Slide Image Placeholder 1"/>
+          <p:cNvSpPr>
+            <a:spLocks noGrp="1"/>
+          </p:cNvSpPr>
+          <p:nvPr>
+            <p:ph type="sldImg" idx="2"/>
+          </p:nvPr>
+        </p:nvSpPr>
+        <p:spPr/>
+      </p:sp>
+      <p:sp>
+        <p:nvSpPr>
+          <p:cNvPr id="3" name="Notes Placeholder 2"/>
+          <p:cNvSpPr>
+            <a:spLocks noGrp="1"/>
+          </p:cNvSpPr>
+          <p:nvPr>
+            <p:ph type="body" idx="3" sz="quarter"/>
+          </p:nvPr>
+        </p:nvSpPr>
+        <p:spPr/>
+        <p:txBody>
+          <a:bodyPr/>
+          <a:lstStyle/>
+          <a:p>
+            <a:r>
+              <a:t>*Infrastructure Layer für Service-to-Service Communication*</a:t>
+            </a:r>
+          </a:p>
+        </p:txBody>
+      </p:sp>
+      <p:sp>
+        <p:nvSpPr>
+          <p:cNvPr id="4" name="Slide Number Placeholder 3"/>
+          <p:cNvSpPr>
+            <a:spLocks noGrp="1"/>
+          </p:cNvSpPr>
+          <p:nvPr>
+            <p:ph type="sldNum" idx="5" sz="quarter"/>
+          </p:nvPr>
+        </p:nvSpPr>
+        <p:spPr/>
+      </p:sp>
+    </p:spTree>
+  </p:cSld>
+  <p:clrMapOvr>
+    <a:masterClrMapping/>
+  </p:clrMapOvr>
+</p:notes>
+</file>
+
+<file path=ppt/notesSlides/notesSlide14.xml><?xml version="1.0" encoding="utf-8"?>
+<p:notes xmlns:a="http://schemas.openxmlformats.org/drawingml/2006/main" xmlns:p="http://schemas.openxmlformats.org/presentationml/2006/main" xmlns:r="http://schemas.openxmlformats.org/officeDocument/2006/relationships">
+  <p:cSld>
+    <p:spTree>
+      <p:nvGrpSpPr>
+        <p:cNvPr id="1" name=""/>
+        <p:cNvGrpSpPr/>
+        <p:nvPr/>
+      </p:nvGrpSpPr>
+      <p:grpSpPr>
+        <a:xfrm>
+          <a:off x="0" y="0"/>
+          <a:ext cx="0" cy="0"/>
+          <a:chOff x="0" y="0"/>
+          <a:chExt cx="0" cy="0"/>
+        </a:xfrm>
+      </p:grpSpPr>
+      <p:sp>
+        <p:nvSpPr>
+          <p:cNvPr id="2" name="Slide Image Placeholder 1"/>
+          <p:cNvSpPr>
+            <a:spLocks noGrp="1"/>
+          </p:cNvSpPr>
+          <p:nvPr>
+            <p:ph type="sldImg" idx="2"/>
+          </p:nvPr>
+        </p:nvSpPr>
+        <p:spPr/>
+      </p:sp>
+      <p:sp>
+        <p:nvSpPr>
+          <p:cNvPr id="3" name="Notes Placeholder 2"/>
+          <p:cNvSpPr>
+            <a:spLocks noGrp="1"/>
+          </p:cNvSpPr>
+          <p:nvPr>
+            <p:ph type="body" idx="3" sz="quarter"/>
+          </p:nvPr>
+        </p:nvSpPr>
+        <p:spPr/>
+        <p:txBody>
+          <a:bodyPr/>
+          <a:lstStyle/>
+          <a:p>
+            <a:r>
+              <a:t>*Infrastructure Layer für Service-to-Service Communication*</a:t>
+            </a:r>
+          </a:p>
+        </p:txBody>
+      </p:sp>
+      <p:sp>
+        <p:nvSpPr>
+          <p:cNvPr id="4" name="Slide Number Placeholder 3"/>
+          <p:cNvSpPr>
+            <a:spLocks noGrp="1"/>
+          </p:cNvSpPr>
+          <p:nvPr>
+            <p:ph type="sldNum" idx="5" sz="quarter"/>
+          </p:nvPr>
+        </p:nvSpPr>
+        <p:spPr/>
+      </p:sp>
+    </p:spTree>
+  </p:cSld>
+  <p:clrMapOvr>
+    <a:masterClrMapping/>
+  </p:clrMapOvr>
+</p:notes>
+</file>
+
+<file path=ppt/notesSlides/notesSlide15.xml><?xml version="1.0" encoding="utf-8"?>
+<p:notes xmlns:a="http://schemas.openxmlformats.org/drawingml/2006/main" xmlns:p="http://schemas.openxmlformats.org/presentationml/2006/main" xmlns:r="http://schemas.openxmlformats.org/officeDocument/2006/relationships">
+  <p:cSld>
+    <p:spTree>
+      <p:nvGrpSpPr>
+        <p:cNvPr id="1" name=""/>
+        <p:cNvGrpSpPr/>
+        <p:nvPr/>
+      </p:nvGrpSpPr>
+      <p:grpSpPr>
+        <a:xfrm>
+          <a:off x="0" y="0"/>
+          <a:ext cx="0" cy="0"/>
+          <a:chOff x="0" y="0"/>
+          <a:chExt cx="0" cy="0"/>
+        </a:xfrm>
+      </p:grpSpPr>
+      <p:sp>
+        <p:nvSpPr>
+          <p:cNvPr id="2" name="Slide Image Placeholder 1"/>
+          <p:cNvSpPr>
+            <a:spLocks noGrp="1"/>
+          </p:cNvSpPr>
+          <p:nvPr>
+            <p:ph type="sldImg" idx="2"/>
+          </p:nvPr>
+        </p:nvSpPr>
+        <p:spPr/>
+      </p:sp>
+      <p:sp>
+        <p:nvSpPr>
+          <p:cNvPr id="3" name="Notes Placeholder 2"/>
+          <p:cNvSpPr>
+            <a:spLocks noGrp="1"/>
+          </p:cNvSpPr>
+          <p:nvPr>
+            <p:ph type="body" idx="3" sz="quarter"/>
+          </p:nvPr>
+        </p:nvSpPr>
+        <p:spPr/>
+        <p:txBody>
+          <a:bodyPr/>
+          <a:lstStyle/>
+          <a:p>
+            <a:r>
+              <a:t>*Fault Tolerance für External Service Dependencies*</a:t>
+            </a:r>
+          </a:p>
+        </p:txBody>
+      </p:sp>
+      <p:sp>
+        <p:nvSpPr>
+          <p:cNvPr id="4" name="Slide Number Placeholder 3"/>
+          <p:cNvSpPr>
+            <a:spLocks noGrp="1"/>
+          </p:cNvSpPr>
+          <p:nvPr>
+            <p:ph type="sldNum" idx="5" sz="quarter"/>
+          </p:nvPr>
+        </p:nvSpPr>
+        <p:spPr/>
+      </p:sp>
+    </p:spTree>
+  </p:cSld>
+  <p:clrMapOvr>
+    <a:masterClrMapping/>
+  </p:clrMapOvr>
+</p:notes>
+</file>
+
+<file path=ppt/notesSlides/notesSlide16.xml><?xml version="1.0" encoding="utf-8"?>
+<p:notes xmlns:a="http://schemas.openxmlformats.org/drawingml/2006/main" xmlns:p="http://schemas.openxmlformats.org/presentationml/2006/main" xmlns:r="http://schemas.openxmlformats.org/officeDocument/2006/relationships">
+  <p:cSld>
+    <p:spTree>
+      <p:nvGrpSpPr>
+        <p:cNvPr id="1" name=""/>
+        <p:cNvGrpSpPr/>
+        <p:nvPr/>
+      </p:nvGrpSpPr>
+      <p:grpSpPr>
+        <a:xfrm>
+          <a:off x="0" y="0"/>
+          <a:ext cx="0" cy="0"/>
+          <a:chOff x="0" y="0"/>
+          <a:chExt cx="0" cy="0"/>
+        </a:xfrm>
+      </p:grpSpPr>
+      <p:sp>
+        <p:nvSpPr>
+          <p:cNvPr id="2" name="Slide Image Placeholder 1"/>
+          <p:cNvSpPr>
+            <a:spLocks noGrp="1"/>
+          </p:cNvSpPr>
+          <p:nvPr>
+            <p:ph type="sldImg" idx="2"/>
+          </p:nvPr>
+        </p:nvSpPr>
+        <p:spPr/>
+      </p:sp>
+      <p:sp>
+        <p:nvSpPr>
+          <p:cNvPr id="3" name="Notes Placeholder 2"/>
+          <p:cNvSpPr>
+            <a:spLocks noGrp="1"/>
+          </p:cNvSpPr>
+          <p:nvPr>
+            <p:ph type="body" idx="3" sz="quarter"/>
+          </p:nvPr>
+        </p:nvSpPr>
+        <p:spPr/>
+        <p:txBody>
+          <a:bodyPr/>
+          <a:lstStyle/>
+          <a:p>
+            <a:r>
+              <a:t>*Enterprise Architecture Patterns für Skalierbarkeit und Integration*</a:t>
+            </a:r>
+          </a:p>
+        </p:txBody>
+      </p:sp>
+      <p:sp>
+        <p:nvSpPr>
+          <p:cNvPr id="4" name="Slide Number Placeholder 3"/>
+          <p:cNvSpPr>
+            <a:spLocks noGrp="1"/>
+          </p:cNvSpPr>
+          <p:nvPr>
+            <p:ph type="sldNum" idx="5" sz="quarter"/>
+          </p:nvPr>
+        </p:nvSpPr>
+        <p:spPr/>
+      </p:sp>
+    </p:spTree>
+  </p:cSld>
+  <p:clrMapOvr>
+    <a:masterClrMapping/>
+  </p:clrMapOvr>
+</p:notes>
+</file>
+
+<file path=ppt/notesSlides/notesSlide17.xml><?xml version="1.0" encoding="utf-8"?>
+<p:notes xmlns:a="http://schemas.openxmlformats.org/drawingml/2006/main" xmlns:p="http://schemas.openxmlformats.org/presentationml/2006/main" xmlns:r="http://schemas.openxmlformats.org/officeDocument/2006/relationships">
+  <p:cSld>
+    <p:spTree>
+      <p:nvGrpSpPr>
+        <p:cNvPr id="1" name=""/>
+        <p:cNvGrpSpPr/>
+        <p:nvPr/>
+      </p:nvGrpSpPr>
+      <p:grpSpPr>
+        <a:xfrm>
+          <a:off x="0" y="0"/>
+          <a:ext cx="0" cy="0"/>
+          <a:chOff x="0" y="0"/>
+          <a:chExt cx="0" cy="0"/>
+        </a:xfrm>
+      </p:grpSpPr>
+      <p:sp>
+        <p:nvSpPr>
+          <p:cNvPr id="2" name="Slide Image Placeholder 1"/>
+          <p:cNvSpPr>
+            <a:spLocks noGrp="1"/>
+          </p:cNvSpPr>
+          <p:nvPr>
+            <p:ph type="sldImg" idx="2"/>
+          </p:nvPr>
+        </p:nvSpPr>
+        <p:spPr/>
+      </p:sp>
+      <p:sp>
+        <p:nvSpPr>
+          <p:cNvPr id="3" name="Notes Placeholder 2"/>
+          <p:cNvSpPr>
+            <a:spLocks noGrp="1"/>
+          </p:cNvSpPr>
+          <p:nvPr>
+            <p:ph type="body" idx="3" sz="quarter"/>
+          </p:nvPr>
+        </p:nvSpPr>
+        <p:spPr/>
+        <p:txBody>
+          <a:bodyPr/>
+          <a:lstStyle/>
+          <a:p>
+            <a:r>
+              <a:t>*Enterprise Architecture Patterns für Skalierbarkeit und Integration*</a:t>
+            </a:r>
+          </a:p>
+        </p:txBody>
+      </p:sp>
+      <p:sp>
+        <p:nvSpPr>
+          <p:cNvPr id="4" name="Slide Number Placeholder 3"/>
+          <p:cNvSpPr>
+            <a:spLocks noGrp="1"/>
+          </p:cNvSpPr>
+          <p:nvPr>
+            <p:ph type="sldNum" idx="5" sz="quarter"/>
+          </p:nvPr>
+        </p:nvSpPr>
+        <p:spPr/>
+      </p:sp>
+    </p:spTree>
+  </p:cSld>
+  <p:clrMapOvr>
+    <a:masterClrMapping/>
+  </p:clrMapOvr>
+</p:notes>
+</file>
+
+<file path=ppt/notesSlides/notesSlide18.xml><?xml version="1.0" encoding="utf-8"?>
+<p:notes xmlns:a="http://schemas.openxmlformats.org/drawingml/2006/main" xmlns:p="http://schemas.openxmlformats.org/presentationml/2006/main" xmlns:r="http://schemas.openxmlformats.org/officeDocument/2006/relationships">
+  <p:cSld>
+    <p:spTree>
+      <p:nvGrpSpPr>
+        <p:cNvPr id="1" name=""/>
+        <p:cNvGrpSpPr/>
+        <p:nvPr/>
+      </p:nvGrpSpPr>
+      <p:grpSpPr>
+        <a:xfrm>
+          <a:off x="0" y="0"/>
+          <a:ext cx="0" cy="0"/>
+          <a:chOff x="0" y="0"/>
+          <a:chExt cx="0" cy="0"/>
+        </a:xfrm>
+      </p:grpSpPr>
+      <p:sp>
+        <p:nvSpPr>
+          <p:cNvPr id="2" name="Slide Image Placeholder 1"/>
+          <p:cNvSpPr>
+            <a:spLocks noGrp="1"/>
+          </p:cNvSpPr>
+          <p:nvPr>
+            <p:ph type="sldImg" idx="2"/>
+          </p:nvPr>
+        </p:nvSpPr>
+        <p:spPr/>
+      </p:sp>
+      <p:sp>
+        <p:nvSpPr>
+          <p:cNvPr id="3" name="Notes Placeholder 2"/>
+          <p:cNvSpPr>
+            <a:spLocks noGrp="1"/>
+          </p:cNvSpPr>
+          <p:nvPr>
+            <p:ph type="body" idx="3" sz="quarter"/>
+          </p:nvPr>
+        </p:nvSpPr>
+        <p:spPr/>
+        <p:txBody>
+          <a:bodyPr/>
+          <a:lstStyle/>
+          <a:p>
+            <a:r>
+              <a:t>*Enterprise Architecture Patterns für Skalierbarkeit und Integration*</a:t>
+            </a:r>
+          </a:p>
+        </p:txBody>
+      </p:sp>
+      <p:sp>
+        <p:nvSpPr>
+          <p:cNvPr id="4" name="Slide Number Placeholder 3"/>
+          <p:cNvSpPr>
+            <a:spLocks noGrp="1"/>
+          </p:cNvSpPr>
+          <p:nvPr>
+            <p:ph type="sldNum" idx="5" sz="quarter"/>
+          </p:nvPr>
+        </p:nvSpPr>
+        <p:spPr/>
+      </p:sp>
+    </p:spTree>
+  </p:cSld>
+  <p:clrMapOvr>
+    <a:masterClrMapping/>
+  </p:clrMapOvr>
+</p:notes>
+</file>
+
+<file path=ppt/notesSlides/notesSlide19.xml><?xml version="1.0" encoding="utf-8"?>
+<p:notes xmlns:a="http://schemas.openxmlformats.org/drawingml/2006/main" xmlns:p="http://schemas.openxmlformats.org/presentationml/2006/main" xmlns:r="http://schemas.openxmlformats.org/officeDocument/2006/relationships">
+  <p:cSld>
+    <p:spTree>
+      <p:nvGrpSpPr>
+        <p:cNvPr id="1" name=""/>
+        <p:cNvGrpSpPr/>
+        <p:nvPr/>
+      </p:nvGrpSpPr>
+      <p:grpSpPr>
+        <a:xfrm>
+          <a:off x="0" y="0"/>
+          <a:ext cx="0" cy="0"/>
+          <a:chOff x="0" y="0"/>
+          <a:chExt cx="0" cy="0"/>
+        </a:xfrm>
+      </p:grpSpPr>
+      <p:sp>
+        <p:nvSpPr>
+          <p:cNvPr id="2" name="Slide Image Placeholder 1"/>
+          <p:cNvSpPr>
+            <a:spLocks noGrp="1"/>
+          </p:cNvSpPr>
+          <p:nvPr>
+            <p:ph type="sldImg" idx="2"/>
+          </p:nvPr>
+        </p:nvSpPr>
+        <p:spPr/>
+      </p:sp>
+      <p:sp>
+        <p:nvSpPr>
+          <p:cNvPr id="3" name="Notes Placeholder 2"/>
+          <p:cNvSpPr>
+            <a:spLocks noGrp="1"/>
+          </p:cNvSpPr>
+          <p:nvPr>
+            <p:ph type="body" idx="3" sz="quarter"/>
+          </p:nvPr>
+        </p:nvSpPr>
+        <p:spPr/>
+        <p:txBody>
+          <a:bodyPr/>
+          <a:lstStyle/>
+          <a:p>
+            <a:r>
+              <a:t>*Enterprise Architecture Patterns für Skalierbarkeit und Integration*</a:t>
+            </a:r>
+          </a:p>
+        </p:txBody>
+      </p:sp>
+      <p:sp>
+        <p:nvSpPr>
+          <p:cNvPr id="4" name="Slide Number Placeholder 3"/>
+          <p:cNvSpPr>
+            <a:spLocks noGrp="1"/>
+          </p:cNvSpPr>
+          <p:nvPr>
+            <p:ph type="sldNum" idx="5" sz="quarter"/>
+          </p:nvPr>
+        </p:nvSpPr>
+        <p:spPr/>
+      </p:sp>
+    </p:spTree>
+  </p:cSld>
+  <p:clrMapOvr>
+    <a:masterClrMapping/>
+  </p:clrMapOvr>
+</p:notes>
+</file>
+
+<file path=ppt/notesSlides/notesSlide2.xml><?xml version="1.0" encoding="utf-8"?>
+<p:notes xmlns:a="http://schemas.openxmlformats.org/drawingml/2006/main" xmlns:p="http://schemas.openxmlformats.org/presentationml/2006/main" xmlns:r="http://schemas.openxmlformats.org/officeDocument/2006/relationships">
+  <p:cSld>
+    <p:spTree>
+      <p:nvGrpSpPr>
+        <p:cNvPr id="1" name=""/>
+        <p:cNvGrpSpPr/>
+        <p:nvPr/>
+      </p:nvGrpSpPr>
+      <p:grpSpPr>
+        <a:xfrm>
+          <a:off x="0" y="0"/>
+          <a:ext cx="0" cy="0"/>
+          <a:chOff x="0" y="0"/>
+          <a:chExt cx="0" cy="0"/>
+        </a:xfrm>
+      </p:grpSpPr>
+      <p:sp>
+        <p:nvSpPr>
+          <p:cNvPr id="2" name="Slide Image Placeholder 1"/>
+          <p:cNvSpPr>
+            <a:spLocks noGrp="1"/>
+          </p:cNvSpPr>
+          <p:nvPr>
+            <p:ph type="sldImg" idx="2"/>
+          </p:nvPr>
+        </p:nvSpPr>
+        <p:spPr/>
+      </p:sp>
+      <p:sp>
+        <p:nvSpPr>
+          <p:cNvPr id="3" name="Notes Placeholder 2"/>
+          <p:cNvSpPr>
+            <a:spLocks noGrp="1"/>
+          </p:cNvSpPr>
+          <p:nvPr>
+            <p:ph type="body" idx="3" sz="quarter"/>
+          </p:nvPr>
+        </p:nvSpPr>
+        <p:spPr/>
+        <p:txBody>
+          <a:bodyPr/>
+          <a:lstStyle/>
+          <a:p>
+            <a:r>
+              <a:t>*Separate Read and Write Models für Performance-Optimierung*</a:t>
+            </a:r>
+          </a:p>
+        </p:txBody>
+      </p:sp>
+      <p:sp>
+        <p:nvSpPr>
+          <p:cNvPr id="4" name="Slide Number Placeholder 3"/>
+          <p:cNvSpPr>
+            <a:spLocks noGrp="1"/>
+          </p:cNvSpPr>
+          <p:nvPr>
+            <p:ph type="sldNum" idx="5" sz="quarter"/>
+          </p:nvPr>
+        </p:nvSpPr>
+        <p:spPr/>
+      </p:sp>
+    </p:spTree>
+  </p:cSld>
+  <p:clrMapOvr>
+    <a:masterClrMapping/>
+  </p:clrMapOvr>
+</p:notes>
+</file>
+
+<file path=ppt/notesSlides/notesSlide20.xml><?xml version="1.0" encoding="utf-8"?>
+<p:notes xmlns:a="http://schemas.openxmlformats.org/drawingml/2006/main" xmlns:p="http://schemas.openxmlformats.org/presentationml/2006/main" xmlns:r="http://schemas.openxmlformats.org/officeDocument/2006/relationships">
+  <p:cSld>
+    <p:spTree>
+      <p:nvGrpSpPr>
+        <p:cNvPr id="1" name=""/>
+        <p:cNvGrpSpPr/>
+        <p:nvPr/>
+      </p:nvGrpSpPr>
+      <p:grpSpPr>
+        <a:xfrm>
+          <a:off x="0" y="0"/>
+          <a:ext cx="0" cy="0"/>
+          <a:chOff x="0" y="0"/>
+          <a:chExt cx="0" cy="0"/>
+        </a:xfrm>
+      </p:grpSpPr>
+      <p:sp>
+        <p:nvSpPr>
+          <p:cNvPr id="2" name="Slide Image Placeholder 1"/>
+          <p:cNvSpPr>
+            <a:spLocks noGrp="1"/>
+          </p:cNvSpPr>
+          <p:nvPr>
+            <p:ph type="sldImg" idx="2"/>
+          </p:nvPr>
+        </p:nvSpPr>
+        <p:spPr/>
+      </p:sp>
+      <p:sp>
+        <p:nvSpPr>
+          <p:cNvPr id="3" name="Notes Placeholder 2"/>
+          <p:cNvSpPr>
+            <a:spLocks noGrp="1"/>
+          </p:cNvSpPr>
+          <p:nvPr>
+            <p:ph type="body" idx="3" sz="quarter"/>
+          </p:nvPr>
+        </p:nvSpPr>
+        <p:spPr/>
+        <p:txBody>
+          <a:bodyPr/>
+          <a:lstStyle/>
+          <a:p>
+            <a:r>
+              <a:t>*Enterprise Architecture Patterns für Skalierbarkeit und Integration*</a:t>
+            </a:r>
+          </a:p>
+        </p:txBody>
+      </p:sp>
+      <p:sp>
+        <p:nvSpPr>
+          <p:cNvPr id="4" name="Slide Number Placeholder 3"/>
+          <p:cNvSpPr>
+            <a:spLocks noGrp="1"/>
+          </p:cNvSpPr>
+          <p:nvPr>
+            <p:ph type="sldNum" idx="5" sz="quarter"/>
+          </p:nvPr>
+        </p:nvSpPr>
+        <p:spPr/>
+      </p:sp>
+    </p:spTree>
+  </p:cSld>
+  <p:clrMapOvr>
+    <a:masterClrMapping/>
+  </p:clrMapOvr>
+</p:notes>
+</file>
+
+<file path=ppt/notesSlides/notesSlide21.xml><?xml version="1.0" encoding="utf-8"?>
+<p:notes xmlns:a="http://schemas.openxmlformats.org/drawingml/2006/main" xmlns:p="http://schemas.openxmlformats.org/presentationml/2006/main" xmlns:r="http://schemas.openxmlformats.org/officeDocument/2006/relationships">
+  <p:cSld>
+    <p:spTree>
+      <p:nvGrpSpPr>
+        <p:cNvPr id="1" name=""/>
+        <p:cNvGrpSpPr/>
+        <p:nvPr/>
+      </p:nvGrpSpPr>
+      <p:grpSpPr>
+        <a:xfrm>
+          <a:off x="0" y="0"/>
+          <a:ext cx="0" cy="0"/>
+          <a:chOff x="0" y="0"/>
+          <a:chExt cx="0" cy="0"/>
+        </a:xfrm>
+      </p:grpSpPr>
+      <p:sp>
+        <p:nvSpPr>
+          <p:cNvPr id="2" name="Slide Image Placeholder 1"/>
+          <p:cNvSpPr>
+            <a:spLocks noGrp="1"/>
+          </p:cNvSpPr>
+          <p:nvPr>
+            <p:ph type="sldImg" idx="2"/>
+          </p:nvPr>
+        </p:nvSpPr>
+        <p:spPr/>
+      </p:sp>
+      <p:sp>
+        <p:nvSpPr>
+          <p:cNvPr id="3" name="Notes Placeholder 2"/>
+          <p:cNvSpPr>
+            <a:spLocks noGrp="1"/>
+          </p:cNvSpPr>
+          <p:nvPr>
+            <p:ph type="body" idx="3" sz="quarter"/>
+          </p:nvPr>
+        </p:nvSpPr>
+        <p:spPr/>
+        <p:txBody>
+          <a:bodyPr/>
+          <a:lstStyle/>
+          <a:p>
+            <a:r>
+              <a:t>*Enterprise Architecture Patterns für Skalierbarkeit und Integration*</a:t>
+            </a:r>
+          </a:p>
+        </p:txBody>
+      </p:sp>
+      <p:sp>
+        <p:nvSpPr>
+          <p:cNvPr id="4" name="Slide Number Placeholder 3"/>
+          <p:cNvSpPr>
+            <a:spLocks noGrp="1"/>
+          </p:cNvSpPr>
+          <p:nvPr>
+            <p:ph type="sldNum" idx="5" sz="quarter"/>
+          </p:nvPr>
+        </p:nvSpPr>
+        <p:spPr/>
+      </p:sp>
+    </p:spTree>
+  </p:cSld>
+  <p:clrMapOvr>
+    <a:masterClrMapping/>
+  </p:clrMapOvr>
+</p:notes>
+</file>
+
+<file path=ppt/notesSlides/notesSlide22.xml><?xml version="1.0" encoding="utf-8"?>
+<p:notes xmlns:a="http://schemas.openxmlformats.org/drawingml/2006/main" xmlns:p="http://schemas.openxmlformats.org/presentationml/2006/main" xmlns:r="http://schemas.openxmlformats.org/officeDocument/2006/relationships">
+  <p:cSld>
+    <p:spTree>
+      <p:nvGrpSpPr>
+        <p:cNvPr id="1" name=""/>
+        <p:cNvGrpSpPr/>
+        <p:nvPr/>
+      </p:nvGrpSpPr>
+      <p:grpSpPr>
+        <a:xfrm>
+          <a:off x="0" y="0"/>
+          <a:ext cx="0" cy="0"/>
+          <a:chOff x="0" y="0"/>
+          <a:chExt cx="0" cy="0"/>
+        </a:xfrm>
+      </p:grpSpPr>
+      <p:sp>
+        <p:nvSpPr>
+          <p:cNvPr id="2" name="Slide Image Placeholder 1"/>
+          <p:cNvSpPr>
+            <a:spLocks noGrp="1"/>
+          </p:cNvSpPr>
+          <p:nvPr>
+            <p:ph type="sldImg" idx="2"/>
+          </p:nvPr>
+        </p:nvSpPr>
+        <p:spPr/>
+      </p:sp>
+      <p:sp>
+        <p:nvSpPr>
+          <p:cNvPr id="3" name="Notes Placeholder 2"/>
+          <p:cNvSpPr>
+            <a:spLocks noGrp="1"/>
+          </p:cNvSpPr>
+          <p:nvPr>
+            <p:ph type="body" idx="3" sz="quarter"/>
+          </p:nvPr>
+        </p:nvSpPr>
+        <p:spPr/>
+        <p:txBody>
+          <a:bodyPr/>
+          <a:lstStyle/>
+          <a:p>
+            <a:r>
+              <a:t>*Enterprise Architecture Patterns für Skalierbarkeit und Integration*</a:t>
+            </a:r>
+          </a:p>
+        </p:txBody>
+      </p:sp>
+      <p:sp>
+        <p:nvSpPr>
+          <p:cNvPr id="4" name="Slide Number Placeholder 3"/>
+          <p:cNvSpPr>
+            <a:spLocks noGrp="1"/>
+          </p:cNvSpPr>
+          <p:nvPr>
+            <p:ph type="sldNum" idx="5" sz="quarter"/>
+          </p:nvPr>
+        </p:nvSpPr>
+        <p:spPr/>
+      </p:sp>
+    </p:spTree>
+  </p:cSld>
+  <p:clrMapOvr>
+    <a:masterClrMapping/>
+  </p:clrMapOvr>
+</p:notes>
+</file>
+
+<file path=ppt/notesSlides/notesSlide23.xml><?xml version="1.0" encoding="utf-8"?>
+<p:notes xmlns:a="http://schemas.openxmlformats.org/drawingml/2006/main" xmlns:p="http://schemas.openxmlformats.org/presentationml/2006/main" xmlns:r="http://schemas.openxmlformats.org/officeDocument/2006/relationships">
+  <p:cSld>
+    <p:spTree>
+      <p:nvGrpSpPr>
+        <p:cNvPr id="1" name=""/>
+        <p:cNvGrpSpPr/>
+        <p:nvPr/>
+      </p:nvGrpSpPr>
+      <p:grpSpPr>
+        <a:xfrm>
+          <a:off x="0" y="0"/>
+          <a:ext cx="0" cy="0"/>
+          <a:chOff x="0" y="0"/>
+          <a:chExt cx="0" cy="0"/>
+        </a:xfrm>
+      </p:grpSpPr>
+      <p:sp>
+        <p:nvSpPr>
+          <p:cNvPr id="2" name="Slide Image Placeholder 1"/>
+          <p:cNvSpPr>
+            <a:spLocks noGrp="1"/>
+          </p:cNvSpPr>
+          <p:nvPr>
+            <p:ph type="sldImg" idx="2"/>
+          </p:nvPr>
+        </p:nvSpPr>
+        <p:spPr/>
+      </p:sp>
+      <p:sp>
+        <p:nvSpPr>
+          <p:cNvPr id="3" name="Notes Placeholder 2"/>
+          <p:cNvSpPr>
+            <a:spLocks noGrp="1"/>
+          </p:cNvSpPr>
+          <p:nvPr>
+            <p:ph type="body" idx="3" sz="quarter"/>
+          </p:nvPr>
+        </p:nvSpPr>
+        <p:spPr/>
+        <p:txBody>
+          <a:bodyPr/>
+          <a:lstStyle/>
+          <a:p>
+            <a:r>
+              <a:t>*Enterprise Architecture Patterns für Skalierbarkeit und Integration*</a:t>
+            </a:r>
+          </a:p>
+        </p:txBody>
+      </p:sp>
+      <p:sp>
+        <p:nvSpPr>
+          <p:cNvPr id="4" name="Slide Number Placeholder 3"/>
+          <p:cNvSpPr>
+            <a:spLocks noGrp="1"/>
+          </p:cNvSpPr>
+          <p:nvPr>
+            <p:ph type="sldNum" idx="5" sz="quarter"/>
+          </p:nvPr>
+        </p:nvSpPr>
+        <p:spPr/>
+      </p:sp>
+    </p:spTree>
+  </p:cSld>
+  <p:clrMapOvr>
+    <a:masterClrMapping/>
+  </p:clrMapOvr>
+</p:notes>
+</file>
+
+<file path=ppt/notesSlides/notesSlide24.xml><?xml version="1.0" encoding="utf-8"?>
+<p:notes xmlns:a="http://schemas.openxmlformats.org/drawingml/2006/main" xmlns:p="http://schemas.openxmlformats.org/presentationml/2006/main" xmlns:r="http://schemas.openxmlformats.org/officeDocument/2006/relationships">
+  <p:cSld>
+    <p:spTree>
+      <p:nvGrpSpPr>
+        <p:cNvPr id="1" name=""/>
+        <p:cNvGrpSpPr/>
+        <p:nvPr/>
+      </p:nvGrpSpPr>
+      <p:grpSpPr>
+        <a:xfrm>
+          <a:off x="0" y="0"/>
+          <a:ext cx="0" cy="0"/>
+          <a:chOff x="0" y="0"/>
+          <a:chExt cx="0" cy="0"/>
+        </a:xfrm>
+      </p:grpSpPr>
+      <p:sp>
+        <p:nvSpPr>
+          <p:cNvPr id="2" name="Slide Image Placeholder 1"/>
+          <p:cNvSpPr>
+            <a:spLocks noGrp="1"/>
+          </p:cNvSpPr>
+          <p:nvPr>
+            <p:ph type="sldImg" idx="2"/>
+          </p:nvPr>
+        </p:nvSpPr>
+        <p:spPr/>
+      </p:sp>
+      <p:sp>
+        <p:nvSpPr>
+          <p:cNvPr id="3" name="Notes Placeholder 2"/>
+          <p:cNvSpPr>
+            <a:spLocks noGrp="1"/>
+          </p:cNvSpPr>
+          <p:nvPr>
+            <p:ph type="body" idx="3" sz="quarter"/>
+          </p:nvPr>
+        </p:nvSpPr>
+        <p:spPr/>
+        <p:txBody>
+          <a:bodyPr/>
+          <a:lstStyle/>
+          <a:p>
+            <a:r>
+              <a:t>*Enterprise Architecture Patterns für Skalierbarkeit und Integration*</a:t>
+            </a:r>
+          </a:p>
+        </p:txBody>
+      </p:sp>
+      <p:sp>
+        <p:nvSpPr>
+          <p:cNvPr id="4" name="Slide Number Placeholder 3"/>
+          <p:cNvSpPr>
+            <a:spLocks noGrp="1"/>
+          </p:cNvSpPr>
+          <p:nvPr>
+            <p:ph type="sldNum" idx="5" sz="quarter"/>
+          </p:nvPr>
+        </p:nvSpPr>
+        <p:spPr/>
+      </p:sp>
+    </p:spTree>
+  </p:cSld>
+  <p:clrMapOvr>
+    <a:masterClrMapping/>
+  </p:clrMapOvr>
+</p:notes>
+</file>
+
+<file path=ppt/notesSlides/notesSlide25.xml><?xml version="1.0" encoding="utf-8"?>
+<p:notes xmlns:a="http://schemas.openxmlformats.org/drawingml/2006/main" xmlns:p="http://schemas.openxmlformats.org/presentationml/2006/main" xmlns:r="http://schemas.openxmlformats.org/officeDocument/2006/relationships">
+  <p:cSld>
+    <p:spTree>
+      <p:nvGrpSpPr>
+        <p:cNvPr id="1" name=""/>
+        <p:cNvGrpSpPr/>
+        <p:nvPr/>
+      </p:nvGrpSpPr>
+      <p:grpSpPr>
+        <a:xfrm>
+          <a:off x="0" y="0"/>
+          <a:ext cx="0" cy="0"/>
+          <a:chOff x="0" y="0"/>
+          <a:chExt cx="0" cy="0"/>
+        </a:xfrm>
+      </p:grpSpPr>
+      <p:sp>
+        <p:nvSpPr>
+          <p:cNvPr id="2" name="Slide Image Placeholder 1"/>
+          <p:cNvSpPr>
+            <a:spLocks noGrp="1"/>
+          </p:cNvSpPr>
+          <p:nvPr>
+            <p:ph type="sldImg" idx="2"/>
+          </p:nvPr>
+        </p:nvSpPr>
+        <p:spPr/>
+      </p:sp>
+      <p:sp>
+        <p:nvSpPr>
+          <p:cNvPr id="3" name="Notes Placeholder 2"/>
+          <p:cNvSpPr>
+            <a:spLocks noGrp="1"/>
+          </p:cNvSpPr>
+          <p:nvPr>
+            <p:ph type="body" idx="3" sz="quarter"/>
+          </p:nvPr>
+        </p:nvSpPr>
+        <p:spPr/>
+        <p:txBody>
+          <a:bodyPr/>
+          <a:lstStyle/>
+          <a:p>
+            <a:r>
+              <a:t>*Enterprise Architecture Patterns für Skalierbarkeit und Integration*</a:t>
+            </a:r>
+          </a:p>
+        </p:txBody>
+      </p:sp>
+      <p:sp>
+        <p:nvSpPr>
+          <p:cNvPr id="4" name="Slide Number Placeholder 3"/>
+          <p:cNvSpPr>
+            <a:spLocks noGrp="1"/>
+          </p:cNvSpPr>
+          <p:nvPr>
+            <p:ph type="sldNum" idx="5" sz="quarter"/>
+          </p:nvPr>
+        </p:nvSpPr>
+        <p:spPr/>
+      </p:sp>
+    </p:spTree>
+  </p:cSld>
+  <p:clrMapOvr>
+    <a:masterClrMapping/>
+  </p:clrMapOvr>
+</p:notes>
+</file>
+
+<file path=ppt/notesSlides/notesSlide3.xml><?xml version="1.0" encoding="utf-8"?>
+<p:notes xmlns:a="http://schemas.openxmlformats.org/drawingml/2006/main" xmlns:p="http://schemas.openxmlformats.org/presentationml/2006/main" xmlns:r="http://schemas.openxmlformats.org/officeDocument/2006/relationships">
+  <p:cSld>
+    <p:spTree>
+      <p:nvGrpSpPr>
+        <p:cNvPr id="1" name=""/>
+        <p:cNvGrpSpPr/>
+        <p:nvPr/>
+      </p:nvGrpSpPr>
+      <p:grpSpPr>
+        <a:xfrm>
+          <a:off x="0" y="0"/>
+          <a:ext cx="0" cy="0"/>
+          <a:chOff x="0" y="0"/>
+          <a:chExt cx="0" cy="0"/>
+        </a:xfrm>
+      </p:grpSpPr>
+      <p:sp>
+        <p:nvSpPr>
+          <p:cNvPr id="2" name="Slide Image Placeholder 1"/>
+          <p:cNvSpPr>
+            <a:spLocks noGrp="1"/>
+          </p:cNvSpPr>
+          <p:nvPr>
+            <p:ph type="sldImg" idx="2"/>
+          </p:nvPr>
+        </p:nvSpPr>
+        <p:spPr/>
+      </p:sp>
+      <p:sp>
+        <p:nvSpPr>
+          <p:cNvPr id="3" name="Notes Placeholder 2"/>
+          <p:cNvSpPr>
+            <a:spLocks noGrp="1"/>
+          </p:cNvSpPr>
+          <p:nvPr>
+            <p:ph type="body" idx="3" sz="quarter"/>
+          </p:nvPr>
+        </p:nvSpPr>
+        <p:spPr/>
+        <p:txBody>
+          <a:bodyPr/>
+          <a:lstStyle/>
+          <a:p>
+            <a:r>
+              <a:t>*Separate Read and Write Models für Performance-Optimierung*</a:t>
+            </a:r>
+          </a:p>
+        </p:txBody>
+      </p:sp>
+      <p:sp>
+        <p:nvSpPr>
+          <p:cNvPr id="4" name="Slide Number Placeholder 3"/>
+          <p:cNvSpPr>
+            <a:spLocks noGrp="1"/>
+          </p:cNvSpPr>
+          <p:nvPr>
+            <p:ph type="sldNum" idx="5" sz="quarter"/>
+          </p:nvPr>
+        </p:nvSpPr>
+        <p:spPr/>
+      </p:sp>
+    </p:spTree>
+  </p:cSld>
+  <p:clrMapOvr>
+    <a:masterClrMapping/>
+  </p:clrMapOvr>
+</p:notes>
+</file>
+
+<file path=ppt/notesSlides/notesSlide4.xml><?xml version="1.0" encoding="utf-8"?>
+<p:notes xmlns:a="http://schemas.openxmlformats.org/drawingml/2006/main" xmlns:p="http://schemas.openxmlformats.org/presentationml/2006/main" xmlns:r="http://schemas.openxmlformats.org/officeDocument/2006/relationships">
+  <p:cSld>
+    <p:spTree>
+      <p:nvGrpSpPr>
+        <p:cNvPr id="1" name=""/>
+        <p:cNvGrpSpPr/>
+        <p:nvPr/>
+      </p:nvGrpSpPr>
+      <p:grpSpPr>
+        <a:xfrm>
+          <a:off x="0" y="0"/>
+          <a:ext cx="0" cy="0"/>
+          <a:chOff x="0" y="0"/>
+          <a:chExt cx="0" cy="0"/>
+        </a:xfrm>
+      </p:grpSpPr>
+      <p:sp>
+        <p:nvSpPr>
+          <p:cNvPr id="2" name="Slide Image Placeholder 1"/>
+          <p:cNvSpPr>
+            <a:spLocks noGrp="1"/>
+          </p:cNvSpPr>
+          <p:nvPr>
+            <p:ph type="sldImg" idx="2"/>
+          </p:nvPr>
+        </p:nvSpPr>
+        <p:spPr/>
+      </p:sp>
+      <p:sp>
+        <p:nvSpPr>
+          <p:cNvPr id="3" name="Notes Placeholder 2"/>
+          <p:cNvSpPr>
+            <a:spLocks noGrp="1"/>
+          </p:cNvSpPr>
+          <p:nvPr>
+            <p:ph type="body" idx="3" sz="quarter"/>
+          </p:nvPr>
+        </p:nvSpPr>
+        <p:spPr/>
+        <p:txBody>
+          <a:bodyPr/>
+          <a:lstStyle/>
+          <a:p>
+            <a:r>
+              <a:t>*Enterprise Architecture Patterns für Skalierbarkeit und Integration*</a:t>
+            </a:r>
+          </a:p>
+        </p:txBody>
+      </p:sp>
+      <p:sp>
+        <p:nvSpPr>
+          <p:cNvPr id="4" name="Slide Number Placeholder 3"/>
+          <p:cNvSpPr>
+            <a:spLocks noGrp="1"/>
+          </p:cNvSpPr>
+          <p:nvPr>
+            <p:ph type="sldNum" idx="5" sz="quarter"/>
+          </p:nvPr>
+        </p:nvSpPr>
+        <p:spPr/>
+      </p:sp>
+    </p:spTree>
+  </p:cSld>
+  <p:clrMapOvr>
+    <a:masterClrMapping/>
+  </p:clrMapOvr>
+</p:notes>
+</file>
+
+<file path=ppt/notesSlides/notesSlide5.xml><?xml version="1.0" encoding="utf-8"?>
+<p:notes xmlns:a="http://schemas.openxmlformats.org/drawingml/2006/main" xmlns:p="http://schemas.openxmlformats.org/presentationml/2006/main" xmlns:r="http://schemas.openxmlformats.org/officeDocument/2006/relationships">
+  <p:cSld>
+    <p:spTree>
+      <p:nvGrpSpPr>
+        <p:cNvPr id="1" name=""/>
+        <p:cNvGrpSpPr/>
+        <p:nvPr/>
+      </p:nvGrpSpPr>
+      <p:grpSpPr>
+        <a:xfrm>
+          <a:off x="0" y="0"/>
+          <a:ext cx="0" cy="0"/>
+          <a:chOff x="0" y="0"/>
+          <a:chExt cx="0" cy="0"/>
+        </a:xfrm>
+      </p:grpSpPr>
+      <p:sp>
+        <p:nvSpPr>
+          <p:cNvPr id="2" name="Slide Image Placeholder 1"/>
+          <p:cNvSpPr>
+            <a:spLocks noGrp="1"/>
+          </p:cNvSpPr>
+          <p:nvPr>
+            <p:ph type="sldImg" idx="2"/>
+          </p:nvPr>
+        </p:nvSpPr>
+        <p:spPr/>
+      </p:sp>
+      <p:sp>
+        <p:nvSpPr>
+          <p:cNvPr id="3" name="Notes Placeholder 2"/>
+          <p:cNvSpPr>
+            <a:spLocks noGrp="1"/>
+          </p:cNvSpPr>
+          <p:nvPr>
+            <p:ph type="body" idx="3" sz="quarter"/>
+          </p:nvPr>
+        </p:nvSpPr>
+        <p:spPr/>
+        <p:txBody>
+          <a:bodyPr/>
+          <a:lstStyle/>
+          <a:p>
+            <a:r>
+              <a:t>*Immutable Event Log als Single Source of Truth*</a:t>
+            </a:r>
+          </a:p>
+        </p:txBody>
+      </p:sp>
+      <p:sp>
+        <p:nvSpPr>
+          <p:cNvPr id="4" name="Slide Number Placeholder 3"/>
+          <p:cNvSpPr>
+            <a:spLocks noGrp="1"/>
+          </p:cNvSpPr>
+          <p:nvPr>
+            <p:ph type="sldNum" idx="5" sz="quarter"/>
+          </p:nvPr>
+        </p:nvSpPr>
+        <p:spPr/>
+      </p:sp>
+    </p:spTree>
+  </p:cSld>
+  <p:clrMapOvr>
+    <a:masterClrMapping/>
+  </p:clrMapOvr>
+</p:notes>
+</file>
+
+<file path=ppt/notesSlides/notesSlide6.xml><?xml version="1.0" encoding="utf-8"?>
+<p:notes xmlns:a="http://schemas.openxmlformats.org/drawingml/2006/main" xmlns:p="http://schemas.openxmlformats.org/presentationml/2006/main" xmlns:r="http://schemas.openxmlformats.org/officeDocument/2006/relationships">
+  <p:cSld>
+    <p:spTree>
+      <p:nvGrpSpPr>
+        <p:cNvPr id="1" name=""/>
+        <p:cNvGrpSpPr/>
+        <p:nvPr/>
+      </p:nvGrpSpPr>
+      <p:grpSpPr>
+        <a:xfrm>
+          <a:off x="0" y="0"/>
+          <a:ext cx="0" cy="0"/>
+          <a:chOff x="0" y="0"/>
+          <a:chExt cx="0" cy="0"/>
+        </a:xfrm>
+      </p:grpSpPr>
+      <p:sp>
+        <p:nvSpPr>
+          <p:cNvPr id="2" name="Slide Image Placeholder 1"/>
+          <p:cNvSpPr>
+            <a:spLocks noGrp="1"/>
+          </p:cNvSpPr>
+          <p:nvPr>
+            <p:ph type="sldImg" idx="2"/>
+          </p:nvPr>
+        </p:nvSpPr>
+        <p:spPr/>
+      </p:sp>
+      <p:sp>
+        <p:nvSpPr>
+          <p:cNvPr id="3" name="Notes Placeholder 2"/>
+          <p:cNvSpPr>
+            <a:spLocks noGrp="1"/>
+          </p:cNvSpPr>
+          <p:nvPr>
+            <p:ph type="body" idx="3" sz="quarter"/>
+          </p:nvPr>
+        </p:nvSpPr>
+        <p:spPr/>
+        <p:txBody>
+          <a:bodyPr/>
+          <a:lstStyle/>
+          <a:p>
+            <a:r>
+              <a:t>*Immutable Event Log als Single Source of Truth*</a:t>
+            </a:r>
+          </a:p>
+        </p:txBody>
+      </p:sp>
+      <p:sp>
+        <p:nvSpPr>
+          <p:cNvPr id="4" name="Slide Number Placeholder 3"/>
+          <p:cNvSpPr>
+            <a:spLocks noGrp="1"/>
+          </p:cNvSpPr>
+          <p:nvPr>
+            <p:ph type="sldNum" idx="5" sz="quarter"/>
+          </p:nvPr>
+        </p:nvSpPr>
+        <p:spPr/>
+      </p:sp>
+    </p:spTree>
+  </p:cSld>
+  <p:clrMapOvr>
+    <a:masterClrMapping/>
+  </p:clrMapOvr>
+</p:notes>
+</file>
+
+<file path=ppt/notesSlides/notesSlide7.xml><?xml version="1.0" encoding="utf-8"?>
+<p:notes xmlns:a="http://schemas.openxmlformats.org/drawingml/2006/main" xmlns:p="http://schemas.openxmlformats.org/presentationml/2006/main" xmlns:r="http://schemas.openxmlformats.org/officeDocument/2006/relationships">
+  <p:cSld>
+    <p:spTree>
+      <p:nvGrpSpPr>
+        <p:cNvPr id="1" name=""/>
+        <p:cNvGrpSpPr/>
+        <p:nvPr/>
+      </p:nvGrpSpPr>
+      <p:grpSpPr>
+        <a:xfrm>
+          <a:off x="0" y="0"/>
+          <a:ext cx="0" cy="0"/>
+          <a:chOff x="0" y="0"/>
+          <a:chExt cx="0" cy="0"/>
+        </a:xfrm>
+      </p:grpSpPr>
+      <p:sp>
+        <p:nvSpPr>
+          <p:cNvPr id="2" name="Slide Image Placeholder 1"/>
+          <p:cNvSpPr>
+            <a:spLocks noGrp="1"/>
+          </p:cNvSpPr>
+          <p:nvPr>
+            <p:ph type="sldImg" idx="2"/>
+          </p:nvPr>
+        </p:nvSpPr>
+        <p:spPr/>
+      </p:sp>
+      <p:sp>
+        <p:nvSpPr>
+          <p:cNvPr id="3" name="Notes Placeholder 2"/>
+          <p:cNvSpPr>
+            <a:spLocks noGrp="1"/>
+          </p:cNvSpPr>
+          <p:nvPr>
+            <p:ph type="body" idx="3" sz="quarter"/>
+          </p:nvPr>
+        </p:nvSpPr>
+        <p:spPr/>
+        <p:txBody>
+          <a:bodyPr/>
+          <a:lstStyle/>
+          <a:p>
+            <a:r>
+              <a:t>*Fault Tolerance für External Service Dependencies*</a:t>
+            </a:r>
+          </a:p>
+        </p:txBody>
+      </p:sp>
+      <p:sp>
+        <p:nvSpPr>
+          <p:cNvPr id="4" name="Slide Number Placeholder 3"/>
+          <p:cNvSpPr>
+            <a:spLocks noGrp="1"/>
+          </p:cNvSpPr>
+          <p:nvPr>
+            <p:ph type="sldNum" idx="5" sz="quarter"/>
+          </p:nvPr>
+        </p:nvSpPr>
+        <p:spPr/>
+      </p:sp>
+    </p:spTree>
+  </p:cSld>
+  <p:clrMapOvr>
+    <a:masterClrMapping/>
+  </p:clrMapOvr>
+</p:notes>
+</file>
+
+<file path=ppt/notesSlides/notesSlide8.xml><?xml version="1.0" encoding="utf-8"?>
+<p:notes xmlns:a="http://schemas.openxmlformats.org/drawingml/2006/main" xmlns:p="http://schemas.openxmlformats.org/presentationml/2006/main" xmlns:r="http://schemas.openxmlformats.org/officeDocument/2006/relationships">
+  <p:cSld>
+    <p:spTree>
+      <p:nvGrpSpPr>
+        <p:cNvPr id="1" name=""/>
+        <p:cNvGrpSpPr/>
+        <p:nvPr/>
+      </p:nvGrpSpPr>
+      <p:grpSpPr>
+        <a:xfrm>
+          <a:off x="0" y="0"/>
+          <a:ext cx="0" cy="0"/>
+          <a:chOff x="0" y="0"/>
+          <a:chExt cx="0" cy="0"/>
+        </a:xfrm>
+      </p:grpSpPr>
+      <p:sp>
+        <p:nvSpPr>
+          <p:cNvPr id="2" name="Slide Image Placeholder 1"/>
+          <p:cNvSpPr>
+            <a:spLocks noGrp="1"/>
+          </p:cNvSpPr>
+          <p:nvPr>
+            <p:ph type="sldImg" idx="2"/>
+          </p:nvPr>
+        </p:nvSpPr>
+        <p:spPr/>
+      </p:sp>
+      <p:sp>
+        <p:nvSpPr>
+          <p:cNvPr id="3" name="Notes Placeholder 2"/>
+          <p:cNvSpPr>
+            <a:spLocks noGrp="1"/>
+          </p:cNvSpPr>
+          <p:nvPr>
+            <p:ph type="body" idx="3" sz="quarter"/>
+          </p:nvPr>
+        </p:nvSpPr>
+        <p:spPr/>
+        <p:txBody>
+          <a:bodyPr/>
+          <a:lstStyle/>
+          <a:p>
+            <a:r>
+              <a:t>*Fault Tolerance für External Service Dependencies*</a:t>
+            </a:r>
+          </a:p>
+        </p:txBody>
+      </p:sp>
+      <p:sp>
+        <p:nvSpPr>
+          <p:cNvPr id="4" name="Slide Number Placeholder 3"/>
+          <p:cNvSpPr>
+            <a:spLocks noGrp="1"/>
+          </p:cNvSpPr>
+          <p:nvPr>
+            <p:ph type="sldNum" idx="5" sz="quarter"/>
+          </p:nvPr>
+        </p:nvSpPr>
+        <p:spPr/>
+      </p:sp>
+    </p:spTree>
+  </p:cSld>
+  <p:clrMapOvr>
+    <a:masterClrMapping/>
+  </p:clrMapOvr>
+</p:notes>
+</file>
+
+<file path=ppt/notesSlides/notesSlide9.xml><?xml version="1.0" encoding="utf-8"?>
+<p:notes xmlns:a="http://schemas.openxmlformats.org/drawingml/2006/main" xmlns:p="http://schemas.openxmlformats.org/presentationml/2006/main" xmlns:r="http://schemas.openxmlformats.org/officeDocument/2006/relationships">
+  <p:cSld>
+    <p:spTree>
+      <p:nvGrpSpPr>
+        <p:cNvPr id="1" name=""/>
+        <p:cNvGrpSpPr/>
+        <p:nvPr/>
+      </p:nvGrpSpPr>
+      <p:grpSpPr>
+        <a:xfrm>
+          <a:off x="0" y="0"/>
+          <a:ext cx="0" cy="0"/>
+          <a:chOff x="0" y="0"/>
+          <a:chExt cx="0" cy="0"/>
+        </a:xfrm>
+      </p:grpSpPr>
+      <p:sp>
+        <p:nvSpPr>
+          <p:cNvPr id="2" name="Slide Image Placeholder 1"/>
+          <p:cNvSpPr>
+            <a:spLocks noGrp="1"/>
+          </p:cNvSpPr>
+          <p:nvPr>
+            <p:ph type="sldImg" idx="2"/>
+          </p:nvPr>
+        </p:nvSpPr>
+        <p:spPr/>
+      </p:sp>
+      <p:sp>
+        <p:nvSpPr>
+          <p:cNvPr id="3" name="Notes Placeholder 2"/>
+          <p:cNvSpPr>
+            <a:spLocks noGrp="1"/>
+          </p:cNvSpPr>
+          <p:nvPr>
+            <p:ph type="body" idx="3" sz="quarter"/>
+          </p:nvPr>
+        </p:nvSpPr>
+        <p:spPr/>
+        <p:txBody>
+          <a:bodyPr/>
+          <a:lstStyle/>
+          <a:p>
+            <a:r>
+              <a:t>*Fault Tolerance für External Service Dependencies*</a:t>
+            </a:r>
+          </a:p>
+        </p:txBody>
+      </p:sp>
+      <p:sp>
+        <p:nvSpPr>
+          <p:cNvPr id="4" name="Slide Number Placeholder 3"/>
+          <p:cNvSpPr>
+            <a:spLocks noGrp="1"/>
+          </p:cNvSpPr>
+          <p:nvPr>
+            <p:ph type="sldNum" idx="5" sz="quarter"/>
+          </p:nvPr>
+        </p:nvSpPr>
+        <p:spPr/>
+      </p:sp>
+    </p:spTree>
+  </p:cSld>
+  <p:clrMapOvr>
+    <a:masterClrMapping/>
+  </p:clrMapOvr>
+</p:notes>
 </file>
 
 <file path=ppt/slideLayouts/slideLayout1.xml><?xml version="1.0" encoding="utf-8"?>
@@ -4273,7 +6379,7 @@
 </file>
 
 <file path=ppt/slides/slide1.xml><?xml version="1.0" encoding="utf-8"?>
-<p:sld xmlns:a="http://schemas.openxmlformats.org/drawingml/2006/main" xmlns:p="http://schemas.openxmlformats.org/presentationml/2006/main" xmlns:r="http://schemas.openxmlformats.org/officeDocument/2006/relationships">
+<p:sld xmlns:a="http://schemas.openxmlformats.org/drawingml/2006/main" xmlns:r="http://schemas.openxmlformats.org/officeDocument/2006/relationships" xmlns:p="http://schemas.openxmlformats.org/presentationml/2006/main">
   <p:cSld>
     <p:spTree>
       <p:nvGrpSpPr>
@@ -4281,7 +6387,14 @@
         <p:cNvGrpSpPr/>
         <p:nvPr/>
       </p:nvGrpSpPr>
-      <p:grpSpPr/>
+      <p:grpSpPr>
+        <a:xfrm>
+          <a:off x="0" y="0"/>
+          <a:ext cx="0" cy="0"/>
+          <a:chOff x="0" y="0"/>
+          <a:chExt cx="0" cy="0"/>
+        </a:xfrm>
+      </p:grpSpPr>
       <p:sp>
         <p:nvSpPr>
           <p:cNvPr id="2" name="Title 1"/>
@@ -4315,7 +6428,9 @@
         </p:nvSpPr>
         <p:spPr/>
         <p:txBody>
-          <a:bodyPr/>
+          <a:bodyPr>
+            <a:normAutofit fontScale="92500"/>
+          </a:bodyPr>
           <a:lstStyle/>
           <a:p>
             <a:r>
@@ -4333,7 +6448,7 @@
 </file>
 
 <file path=ppt/slides/slide10.xml><?xml version="1.0" encoding="utf-8"?>
-<p:sld xmlns:a="http://schemas.openxmlformats.org/drawingml/2006/main" xmlns:p="http://schemas.openxmlformats.org/presentationml/2006/main" xmlns:r="http://schemas.openxmlformats.org/officeDocument/2006/relationships">
+<p:sld xmlns:a="http://schemas.openxmlformats.org/drawingml/2006/main" xmlns:r="http://schemas.openxmlformats.org/officeDocument/2006/relationships" xmlns:p="http://schemas.openxmlformats.org/presentationml/2006/main">
   <p:cSld>
     <p:spTree>
       <p:nvGrpSpPr>
@@ -4341,7 +6456,14 @@
         <p:cNvGrpSpPr/>
         <p:nvPr/>
       </p:nvGrpSpPr>
-      <p:grpSpPr/>
+      <p:grpSpPr>
+        <a:xfrm>
+          <a:off x="0" y="0"/>
+          <a:ext cx="0" cy="0"/>
+          <a:chOff x="0" y="0"/>
+          <a:chExt cx="0" cy="0"/>
+        </a:xfrm>
+      </p:grpSpPr>
       <p:sp>
         <p:nvSpPr>
           <p:cNvPr id="2" name="Title 1"/>
@@ -4375,7 +6497,9 @@
         </p:nvSpPr>
         <p:spPr/>
         <p:txBody>
-          <a:bodyPr/>
+          <a:bodyPr>
+            <a:normAutofit lnSpcReduction="10000"/>
+          </a:bodyPr>
           <a:lstStyle/>
           <a:p>
             <a:pPr>
@@ -4390,91 +6514,145 @@
               </a:spcAft>
             </a:pPr>
             <a:r>
-              <a:rPr sz="900">
+              <a:rPr dirty="0">
                 <a:latin typeface="Consolas"/>
               </a:rPr>
               <a:t>Choreography Saga:           Orchestration Saga:</a:t>
             </a:r>
-            <a:br/>
-            <a:r>
-              <a:rPr sz="900">
+            <a:br>
+              <a:rPr sz="6600" dirty="0"/>
+            </a:br>
+            <a:r>
+              <a:rPr dirty="0">
                 <a:latin typeface="Consolas"/>
               </a:rPr>
               <a:t>                            </a:t>
             </a:r>
-            <a:br/>
-            <a:r>
-              <a:rPr sz="900">
-                <a:latin typeface="Consolas"/>
-              </a:rPr>
-              <a:t>Service A ──&gt; Service B       ┌─────────────────┐</a:t>
-            </a:r>
-            <a:br/>
-            <a:r>
-              <a:rPr sz="900">
-                <a:latin typeface="Consolas"/>
-              </a:rPr>
-              <a:t>    │             │          │ Saga Manager   │</a:t>
-            </a:r>
-            <a:br/>
-            <a:r>
-              <a:rPr sz="900">
-                <a:latin typeface="Consolas"/>
-              </a:rPr>
-              <a:t>    ▼             ▼          │                 │</a:t>
-            </a:r>
-            <a:br/>
-            <a:r>
-              <a:rPr sz="900">
+            <a:br>
+              <a:rPr sz="6600" dirty="0"/>
+            </a:br>
+            <a:r>
+              <a:rPr dirty="0">
+                <a:latin typeface="Consolas"/>
+              </a:rPr>
+              <a:t>Service A ──&gt; Service B      ┌─────────────────┐</a:t>
+            </a:r>
+            <a:br>
+              <a:rPr sz="6600" dirty="0"/>
+            </a:br>
+            <a:r>
+              <a:rPr dirty="0">
+                <a:latin typeface="Consolas"/>
+              </a:rPr>
+              <a:t>    │             │          │ Saga Manager   </a:t>
+            </a:r>
+            <a:r>
+              <a:rPr lang="en-US" dirty="0">
+                <a:latin typeface="Consolas"/>
+              </a:rPr>
+              <a:t> </a:t>
+            </a:r>
+            <a:r>
+              <a:rPr dirty="0">
+                <a:latin typeface="Consolas"/>
+              </a:rPr>
+              <a:t>│</a:t>
+            </a:r>
+            <a:br>
+              <a:rPr sz="6600" dirty="0"/>
+            </a:br>
+            <a:r>
+              <a:rPr dirty="0">
+                <a:latin typeface="Consolas"/>
+              </a:rPr>
+              <a:t>    ▼             ▼         </a:t>
+            </a:r>
+            <a:r>
+              <a:rPr lang="en-US" sz="2000" dirty="0">
+                <a:latin typeface="Consolas"/>
+              </a:rPr>
+              <a:t> </a:t>
+            </a:r>
+            <a:r>
+              <a:rPr lang="en-US" dirty="0">
+                <a:latin typeface="Consolas"/>
+              </a:rPr>
+              <a:t>│</a:t>
+            </a:r>
+            <a:r>
+              <a:rPr dirty="0">
+                <a:latin typeface="Consolas"/>
+              </a:rPr>
+              <a:t>                 │</a:t>
+            </a:r>
+            <a:br>
+              <a:rPr sz="6600" dirty="0"/>
+            </a:br>
+            <a:r>
+              <a:rPr dirty="0">
                 <a:latin typeface="Consolas"/>
               </a:rPr>
               <a:t>Service C ──&gt; Service D      │ 1. Service A    │</a:t>
             </a:r>
-            <a:br/>
-            <a:r>
-              <a:rPr sz="900">
+            <a:br>
+              <a:rPr sz="6600" dirty="0"/>
+            </a:br>
+            <a:r>
+              <a:rPr dirty="0">
                 <a:latin typeface="Consolas"/>
               </a:rPr>
               <a:t>                             │ 2. Service B    │</a:t>
             </a:r>
-            <a:br/>
-            <a:r>
-              <a:rPr sz="900">
+            <a:br>
+              <a:rPr sz="6600" dirty="0"/>
+            </a:br>
+            <a:r>
+              <a:rPr dirty="0">
                 <a:latin typeface="Consolas"/>
               </a:rPr>
               <a:t>Event-driven,                │ 3. Service C    │</a:t>
             </a:r>
-            <a:br/>
-            <a:r>
-              <a:rPr sz="900">
+            <a:br>
+              <a:rPr sz="6600" dirty="0"/>
+            </a:br>
+            <a:r>
+              <a:rPr dirty="0">
                 <a:latin typeface="Consolas"/>
               </a:rPr>
               <a:t>Distributed control          │ 4. Rollback?    │</a:t>
             </a:r>
-            <a:br/>
-            <a:r>
-              <a:rPr sz="900">
+            <a:br>
+              <a:rPr sz="6600" dirty="0"/>
+            </a:br>
+            <a:r>
+              <a:rPr dirty="0">
                 <a:latin typeface="Consolas"/>
               </a:rPr>
               <a:t>                             └─────────────────┘</a:t>
             </a:r>
-            <a:br/>
-            <a:r>
-              <a:rPr sz="900">
+            <a:br>
+              <a:rPr sz="6600" dirty="0"/>
+            </a:br>
+            <a:r>
+              <a:rPr dirty="0">
                 <a:latin typeface="Consolas"/>
               </a:rPr>
               <a:t>                             </a:t>
             </a:r>
-            <a:br/>
-            <a:r>
-              <a:rPr sz="900">
+            <a:br>
+              <a:rPr sz="6600" dirty="0"/>
+            </a:br>
+            <a:r>
+              <a:rPr dirty="0">
                 <a:latin typeface="Consolas"/>
               </a:rPr>
               <a:t>                             Centralized control,</a:t>
             </a:r>
-            <a:br/>
-            <a:r>
-              <a:rPr sz="900">
+            <a:br>
+              <a:rPr sz="6600" dirty="0"/>
+            </a:br>
+            <a:r>
+              <a:rPr dirty="0">
                 <a:latin typeface="Consolas"/>
               </a:rPr>
               <a:t>                             Explicit workflow</a:t>
@@ -4491,7 +6669,7 @@
 </file>
 
 <file path=ppt/slides/slide11.xml><?xml version="1.0" encoding="utf-8"?>
-<p:sld xmlns:a="http://schemas.openxmlformats.org/drawingml/2006/main" xmlns:p="http://schemas.openxmlformats.org/presentationml/2006/main" xmlns:r="http://schemas.openxmlformats.org/officeDocument/2006/relationships">
+<p:sld xmlns:a="http://schemas.openxmlformats.org/drawingml/2006/main" xmlns:r="http://schemas.openxmlformats.org/officeDocument/2006/relationships" xmlns:p="http://schemas.openxmlformats.org/presentationml/2006/main">
   <p:cSld>
     <p:spTree>
       <p:nvGrpSpPr>
@@ -4499,7 +6677,14 @@
         <p:cNvGrpSpPr/>
         <p:nvPr/>
       </p:nvGrpSpPr>
-      <p:grpSpPr/>
+      <p:grpSpPr>
+        <a:xfrm>
+          <a:off x="0" y="0"/>
+          <a:ext cx="0" cy="0"/>
+          <a:chOff x="0" y="0"/>
+          <a:chExt cx="0" cy="0"/>
+        </a:xfrm>
+      </p:grpSpPr>
       <p:sp>
         <p:nvSpPr>
           <p:cNvPr id="2" name="Title 1"/>
@@ -4535,7 +6720,9 @@
         <p:txBody>
           <a:bodyPr/>
           <a:lstStyle/>
-          <a:p/>
+          <a:p>
+            <a:endParaRPr/>
+          </a:p>
         </p:txBody>
       </p:sp>
     </p:spTree>
@@ -4547,7 +6734,7 @@
 </file>
 
 <file path=ppt/slides/slide12.xml><?xml version="1.0" encoding="utf-8"?>
-<p:sld xmlns:a="http://schemas.openxmlformats.org/drawingml/2006/main" xmlns:p="http://schemas.openxmlformats.org/presentationml/2006/main" xmlns:r="http://schemas.openxmlformats.org/officeDocument/2006/relationships">
+<p:sld xmlns:a="http://schemas.openxmlformats.org/drawingml/2006/main" xmlns:r="http://schemas.openxmlformats.org/officeDocument/2006/relationships" xmlns:p="http://schemas.openxmlformats.org/presentationml/2006/main">
   <p:cSld>
     <p:spTree>
       <p:nvGrpSpPr>
@@ -4555,7 +6742,14 @@
         <p:cNvGrpSpPr/>
         <p:nvPr/>
       </p:nvGrpSpPr>
-      <p:grpSpPr/>
+      <p:grpSpPr>
+        <a:xfrm>
+          <a:off x="0" y="0"/>
+          <a:ext cx="0" cy="0"/>
+          <a:chOff x="0" y="0"/>
+          <a:chExt cx="0" cy="0"/>
+        </a:xfrm>
+      </p:grpSpPr>
       <p:sp>
         <p:nvSpPr>
           <p:cNvPr id="2" name="Title 1"/>
@@ -4589,7 +6783,9 @@
         </p:nvSpPr>
         <p:spPr/>
         <p:txBody>
-          <a:bodyPr/>
+          <a:bodyPr>
+            <a:normAutofit fontScale="92500" lnSpcReduction="10000"/>
+          </a:bodyPr>
           <a:lstStyle/>
           <a:p>
             <a:pPr>
@@ -4604,133 +6800,193 @@
               </a:spcAft>
             </a:pPr>
             <a:r>
-              <a:rPr sz="900">
+              <a:rPr sz="1800" dirty="0">
                 <a:latin typeface="Consolas"/>
               </a:rPr>
               <a:t>Client Requests</a:t>
             </a:r>
-            <a:br/>
-            <a:r>
-              <a:rPr sz="900">
+            <a:br>
+              <a:rPr sz="5400" dirty="0"/>
+            </a:br>
+            <a:r>
+              <a:rPr sz="1800" dirty="0">
                 <a:latin typeface="Consolas"/>
               </a:rPr>
               <a:t>               │</a:t>
             </a:r>
-            <a:br/>
-            <a:r>
-              <a:rPr sz="900">
+            <a:br>
+              <a:rPr sz="5400" dirty="0"/>
+            </a:br>
+            <a:r>
+              <a:rPr sz="1800" dirty="0">
                 <a:latin typeface="Consolas"/>
               </a:rPr>
               <a:t>               ▼</a:t>
             </a:r>
-            <a:br/>
-            <a:r>
-              <a:rPr sz="900">
+            <a:br>
+              <a:rPr sz="5400" dirty="0"/>
+            </a:br>
+            <a:r>
+              <a:rPr sz="1800" dirty="0">
                 <a:latin typeface="Consolas"/>
               </a:rPr>
               <a:t>    ┌─────────────────────┐</a:t>
             </a:r>
-            <a:br/>
-            <a:r>
-              <a:rPr sz="900">
+            <a:br>
+              <a:rPr sz="5400" dirty="0"/>
+            </a:br>
+            <a:r>
+              <a:rPr sz="1800" dirty="0">
                 <a:latin typeface="Consolas"/>
               </a:rPr>
               <a:t>    │   API Gateway       │</a:t>
             </a:r>
-            <a:br/>
-            <a:r>
-              <a:rPr sz="900">
+            <a:br>
+              <a:rPr sz="5400" dirty="0"/>
+            </a:br>
+            <a:r>
+              <a:rPr sz="1800" dirty="0">
                 <a:latin typeface="Consolas"/>
               </a:rPr>
               <a:t>    │                     │</a:t>
             </a:r>
-            <a:br/>
-            <a:r>
-              <a:rPr sz="900">
+            <a:br>
+              <a:rPr sz="5400" dirty="0"/>
+            </a:br>
+            <a:r>
+              <a:rPr sz="1800" dirty="0">
                 <a:latin typeface="Consolas"/>
               </a:rPr>
               <a:t>    │ - Authentication    │</a:t>
             </a:r>
-            <a:br/>
-            <a:r>
-              <a:rPr sz="900">
+            <a:br>
+              <a:rPr sz="5400" dirty="0"/>
+            </a:br>
+            <a:r>
+              <a:rPr sz="1800" dirty="0">
                 <a:latin typeface="Consolas"/>
               </a:rPr>
               <a:t>    │ - Authorization     │</a:t>
             </a:r>
-            <a:br/>
-            <a:r>
-              <a:rPr sz="900">
+            <a:br>
+              <a:rPr sz="5400" dirty="0"/>
+            </a:br>
+            <a:r>
+              <a:rPr sz="1800" dirty="0">
                 <a:latin typeface="Consolas"/>
               </a:rPr>
               <a:t>    │ - Rate Limiting     │</a:t>
             </a:r>
-            <a:br/>
-            <a:r>
-              <a:rPr sz="900">
+            <a:br>
+              <a:rPr sz="5400" dirty="0"/>
+            </a:br>
+            <a:r>
+              <a:rPr sz="1800" dirty="0">
                 <a:latin typeface="Consolas"/>
               </a:rPr>
               <a:t>    │ - Load Balancing    │</a:t>
             </a:r>
-            <a:br/>
-            <a:r>
-              <a:rPr sz="900">
+            <a:br>
+              <a:rPr sz="5400" dirty="0"/>
+            </a:br>
+            <a:r>
+              <a:rPr sz="1800" dirty="0">
                 <a:latin typeface="Consolas"/>
               </a:rPr>
               <a:t>    │ - Request Routing   │</a:t>
             </a:r>
-            <a:br/>
-            <a:r>
-              <a:rPr sz="900">
+            <a:br>
+              <a:rPr sz="5400" dirty="0"/>
+            </a:br>
+            <a:r>
+              <a:rPr sz="1800" dirty="0">
                 <a:latin typeface="Consolas"/>
               </a:rPr>
               <a:t>    │ - Response Caching  │</a:t>
             </a:r>
-            <a:br/>
-            <a:r>
-              <a:rPr sz="900">
+            <a:br>
+              <a:rPr sz="5400" dirty="0"/>
+            </a:br>
+            <a:r>
+              <a:rPr sz="1800" dirty="0">
                 <a:latin typeface="Consolas"/>
               </a:rPr>
               <a:t>    │ - Monitoring        │</a:t>
             </a:r>
-            <a:br/>
-            <a:r>
-              <a:rPr sz="900">
+            <a:br>
+              <a:rPr sz="5400" dirty="0"/>
+            </a:br>
+            <a:r>
+              <a:rPr sz="1800" dirty="0">
                 <a:latin typeface="Consolas"/>
               </a:rPr>
               <a:t>    └─────────────────────┘</a:t>
             </a:r>
-            <a:br/>
-            <a:r>
-              <a:rPr sz="900">
+            <a:br>
+              <a:rPr sz="5400" dirty="0"/>
+            </a:br>
+            <a:r>
+              <a:rPr sz="1800" dirty="0">
                 <a:latin typeface="Consolas"/>
               </a:rPr>
               <a:t>               │</a:t>
             </a:r>
-            <a:br/>
-            <a:r>
-              <a:rPr sz="900">
+            <a:br>
+              <a:rPr sz="5400" dirty="0"/>
+            </a:br>
+            <a:r>
+              <a:rPr sz="1800" dirty="0">
                 <a:latin typeface="Consolas"/>
               </a:rPr>
               <a:t>               ▼</a:t>
             </a:r>
-            <a:br/>
-            <a:r>
-              <a:rPr sz="900">
+            <a:br>
+              <a:rPr sz="5400" dirty="0"/>
+            </a:br>
+            <a:r>
+              <a:rPr sz="1800" dirty="0">
                 <a:latin typeface="Consolas"/>
               </a:rPr>
               <a:t>    ┌─────────┬─────────┬─────────┐</a:t>
             </a:r>
-            <a:br/>
-            <a:r>
-              <a:rPr sz="900">
-                <a:latin typeface="Consolas"/>
-              </a:rPr>
-              <a:t>    │Service A│Service B│Service C│</a:t>
-            </a:r>
-            <a:br/>
-            <a:r>
-              <a:rPr sz="900">
+            <a:br>
+              <a:rPr sz="5400" dirty="0"/>
+            </a:br>
+            <a:r>
+              <a:rPr sz="1800" dirty="0">
+                <a:latin typeface="Consolas"/>
+              </a:rPr>
+              <a:t>    │Service </a:t>
+            </a:r>
+            <a:r>
+              <a:rPr sz="1800" dirty="0" err="1">
+                <a:latin typeface="Consolas"/>
+              </a:rPr>
+              <a:t>A│Service</a:t>
+            </a:r>
+            <a:r>
+              <a:rPr sz="1800" dirty="0">
+                <a:latin typeface="Consolas"/>
+              </a:rPr>
+              <a:t> </a:t>
+            </a:r>
+            <a:r>
+              <a:rPr sz="1800" dirty="0" err="1">
+                <a:latin typeface="Consolas"/>
+              </a:rPr>
+              <a:t>B│Service</a:t>
+            </a:r>
+            <a:r>
+              <a:rPr sz="1800" dirty="0">
+                <a:latin typeface="Consolas"/>
+              </a:rPr>
+              <a:t> C│</a:t>
+            </a:r>
+            <a:br>
+              <a:rPr sz="5400" dirty="0"/>
+            </a:br>
+            <a:r>
+              <a:rPr sz="1800" dirty="0">
                 <a:latin typeface="Consolas"/>
               </a:rPr>
               <a:t>    └─────────┴─────────┴─────────┘</a:t>
@@ -4747,7 +7003,7 @@
 </file>
 
 <file path=ppt/slides/slide13.xml><?xml version="1.0" encoding="utf-8"?>
-<p:sld xmlns:a="http://schemas.openxmlformats.org/drawingml/2006/main" xmlns:p="http://schemas.openxmlformats.org/presentationml/2006/main" xmlns:r="http://schemas.openxmlformats.org/officeDocument/2006/relationships">
+<p:sld xmlns:a="http://schemas.openxmlformats.org/drawingml/2006/main" xmlns:r="http://schemas.openxmlformats.org/officeDocument/2006/relationships" xmlns:p="http://schemas.openxmlformats.org/presentationml/2006/main">
   <p:cSld>
     <p:spTree>
       <p:nvGrpSpPr>
@@ -4755,7 +7011,14 @@
         <p:cNvGrpSpPr/>
         <p:nvPr/>
       </p:nvGrpSpPr>
-      <p:grpSpPr/>
+      <p:grpSpPr>
+        <a:xfrm>
+          <a:off x="0" y="0"/>
+          <a:ext cx="0" cy="0"/>
+          <a:chOff x="0" y="0"/>
+          <a:chExt cx="0" cy="0"/>
+        </a:xfrm>
+      </p:grpSpPr>
       <p:sp>
         <p:nvSpPr>
           <p:cNvPr id="2" name="Title 1"/>
@@ -4791,7 +7054,9 @@
         <p:txBody>
           <a:bodyPr/>
           <a:lstStyle/>
-          <a:p/>
+          <a:p>
+            <a:endParaRPr/>
+          </a:p>
         </p:txBody>
       </p:sp>
     </p:spTree>
@@ -4803,7 +7068,7 @@
 </file>
 
 <file path=ppt/slides/slide14.xml><?xml version="1.0" encoding="utf-8"?>
-<p:sld xmlns:a="http://schemas.openxmlformats.org/drawingml/2006/main" xmlns:p="http://schemas.openxmlformats.org/presentationml/2006/main" xmlns:r="http://schemas.openxmlformats.org/officeDocument/2006/relationships">
+<p:sld xmlns:a="http://schemas.openxmlformats.org/drawingml/2006/main" xmlns:r="http://schemas.openxmlformats.org/officeDocument/2006/relationships" xmlns:p="http://schemas.openxmlformats.org/presentationml/2006/main">
   <p:cSld>
     <p:spTree>
       <p:nvGrpSpPr>
@@ -4811,7 +7076,14 @@
         <p:cNvGrpSpPr/>
         <p:nvPr/>
       </p:nvGrpSpPr>
-      <p:grpSpPr/>
+      <p:grpSpPr>
+        <a:xfrm>
+          <a:off x="0" y="0"/>
+          <a:ext cx="0" cy="0"/>
+          <a:chOff x="0" y="0"/>
+          <a:chExt cx="0" cy="0"/>
+        </a:xfrm>
+      </p:grpSpPr>
       <p:sp>
         <p:nvSpPr>
           <p:cNvPr id="2" name="Title 1"/>
@@ -4845,7 +7117,9 @@
         </p:nvSpPr>
         <p:spPr/>
         <p:txBody>
-          <a:bodyPr/>
+          <a:bodyPr>
+            <a:normAutofit lnSpcReduction="10000"/>
+          </a:bodyPr>
           <a:lstStyle/>
           <a:p>
             <a:pPr>
@@ -4860,134 +7134,172 @@
               </a:spcAft>
             </a:pPr>
             <a:r>
-              <a:rPr sz="900">
+              <a:rPr sz="1400" dirty="0">
                 <a:latin typeface="Consolas"/>
               </a:rPr>
               <a:t>┌──────────────────────────────────────────────────────┐</a:t>
             </a:r>
-            <a:br/>
-            <a:r>
-              <a:rPr sz="900">
+            <a:br>
+              <a:rPr sz="4400" dirty="0"/>
+            </a:br>
+            <a:r>
+              <a:rPr sz="1400" dirty="0">
                 <a:latin typeface="Consolas"/>
               </a:rPr>
               <a:t>│                Control Plane                         │</a:t>
             </a:r>
-            <a:br/>
-            <a:r>
-              <a:rPr sz="900">
+            <a:br>
+              <a:rPr sz="4400" dirty="0"/>
+            </a:br>
+            <a:r>
+              <a:rPr sz="1400" dirty="0">
                 <a:latin typeface="Consolas"/>
               </a:rPr>
               <a:t>│ ┌─────────────┐ ┌─────────────┐ ┌─────────────┐      │</a:t>
             </a:r>
-            <a:br/>
-            <a:r>
-              <a:rPr sz="900">
+            <a:br>
+              <a:rPr sz="4400" dirty="0"/>
+            </a:br>
+            <a:r>
+              <a:rPr sz="1400" dirty="0">
                 <a:latin typeface="Consolas"/>
               </a:rPr>
               <a:t>│ │   Pilot     │ │   Citadel   │ │   Mixer     │      │</a:t>
             </a:r>
-            <a:br/>
-            <a:r>
-              <a:rPr sz="900">
+            <a:br>
+              <a:rPr sz="4400" dirty="0"/>
+            </a:br>
+            <a:r>
+              <a:rPr sz="1400" dirty="0">
                 <a:latin typeface="Consolas"/>
               </a:rPr>
               <a:t>│ │ (Discovery) │ │ (Security)  │ │ (Telemetry) │      │</a:t>
             </a:r>
-            <a:br/>
-            <a:r>
-              <a:rPr sz="900">
+            <a:br>
+              <a:rPr sz="4400" dirty="0"/>
+            </a:br>
+            <a:r>
+              <a:rPr sz="1400" dirty="0">
                 <a:latin typeface="Consolas"/>
               </a:rPr>
               <a:t>│ └─────────────┘ └─────────────┘ └─────────────┘      │</a:t>
             </a:r>
-            <a:br/>
-            <a:r>
-              <a:rPr sz="900">
+            <a:br>
+              <a:rPr sz="4400" dirty="0"/>
+            </a:br>
+            <a:r>
+              <a:rPr sz="1400" dirty="0">
                 <a:latin typeface="Consolas"/>
               </a:rPr>
               <a:t>└──────────────────────────────────────────────────────┘</a:t>
             </a:r>
-            <a:br/>
-            <a:r>
-              <a:rPr sz="900">
+            <a:br>
+              <a:rPr sz="4400" dirty="0"/>
+            </a:br>
+            <a:r>
+              <a:rPr sz="1400" dirty="0">
                 <a:latin typeface="Consolas"/>
               </a:rPr>
               <a:t>                        │</a:t>
             </a:r>
-            <a:br/>
-            <a:r>
-              <a:rPr sz="900">
+            <a:br>
+              <a:rPr sz="4400" dirty="0"/>
+            </a:br>
+            <a:r>
+              <a:rPr sz="1400" dirty="0">
                 <a:latin typeface="Consolas"/>
               </a:rPr>
               <a:t>                        ▼ (Configuration)</a:t>
             </a:r>
-            <a:br/>
-            <a:r>
-              <a:rPr sz="900">
+            <a:br>
+              <a:rPr sz="4400" dirty="0"/>
+            </a:br>
+            <a:r>
+              <a:rPr sz="1400" dirty="0">
                 <a:latin typeface="Consolas"/>
               </a:rPr>
               <a:t>┌─────────────┐     ┌─────────────┐     ┌─────────────┐</a:t>
             </a:r>
-            <a:br/>
-            <a:r>
-              <a:rPr sz="900">
+            <a:br>
+              <a:rPr sz="4400" dirty="0"/>
+            </a:br>
+            <a:r>
+              <a:rPr sz="1400" dirty="0">
                 <a:latin typeface="Consolas"/>
               </a:rPr>
               <a:t>│ Service A   │     │ Service B   │     │ Service C   │</a:t>
             </a:r>
-            <a:br/>
-            <a:r>
-              <a:rPr sz="900">
+            <a:br>
+              <a:rPr sz="4400" dirty="0"/>
+            </a:br>
+            <a:r>
+              <a:rPr sz="1400" dirty="0">
                 <a:latin typeface="Consolas"/>
               </a:rPr>
               <a:t>│             │     │             │     │             │</a:t>
             </a:r>
-            <a:br/>
-            <a:r>
-              <a:rPr sz="900">
+            <a:br>
+              <a:rPr sz="4400" dirty="0"/>
+            </a:br>
+            <a:r>
+              <a:rPr sz="1400" dirty="0">
                 <a:latin typeface="Consolas"/>
               </a:rPr>
               <a:t>│ ┌─────────┐ │◄────┤ ┌─────────┐ │◄────┤ ┌─────────┐ │</a:t>
             </a:r>
-            <a:br/>
-            <a:r>
-              <a:rPr sz="900">
+            <a:br>
+              <a:rPr sz="4400" dirty="0"/>
+            </a:br>
+            <a:r>
+              <a:rPr sz="1400" dirty="0">
                 <a:latin typeface="Consolas"/>
               </a:rPr>
               <a:t>│ │ Proxy   │ │     │ │ Proxy   │ │     │ │ Proxy   │ │</a:t>
             </a:r>
-            <a:br/>
-            <a:r>
-              <a:rPr sz="900">
+            <a:br>
+              <a:rPr sz="4400" dirty="0"/>
+            </a:br>
+            <a:r>
+              <a:rPr sz="1400" dirty="0">
                 <a:latin typeface="Consolas"/>
               </a:rPr>
               <a:t>│ │(Envoy)  │ │     │ │(Envoy)  │ │     │ │(Envoy)  │ │</a:t>
             </a:r>
-            <a:br/>
-            <a:r>
-              <a:rPr sz="900">
+            <a:br>
+              <a:rPr sz="4400" dirty="0"/>
+            </a:br>
+            <a:r>
+              <a:rPr sz="1400" dirty="0">
                 <a:latin typeface="Consolas"/>
               </a:rPr>
               <a:t>│ └─────────┘ │     │ └─────────┘ │     │ └─────────┘ │</a:t>
             </a:r>
-            <a:br/>
-            <a:r>
-              <a:rPr sz="900">
+            <a:br>
+              <a:rPr sz="4400" dirty="0"/>
+            </a:br>
+            <a:r>
+              <a:rPr sz="1400" dirty="0">
                 <a:latin typeface="Consolas"/>
               </a:rPr>
               <a:t>└─────────────┘     └─────────────┘     └─────────────┘</a:t>
             </a:r>
-            <a:br/>
-            <a:br/>
-            <a:r>
-              <a:rPr sz="900">
+            <a:br>
+              <a:rPr sz="4400" dirty="0"/>
+            </a:br>
+            <a:br>
+              <a:rPr sz="4400" dirty="0"/>
+            </a:br>
+            <a:r>
+              <a:rPr sz="1400" dirty="0">
                 <a:latin typeface="Consolas"/>
               </a:rPr>
               <a:t>Data Plane: Envoy Proxies handle all traffic</a:t>
             </a:r>
-            <a:br/>
-            <a:r>
-              <a:rPr sz="900">
+            <a:br>
+              <a:rPr sz="4400" dirty="0"/>
+            </a:br>
+            <a:r>
+              <a:rPr sz="1400" dirty="0">
                 <a:latin typeface="Consolas"/>
               </a:rPr>
               <a:t>Control Plane: Configures and monitors proxies</a:t>
@@ -5004,7 +7316,7 @@
 </file>
 
 <file path=ppt/slides/slide15.xml><?xml version="1.0" encoding="utf-8"?>
-<p:sld xmlns:a="http://schemas.openxmlformats.org/drawingml/2006/main" xmlns:p="http://schemas.openxmlformats.org/presentationml/2006/main" xmlns:r="http://schemas.openxmlformats.org/officeDocument/2006/relationships">
+<p:sld xmlns:a="http://schemas.openxmlformats.org/drawingml/2006/main" xmlns:r="http://schemas.openxmlformats.org/officeDocument/2006/relationships" xmlns:p="http://schemas.openxmlformats.org/presentationml/2006/main">
   <p:cSld>
     <p:spTree>
       <p:nvGrpSpPr>
@@ -5012,7 +7324,14 @@
         <p:cNvGrpSpPr/>
         <p:nvPr/>
       </p:nvGrpSpPr>
-      <p:grpSpPr/>
+      <p:grpSpPr>
+        <a:xfrm>
+          <a:off x="0" y="0"/>
+          <a:ext cx="0" cy="0"/>
+          <a:chOff x="0" y="0"/>
+          <a:chExt cx="0" cy="0"/>
+        </a:xfrm>
+      </p:grpSpPr>
       <p:sp>
         <p:nvSpPr>
           <p:cNvPr id="2" name="Title 1"/>
@@ -5048,7 +7367,9 @@
         <p:txBody>
           <a:bodyPr/>
           <a:lstStyle/>
-          <a:p/>
+          <a:p>
+            <a:endParaRPr/>
+          </a:p>
         </p:txBody>
       </p:sp>
     </p:spTree>
@@ -5060,7 +7381,7 @@
 </file>
 
 <file path=ppt/slides/slide16.xml><?xml version="1.0" encoding="utf-8"?>
-<p:sld xmlns:a="http://schemas.openxmlformats.org/drawingml/2006/main" xmlns:p="http://schemas.openxmlformats.org/presentationml/2006/main" xmlns:r="http://schemas.openxmlformats.org/officeDocument/2006/relationships">
+<p:sld xmlns:a="http://schemas.openxmlformats.org/drawingml/2006/main" xmlns:r="http://schemas.openxmlformats.org/officeDocument/2006/relationships" xmlns:p="http://schemas.openxmlformats.org/presentationml/2006/main">
   <p:cSld>
     <p:spTree>
       <p:nvGrpSpPr>
@@ -5068,7 +7389,14 @@
         <p:cNvGrpSpPr/>
         <p:nvPr/>
       </p:nvGrpSpPr>
-      <p:grpSpPr/>
+      <p:grpSpPr>
+        <a:xfrm>
+          <a:off x="0" y="0"/>
+          <a:ext cx="0" cy="0"/>
+          <a:chOff x="0" y="0"/>
+          <a:chExt cx="0" cy="0"/>
+        </a:xfrm>
+      </p:grpSpPr>
       <p:sp>
         <p:nvSpPr>
           <p:cNvPr id="2" name="Title 1"/>
@@ -5102,7 +7430,9 @@
         </p:nvSpPr>
         <p:spPr/>
         <p:txBody>
-          <a:bodyPr/>
+          <a:bodyPr>
+            <a:normAutofit/>
+          </a:bodyPr>
           <a:lstStyle/>
           <a:p>
             <a:pPr>
@@ -5117,92 +7447,118 @@
               </a:spcAft>
             </a:pPr>
             <a:r>
-              <a:rPr sz="900">
+              <a:rPr sz="1800" dirty="0">
                 <a:latin typeface="Consolas"/>
               </a:rPr>
               <a:t>Thread Pools per Client Type:</a:t>
             </a:r>
-            <a:br/>
-            <a:r>
-              <a:rPr sz="900">
+            <a:br>
+              <a:rPr sz="5400" dirty="0"/>
+            </a:br>
+            <a:r>
+              <a:rPr sz="1800" dirty="0">
                 <a:latin typeface="Consolas"/>
               </a:rPr>
               <a:t>┌─────────────────────────────────────────────────┐</a:t>
             </a:r>
-            <a:br/>
-            <a:r>
-              <a:rPr sz="900">
+            <a:br>
+              <a:rPr sz="5400" dirty="0"/>
+            </a:br>
+            <a:r>
+              <a:rPr sz="1800" dirty="0">
                 <a:latin typeface="Consolas"/>
               </a:rPr>
               <a:t>│                Service                          │</a:t>
             </a:r>
-            <a:br/>
-            <a:r>
-              <a:rPr sz="900">
+            <a:br>
+              <a:rPr sz="5400" dirty="0"/>
+            </a:br>
+            <a:r>
+              <a:rPr sz="1800" dirty="0">
                 <a:latin typeface="Consolas"/>
               </a:rPr>
               <a:t>│                                                 │</a:t>
             </a:r>
-            <a:br/>
-            <a:r>
-              <a:rPr sz="900">
+            <a:br>
+              <a:rPr sz="5400" dirty="0"/>
+            </a:br>
+            <a:r>
+              <a:rPr sz="1800" dirty="0">
                 <a:latin typeface="Consolas"/>
               </a:rPr>
               <a:t>│ ┌─────────────┐ ┌─────────────┐ ┌─────────────┐ │</a:t>
             </a:r>
-            <a:br/>
-            <a:r>
-              <a:rPr sz="900">
+            <a:br>
+              <a:rPr sz="5400" dirty="0"/>
+            </a:br>
+            <a:r>
+              <a:rPr sz="1800" dirty="0">
                 <a:latin typeface="Consolas"/>
               </a:rPr>
               <a:t>│ │Premium      │ │Standard     │ │Basic        │ │</a:t>
             </a:r>
-            <a:br/>
-            <a:r>
-              <a:rPr sz="900">
+            <a:br>
+              <a:rPr sz="5400" dirty="0"/>
+            </a:br>
+            <a:r>
+              <a:rPr sz="1800" dirty="0">
                 <a:latin typeface="Consolas"/>
               </a:rPr>
               <a:t>│ │Clients      │ │Clients      │ │Clients      │ │</a:t>
             </a:r>
-            <a:br/>
-            <a:r>
-              <a:rPr sz="900">
+            <a:br>
+              <a:rPr sz="5400" dirty="0"/>
+            </a:br>
+            <a:r>
+              <a:rPr sz="1800" dirty="0">
                 <a:latin typeface="Consolas"/>
               </a:rPr>
               <a:t>│ │             │ │             │ │             │ │</a:t>
             </a:r>
-            <a:br/>
-            <a:r>
-              <a:rPr sz="900">
+            <a:br>
+              <a:rPr sz="5400" dirty="0"/>
+            </a:br>
+            <a:r>
+              <a:rPr sz="1800" dirty="0">
                 <a:latin typeface="Consolas"/>
               </a:rPr>
               <a:t>│ │Thread Pool  │ │Thread Pool  │ │Thread Pool  │ │</a:t>
             </a:r>
-            <a:br/>
-            <a:r>
-              <a:rPr sz="900">
+            <a:br>
+              <a:rPr sz="5400" dirty="0"/>
+            </a:br>
+            <a:r>
+              <a:rPr sz="1800" dirty="0">
                 <a:latin typeface="Consolas"/>
               </a:rPr>
               <a:t>│ │Size: 50     │ │Size: 30     │ │Size: 20     │ │</a:t>
             </a:r>
-            <a:br/>
-            <a:r>
-              <a:rPr sz="900">
+            <a:br>
+              <a:rPr sz="5400" dirty="0"/>
+            </a:br>
+            <a:r>
+              <a:rPr sz="1800" dirty="0">
                 <a:latin typeface="Consolas"/>
               </a:rPr>
               <a:t>│ └─────────────┘ └─────────────┘ └─────────────┘ │</a:t>
             </a:r>
-            <a:br/>
-            <a:r>
-              <a:rPr sz="900">
+            <a:br>
+              <a:rPr sz="5400" dirty="0"/>
+            </a:br>
+            <a:r>
+              <a:rPr sz="1800" dirty="0">
                 <a:latin typeface="Consolas"/>
               </a:rPr>
               <a:t>└─────────────────────────────────────────────────┘</a:t>
             </a:r>
-            <a:br/>
-            <a:br/>
-            <a:r>
-              <a:rPr sz="900">
+            <a:br>
+              <a:rPr sz="5400" dirty="0"/>
+            </a:br>
+            <a:br>
+              <a:rPr sz="5400" dirty="0"/>
+            </a:br>
+            <a:r>
+              <a:rPr sz="1800" dirty="0">
                 <a:latin typeface="Consolas"/>
               </a:rPr>
               <a:t>Benefit: Basic clients cannot starve Premium clients</a:t>
@@ -5219,7 +7575,7 @@
 </file>
 
 <file path=ppt/slides/slide17.xml><?xml version="1.0" encoding="utf-8"?>
-<p:sld xmlns:a="http://schemas.openxmlformats.org/drawingml/2006/main" xmlns:p="http://schemas.openxmlformats.org/presentationml/2006/main" xmlns:r="http://schemas.openxmlformats.org/officeDocument/2006/relationships">
+<p:sld xmlns:a="http://schemas.openxmlformats.org/drawingml/2006/main" xmlns:r="http://schemas.openxmlformats.org/officeDocument/2006/relationships" xmlns:p="http://schemas.openxmlformats.org/presentationml/2006/main">
   <p:cSld>
     <p:spTree>
       <p:nvGrpSpPr>
@@ -5227,7 +7583,14 @@
         <p:cNvGrpSpPr/>
         <p:nvPr/>
       </p:nvGrpSpPr>
-      <p:grpSpPr/>
+      <p:grpSpPr>
+        <a:xfrm>
+          <a:off x="0" y="0"/>
+          <a:ext cx="0" cy="0"/>
+          <a:chOff x="0" y="0"/>
+          <a:chExt cx="0" cy="0"/>
+        </a:xfrm>
+      </p:grpSpPr>
       <p:sp>
         <p:nvSpPr>
           <p:cNvPr id="2" name="Title 1"/>
@@ -5263,7 +7626,9 @@
         <p:txBody>
           <a:bodyPr/>
           <a:lstStyle/>
-          <a:p/>
+          <a:p>
+            <a:endParaRPr/>
+          </a:p>
         </p:txBody>
       </p:sp>
     </p:spTree>
@@ -5299,121 +7664,272 @@
           <a:bodyPr/>
           <a:lstStyle/>
           <a:p>
-            <a:r>
-              <a:t>DDD Bounded Contexts - Telekom</a:t>
-            </a:r>
-          </a:p>
-        </p:txBody>
-      </p:sp>
-      <p:sp>
-        <p:nvSpPr>
-          <p:cNvPr id="3" name="Content Placeholder 2"/>
-          <p:cNvSpPr>
-            <a:spLocks noGrp="1"/>
-          </p:cNvSpPr>
-          <p:nvPr>
-            <p:ph idx="1"/>
+            <a:pPr>
+              <a:defRPr sz="3200" b="1"/>
+            </a:pPr>
+            <a:r>
+              <a:t>CQRS - Vorteile/Nachteile</a:t>
+            </a:r>
+          </a:p>
+        </p:txBody>
+      </p:sp>
+      <p:sp>
+        <p:nvSpPr>
+          <p:cNvPr id="3" name="Text Placeholder 2"/>
+          <p:cNvSpPr>
+            <a:spLocks noGrp="1"/>
+          </p:cNvSpPr>
+          <p:nvPr>
+            <p:ph type="body" idx="1"/>
           </p:nvPr>
         </p:nvSpPr>
         <p:spPr/>
         <p:txBody>
           <a:bodyPr/>
           <a:lstStyle/>
+          <a:p/>
+        </p:txBody>
+      </p:sp>
+      <p:sp>
+        <p:nvSpPr>
+          <p:cNvPr id="4" name="Content Placeholder 3"/>
+          <p:cNvSpPr>
+            <a:spLocks noGrp="1"/>
+          </p:cNvSpPr>
+          <p:nvPr>
+            <p:ph idx="2" sz="half"/>
+          </p:nvPr>
+        </p:nvSpPr>
+        <p:spPr/>
+        <p:txBody>
+          <a:bodyPr/>
+          <a:lstStyle/>
+          <a:p/>
+        </p:txBody>
+      </p:sp>
+      <p:sp>
+        <p:nvSpPr>
+          <p:cNvPr id="5" name="Text Placeholder 4"/>
+          <p:cNvSpPr>
+            <a:spLocks noGrp="1"/>
+          </p:cNvSpPr>
+          <p:nvPr>
+            <p:ph type="body" idx="3" sz="quarter"/>
+          </p:nvPr>
+        </p:nvSpPr>
+        <p:spPr/>
+        <p:txBody>
+          <a:bodyPr/>
+          <a:lstStyle/>
+          <a:p/>
+        </p:txBody>
+      </p:sp>
+      <p:sp>
+        <p:nvSpPr>
+          <p:cNvPr id="6" name="Content Placeholder 5"/>
+          <p:cNvSpPr>
+            <a:spLocks noGrp="1"/>
+          </p:cNvSpPr>
+          <p:nvPr>
+            <p:ph idx="4" sz="quarter"/>
+          </p:nvPr>
+        </p:nvSpPr>
+        <p:spPr/>
+        <p:txBody>
+          <a:bodyPr/>
+          <a:lstStyle/>
+          <a:p/>
+        </p:txBody>
+      </p:sp>
+      <p:sp>
+        <p:nvSpPr>
+          <p:cNvPr id="7" name="TextBox 6"/>
+          <p:cNvSpPr txBox="1"/>
+          <p:nvPr/>
+        </p:nvSpPr>
+        <p:spPr>
+          <a:xfrm>
+            <a:off x="457200" y="1371600"/>
+            <a:ext cx="4114800" cy="4572000"/>
+          </a:xfrm>
+          <a:prstGeom prst="rect">
+            <a:avLst/>
+          </a:prstGeom>
+          <a:noFill/>
+        </p:spPr>
+        <p:txBody>
+          <a:bodyPr wrap="square">
+            <a:spAutoFit/>
+          </a:bodyPr>
+          <a:lstStyle/>
           <a:p>
             <a:pPr>
-              <a:lnSpc>
-                <a:spcPct val="100000"/>
-              </a:lnSpc>
-              <a:spcBef>
-                <a:spcPts val="0"/>
-              </a:spcBef>
-              <a:spcAft>
-                <a:spcPts val="0"/>
-              </a:spcAft>
+              <a:defRPr sz="2400" b="1">
+                <a:solidFill>
+                  <a:srgbClr val="009900"/>
+                </a:solidFill>
+              </a:defRPr>
             </a:pPr>
             <a:r>
-              <a:rPr sz="900">
-                <a:latin typeface="Consolas"/>
-              </a:rPr>
-              <a:t>┌─────────────────┐    ┌─────────────────┐    ┌─────────────────┐</a:t>
-            </a:r>
-            <a:br/>
-            <a:r>
-              <a:rPr sz="900">
-                <a:latin typeface="Consolas"/>
-              </a:rPr>
-              <a:t>│ Customer        │    │ Billing         │    │ Network         │</a:t>
-            </a:r>
-            <a:br/>
-            <a:r>
-              <a:rPr sz="900">
-                <a:latin typeface="Consolas"/>
-              </a:rPr>
-              <a:t>│ Management      │    │ Context         │    │ Operations      │</a:t>
-            </a:r>
-            <a:br/>
-            <a:r>
-              <a:rPr sz="900">
-                <a:latin typeface="Consolas"/>
-              </a:rPr>
-              <a:t>│                 │    │                 │    │                 │</a:t>
-            </a:r>
-            <a:br/>
-            <a:r>
-              <a:rPr sz="900">
-                <a:latin typeface="Consolas"/>
-              </a:rPr>
-              <a:t>│ - Customer      │◄──►│ - Invoice       │◄──►│ - Device        │</a:t>
-            </a:r>
-            <a:br/>
-            <a:r>
-              <a:rPr sz="900">
-                <a:latin typeface="Consolas"/>
-              </a:rPr>
-              <a:t>│ - Contract      │    │ - Payment       │    │ - Configuration │</a:t>
-            </a:r>
-            <a:br/>
-            <a:r>
-              <a:rPr sz="900">
-                <a:latin typeface="Consolas"/>
-              </a:rPr>
-              <a:t>│ - Profile       │    │ - Tariff        │    │ - Monitoring    │</a:t>
-            </a:r>
-            <a:br/>
-            <a:r>
-              <a:rPr sz="900">
-                <a:latin typeface="Consolas"/>
-              </a:rPr>
-              <a:t>└─────────────────┘    └─────────────────┘    └─────────────────┘</a:t>
-            </a:r>
-            <a:br/>
-            <a:br/>
-            <a:r>
-              <a:rPr sz="900">
-                <a:latin typeface="Consolas"/>
-              </a:rPr>
-              <a:t>Relationships:</a:t>
-            </a:r>
-            <a:br/>
-            <a:r>
-              <a:rPr sz="900">
-                <a:latin typeface="Consolas"/>
-              </a:rPr>
-              <a:t>◄──► Anti-Corruption Layer (ACL)</a:t>
-            </a:r>
-            <a:br/>
-            <a:r>
-              <a:rPr sz="900">
-                <a:latin typeface="Consolas"/>
-              </a:rPr>
-              <a:t>═══► Shared Kernel</a:t>
-            </a:r>
-            <a:br/>
-            <a:r>
-              <a:rPr sz="900">
-                <a:latin typeface="Consolas"/>
-              </a:rPr>
-              <a:t>───► Customer-Supplier</a:t>
+              <a:t>Vorteile ✅</a:t>
+            </a:r>
+          </a:p>
+          <a:p>
+            <a:pPr>
+              <a:defRPr sz="1600"/>
+            </a:pPr>
+            <a:r>
+              <a:t>• Performance: Optimized Data Models für Read/Write Operations</a:t>
+            </a:r>
+          </a:p>
+          <a:p>
+            <a:pPr>
+              <a:defRPr sz="1600"/>
+            </a:pPr>
+            <a:r>
+              <a:t>• Skalierung: Read/Write Operations unabhängig skalierbar</a:t>
+            </a:r>
+          </a:p>
+          <a:p>
+            <a:pPr>
+              <a:defRPr sz="1600"/>
+            </a:pPr>
+            <a:r>
+              <a:t>• Complex Queries: Performance durch denormalized Read Models</a:t>
+            </a:r>
+          </a:p>
+          <a:p>
+            <a:pPr>
+              <a:defRPr sz="1600"/>
+            </a:pPr>
+            <a:r>
+              <a:t>• Event Sourcing Integration: Natürliche Kombination möglich</a:t>
+            </a:r>
+          </a:p>
+        </p:txBody>
+      </p:sp>
+      <p:sp>
+        <p:nvSpPr>
+          <p:cNvPr id="8" name="TextBox 7"/>
+          <p:cNvSpPr txBox="1"/>
+          <p:nvPr/>
+        </p:nvSpPr>
+        <p:spPr>
+          <a:xfrm>
+            <a:off x="4572000" y="1371600"/>
+            <a:ext cx="4114800" cy="4572000"/>
+          </a:xfrm>
+          <a:prstGeom prst="rect">
+            <a:avLst/>
+          </a:prstGeom>
+          <a:noFill/>
+        </p:spPr>
+        <p:txBody>
+          <a:bodyPr wrap="square">
+            <a:spAutoFit/>
+          </a:bodyPr>
+          <a:lstStyle/>
+          <a:p>
+            <a:pPr>
+              <a:defRPr sz="2400" b="1">
+                <a:solidFill>
+                  <a:srgbClr val="CC0000"/>
+                </a:solidFill>
+              </a:defRPr>
+            </a:pPr>
+            <a:r>
+              <a:t>Nachteile ❌</a:t>
+            </a:r>
+          </a:p>
+          <a:p>
+            <a:pPr>
+              <a:defRPr sz="1600"/>
+            </a:pPr>
+            <a:r>
+              <a:t>• Eventual Consistency: zwischen Read/Write Models</a:t>
+            </a:r>
+          </a:p>
+          <a:p>
+            <a:pPr>
+              <a:defRPr sz="1600"/>
+            </a:pPr>
+            <a:r>
+              <a:t>• Maintenance: Doppelte Data Models erhöhen Aufwand</a:t>
+            </a:r>
+          </a:p>
+          <a:p>
+            <a:pPr>
+              <a:defRPr sz="1600"/>
+            </a:pPr>
+            <a:r>
+              <a:t>• Synchronization: Event Sync zwischen Models komplex</a:t>
+            </a:r>
+          </a:p>
+          <a:p>
+            <a:pPr>
+              <a:defRPr sz="1600"/>
+            </a:pPr>
+            <a:r>
+              <a:t>• Over-Engineering: für simple CRUD Applications</a:t>
+            </a:r>
+          </a:p>
+        </p:txBody>
+      </p:sp>
+      <p:sp>
+        <p:nvSpPr>
+          <p:cNvPr id="9" name="TextBox 8"/>
+          <p:cNvSpPr txBox="1"/>
+          <p:nvPr/>
+        </p:nvSpPr>
+        <p:spPr>
+          <a:xfrm>
+            <a:off x="457200" y="5486400"/>
+            <a:ext cx="8229600" cy="914400"/>
+          </a:xfrm>
+          <a:prstGeom prst="rect">
+            <a:avLst/>
+          </a:prstGeom>
+          <a:noFill/>
+        </p:spPr>
+        <p:txBody>
+          <a:bodyPr wrap="square">
+            <a:spAutoFit/>
+          </a:bodyPr>
+          <a:lstStyle/>
+          <a:p>
+            <a:pPr>
+              <a:defRPr sz="2000" b="1">
+                <a:solidFill>
+                  <a:srgbClr val="FF9900"/>
+                </a:solidFill>
+              </a:defRPr>
+            </a:pPr>
+            <a:r>
+              <a:t>Production Considerations ⚠️</a:t>
+            </a:r>
+          </a:p>
+          <a:p>
+            <a:pPr>
+              <a:defRPr sz="1400"/>
+            </a:pPr>
+            <a:r>
+              <a:t>• Event Store für reliable Command/Query Sync</a:t>
+            </a:r>
+          </a:p>
+          <a:p>
+            <a:pPr>
+              <a:defRPr sz="1400"/>
+            </a:pPr>
+            <a:r>
+              <a:t>• Read Model Rebuild Strategy bei Schema Changes</a:t>
+            </a:r>
+          </a:p>
+          <a:p>
+            <a:pPr>
+              <a:defRPr sz="1400"/>
+            </a:pPr>
+            <a:r>
+              <a:t>• Monitoring von Read/Write Model Sync Lag</a:t>
             </a:r>
           </a:p>
         </p:txBody>
@@ -5451,108 +7967,280 @@
           <a:bodyPr/>
           <a:lstStyle/>
           <a:p>
-            <a:r>
-              <a:t>Zusammenfassung - Part 2</a:t>
-            </a:r>
-          </a:p>
-        </p:txBody>
-      </p:sp>
-      <p:sp>
-        <p:nvSpPr>
-          <p:cNvPr id="3" name="Content Placeholder 2"/>
-          <p:cNvSpPr>
-            <a:spLocks noGrp="1"/>
-          </p:cNvSpPr>
-          <p:nvPr>
-            <p:ph idx="1"/>
+            <a:pPr>
+              <a:defRPr sz="3200" b="1"/>
+            </a:pPr>
+            <a:r>
+              <a:t>Event Sourcing - Vorteile/Nachteile</a:t>
+            </a:r>
+          </a:p>
+        </p:txBody>
+      </p:sp>
+      <p:sp>
+        <p:nvSpPr>
+          <p:cNvPr id="3" name="Text Placeholder 2"/>
+          <p:cNvSpPr>
+            <a:spLocks noGrp="1"/>
+          </p:cNvSpPr>
+          <p:nvPr>
+            <p:ph type="body" idx="1"/>
           </p:nvPr>
         </p:nvSpPr>
         <p:spPr/>
         <p:txBody>
           <a:bodyPr/>
           <a:lstStyle/>
-          <a:p>
-            <a:pPr/>
-            <a:r>
-              <a:t>**Pattern-Kombinationen nutzen:**</a:t>
-            </a:r>
-          </a:p>
-          <a:p>
-            <a:pPr lvl="1"/>
-            <a:r>
-              <a:t>• CQRS + Event Sourcing: Für Audit und Performance</a:t>
-            </a:r>
-          </a:p>
-          <a:p>
-            <a:pPr lvl="1"/>
-            <a:r>
-              <a:t>• Microservices + Service Mesh: Für Infrastructure Concerns</a:t>
-            </a:r>
-          </a:p>
-          <a:p>
-            <a:pPr lvl="1"/>
-            <a:r>
-              <a:t>• Circuit Breaker + Bulkhead: Für System Resilience</a:t>
-            </a:r>
-          </a:p>
-          <a:p>
-            <a:pPr lvl="1"/>
-            <a:r>
-              <a:t>• API Gateway + DDD: Für Business-oriented APIs</a:t>
-            </a:r>
-          </a:p>
-          <a:p>
-            <a:pPr/>
-            <a:r>
-              <a:t>**Evolution über Revolution:**</a:t>
-            </a:r>
-          </a:p>
-          <a:p>
-            <a:pPr lvl="1"/>
-            <a:r>
-              <a:t>• Start Simple: Layered Architecture für Prototypen</a:t>
-            </a:r>
-          </a:p>
-          <a:p>
-            <a:pPr lvl="1"/>
-            <a:r>
-              <a:t>• Scale Systematically: Microservices für große Teams</a:t>
-            </a:r>
-          </a:p>
-          <a:p>
-            <a:pPr lvl="1"/>
-            <a:r>
-              <a:t>• Optimize Specifically: CQRS/Event Sourcing für Performance</a:t>
-            </a:r>
-          </a:p>
-          <a:p>
-            <a:pPr/>
-            <a:r>
-              <a:t>**Telekom-spezifische Guidance:**</a:t>
-            </a:r>
-          </a:p>
-          <a:p>
-            <a:pPr/>
-            <a:r>
-              <a:t>✅ Network Operations: Event-Driven + CQRS</a:t>
-            </a:r>
-          </a:p>
-          <a:p>
-            <a:pPr/>
-            <a:r>
-              <a:t>✅ Customer Management: DDD + Event Sourcing</a:t>
-            </a:r>
-          </a:p>
-          <a:p>
-            <a:pPr/>
-            <a:r>
-              <a:t>✅ Billing Systems: Saga Pattern</a:t>
-            </a:r>
-          </a:p>
-          <a:p>
-            <a:pPr/>
-            <a:r>
-              <a:t>✅ Legacy Integration: Strangler Fig Pattern</a:t>
+          <a:p/>
+        </p:txBody>
+      </p:sp>
+      <p:sp>
+        <p:nvSpPr>
+          <p:cNvPr id="4" name="Content Placeholder 3"/>
+          <p:cNvSpPr>
+            <a:spLocks noGrp="1"/>
+          </p:cNvSpPr>
+          <p:nvPr>
+            <p:ph idx="2" sz="half"/>
+          </p:nvPr>
+        </p:nvSpPr>
+        <p:spPr/>
+        <p:txBody>
+          <a:bodyPr/>
+          <a:lstStyle/>
+          <a:p/>
+        </p:txBody>
+      </p:sp>
+      <p:sp>
+        <p:nvSpPr>
+          <p:cNvPr id="5" name="Text Placeholder 4"/>
+          <p:cNvSpPr>
+            <a:spLocks noGrp="1"/>
+          </p:cNvSpPr>
+          <p:nvPr>
+            <p:ph type="body" idx="3" sz="quarter"/>
+          </p:nvPr>
+        </p:nvSpPr>
+        <p:spPr/>
+        <p:txBody>
+          <a:bodyPr/>
+          <a:lstStyle/>
+          <a:p/>
+        </p:txBody>
+      </p:sp>
+      <p:sp>
+        <p:nvSpPr>
+          <p:cNvPr id="6" name="Content Placeholder 5"/>
+          <p:cNvSpPr>
+            <a:spLocks noGrp="1"/>
+          </p:cNvSpPr>
+          <p:nvPr>
+            <p:ph idx="4" sz="quarter"/>
+          </p:nvPr>
+        </p:nvSpPr>
+        <p:spPr/>
+        <p:txBody>
+          <a:bodyPr/>
+          <a:lstStyle/>
+          <a:p/>
+        </p:txBody>
+      </p:sp>
+      <p:sp>
+        <p:nvSpPr>
+          <p:cNvPr id="7" name="TextBox 6"/>
+          <p:cNvSpPr txBox="1"/>
+          <p:nvPr/>
+        </p:nvSpPr>
+        <p:spPr>
+          <a:xfrm>
+            <a:off x="457200" y="1371600"/>
+            <a:ext cx="4114800" cy="4572000"/>
+          </a:xfrm>
+          <a:prstGeom prst="rect">
+            <a:avLst/>
+          </a:prstGeom>
+          <a:noFill/>
+        </p:spPr>
+        <p:txBody>
+          <a:bodyPr wrap="square">
+            <a:spAutoFit/>
+          </a:bodyPr>
+          <a:lstStyle/>
+          <a:p>
+            <a:pPr>
+              <a:defRPr sz="2400" b="1">
+                <a:solidFill>
+                  <a:srgbClr val="009900"/>
+                </a:solidFill>
+              </a:defRPr>
+            </a:pPr>
+            <a:r>
+              <a:t>Vorteile ✅</a:t>
+            </a:r>
+          </a:p>
+          <a:p>
+            <a:pPr>
+              <a:defRPr sz="1600"/>
+            </a:pPr>
+            <a:r>
+              <a:t>• Complete Audit Trail: für Compliance</a:t>
+            </a:r>
+          </a:p>
+          <a:p>
+            <a:pPr>
+              <a:defRPr sz="1600"/>
+            </a:pPr>
+            <a:r>
+              <a:t>• Time Travel: für Debugging und Analysis</a:t>
+            </a:r>
+          </a:p>
+          <a:p>
+            <a:pPr>
+              <a:defRPr sz="1600"/>
+            </a:pPr>
+            <a:r>
+              <a:t>• Event Replay: für verschiedene Projections</a:t>
+            </a:r>
+          </a:p>
+          <a:p>
+            <a:pPr>
+              <a:defRPr sz="1600"/>
+            </a:pPr>
+            <a:r>
+              <a:t>• Natural fit: für Event-Driven Architecture</a:t>
+            </a:r>
+          </a:p>
+        </p:txBody>
+      </p:sp>
+      <p:sp>
+        <p:nvSpPr>
+          <p:cNvPr id="8" name="TextBox 7"/>
+          <p:cNvSpPr txBox="1"/>
+          <p:nvPr/>
+        </p:nvSpPr>
+        <p:spPr>
+          <a:xfrm>
+            <a:off x="4572000" y="1371600"/>
+            <a:ext cx="4114800" cy="4572000"/>
+          </a:xfrm>
+          <a:prstGeom prst="rect">
+            <a:avLst/>
+          </a:prstGeom>
+          <a:noFill/>
+        </p:spPr>
+        <p:txBody>
+          <a:bodyPr wrap="square">
+            <a:spAutoFit/>
+          </a:bodyPr>
+          <a:lstStyle/>
+          <a:p>
+            <a:pPr>
+              <a:defRPr sz="2400" b="1">
+                <a:solidFill>
+                  <a:srgbClr val="CC0000"/>
+                </a:solidFill>
+              </a:defRPr>
+            </a:pPr>
+            <a:r>
+              <a:t>Nachteile ❌</a:t>
+            </a:r>
+          </a:p>
+          <a:p>
+            <a:pPr>
+              <a:defRPr sz="1600"/>
+            </a:pPr>
+            <a:r>
+              <a:t>• Storage Requirements: wachsen monoton</a:t>
+            </a:r>
+          </a:p>
+          <a:p>
+            <a:pPr>
+              <a:defRPr sz="1600"/>
+            </a:pPr>
+            <a:r>
+              <a:t>• Event Schema Evolution: challenging</a:t>
+            </a:r>
+          </a:p>
+          <a:p>
+            <a:pPr>
+              <a:defRPr sz="1600"/>
+            </a:pPr>
+            <a:r>
+              <a:t>• Query Performance: für Complex Projections</a:t>
+            </a:r>
+          </a:p>
+          <a:p>
+            <a:pPr>
+              <a:defRPr sz="1600"/>
+            </a:pPr>
+            <a:r>
+              <a:t>• Learning Curve: für Traditional SQL Developers</a:t>
+            </a:r>
+          </a:p>
+        </p:txBody>
+      </p:sp>
+      <p:sp>
+        <p:nvSpPr>
+          <p:cNvPr id="9" name="TextBox 8"/>
+          <p:cNvSpPr txBox="1"/>
+          <p:nvPr/>
+        </p:nvSpPr>
+        <p:spPr>
+          <a:xfrm>
+            <a:off x="457200" y="5486400"/>
+            <a:ext cx="8229600" cy="914400"/>
+          </a:xfrm>
+          <a:prstGeom prst="rect">
+            <a:avLst/>
+          </a:prstGeom>
+          <a:noFill/>
+        </p:spPr>
+        <p:txBody>
+          <a:bodyPr wrap="square">
+            <a:spAutoFit/>
+          </a:bodyPr>
+          <a:lstStyle/>
+          <a:p>
+            <a:pPr>
+              <a:defRPr sz="2000" b="1">
+                <a:solidFill>
+                  <a:srgbClr val="FF9900"/>
+                </a:solidFill>
+              </a:defRPr>
+            </a:pPr>
+            <a:r>
+              <a:t>Production Considerations ⚠️</a:t>
+            </a:r>
+          </a:p>
+          <a:p>
+            <a:pPr>
+              <a:defRPr sz="1400"/>
+            </a:pPr>
+            <a:r>
+              <a:t>• Event Store Snapshots für Performance</a:t>
+            </a:r>
+          </a:p>
+          <a:p>
+            <a:pPr>
+              <a:defRPr sz="1400"/>
+            </a:pPr>
+            <a:r>
+              <a:t>• Event Schema Versioning Strategy</a:t>
+            </a:r>
+          </a:p>
+          <a:p>
+            <a:pPr>
+              <a:defRPr sz="1400"/>
+            </a:pPr>
+            <a:r>
+              <a:t>• Projection Rebuild für Schema Changes</a:t>
+            </a:r>
+          </a:p>
+          <a:p>
+            <a:pPr>
+              <a:defRPr sz="1400"/>
+            </a:pPr>
+            <a:r>
+              <a:t>• Event Store Backup und Recovery</a:t>
             </a:r>
           </a:p>
         </p:txBody>
@@ -5566,6 +8254,73 @@
 </file>
 
 <file path=ppt/slides/slide2.xml><?xml version="1.0" encoding="utf-8"?>
+<p:sld xmlns:a="http://schemas.openxmlformats.org/drawingml/2006/main" xmlns:r="http://schemas.openxmlformats.org/officeDocument/2006/relationships" xmlns:p="http://schemas.openxmlformats.org/presentationml/2006/main">
+  <p:cSld>
+    <p:spTree>
+      <p:nvGrpSpPr>
+        <p:cNvPr id="1" name=""/>
+        <p:cNvGrpSpPr/>
+        <p:nvPr/>
+      </p:nvGrpSpPr>
+      <p:grpSpPr>
+        <a:xfrm>
+          <a:off x="0" y="0"/>
+          <a:ext cx="0" cy="0"/>
+          <a:chOff x="0" y="0"/>
+          <a:chExt cx="0" cy="0"/>
+        </a:xfrm>
+      </p:grpSpPr>
+      <p:sp>
+        <p:nvSpPr>
+          <p:cNvPr id="2" name="Title 1"/>
+          <p:cNvSpPr>
+            <a:spLocks noGrp="1"/>
+          </p:cNvSpPr>
+          <p:nvPr>
+            <p:ph type="ctrTitle"/>
+          </p:nvPr>
+        </p:nvSpPr>
+        <p:spPr/>
+        <p:txBody>
+          <a:bodyPr>
+            <a:normAutofit fontScale="90000"/>
+          </a:bodyPr>
+          <a:lstStyle/>
+          <a:p>
+            <a:r>
+              <a:t>CQRS (Command Query Responsibility Segregation)</a:t>
+            </a:r>
+          </a:p>
+        </p:txBody>
+      </p:sp>
+      <p:sp>
+        <p:nvSpPr>
+          <p:cNvPr id="3" name="Subtitle 2"/>
+          <p:cNvSpPr>
+            <a:spLocks noGrp="1"/>
+          </p:cNvSpPr>
+          <p:nvPr>
+            <p:ph type="subTitle" idx="1"/>
+          </p:nvPr>
+        </p:nvSpPr>
+        <p:spPr/>
+        <p:txBody>
+          <a:bodyPr/>
+          <a:lstStyle/>
+          <a:p>
+            <a:endParaRPr/>
+          </a:p>
+        </p:txBody>
+      </p:sp>
+    </p:spTree>
+  </p:cSld>
+  <p:clrMapOvr>
+    <a:masterClrMapping/>
+  </p:clrMapOvr>
+</p:sld>
+</file>
+
+<file path=ppt/slides/slide20.xml><?xml version="1.0" encoding="utf-8"?>
 <p:sld xmlns:a="http://schemas.openxmlformats.org/drawingml/2006/main" xmlns:p="http://schemas.openxmlformats.org/presentationml/2006/main" xmlns:r="http://schemas.openxmlformats.org/officeDocument/2006/relationships">
   <p:cSld>
     <p:spTree>
@@ -5582,7 +8337,7 @@
             <a:spLocks noGrp="1"/>
           </p:cNvSpPr>
           <p:nvPr>
-            <p:ph type="ctrTitle"/>
+            <p:ph type="title"/>
           </p:nvPr>
         </p:nvSpPr>
         <p:spPr/>
@@ -5590,20 +8345,23 @@
           <a:bodyPr/>
           <a:lstStyle/>
           <a:p>
-            <a:r>
-              <a:t>CQRS (Command Query Responsibility Segregation)</a:t>
-            </a:r>
-          </a:p>
-        </p:txBody>
-      </p:sp>
-      <p:sp>
-        <p:nvSpPr>
-          <p:cNvPr id="3" name="Subtitle 2"/>
-          <p:cNvSpPr>
-            <a:spLocks noGrp="1"/>
-          </p:cNvSpPr>
-          <p:nvPr>
-            <p:ph type="subTitle" idx="1"/>
+            <a:pPr>
+              <a:defRPr sz="3200" b="1"/>
+            </a:pPr>
+            <a:r>
+              <a:t>Circuit Breaker - Vorteile/Nachteile</a:t>
+            </a:r>
+          </a:p>
+        </p:txBody>
+      </p:sp>
+      <p:sp>
+        <p:nvSpPr>
+          <p:cNvPr id="3" name="Text Placeholder 2"/>
+          <p:cNvSpPr>
+            <a:spLocks noGrp="1"/>
+          </p:cNvSpPr>
+          <p:nvPr>
+            <p:ph type="body" idx="1"/>
           </p:nvPr>
         </p:nvSpPr>
         <p:spPr/>
@@ -5611,6 +8369,1411 @@
           <a:bodyPr/>
           <a:lstStyle/>
           <a:p/>
+        </p:txBody>
+      </p:sp>
+      <p:sp>
+        <p:nvSpPr>
+          <p:cNvPr id="4" name="Content Placeholder 3"/>
+          <p:cNvSpPr>
+            <a:spLocks noGrp="1"/>
+          </p:cNvSpPr>
+          <p:nvPr>
+            <p:ph idx="2" sz="half"/>
+          </p:nvPr>
+        </p:nvSpPr>
+        <p:spPr/>
+        <p:txBody>
+          <a:bodyPr/>
+          <a:lstStyle/>
+          <a:p/>
+        </p:txBody>
+      </p:sp>
+      <p:sp>
+        <p:nvSpPr>
+          <p:cNvPr id="5" name="Text Placeholder 4"/>
+          <p:cNvSpPr>
+            <a:spLocks noGrp="1"/>
+          </p:cNvSpPr>
+          <p:nvPr>
+            <p:ph type="body" idx="3" sz="quarter"/>
+          </p:nvPr>
+        </p:nvSpPr>
+        <p:spPr/>
+        <p:txBody>
+          <a:bodyPr/>
+          <a:lstStyle/>
+          <a:p/>
+        </p:txBody>
+      </p:sp>
+      <p:sp>
+        <p:nvSpPr>
+          <p:cNvPr id="6" name="Content Placeholder 5"/>
+          <p:cNvSpPr>
+            <a:spLocks noGrp="1"/>
+          </p:cNvSpPr>
+          <p:nvPr>
+            <p:ph idx="4" sz="quarter"/>
+          </p:nvPr>
+        </p:nvSpPr>
+        <p:spPr/>
+        <p:txBody>
+          <a:bodyPr/>
+          <a:lstStyle/>
+          <a:p/>
+        </p:txBody>
+      </p:sp>
+      <p:sp>
+        <p:nvSpPr>
+          <p:cNvPr id="7" name="TextBox 6"/>
+          <p:cNvSpPr txBox="1"/>
+          <p:nvPr/>
+        </p:nvSpPr>
+        <p:spPr>
+          <a:xfrm>
+            <a:off x="457200" y="1371600"/>
+            <a:ext cx="4114800" cy="4572000"/>
+          </a:xfrm>
+          <a:prstGeom prst="rect">
+            <a:avLst/>
+          </a:prstGeom>
+          <a:noFill/>
+        </p:spPr>
+        <p:txBody>
+          <a:bodyPr wrap="square">
+            <a:spAutoFit/>
+          </a:bodyPr>
+          <a:lstStyle/>
+          <a:p>
+            <a:pPr>
+              <a:defRPr sz="2400" b="1">
+                <a:solidFill>
+                  <a:srgbClr val="009900"/>
+                </a:solidFill>
+              </a:defRPr>
+            </a:pPr>
+            <a:r>
+              <a:t>Vorteile ✅</a:t>
+            </a:r>
+          </a:p>
+          <a:p>
+            <a:pPr>
+              <a:defRPr sz="1600"/>
+            </a:pPr>
+            <a:r>
+              <a:t>• Verhindert Cascading Failures in verteilten Systemen</a:t>
+            </a:r>
+          </a:p>
+          <a:p>
+            <a:pPr>
+              <a:defRPr sz="1600"/>
+            </a:pPr>
+            <a:r>
+              <a:t>• Schnelles Fail-Fast Verhalten statt langsame Timeouts</a:t>
+            </a:r>
+          </a:p>
+          <a:p>
+            <a:pPr>
+              <a:defRPr sz="1600"/>
+            </a:pPr>
+            <a:r>
+              <a:t>• Automatische Recovery durch Health Checks</a:t>
+            </a:r>
+          </a:p>
+          <a:p>
+            <a:pPr>
+              <a:defRPr sz="1600"/>
+            </a:pPr>
+            <a:r>
+              <a:t>• Monitoring und Alerting für Service Dependencies</a:t>
+            </a:r>
+          </a:p>
+        </p:txBody>
+      </p:sp>
+      <p:sp>
+        <p:nvSpPr>
+          <p:cNvPr id="8" name="TextBox 7"/>
+          <p:cNvSpPr txBox="1"/>
+          <p:nvPr/>
+        </p:nvSpPr>
+        <p:spPr>
+          <a:xfrm>
+            <a:off x="4572000" y="1371600"/>
+            <a:ext cx="4114800" cy="4572000"/>
+          </a:xfrm>
+          <a:prstGeom prst="rect">
+            <a:avLst/>
+          </a:prstGeom>
+          <a:noFill/>
+        </p:spPr>
+        <p:txBody>
+          <a:bodyPr wrap="square">
+            <a:spAutoFit/>
+          </a:bodyPr>
+          <a:lstStyle/>
+          <a:p>
+            <a:pPr>
+              <a:defRPr sz="2400" b="1">
+                <a:solidFill>
+                  <a:srgbClr val="CC0000"/>
+                </a:solidFill>
+              </a:defRPr>
+            </a:pPr>
+            <a:r>
+              <a:t>Nachteile ❌</a:t>
+            </a:r>
+          </a:p>
+          <a:p>
+            <a:pPr>
+              <a:defRPr sz="1600"/>
+            </a:pPr>
+            <a:r>
+              <a:t>• Zusätzliche Complexity in Service Integration</a:t>
+            </a:r>
+          </a:p>
+          <a:p>
+            <a:pPr>
+              <a:defRPr sz="1600"/>
+            </a:pPr>
+            <a:r>
+              <a:t>• Konfiguration von Thresholds und Timeouts erforderlich</a:t>
+            </a:r>
+          </a:p>
+          <a:p>
+            <a:pPr>
+              <a:defRPr sz="1600"/>
+            </a:pPr>
+            <a:r>
+              <a:t>• False Positives können zu unnötigen Ausfällen führen</a:t>
+            </a:r>
+          </a:p>
+          <a:p>
+            <a:pPr>
+              <a:defRPr sz="1600"/>
+            </a:pPr>
+            <a:r>
+              <a:t>• Debugging wird komplexer durch zusätzliche Abstraction</a:t>
+            </a:r>
+          </a:p>
+        </p:txBody>
+      </p:sp>
+    </p:spTree>
+  </p:cSld>
+  <p:clrMapOvr>
+    <a:masterClrMapping/>
+  </p:clrMapOvr>
+</p:sld>
+</file>
+
+<file path=ppt/slides/slide21.xml><?xml version="1.0" encoding="utf-8"?>
+<p:sld xmlns:a="http://schemas.openxmlformats.org/drawingml/2006/main" xmlns:p="http://schemas.openxmlformats.org/presentationml/2006/main" xmlns:r="http://schemas.openxmlformats.org/officeDocument/2006/relationships">
+  <p:cSld>
+    <p:spTree>
+      <p:nvGrpSpPr>
+        <p:cNvPr id="1" name=""/>
+        <p:cNvGrpSpPr/>
+        <p:nvPr/>
+      </p:nvGrpSpPr>
+      <p:grpSpPr/>
+      <p:sp>
+        <p:nvSpPr>
+          <p:cNvPr id="2" name="Title 1"/>
+          <p:cNvSpPr>
+            <a:spLocks noGrp="1"/>
+          </p:cNvSpPr>
+          <p:nvPr>
+            <p:ph type="title"/>
+          </p:nvPr>
+        </p:nvSpPr>
+        <p:spPr/>
+        <p:txBody>
+          <a:bodyPr/>
+          <a:lstStyle/>
+          <a:p>
+            <a:pPr>
+              <a:defRPr sz="3200" b="1"/>
+            </a:pPr>
+            <a:r>
+              <a:t>Saga Pattern - Vorteile/Nachteile</a:t>
+            </a:r>
+          </a:p>
+        </p:txBody>
+      </p:sp>
+      <p:sp>
+        <p:nvSpPr>
+          <p:cNvPr id="3" name="Text Placeholder 2"/>
+          <p:cNvSpPr>
+            <a:spLocks noGrp="1"/>
+          </p:cNvSpPr>
+          <p:nvPr>
+            <p:ph type="body" idx="1"/>
+          </p:nvPr>
+        </p:nvSpPr>
+        <p:spPr/>
+        <p:txBody>
+          <a:bodyPr/>
+          <a:lstStyle/>
+          <a:p/>
+        </p:txBody>
+      </p:sp>
+      <p:sp>
+        <p:nvSpPr>
+          <p:cNvPr id="4" name="Content Placeholder 3"/>
+          <p:cNvSpPr>
+            <a:spLocks noGrp="1"/>
+          </p:cNvSpPr>
+          <p:nvPr>
+            <p:ph idx="2" sz="half"/>
+          </p:nvPr>
+        </p:nvSpPr>
+        <p:spPr/>
+        <p:txBody>
+          <a:bodyPr/>
+          <a:lstStyle/>
+          <a:p/>
+        </p:txBody>
+      </p:sp>
+      <p:sp>
+        <p:nvSpPr>
+          <p:cNvPr id="5" name="Text Placeholder 4"/>
+          <p:cNvSpPr>
+            <a:spLocks noGrp="1"/>
+          </p:cNvSpPr>
+          <p:nvPr>
+            <p:ph type="body" idx="3" sz="quarter"/>
+          </p:nvPr>
+        </p:nvSpPr>
+        <p:spPr/>
+        <p:txBody>
+          <a:bodyPr/>
+          <a:lstStyle/>
+          <a:p/>
+        </p:txBody>
+      </p:sp>
+      <p:sp>
+        <p:nvSpPr>
+          <p:cNvPr id="6" name="Content Placeholder 5"/>
+          <p:cNvSpPr>
+            <a:spLocks noGrp="1"/>
+          </p:cNvSpPr>
+          <p:nvPr>
+            <p:ph idx="4" sz="quarter"/>
+          </p:nvPr>
+        </p:nvSpPr>
+        <p:spPr/>
+        <p:txBody>
+          <a:bodyPr/>
+          <a:lstStyle/>
+          <a:p/>
+        </p:txBody>
+      </p:sp>
+      <p:sp>
+        <p:nvSpPr>
+          <p:cNvPr id="7" name="TextBox 6"/>
+          <p:cNvSpPr txBox="1"/>
+          <p:nvPr/>
+        </p:nvSpPr>
+        <p:spPr>
+          <a:xfrm>
+            <a:off x="457200" y="1371600"/>
+            <a:ext cx="4114800" cy="4572000"/>
+          </a:xfrm>
+          <a:prstGeom prst="rect">
+            <a:avLst/>
+          </a:prstGeom>
+          <a:noFill/>
+        </p:spPr>
+        <p:txBody>
+          <a:bodyPr wrap="square">
+            <a:spAutoFit/>
+          </a:bodyPr>
+          <a:lstStyle/>
+          <a:p>
+            <a:pPr>
+              <a:defRPr sz="2400" b="1">
+                <a:solidFill>
+                  <a:srgbClr val="009900"/>
+                </a:solidFill>
+              </a:defRPr>
+            </a:pPr>
+            <a:r>
+              <a:t>Vorteile ✅</a:t>
+            </a:r>
+          </a:p>
+          <a:p>
+            <a:pPr>
+              <a:defRPr sz="1600"/>
+            </a:pPr>
+            <a:r>
+              <a:t>• Verteilte Transaktionen ohne 2-Phase-Commit</a:t>
+            </a:r>
+          </a:p>
+          <a:p>
+            <a:pPr>
+              <a:defRPr sz="1600"/>
+            </a:pPr>
+            <a:r>
+              <a:t>• Bessere Performance als traditionelle ACID Transaktionen</a:t>
+            </a:r>
+          </a:p>
+          <a:p>
+            <a:pPr>
+              <a:defRPr sz="1600"/>
+            </a:pPr>
+            <a:r>
+              <a:t>• Flexible Compensation Logic für Rollbacks</a:t>
+            </a:r>
+          </a:p>
+          <a:p>
+            <a:pPr>
+              <a:defRPr sz="1600"/>
+            </a:pPr>
+            <a:r>
+              <a:t>• Natürliche Integration mit Event-Driven Architecture</a:t>
+            </a:r>
+          </a:p>
+        </p:txBody>
+      </p:sp>
+      <p:sp>
+        <p:nvSpPr>
+          <p:cNvPr id="8" name="TextBox 7"/>
+          <p:cNvSpPr txBox="1"/>
+          <p:nvPr/>
+        </p:nvSpPr>
+        <p:spPr>
+          <a:xfrm>
+            <a:off x="4572000" y="1371600"/>
+            <a:ext cx="4114800" cy="4572000"/>
+          </a:xfrm>
+          <a:prstGeom prst="rect">
+            <a:avLst/>
+          </a:prstGeom>
+          <a:noFill/>
+        </p:spPr>
+        <p:txBody>
+          <a:bodyPr wrap="square">
+            <a:spAutoFit/>
+          </a:bodyPr>
+          <a:lstStyle/>
+          <a:p>
+            <a:pPr>
+              <a:defRPr sz="2400" b="1">
+                <a:solidFill>
+                  <a:srgbClr val="CC0000"/>
+                </a:solidFill>
+              </a:defRPr>
+            </a:pPr>
+            <a:r>
+              <a:t>Nachteile ❌</a:t>
+            </a:r>
+          </a:p>
+          <a:p>
+            <a:pPr>
+              <a:defRPr sz="1600"/>
+            </a:pPr>
+            <a:r>
+              <a:t>• Eventual Consistency statt ACID Guarantees</a:t>
+            </a:r>
+          </a:p>
+          <a:p>
+            <a:pPr>
+              <a:defRPr sz="1600"/>
+            </a:pPr>
+            <a:r>
+              <a:t>• Komplexe Rollback Logic (Compensating Actions)</a:t>
+            </a:r>
+          </a:p>
+          <a:p>
+            <a:pPr>
+              <a:defRPr sz="1600"/>
+            </a:pPr>
+            <a:r>
+              <a:t>• Debugging von Saga Flows schwierig</a:t>
+            </a:r>
+          </a:p>
+          <a:p>
+            <a:pPr>
+              <a:defRPr sz="1600"/>
+            </a:pPr>
+            <a:r>
+              <a:t>• Zusätzlicher Overhead für State Management</a:t>
+            </a:r>
+          </a:p>
+        </p:txBody>
+      </p:sp>
+    </p:spTree>
+  </p:cSld>
+  <p:clrMapOvr>
+    <a:masterClrMapping/>
+  </p:clrMapOvr>
+</p:sld>
+</file>
+
+<file path=ppt/slides/slide22.xml><?xml version="1.0" encoding="utf-8"?>
+<p:sld xmlns:a="http://schemas.openxmlformats.org/drawingml/2006/main" xmlns:p="http://schemas.openxmlformats.org/presentationml/2006/main" xmlns:r="http://schemas.openxmlformats.org/officeDocument/2006/relationships">
+  <p:cSld>
+    <p:spTree>
+      <p:nvGrpSpPr>
+        <p:cNvPr id="1" name=""/>
+        <p:cNvGrpSpPr/>
+        <p:nvPr/>
+      </p:nvGrpSpPr>
+      <p:grpSpPr/>
+      <p:sp>
+        <p:nvSpPr>
+          <p:cNvPr id="2" name="Title 1"/>
+          <p:cNvSpPr>
+            <a:spLocks noGrp="1"/>
+          </p:cNvSpPr>
+          <p:nvPr>
+            <p:ph type="title"/>
+          </p:nvPr>
+        </p:nvSpPr>
+        <p:spPr/>
+        <p:txBody>
+          <a:bodyPr/>
+          <a:lstStyle/>
+          <a:p>
+            <a:pPr>
+              <a:defRPr sz="3200" b="1"/>
+            </a:pPr>
+            <a:r>
+              <a:t>API Gateway - Vorteile/Nachteile</a:t>
+            </a:r>
+          </a:p>
+        </p:txBody>
+      </p:sp>
+      <p:sp>
+        <p:nvSpPr>
+          <p:cNvPr id="3" name="Text Placeholder 2"/>
+          <p:cNvSpPr>
+            <a:spLocks noGrp="1"/>
+          </p:cNvSpPr>
+          <p:nvPr>
+            <p:ph type="body" idx="1"/>
+          </p:nvPr>
+        </p:nvSpPr>
+        <p:spPr/>
+        <p:txBody>
+          <a:bodyPr/>
+          <a:lstStyle/>
+          <a:p/>
+        </p:txBody>
+      </p:sp>
+      <p:sp>
+        <p:nvSpPr>
+          <p:cNvPr id="4" name="Content Placeholder 3"/>
+          <p:cNvSpPr>
+            <a:spLocks noGrp="1"/>
+          </p:cNvSpPr>
+          <p:nvPr>
+            <p:ph idx="2" sz="half"/>
+          </p:nvPr>
+        </p:nvSpPr>
+        <p:spPr/>
+        <p:txBody>
+          <a:bodyPr/>
+          <a:lstStyle/>
+          <a:p/>
+        </p:txBody>
+      </p:sp>
+      <p:sp>
+        <p:nvSpPr>
+          <p:cNvPr id="5" name="Text Placeholder 4"/>
+          <p:cNvSpPr>
+            <a:spLocks noGrp="1"/>
+          </p:cNvSpPr>
+          <p:nvPr>
+            <p:ph type="body" idx="3" sz="quarter"/>
+          </p:nvPr>
+        </p:nvSpPr>
+        <p:spPr/>
+        <p:txBody>
+          <a:bodyPr/>
+          <a:lstStyle/>
+          <a:p/>
+        </p:txBody>
+      </p:sp>
+      <p:sp>
+        <p:nvSpPr>
+          <p:cNvPr id="6" name="Content Placeholder 5"/>
+          <p:cNvSpPr>
+            <a:spLocks noGrp="1"/>
+          </p:cNvSpPr>
+          <p:nvPr>
+            <p:ph idx="4" sz="quarter"/>
+          </p:nvPr>
+        </p:nvSpPr>
+        <p:spPr/>
+        <p:txBody>
+          <a:bodyPr/>
+          <a:lstStyle/>
+          <a:p/>
+        </p:txBody>
+      </p:sp>
+      <p:sp>
+        <p:nvSpPr>
+          <p:cNvPr id="7" name="TextBox 6"/>
+          <p:cNvSpPr txBox="1"/>
+          <p:nvPr/>
+        </p:nvSpPr>
+        <p:spPr>
+          <a:xfrm>
+            <a:off x="457200" y="1371600"/>
+            <a:ext cx="4114800" cy="4572000"/>
+          </a:xfrm>
+          <a:prstGeom prst="rect">
+            <a:avLst/>
+          </a:prstGeom>
+          <a:noFill/>
+        </p:spPr>
+        <p:txBody>
+          <a:bodyPr wrap="square">
+            <a:spAutoFit/>
+          </a:bodyPr>
+          <a:lstStyle/>
+          <a:p>
+            <a:pPr>
+              <a:defRPr sz="2400" b="1">
+                <a:solidFill>
+                  <a:srgbClr val="009900"/>
+                </a:solidFill>
+              </a:defRPr>
+            </a:pPr>
+            <a:r>
+              <a:t>Vorteile ✅</a:t>
+            </a:r>
+          </a:p>
+          <a:p>
+            <a:pPr>
+              <a:defRPr sz="1600"/>
+            </a:pPr>
+            <a:r>
+              <a:t>• Zentraler Entry Point für alle Client Requests</a:t>
+            </a:r>
+          </a:p>
+          <a:p>
+            <a:pPr>
+              <a:defRPr sz="1600"/>
+            </a:pPr>
+            <a:r>
+              <a:t>• Cross-cutting Concerns (Auth, Logging, Rate Limiting) zentral</a:t>
+            </a:r>
+          </a:p>
+          <a:p>
+            <a:pPr>
+              <a:defRPr sz="1600"/>
+            </a:pPr>
+            <a:r>
+              <a:t>• Service Discovery Abstraktion für Clients</a:t>
+            </a:r>
+          </a:p>
+          <a:p>
+            <a:pPr>
+              <a:defRPr sz="1600"/>
+            </a:pPr>
+            <a:r>
+              <a:t>• API Versioning und Evolution vereinfacht</a:t>
+            </a:r>
+          </a:p>
+        </p:txBody>
+      </p:sp>
+      <p:sp>
+        <p:nvSpPr>
+          <p:cNvPr id="8" name="TextBox 7"/>
+          <p:cNvSpPr txBox="1"/>
+          <p:nvPr/>
+        </p:nvSpPr>
+        <p:spPr>
+          <a:xfrm>
+            <a:off x="4572000" y="1371600"/>
+            <a:ext cx="4114800" cy="4572000"/>
+          </a:xfrm>
+          <a:prstGeom prst="rect">
+            <a:avLst/>
+          </a:prstGeom>
+          <a:noFill/>
+        </p:spPr>
+        <p:txBody>
+          <a:bodyPr wrap="square">
+            <a:spAutoFit/>
+          </a:bodyPr>
+          <a:lstStyle/>
+          <a:p>
+            <a:pPr>
+              <a:defRPr sz="2400" b="1">
+                <a:solidFill>
+                  <a:srgbClr val="CC0000"/>
+                </a:solidFill>
+              </a:defRPr>
+            </a:pPr>
+            <a:r>
+              <a:t>Nachteile ❌</a:t>
+            </a:r>
+          </a:p>
+          <a:p>
+            <a:pPr>
+              <a:defRPr sz="1600"/>
+            </a:pPr>
+            <a:r>
+              <a:t>• Single Point of Failure ohne High Availability</a:t>
+            </a:r>
+          </a:p>
+          <a:p>
+            <a:pPr>
+              <a:defRPr sz="1600"/>
+            </a:pPr>
+            <a:r>
+              <a:t>• Performance Bottleneck bei hohem Traffic</a:t>
+            </a:r>
+          </a:p>
+          <a:p>
+            <a:pPr>
+              <a:defRPr sz="1600"/>
+            </a:pPr>
+            <a:r>
+              <a:t>• Zusätzliche Latency durch Proxy Layer</a:t>
+            </a:r>
+          </a:p>
+          <a:p>
+            <a:pPr>
+              <a:defRPr sz="1600"/>
+            </a:pPr>
+            <a:r>
+              <a:t>• Gateway selbst wird zu komplexem System</a:t>
+            </a:r>
+          </a:p>
+        </p:txBody>
+      </p:sp>
+    </p:spTree>
+  </p:cSld>
+  <p:clrMapOvr>
+    <a:masterClrMapping/>
+  </p:clrMapOvr>
+</p:sld>
+</file>
+
+<file path=ppt/slides/slide23.xml><?xml version="1.0" encoding="utf-8"?>
+<p:sld xmlns:a="http://schemas.openxmlformats.org/drawingml/2006/main" xmlns:p="http://schemas.openxmlformats.org/presentationml/2006/main" xmlns:r="http://schemas.openxmlformats.org/officeDocument/2006/relationships">
+  <p:cSld>
+    <p:spTree>
+      <p:nvGrpSpPr>
+        <p:cNvPr id="1" name=""/>
+        <p:cNvGrpSpPr/>
+        <p:nvPr/>
+      </p:nvGrpSpPr>
+      <p:grpSpPr/>
+      <p:sp>
+        <p:nvSpPr>
+          <p:cNvPr id="2" name="Title 1"/>
+          <p:cNvSpPr>
+            <a:spLocks noGrp="1"/>
+          </p:cNvSpPr>
+          <p:nvPr>
+            <p:ph type="title"/>
+          </p:nvPr>
+        </p:nvSpPr>
+        <p:spPr/>
+        <p:txBody>
+          <a:bodyPr/>
+          <a:lstStyle/>
+          <a:p>
+            <a:pPr>
+              <a:defRPr sz="3200" b="1"/>
+            </a:pPr>
+            <a:r>
+              <a:t>Service Mesh - Vorteile/Nachteile</a:t>
+            </a:r>
+          </a:p>
+        </p:txBody>
+      </p:sp>
+      <p:sp>
+        <p:nvSpPr>
+          <p:cNvPr id="3" name="Text Placeholder 2"/>
+          <p:cNvSpPr>
+            <a:spLocks noGrp="1"/>
+          </p:cNvSpPr>
+          <p:nvPr>
+            <p:ph type="body" idx="1"/>
+          </p:nvPr>
+        </p:nvSpPr>
+        <p:spPr/>
+        <p:txBody>
+          <a:bodyPr/>
+          <a:lstStyle/>
+          <a:p/>
+        </p:txBody>
+      </p:sp>
+      <p:sp>
+        <p:nvSpPr>
+          <p:cNvPr id="4" name="Content Placeholder 3"/>
+          <p:cNvSpPr>
+            <a:spLocks noGrp="1"/>
+          </p:cNvSpPr>
+          <p:nvPr>
+            <p:ph idx="2" sz="half"/>
+          </p:nvPr>
+        </p:nvSpPr>
+        <p:spPr/>
+        <p:txBody>
+          <a:bodyPr/>
+          <a:lstStyle/>
+          <a:p/>
+        </p:txBody>
+      </p:sp>
+      <p:sp>
+        <p:nvSpPr>
+          <p:cNvPr id="5" name="Text Placeholder 4"/>
+          <p:cNvSpPr>
+            <a:spLocks noGrp="1"/>
+          </p:cNvSpPr>
+          <p:nvPr>
+            <p:ph type="body" idx="3" sz="quarter"/>
+          </p:nvPr>
+        </p:nvSpPr>
+        <p:spPr/>
+        <p:txBody>
+          <a:bodyPr/>
+          <a:lstStyle/>
+          <a:p/>
+        </p:txBody>
+      </p:sp>
+      <p:sp>
+        <p:nvSpPr>
+          <p:cNvPr id="6" name="Content Placeholder 5"/>
+          <p:cNvSpPr>
+            <a:spLocks noGrp="1"/>
+          </p:cNvSpPr>
+          <p:nvPr>
+            <p:ph idx="4" sz="quarter"/>
+          </p:nvPr>
+        </p:nvSpPr>
+        <p:spPr/>
+        <p:txBody>
+          <a:bodyPr/>
+          <a:lstStyle/>
+          <a:p/>
+        </p:txBody>
+      </p:sp>
+      <p:sp>
+        <p:nvSpPr>
+          <p:cNvPr id="7" name="TextBox 6"/>
+          <p:cNvSpPr txBox="1"/>
+          <p:nvPr/>
+        </p:nvSpPr>
+        <p:spPr>
+          <a:xfrm>
+            <a:off x="457200" y="1371600"/>
+            <a:ext cx="4114800" cy="4572000"/>
+          </a:xfrm>
+          <a:prstGeom prst="rect">
+            <a:avLst/>
+          </a:prstGeom>
+          <a:noFill/>
+        </p:spPr>
+        <p:txBody>
+          <a:bodyPr wrap="square">
+            <a:spAutoFit/>
+          </a:bodyPr>
+          <a:lstStyle/>
+          <a:p>
+            <a:pPr>
+              <a:defRPr sz="2400" b="1">
+                <a:solidFill>
+                  <a:srgbClr val="009900"/>
+                </a:solidFill>
+              </a:defRPr>
+            </a:pPr>
+            <a:r>
+              <a:t>Vorteile ✅</a:t>
+            </a:r>
+          </a:p>
+          <a:p>
+            <a:pPr>
+              <a:defRPr sz="1600"/>
+            </a:pPr>
+            <a:r>
+              <a:t>• Infrastructure Layer für Service Communication</a:t>
+            </a:r>
+          </a:p>
+          <a:p>
+            <a:pPr>
+              <a:defRPr sz="1600"/>
+            </a:pPr>
+            <a:r>
+              <a:t>• Automatisches mTLS und Service Security</a:t>
+            </a:r>
+          </a:p>
+          <a:p>
+            <a:pPr>
+              <a:defRPr sz="1600"/>
+            </a:pPr>
+            <a:r>
+              <a:t>• Distributed Tracing und Observability out-of-the-box</a:t>
+            </a:r>
+          </a:p>
+          <a:p>
+            <a:pPr>
+              <a:defRPr sz="1600"/>
+            </a:pPr>
+            <a:r>
+              <a:t>• Traffic Management ohne Code Changes</a:t>
+            </a:r>
+          </a:p>
+        </p:txBody>
+      </p:sp>
+      <p:sp>
+        <p:nvSpPr>
+          <p:cNvPr id="8" name="TextBox 7"/>
+          <p:cNvSpPr txBox="1"/>
+          <p:nvPr/>
+        </p:nvSpPr>
+        <p:spPr>
+          <a:xfrm>
+            <a:off x="4572000" y="1371600"/>
+            <a:ext cx="4114800" cy="4572000"/>
+          </a:xfrm>
+          <a:prstGeom prst="rect">
+            <a:avLst/>
+          </a:prstGeom>
+          <a:noFill/>
+        </p:spPr>
+        <p:txBody>
+          <a:bodyPr wrap="square">
+            <a:spAutoFit/>
+          </a:bodyPr>
+          <a:lstStyle/>
+          <a:p>
+            <a:pPr>
+              <a:defRPr sz="2400" b="1">
+                <a:solidFill>
+                  <a:srgbClr val="CC0000"/>
+                </a:solidFill>
+              </a:defRPr>
+            </a:pPr>
+            <a:r>
+              <a:t>Nachteile ❌</a:t>
+            </a:r>
+          </a:p>
+          <a:p>
+            <a:pPr>
+              <a:defRPr sz="1600"/>
+            </a:pPr>
+            <a:r>
+              <a:t>• Hohe operationale Komplexität</a:t>
+            </a:r>
+          </a:p>
+          <a:p>
+            <a:pPr>
+              <a:defRPr sz="1600"/>
+            </a:pPr>
+            <a:r>
+              <a:t>• Zusätzliche Latency durch Proxy Layer</a:t>
+            </a:r>
+          </a:p>
+          <a:p>
+            <a:pPr>
+              <a:defRPr sz="1600"/>
+            </a:pPr>
+            <a:r>
+              <a:t>• Steile Lernkurve für Operations Teams</a:t>
+            </a:r>
+          </a:p>
+          <a:p>
+            <a:pPr>
+              <a:defRPr sz="1600"/>
+            </a:pPr>
+            <a:r>
+              <a:t>• Resource Overhead durch Sidecar Proxies</a:t>
+            </a:r>
+          </a:p>
+        </p:txBody>
+      </p:sp>
+    </p:spTree>
+  </p:cSld>
+  <p:clrMapOvr>
+    <a:masterClrMapping/>
+  </p:clrMapOvr>
+</p:sld>
+</file>
+
+<file path=ppt/slides/slide24.xml><?xml version="1.0" encoding="utf-8"?>
+<p:sld xmlns:a="http://schemas.openxmlformats.org/drawingml/2006/main" xmlns:p="http://schemas.openxmlformats.org/presentationml/2006/main" xmlns:r="http://schemas.openxmlformats.org/officeDocument/2006/relationships">
+  <p:cSld>
+    <p:spTree>
+      <p:nvGrpSpPr>
+        <p:cNvPr id="1" name=""/>
+        <p:cNvGrpSpPr/>
+        <p:nvPr/>
+      </p:nvGrpSpPr>
+      <p:grpSpPr/>
+      <p:sp>
+        <p:nvSpPr>
+          <p:cNvPr id="2" name="Title 1"/>
+          <p:cNvSpPr>
+            <a:spLocks noGrp="1"/>
+          </p:cNvSpPr>
+          <p:nvPr>
+            <p:ph type="title"/>
+          </p:nvPr>
+        </p:nvSpPr>
+        <p:spPr/>
+        <p:txBody>
+          <a:bodyPr/>
+          <a:lstStyle/>
+          <a:p>
+            <a:pPr>
+              <a:defRPr sz="3200" b="1"/>
+            </a:pPr>
+            <a:r>
+              <a:t>Bulkhead Pattern - Vorteile/Nachteile</a:t>
+            </a:r>
+          </a:p>
+        </p:txBody>
+      </p:sp>
+      <p:sp>
+        <p:nvSpPr>
+          <p:cNvPr id="3" name="Text Placeholder 2"/>
+          <p:cNvSpPr>
+            <a:spLocks noGrp="1"/>
+          </p:cNvSpPr>
+          <p:nvPr>
+            <p:ph type="body" idx="1"/>
+          </p:nvPr>
+        </p:nvSpPr>
+        <p:spPr/>
+        <p:txBody>
+          <a:bodyPr/>
+          <a:lstStyle/>
+          <a:p/>
+        </p:txBody>
+      </p:sp>
+      <p:sp>
+        <p:nvSpPr>
+          <p:cNvPr id="4" name="Content Placeholder 3"/>
+          <p:cNvSpPr>
+            <a:spLocks noGrp="1"/>
+          </p:cNvSpPr>
+          <p:nvPr>
+            <p:ph idx="2" sz="half"/>
+          </p:nvPr>
+        </p:nvSpPr>
+        <p:spPr/>
+        <p:txBody>
+          <a:bodyPr/>
+          <a:lstStyle/>
+          <a:p/>
+        </p:txBody>
+      </p:sp>
+      <p:sp>
+        <p:nvSpPr>
+          <p:cNvPr id="5" name="Text Placeholder 4"/>
+          <p:cNvSpPr>
+            <a:spLocks noGrp="1"/>
+          </p:cNvSpPr>
+          <p:nvPr>
+            <p:ph type="body" idx="3" sz="quarter"/>
+          </p:nvPr>
+        </p:nvSpPr>
+        <p:spPr/>
+        <p:txBody>
+          <a:bodyPr/>
+          <a:lstStyle/>
+          <a:p/>
+        </p:txBody>
+      </p:sp>
+      <p:sp>
+        <p:nvSpPr>
+          <p:cNvPr id="6" name="Content Placeholder 5"/>
+          <p:cNvSpPr>
+            <a:spLocks noGrp="1"/>
+          </p:cNvSpPr>
+          <p:nvPr>
+            <p:ph idx="4" sz="quarter"/>
+          </p:nvPr>
+        </p:nvSpPr>
+        <p:spPr/>
+        <p:txBody>
+          <a:bodyPr/>
+          <a:lstStyle/>
+          <a:p/>
+        </p:txBody>
+      </p:sp>
+      <p:sp>
+        <p:nvSpPr>
+          <p:cNvPr id="7" name="TextBox 6"/>
+          <p:cNvSpPr txBox="1"/>
+          <p:nvPr/>
+        </p:nvSpPr>
+        <p:spPr>
+          <a:xfrm>
+            <a:off x="457200" y="1371600"/>
+            <a:ext cx="4114800" cy="4572000"/>
+          </a:xfrm>
+          <a:prstGeom prst="rect">
+            <a:avLst/>
+          </a:prstGeom>
+          <a:noFill/>
+        </p:spPr>
+        <p:txBody>
+          <a:bodyPr wrap="square">
+            <a:spAutoFit/>
+          </a:bodyPr>
+          <a:lstStyle/>
+          <a:p>
+            <a:pPr>
+              <a:defRPr sz="2400" b="1">
+                <a:solidFill>
+                  <a:srgbClr val="009900"/>
+                </a:solidFill>
+              </a:defRPr>
+            </a:pPr>
+            <a:r>
+              <a:t>Vorteile ✅</a:t>
+            </a:r>
+          </a:p>
+          <a:p>
+            <a:pPr>
+              <a:defRPr sz="1600"/>
+            </a:pPr>
+            <a:r>
+              <a:t>• Isolation von Critical Resources</a:t>
+            </a:r>
+          </a:p>
+          <a:p>
+            <a:pPr>
+              <a:defRPr sz="1600"/>
+            </a:pPr>
+            <a:r>
+              <a:t>• Ein problematischer Client kann andere nicht beeinträchtigen</a:t>
+            </a:r>
+          </a:p>
+          <a:p>
+            <a:pPr>
+              <a:defRPr sz="1600"/>
+            </a:pPr>
+            <a:r>
+              <a:t>• Verbesserte System Resilience</a:t>
+            </a:r>
+          </a:p>
+          <a:p>
+            <a:pPr>
+              <a:defRPr sz="1600"/>
+            </a:pPr>
+            <a:r>
+              <a:t>• Priorisierung von wichtigen Clients möglich</a:t>
+            </a:r>
+          </a:p>
+        </p:txBody>
+      </p:sp>
+      <p:sp>
+        <p:nvSpPr>
+          <p:cNvPr id="8" name="TextBox 7"/>
+          <p:cNvSpPr txBox="1"/>
+          <p:nvPr/>
+        </p:nvSpPr>
+        <p:spPr>
+          <a:xfrm>
+            <a:off x="4572000" y="1371600"/>
+            <a:ext cx="4114800" cy="4572000"/>
+          </a:xfrm>
+          <a:prstGeom prst="rect">
+            <a:avLst/>
+          </a:prstGeom>
+          <a:noFill/>
+        </p:spPr>
+        <p:txBody>
+          <a:bodyPr wrap="square">
+            <a:spAutoFit/>
+          </a:bodyPr>
+          <a:lstStyle/>
+          <a:p>
+            <a:pPr>
+              <a:defRPr sz="2400" b="1">
+                <a:solidFill>
+                  <a:srgbClr val="CC0000"/>
+                </a:solidFill>
+              </a:defRPr>
+            </a:pPr>
+            <a:r>
+              <a:t>Nachteile ❌</a:t>
+            </a:r>
+          </a:p>
+          <a:p>
+            <a:pPr>
+              <a:defRPr sz="1600"/>
+            </a:pPr>
+            <a:r>
+              <a:t>• Reduced Resource Utilization durch Isolation</a:t>
+            </a:r>
+          </a:p>
+          <a:p>
+            <a:pPr>
+              <a:defRPr sz="1600"/>
+            </a:pPr>
+            <a:r>
+              <a:t>• Complexity bei Resource Pool Management</a:t>
+            </a:r>
+          </a:p>
+          <a:p>
+            <a:pPr>
+              <a:defRPr sz="1600"/>
+            </a:pPr>
+            <a:r>
+              <a:t>• Schwierige Konfiguration von Pool Sizes</a:t>
+            </a:r>
+          </a:p>
+          <a:p>
+            <a:pPr>
+              <a:defRPr sz="1600"/>
+            </a:pPr>
+            <a:r>
+              <a:t>• Monitoring von mehreren Resource Pools erforderlich</a:t>
+            </a:r>
+          </a:p>
+        </p:txBody>
+      </p:sp>
+    </p:spTree>
+  </p:cSld>
+  <p:clrMapOvr>
+    <a:masterClrMapping/>
+  </p:clrMapOvr>
+</p:sld>
+</file>
+
+<file path=ppt/slides/slide25.xml><?xml version="1.0" encoding="utf-8"?>
+<p:sld xmlns:a="http://schemas.openxmlformats.org/drawingml/2006/main" xmlns:p="http://schemas.openxmlformats.org/presentationml/2006/main" xmlns:r="http://schemas.openxmlformats.org/officeDocument/2006/relationships">
+  <p:cSld>
+    <p:spTree>
+      <p:nvGrpSpPr>
+        <p:cNvPr id="1" name=""/>
+        <p:cNvGrpSpPr/>
+        <p:nvPr/>
+      </p:nvGrpSpPr>
+      <p:grpSpPr/>
+      <p:sp>
+        <p:nvSpPr>
+          <p:cNvPr id="2" name="Title 1"/>
+          <p:cNvSpPr>
+            <a:spLocks noGrp="1"/>
+          </p:cNvSpPr>
+          <p:nvPr>
+            <p:ph type="title"/>
+          </p:nvPr>
+        </p:nvSpPr>
+        <p:spPr/>
+        <p:txBody>
+          <a:bodyPr/>
+          <a:lstStyle/>
+          <a:p>
+            <a:pPr>
+              <a:defRPr sz="3200" b="1"/>
+            </a:pPr>
+            <a:r>
+              <a:t>Domain-Driven Design - Vorteile/Nachteile</a:t>
+            </a:r>
+          </a:p>
+        </p:txBody>
+      </p:sp>
+      <p:sp>
+        <p:nvSpPr>
+          <p:cNvPr id="3" name="Text Placeholder 2"/>
+          <p:cNvSpPr>
+            <a:spLocks noGrp="1"/>
+          </p:cNvSpPr>
+          <p:nvPr>
+            <p:ph type="body" idx="1"/>
+          </p:nvPr>
+        </p:nvSpPr>
+        <p:spPr/>
+        <p:txBody>
+          <a:bodyPr/>
+          <a:lstStyle/>
+          <a:p/>
+        </p:txBody>
+      </p:sp>
+      <p:sp>
+        <p:nvSpPr>
+          <p:cNvPr id="4" name="Content Placeholder 3"/>
+          <p:cNvSpPr>
+            <a:spLocks noGrp="1"/>
+          </p:cNvSpPr>
+          <p:nvPr>
+            <p:ph idx="2" sz="half"/>
+          </p:nvPr>
+        </p:nvSpPr>
+        <p:spPr/>
+        <p:txBody>
+          <a:bodyPr/>
+          <a:lstStyle/>
+          <a:p/>
+        </p:txBody>
+      </p:sp>
+      <p:sp>
+        <p:nvSpPr>
+          <p:cNvPr id="5" name="Text Placeholder 4"/>
+          <p:cNvSpPr>
+            <a:spLocks noGrp="1"/>
+          </p:cNvSpPr>
+          <p:nvPr>
+            <p:ph type="body" idx="3" sz="quarter"/>
+          </p:nvPr>
+        </p:nvSpPr>
+        <p:spPr/>
+        <p:txBody>
+          <a:bodyPr/>
+          <a:lstStyle/>
+          <a:p/>
+        </p:txBody>
+      </p:sp>
+      <p:sp>
+        <p:nvSpPr>
+          <p:cNvPr id="6" name="Content Placeholder 5"/>
+          <p:cNvSpPr>
+            <a:spLocks noGrp="1"/>
+          </p:cNvSpPr>
+          <p:nvPr>
+            <p:ph idx="4" sz="quarter"/>
+          </p:nvPr>
+        </p:nvSpPr>
+        <p:spPr/>
+        <p:txBody>
+          <a:bodyPr/>
+          <a:lstStyle/>
+          <a:p/>
+        </p:txBody>
+      </p:sp>
+      <p:sp>
+        <p:nvSpPr>
+          <p:cNvPr id="7" name="TextBox 6"/>
+          <p:cNvSpPr txBox="1"/>
+          <p:nvPr/>
+        </p:nvSpPr>
+        <p:spPr>
+          <a:xfrm>
+            <a:off x="457200" y="1371600"/>
+            <a:ext cx="4114800" cy="4572000"/>
+          </a:xfrm>
+          <a:prstGeom prst="rect">
+            <a:avLst/>
+          </a:prstGeom>
+          <a:noFill/>
+        </p:spPr>
+        <p:txBody>
+          <a:bodyPr wrap="square">
+            <a:spAutoFit/>
+          </a:bodyPr>
+          <a:lstStyle/>
+          <a:p>
+            <a:pPr>
+              <a:defRPr sz="2400" b="1">
+                <a:solidFill>
+                  <a:srgbClr val="009900"/>
+                </a:solidFill>
+              </a:defRPr>
+            </a:pPr>
+            <a:r>
+              <a:t>Vorteile ✅</a:t>
+            </a:r>
+          </a:p>
+          <a:p>
+            <a:pPr>
+              <a:defRPr sz="1600"/>
+            </a:pPr>
+            <a:r>
+              <a:t>• Ubiquitous Language zwischen Business und Tech</a:t>
+            </a:r>
+          </a:p>
+          <a:p>
+            <a:pPr>
+              <a:defRPr sz="1600"/>
+            </a:pPr>
+            <a:r>
+              <a:t>• Bounded Context für klare Domain Grenzen</a:t>
+            </a:r>
+          </a:p>
+          <a:p>
+            <a:pPr>
+              <a:defRPr sz="1600"/>
+            </a:pPr>
+            <a:r>
+              <a:t>• Complex Domain Logic durch Domain Models</a:t>
+            </a:r>
+          </a:p>
+          <a:p>
+            <a:pPr>
+              <a:defRPr sz="1600"/>
+            </a:pPr>
+            <a:r>
+              <a:t>• Bessere Alignment zwischen Code und Business</a:t>
+            </a:r>
+          </a:p>
+        </p:txBody>
+      </p:sp>
+      <p:sp>
+        <p:nvSpPr>
+          <p:cNvPr id="8" name="TextBox 7"/>
+          <p:cNvSpPr txBox="1"/>
+          <p:nvPr/>
+        </p:nvSpPr>
+        <p:spPr>
+          <a:xfrm>
+            <a:off x="4572000" y="1371600"/>
+            <a:ext cx="4114800" cy="4572000"/>
+          </a:xfrm>
+          <a:prstGeom prst="rect">
+            <a:avLst/>
+          </a:prstGeom>
+          <a:noFill/>
+        </p:spPr>
+        <p:txBody>
+          <a:bodyPr wrap="square">
+            <a:spAutoFit/>
+          </a:bodyPr>
+          <a:lstStyle/>
+          <a:p>
+            <a:pPr>
+              <a:defRPr sz="2400" b="1">
+                <a:solidFill>
+                  <a:srgbClr val="CC0000"/>
+                </a:solidFill>
+              </a:defRPr>
+            </a:pPr>
+            <a:r>
+              <a:t>Nachteile ❌</a:t>
+            </a:r>
+          </a:p>
+          <a:p>
+            <a:pPr>
+              <a:defRPr sz="1600"/>
+            </a:pPr>
+            <a:r>
+              <a:t>• Hoher Initial Investment für Domain Modeling</a:t>
+            </a:r>
+          </a:p>
+          <a:p>
+            <a:pPr>
+              <a:defRPr sz="1600"/>
+            </a:pPr>
+            <a:r>
+              <a:t>• Erfordert enge Zusammenarbeit mit Domain Experts</a:t>
+            </a:r>
+          </a:p>
+          <a:p>
+            <a:pPr>
+              <a:defRPr sz="1600"/>
+            </a:pPr>
+            <a:r>
+              <a:t>• Kann zu Over-Engineering bei einfachen Domains führen</a:t>
+            </a:r>
+          </a:p>
+          <a:p>
+            <a:pPr>
+              <a:defRPr sz="1600"/>
+            </a:pPr>
+            <a:r>
+              <a:t>• Steile Lernkurve für traditionelle CRUD Entwickler</a:t>
+            </a:r>
+          </a:p>
         </p:txBody>
       </p:sp>
     </p:spTree>
@@ -5622,7 +9785,7 @@
 </file>
 
 <file path=ppt/slides/slide3.xml><?xml version="1.0" encoding="utf-8"?>
-<p:sld xmlns:a="http://schemas.openxmlformats.org/drawingml/2006/main" xmlns:p="http://schemas.openxmlformats.org/presentationml/2006/main" xmlns:r="http://schemas.openxmlformats.org/officeDocument/2006/relationships">
+<p:sld xmlns:a="http://schemas.openxmlformats.org/drawingml/2006/main" xmlns:r="http://schemas.openxmlformats.org/officeDocument/2006/relationships" xmlns:p="http://schemas.openxmlformats.org/presentationml/2006/main">
   <p:cSld>
     <p:spTree>
       <p:nvGrpSpPr>
@@ -5630,7 +9793,14 @@
         <p:cNvGrpSpPr/>
         <p:nvPr/>
       </p:nvGrpSpPr>
-      <p:grpSpPr/>
+      <p:grpSpPr>
+        <a:xfrm>
+          <a:off x="0" y="0"/>
+          <a:ext cx="0" cy="0"/>
+          <a:chOff x="0" y="0"/>
+          <a:chExt cx="0" cy="0"/>
+        </a:xfrm>
+      </p:grpSpPr>
       <p:sp>
         <p:nvSpPr>
           <p:cNvPr id="2" name="Title 1"/>
@@ -5664,7 +9834,9 @@
         </p:nvSpPr>
         <p:spPr/>
         <p:txBody>
-          <a:bodyPr/>
+          <a:bodyPr>
+            <a:normAutofit/>
+          </a:bodyPr>
           <a:lstStyle/>
           <a:p>
             <a:pPr>
@@ -5679,56 +9851,178 @@
               </a:spcAft>
             </a:pPr>
             <a:r>
-              <a:rPr sz="900">
+              <a:rPr sz="2000" dirty="0">
                 <a:latin typeface="Consolas"/>
               </a:rPr>
               <a:t>Command Side              Event Store           Query Side</a:t>
             </a:r>
-            <a:br/>
-            <a:r>
-              <a:rPr sz="900">
+            <a:br>
+              <a:rPr sz="6000" dirty="0"/>
+            </a:br>
+            <a:r>
+              <a:rPr sz="2000" dirty="0">
                 <a:latin typeface="Consolas"/>
               </a:rPr>
               <a:t>┌──────────────────────┐  ┌─────────────────┐  ┌──────────────────────┐</a:t>
             </a:r>
-            <a:br/>
-            <a:r>
-              <a:rPr sz="900">
-                <a:latin typeface="Consolas"/>
-              </a:rPr>
-              <a:t>│ Write Model          │  │   Events       │  │ Read Model         │</a:t>
-            </a:r>
-            <a:br/>
-            <a:r>
-              <a:rPr sz="900">
-                <a:latin typeface="Consolas"/>
-              </a:rPr>
-              <a:t>│                      │  │                 │  │                    │</a:t>
-            </a:r>
-            <a:br/>
-            <a:r>
-              <a:rPr sz="900">
-                <a:latin typeface="Consolas"/>
-              </a:rPr>
-              <a:t>│ - Normalized         │─&gt;│ Event Bus      │─&gt;│ - Denormalized     │</a:t>
-            </a:r>
-            <a:br/>
-            <a:r>
-              <a:rPr sz="900">
-                <a:latin typeface="Consolas"/>
-              </a:rPr>
-              <a:t>│ - PostgreSQL         │  │ Command/Query  │  │ - Elasticsearch    │</a:t>
-            </a:r>
-            <a:br/>
-            <a:r>
-              <a:rPr sz="900">
-                <a:latin typeface="Consolas"/>
-              </a:rPr>
-              <a:t>│ - ACID Transactions  │  │ Sync           │  │ - Read Optimized   │</a:t>
-            </a:r>
-            <a:br/>
-            <a:r>
-              <a:rPr sz="900">
+            <a:br>
+              <a:rPr sz="6000" dirty="0"/>
+            </a:br>
+            <a:r>
+              <a:rPr sz="2000" dirty="0">
+                <a:latin typeface="Consolas"/>
+              </a:rPr>
+              <a:t>│ Write Model          │  │   Events       </a:t>
+            </a:r>
+            <a:r>
+              <a:rPr lang="en-US" sz="2000" dirty="0">
+                <a:latin typeface="Consolas"/>
+              </a:rPr>
+              <a:t> </a:t>
+            </a:r>
+            <a:r>
+              <a:rPr sz="2000" dirty="0">
+                <a:latin typeface="Consolas"/>
+              </a:rPr>
+              <a:t>│  │ Read Model        </a:t>
+            </a:r>
+            <a:r>
+              <a:rPr lang="en-US" sz="2000" dirty="0">
+                <a:latin typeface="Consolas"/>
+              </a:rPr>
+              <a:t>  </a:t>
+            </a:r>
+            <a:r>
+              <a:rPr sz="2000" dirty="0">
+                <a:latin typeface="Consolas"/>
+              </a:rPr>
+              <a:t> │</a:t>
+            </a:r>
+            <a:br>
+              <a:rPr sz="6000" dirty="0"/>
+            </a:br>
+            <a:r>
+              <a:rPr sz="2000" dirty="0">
+                <a:latin typeface="Consolas"/>
+              </a:rPr>
+              <a:t>│                      │  │                 │  │                   </a:t>
+            </a:r>
+            <a:r>
+              <a:rPr lang="en-US" sz="2000" dirty="0">
+                <a:latin typeface="Consolas"/>
+              </a:rPr>
+              <a:t>  </a:t>
+            </a:r>
+            <a:r>
+              <a:rPr sz="2000" dirty="0">
+                <a:latin typeface="Consolas"/>
+              </a:rPr>
+              <a:t> │</a:t>
+            </a:r>
+            <a:br>
+              <a:rPr sz="6000" dirty="0"/>
+            </a:br>
+            <a:r>
+              <a:rPr sz="2000" dirty="0">
+                <a:latin typeface="Consolas"/>
+              </a:rPr>
+              <a:t>│ - Normalized         │─&gt;│ Event Bus      </a:t>
+            </a:r>
+            <a:r>
+              <a:rPr lang="en-US" sz="2000" dirty="0">
+                <a:latin typeface="Consolas"/>
+              </a:rPr>
+              <a:t> </a:t>
+            </a:r>
+            <a:r>
+              <a:rPr sz="2000" dirty="0">
+                <a:latin typeface="Consolas"/>
+              </a:rPr>
+              <a:t>│─&gt;│ - Denormalized    </a:t>
+            </a:r>
+            <a:r>
+              <a:rPr lang="en-US" sz="2000" dirty="0">
+                <a:latin typeface="Consolas"/>
+              </a:rPr>
+              <a:t>  </a:t>
+            </a:r>
+            <a:r>
+              <a:rPr sz="2000" dirty="0">
+                <a:latin typeface="Consolas"/>
+              </a:rPr>
+              <a:t> │</a:t>
+            </a:r>
+            <a:br>
+              <a:rPr sz="6000" dirty="0"/>
+            </a:br>
+            <a:r>
+              <a:rPr sz="2000" dirty="0">
+                <a:latin typeface="Consolas"/>
+              </a:rPr>
+              <a:t>│ - PostgreSQL         │  │ Command/Query  </a:t>
+            </a:r>
+            <a:r>
+              <a:rPr lang="en-US" sz="2000" dirty="0">
+                <a:latin typeface="Consolas"/>
+              </a:rPr>
+              <a:t> </a:t>
+            </a:r>
+            <a:r>
+              <a:rPr sz="2000" dirty="0">
+                <a:latin typeface="Consolas"/>
+              </a:rPr>
+              <a:t>│  │ - Elasticsearch   </a:t>
+            </a:r>
+            <a:r>
+              <a:rPr lang="en-US" sz="2000" dirty="0">
+                <a:latin typeface="Consolas"/>
+              </a:rPr>
+              <a:t>  </a:t>
+            </a:r>
+            <a:r>
+              <a:rPr sz="2000" dirty="0">
+                <a:latin typeface="Consolas"/>
+              </a:rPr>
+              <a:t> │</a:t>
+            </a:r>
+            <a:br>
+              <a:rPr sz="6000" dirty="0"/>
+            </a:br>
+            <a:r>
+              <a:rPr sz="2000" dirty="0">
+                <a:latin typeface="Consolas"/>
+              </a:rPr>
+              <a:t>│ - ACID Transactions  │  │ Sync           </a:t>
+            </a:r>
+            <a:r>
+              <a:rPr lang="en-US" sz="2000" dirty="0">
+                <a:latin typeface="Consolas"/>
+              </a:rPr>
+              <a:t> </a:t>
+            </a:r>
+            <a:r>
+              <a:rPr sz="2000" dirty="0">
+                <a:latin typeface="Consolas"/>
+              </a:rPr>
+              <a:t>│  │ - Read Optimized  </a:t>
+            </a:r>
+            <a:r>
+              <a:rPr lang="en-US" sz="2000" dirty="0">
+                <a:latin typeface="Consolas"/>
+              </a:rPr>
+              <a:t>  </a:t>
+            </a:r>
+            <a:r>
+              <a:rPr sz="2000" dirty="0">
+                <a:latin typeface="Consolas"/>
+              </a:rPr>
+              <a:t> │</a:t>
+            </a:r>
+            <a:br>
+              <a:rPr sz="6000" dirty="0"/>
+            </a:br>
+            <a:r>
+              <a:rPr sz="2000" dirty="0">
                 <a:latin typeface="Consolas"/>
               </a:rPr>
               <a:t>└──────────────────────┘  └─────────────────┘  └──────────────────────┘</a:t>
@@ -5745,7 +10039,7 @@
 </file>
 
 <file path=ppt/slides/slide4.xml><?xml version="1.0" encoding="utf-8"?>
-<p:sld xmlns:a="http://schemas.openxmlformats.org/drawingml/2006/main" xmlns:p="http://schemas.openxmlformats.org/presentationml/2006/main" xmlns:r="http://schemas.openxmlformats.org/officeDocument/2006/relationships">
+<p:sld xmlns:a="http://schemas.openxmlformats.org/drawingml/2006/main" xmlns:r="http://schemas.openxmlformats.org/officeDocument/2006/relationships" xmlns:p="http://schemas.openxmlformats.org/presentationml/2006/main">
   <p:cSld>
     <p:spTree>
       <p:nvGrpSpPr>
@@ -5753,7 +10047,14 @@
         <p:cNvGrpSpPr/>
         <p:nvPr/>
       </p:nvGrpSpPr>
-      <p:grpSpPr/>
+      <p:grpSpPr>
+        <a:xfrm>
+          <a:off x="0" y="0"/>
+          <a:ext cx="0" cy="0"/>
+          <a:chOff x="0" y="0"/>
+          <a:chExt cx="0" cy="0"/>
+        </a:xfrm>
+      </p:grpSpPr>
       <p:sp>
         <p:nvSpPr>
           <p:cNvPr id="2" name="Title 1"/>
@@ -5782,60 +10083,133 @@
             <a:spLocks noGrp="1"/>
           </p:cNvSpPr>
           <p:nvPr>
-            <p:ph idx="1" sz="half"/>
-          </p:nvPr>
-        </p:nvSpPr>
-        <p:spPr/>
-        <p:txBody>
-          <a:bodyPr/>
-          <a:lstStyle/>
+            <p:ph sz="half" idx="1"/>
+          </p:nvPr>
+        </p:nvSpPr>
+        <p:spPr/>
+        <p:txBody>
+          <a:bodyPr>
+            <a:normAutofit/>
+          </a:bodyPr>
+          <a:lstStyle/>
+          <a:p>
+            <a:pPr marL="0" indent="0">
+              <a:lnSpc>
+                <a:spcPct val="150000"/>
+              </a:lnSpc>
+              <a:buNone/>
+              <a:defRPr sz="1600" b="1"/>
+            </a:pPr>
+            <a:r>
+              <a:rPr sz="1800" dirty="0" err="1"/>
+              <a:t>Vorteile</a:t>
+            </a:r>
+            <a:r>
+              <a:rPr sz="1800" dirty="0"/>
+              <a:t> </a:t>
+            </a:r>
+          </a:p>
           <a:p>
             <a:pPr>
-              <a:defRPr b="1" sz="1600"/>
-            </a:pPr>
-            <a:r>
-              <a:t>Vorteile ✅</a:t>
-            </a:r>
-          </a:p>
-          <a:p>
-            <a:pPr>
+              <a:lnSpc>
+                <a:spcPct val="150000"/>
+              </a:lnSpc>
               <a:spcAft>
                 <a:spcPts val="600"/>
               </a:spcAft>
             </a:pPr>
             <a:r>
-              <a:t>• Performance: Optimized Data Models für Read/Write</a:t>
+              <a:rPr sz="1800" dirty="0"/>
+              <a:t>Performance: Optimized Data Models für Read/Write</a:t>
             </a:r>
           </a:p>
           <a:p>
             <a:pPr>
+              <a:lnSpc>
+                <a:spcPct val="150000"/>
+              </a:lnSpc>
               <a:spcAft>
                 <a:spcPts val="600"/>
               </a:spcAft>
             </a:pPr>
             <a:r>
-              <a:t>• Skalierung: Read/Write Operations unabhängig skalierbar</a:t>
-            </a:r>
+              <a:rPr sz="1800" dirty="0" err="1"/>
+              <a:t>Skalierung</a:t>
+            </a:r>
+            <a:r>
+              <a:rPr sz="1800" dirty="0"/>
+              <a:t>: Read/Write Operations </a:t>
+            </a:r>
+            <a:r>
+              <a:rPr sz="1800" dirty="0" err="1"/>
+              <a:t>unabhängig</a:t>
+            </a:r>
+            <a:r>
+              <a:rPr sz="1800" dirty="0"/>
+              <a:t> </a:t>
+            </a:r>
+            <a:r>
+              <a:rPr sz="1800" dirty="0" err="1"/>
+              <a:t>skalierbar</a:t>
+            </a:r>
+            <a:endParaRPr sz="1800" dirty="0"/>
           </a:p>
           <a:p>
             <a:pPr>
+              <a:lnSpc>
+                <a:spcPct val="150000"/>
+              </a:lnSpc>
               <a:spcAft>
                 <a:spcPts val="600"/>
               </a:spcAft>
             </a:pPr>
             <a:r>
-              <a:t>• Complex Queries: Performance durch denormalized Read Models</a:t>
+              <a:rPr sz="1800" dirty="0"/>
+              <a:t>Complex Queries: Performance </a:t>
+            </a:r>
+            <a:r>
+              <a:rPr sz="1800" dirty="0" err="1"/>
+              <a:t>durch</a:t>
+            </a:r>
+            <a:r>
+              <a:rPr sz="1800" dirty="0"/>
+              <a:t> denormalized Read Models</a:t>
             </a:r>
           </a:p>
           <a:p>
             <a:pPr>
+              <a:lnSpc>
+                <a:spcPct val="150000"/>
+              </a:lnSpc>
               <a:spcAft>
                 <a:spcPts val="600"/>
               </a:spcAft>
             </a:pPr>
             <a:r>
-              <a:t>• Event Sourcing Integration: Natürliche Kombination möglich</a:t>
-            </a:r>
+              <a:rPr sz="1800" dirty="0"/>
+              <a:t>Event Sourcing Integration: </a:t>
+            </a:r>
+            <a:r>
+              <a:rPr sz="1800" dirty="0" err="1"/>
+              <a:t>Natürliche</a:t>
+            </a:r>
+            <a:r>
+              <a:rPr sz="1800" dirty="0"/>
+              <a:t> </a:t>
+            </a:r>
+            <a:r>
+              <a:rPr sz="1800" dirty="0" err="1"/>
+              <a:t>Kombination</a:t>
+            </a:r>
+            <a:r>
+              <a:rPr sz="1800" dirty="0"/>
+              <a:t> </a:t>
+            </a:r>
+            <a:r>
+              <a:rPr sz="1800" dirty="0" err="1"/>
+              <a:t>möglich</a:t>
+            </a:r>
+            <a:endParaRPr sz="1800" dirty="0"/>
           </a:p>
         </p:txBody>
       </p:sp>
@@ -5846,59 +10220,128 @@
             <a:spLocks noGrp="1"/>
           </p:cNvSpPr>
           <p:nvPr>
-            <p:ph idx="2" sz="half"/>
-          </p:nvPr>
-        </p:nvSpPr>
-        <p:spPr/>
-        <p:txBody>
-          <a:bodyPr/>
-          <a:lstStyle/>
+            <p:ph sz="half" idx="2"/>
+          </p:nvPr>
+        </p:nvSpPr>
+        <p:spPr/>
+        <p:txBody>
+          <a:bodyPr>
+            <a:normAutofit/>
+          </a:bodyPr>
+          <a:lstStyle/>
+          <a:p>
+            <a:pPr marL="0" indent="0">
+              <a:lnSpc>
+                <a:spcPct val="150000"/>
+              </a:lnSpc>
+              <a:buNone/>
+              <a:defRPr sz="1600" b="1"/>
+            </a:pPr>
+            <a:r>
+              <a:rPr sz="1800" dirty="0" err="1"/>
+              <a:t>Nachteile</a:t>
+            </a:r>
+            <a:r>
+              <a:rPr sz="1800" dirty="0"/>
+              <a:t> </a:t>
+            </a:r>
+          </a:p>
           <a:p>
             <a:pPr>
-              <a:defRPr b="1" sz="1600"/>
-            </a:pPr>
-            <a:r>
-              <a:t>Nachteile ❌</a:t>
-            </a:r>
-          </a:p>
-          <a:p>
-            <a:pPr>
+              <a:lnSpc>
+                <a:spcPct val="150000"/>
+              </a:lnSpc>
               <a:spcAft>
                 <a:spcPts val="600"/>
               </a:spcAft>
             </a:pPr>
             <a:r>
-              <a:t>• Eventual Consistency: zwischen Read/Write Models</a:t>
+              <a:rPr sz="1800" dirty="0"/>
+              <a:t>Eventual Consistency: </a:t>
+            </a:r>
+            <a:r>
+              <a:rPr sz="1800" dirty="0" err="1"/>
+              <a:t>zwischen</a:t>
+            </a:r>
+            <a:r>
+              <a:rPr sz="1800" dirty="0"/>
+              <a:t> Read/Write Models</a:t>
             </a:r>
           </a:p>
           <a:p>
             <a:pPr>
+              <a:lnSpc>
+                <a:spcPct val="150000"/>
+              </a:lnSpc>
               <a:spcAft>
                 <a:spcPts val="600"/>
               </a:spcAft>
             </a:pPr>
             <a:r>
-              <a:t>• Maintenance: Doppelte Data Models erhöhen Aufwand</a:t>
-            </a:r>
+              <a:rPr sz="1800" dirty="0"/>
+              <a:t>Maintenance: </a:t>
+            </a:r>
+            <a:r>
+              <a:rPr sz="1800" dirty="0" err="1"/>
+              <a:t>Doppelte</a:t>
+            </a:r>
+            <a:r>
+              <a:rPr sz="1800" dirty="0"/>
+              <a:t> Data Models </a:t>
+            </a:r>
+            <a:r>
+              <a:rPr sz="1800" dirty="0" err="1"/>
+              <a:t>erhöhen</a:t>
+            </a:r>
+            <a:r>
+              <a:rPr sz="1800" dirty="0"/>
+              <a:t> </a:t>
+            </a:r>
+            <a:r>
+              <a:rPr sz="1800" dirty="0" err="1"/>
+              <a:t>Aufwand</a:t>
+            </a:r>
+            <a:endParaRPr sz="1800" dirty="0"/>
           </a:p>
           <a:p>
             <a:pPr>
+              <a:lnSpc>
+                <a:spcPct val="150000"/>
+              </a:lnSpc>
               <a:spcAft>
                 <a:spcPts val="600"/>
               </a:spcAft>
             </a:pPr>
             <a:r>
-              <a:t>• Synchronization: Event Sync zwischen Models komplex</a:t>
-            </a:r>
+              <a:rPr sz="1800" dirty="0"/>
+              <a:t>Synchronization: Event Sync </a:t>
+            </a:r>
+            <a:r>
+              <a:rPr sz="1800" dirty="0" err="1"/>
+              <a:t>zwischen</a:t>
+            </a:r>
+            <a:r>
+              <a:rPr sz="1800" dirty="0"/>
+              <a:t> Models </a:t>
+            </a:r>
+            <a:r>
+              <a:rPr sz="1800" dirty="0" err="1"/>
+              <a:t>komplex</a:t>
+            </a:r>
+            <a:endParaRPr sz="1800" dirty="0"/>
           </a:p>
           <a:p>
             <a:pPr>
+              <a:lnSpc>
+                <a:spcPct val="150000"/>
+              </a:lnSpc>
               <a:spcAft>
                 <a:spcPts val="600"/>
               </a:spcAft>
             </a:pPr>
             <a:r>
-              <a:t>• Over-Engineering: für simple CRUD Applications</a:t>
+              <a:rPr sz="1800" dirty="0"/>
+              <a:t>Over-Engineering: für simple CRUD Applications</a:t>
             </a:r>
           </a:p>
         </p:txBody>
@@ -5908,11 +10351,464 @@
   <p:clrMapOvr>
     <a:masterClrMapping/>
   </p:clrMapOvr>
+  <p:timing>
+    <p:tnLst>
+      <p:par>
+        <p:cTn id="1" dur="indefinite" restart="never" nodeType="tmRoot">
+          <p:childTnLst>
+            <p:seq concurrent="1" nextAc="seek">
+              <p:cTn id="2" dur="indefinite" nodeType="mainSeq">
+                <p:childTnLst>
+                  <p:par>
+                    <p:cTn id="3" fill="hold">
+                      <p:stCondLst>
+                        <p:cond delay="indefinite"/>
+                      </p:stCondLst>
+                      <p:childTnLst>
+                        <p:par>
+                          <p:cTn id="4" fill="hold">
+                            <p:stCondLst>
+                              <p:cond delay="0"/>
+                            </p:stCondLst>
+                            <p:childTnLst>
+                              <p:par>
+                                <p:cTn id="5" presetID="1" presetClass="entr" presetSubtype="0" fill="hold" nodeType="clickEffect">
+                                  <p:stCondLst>
+                                    <p:cond delay="0"/>
+                                  </p:stCondLst>
+                                  <p:childTnLst>
+                                    <p:set>
+                                      <p:cBhvr>
+                                        <p:cTn id="6" dur="1" fill="hold">
+                                          <p:stCondLst>
+                                            <p:cond delay="0"/>
+                                          </p:stCondLst>
+                                        </p:cTn>
+                                        <p:tgtEl>
+                                          <p:spTgt spid="3">
+                                            <p:txEl>
+                                              <p:pRg st="1" end="1"/>
+                                            </p:txEl>
+                                          </p:spTgt>
+                                        </p:tgtEl>
+                                        <p:attrNameLst>
+                                          <p:attrName>style.visibility</p:attrName>
+                                        </p:attrNameLst>
+                                      </p:cBhvr>
+                                      <p:to>
+                                        <p:strVal val="visible"/>
+                                      </p:to>
+                                    </p:set>
+                                  </p:childTnLst>
+                                </p:cTn>
+                              </p:par>
+                            </p:childTnLst>
+                          </p:cTn>
+                        </p:par>
+                      </p:childTnLst>
+                    </p:cTn>
+                  </p:par>
+                  <p:par>
+                    <p:cTn id="7" fill="hold">
+                      <p:stCondLst>
+                        <p:cond delay="indefinite"/>
+                      </p:stCondLst>
+                      <p:childTnLst>
+                        <p:par>
+                          <p:cTn id="8" fill="hold">
+                            <p:stCondLst>
+                              <p:cond delay="0"/>
+                            </p:stCondLst>
+                            <p:childTnLst>
+                              <p:par>
+                                <p:cTn id="9" presetID="1" presetClass="entr" presetSubtype="0" fill="hold" nodeType="clickEffect">
+                                  <p:stCondLst>
+                                    <p:cond delay="0"/>
+                                  </p:stCondLst>
+                                  <p:childTnLst>
+                                    <p:set>
+                                      <p:cBhvr>
+                                        <p:cTn id="10" dur="1" fill="hold">
+                                          <p:stCondLst>
+                                            <p:cond delay="0"/>
+                                          </p:stCondLst>
+                                        </p:cTn>
+                                        <p:tgtEl>
+                                          <p:spTgt spid="3">
+                                            <p:txEl>
+                                              <p:pRg st="2" end="2"/>
+                                            </p:txEl>
+                                          </p:spTgt>
+                                        </p:tgtEl>
+                                        <p:attrNameLst>
+                                          <p:attrName>style.visibility</p:attrName>
+                                        </p:attrNameLst>
+                                      </p:cBhvr>
+                                      <p:to>
+                                        <p:strVal val="visible"/>
+                                      </p:to>
+                                    </p:set>
+                                  </p:childTnLst>
+                                </p:cTn>
+                              </p:par>
+                            </p:childTnLst>
+                          </p:cTn>
+                        </p:par>
+                      </p:childTnLst>
+                    </p:cTn>
+                  </p:par>
+                  <p:par>
+                    <p:cTn id="11" fill="hold">
+                      <p:stCondLst>
+                        <p:cond delay="indefinite"/>
+                      </p:stCondLst>
+                      <p:childTnLst>
+                        <p:par>
+                          <p:cTn id="12" fill="hold">
+                            <p:stCondLst>
+                              <p:cond delay="0"/>
+                            </p:stCondLst>
+                            <p:childTnLst>
+                              <p:par>
+                                <p:cTn id="13" presetID="1" presetClass="entr" presetSubtype="0" fill="hold" nodeType="clickEffect">
+                                  <p:stCondLst>
+                                    <p:cond delay="0"/>
+                                  </p:stCondLst>
+                                  <p:childTnLst>
+                                    <p:set>
+                                      <p:cBhvr>
+                                        <p:cTn id="14" dur="1" fill="hold">
+                                          <p:stCondLst>
+                                            <p:cond delay="0"/>
+                                          </p:stCondLst>
+                                        </p:cTn>
+                                        <p:tgtEl>
+                                          <p:spTgt spid="3">
+                                            <p:txEl>
+                                              <p:pRg st="3" end="3"/>
+                                            </p:txEl>
+                                          </p:spTgt>
+                                        </p:tgtEl>
+                                        <p:attrNameLst>
+                                          <p:attrName>style.visibility</p:attrName>
+                                        </p:attrNameLst>
+                                      </p:cBhvr>
+                                      <p:to>
+                                        <p:strVal val="visible"/>
+                                      </p:to>
+                                    </p:set>
+                                  </p:childTnLst>
+                                </p:cTn>
+                              </p:par>
+                            </p:childTnLst>
+                          </p:cTn>
+                        </p:par>
+                      </p:childTnLst>
+                    </p:cTn>
+                  </p:par>
+                  <p:par>
+                    <p:cTn id="15" fill="hold">
+                      <p:stCondLst>
+                        <p:cond delay="indefinite"/>
+                      </p:stCondLst>
+                      <p:childTnLst>
+                        <p:par>
+                          <p:cTn id="16" fill="hold">
+                            <p:stCondLst>
+                              <p:cond delay="0"/>
+                            </p:stCondLst>
+                            <p:childTnLst>
+                              <p:par>
+                                <p:cTn id="17" presetID="1" presetClass="entr" presetSubtype="0" fill="hold" nodeType="clickEffect">
+                                  <p:stCondLst>
+                                    <p:cond delay="0"/>
+                                  </p:stCondLst>
+                                  <p:childTnLst>
+                                    <p:set>
+                                      <p:cBhvr>
+                                        <p:cTn id="18" dur="1" fill="hold">
+                                          <p:stCondLst>
+                                            <p:cond delay="0"/>
+                                          </p:stCondLst>
+                                        </p:cTn>
+                                        <p:tgtEl>
+                                          <p:spTgt spid="3">
+                                            <p:txEl>
+                                              <p:pRg st="4" end="4"/>
+                                            </p:txEl>
+                                          </p:spTgt>
+                                        </p:tgtEl>
+                                        <p:attrNameLst>
+                                          <p:attrName>style.visibility</p:attrName>
+                                        </p:attrNameLst>
+                                      </p:cBhvr>
+                                      <p:to>
+                                        <p:strVal val="visible"/>
+                                      </p:to>
+                                    </p:set>
+                                  </p:childTnLst>
+                                </p:cTn>
+                              </p:par>
+                            </p:childTnLst>
+                          </p:cTn>
+                        </p:par>
+                      </p:childTnLst>
+                    </p:cTn>
+                  </p:par>
+                  <p:par>
+                    <p:cTn id="19" fill="hold">
+                      <p:stCondLst>
+                        <p:cond delay="indefinite"/>
+                      </p:stCondLst>
+                      <p:childTnLst>
+                        <p:par>
+                          <p:cTn id="20" fill="hold">
+                            <p:stCondLst>
+                              <p:cond delay="0"/>
+                            </p:stCondLst>
+                            <p:childTnLst>
+                              <p:par>
+                                <p:cTn id="21" presetID="1" presetClass="entr" presetSubtype="0" fill="hold" nodeType="clickEffect">
+                                  <p:stCondLst>
+                                    <p:cond delay="0"/>
+                                  </p:stCondLst>
+                                  <p:childTnLst>
+                                    <p:set>
+                                      <p:cBhvr>
+                                        <p:cTn id="22" dur="1" fill="hold">
+                                          <p:stCondLst>
+                                            <p:cond delay="0"/>
+                                          </p:stCondLst>
+                                        </p:cTn>
+                                        <p:tgtEl>
+                                          <p:spTgt spid="4">
+                                            <p:txEl>
+                                              <p:pRg st="0" end="0"/>
+                                            </p:txEl>
+                                          </p:spTgt>
+                                        </p:tgtEl>
+                                        <p:attrNameLst>
+                                          <p:attrName>style.visibility</p:attrName>
+                                        </p:attrNameLst>
+                                      </p:cBhvr>
+                                      <p:to>
+                                        <p:strVal val="visible"/>
+                                      </p:to>
+                                    </p:set>
+                                  </p:childTnLst>
+                                </p:cTn>
+                              </p:par>
+                              <p:par>
+                                <p:cTn id="23" presetID="1" presetClass="entr" presetSubtype="0" fill="hold" nodeType="withEffect">
+                                  <p:stCondLst>
+                                    <p:cond delay="0"/>
+                                  </p:stCondLst>
+                                  <p:childTnLst>
+                                    <p:set>
+                                      <p:cBhvr>
+                                        <p:cTn id="24" dur="1" fill="hold">
+                                          <p:stCondLst>
+                                            <p:cond delay="0"/>
+                                          </p:stCondLst>
+                                        </p:cTn>
+                                        <p:tgtEl>
+                                          <p:spTgt spid="4">
+                                            <p:txEl>
+                                              <p:pRg st="1" end="1"/>
+                                            </p:txEl>
+                                          </p:spTgt>
+                                        </p:tgtEl>
+                                        <p:attrNameLst>
+                                          <p:attrName>style.visibility</p:attrName>
+                                        </p:attrNameLst>
+                                      </p:cBhvr>
+                                      <p:to>
+                                        <p:strVal val="visible"/>
+                                      </p:to>
+                                    </p:set>
+                                  </p:childTnLst>
+                                </p:cTn>
+                              </p:par>
+                            </p:childTnLst>
+                          </p:cTn>
+                        </p:par>
+                      </p:childTnLst>
+                    </p:cTn>
+                  </p:par>
+                  <p:par>
+                    <p:cTn id="25" fill="hold">
+                      <p:stCondLst>
+                        <p:cond delay="indefinite"/>
+                      </p:stCondLst>
+                      <p:childTnLst>
+                        <p:par>
+                          <p:cTn id="26" fill="hold">
+                            <p:stCondLst>
+                              <p:cond delay="0"/>
+                            </p:stCondLst>
+                            <p:childTnLst>
+                              <p:par>
+                                <p:cTn id="27" presetID="1" presetClass="entr" presetSubtype="0" fill="hold" nodeType="clickEffect">
+                                  <p:stCondLst>
+                                    <p:cond delay="0"/>
+                                  </p:stCondLst>
+                                  <p:childTnLst>
+                                    <p:set>
+                                      <p:cBhvr>
+                                        <p:cTn id="28" dur="1" fill="hold">
+                                          <p:stCondLst>
+                                            <p:cond delay="0"/>
+                                          </p:stCondLst>
+                                        </p:cTn>
+                                        <p:tgtEl>
+                                          <p:spTgt spid="4">
+                                            <p:txEl>
+                                              <p:pRg st="2" end="2"/>
+                                            </p:txEl>
+                                          </p:spTgt>
+                                        </p:tgtEl>
+                                        <p:attrNameLst>
+                                          <p:attrName>style.visibility</p:attrName>
+                                        </p:attrNameLst>
+                                      </p:cBhvr>
+                                      <p:to>
+                                        <p:strVal val="visible"/>
+                                      </p:to>
+                                    </p:set>
+                                  </p:childTnLst>
+                                </p:cTn>
+                              </p:par>
+                            </p:childTnLst>
+                          </p:cTn>
+                        </p:par>
+                      </p:childTnLst>
+                    </p:cTn>
+                  </p:par>
+                  <p:par>
+                    <p:cTn id="29" fill="hold">
+                      <p:stCondLst>
+                        <p:cond delay="indefinite"/>
+                      </p:stCondLst>
+                      <p:childTnLst>
+                        <p:par>
+                          <p:cTn id="30" fill="hold">
+                            <p:stCondLst>
+                              <p:cond delay="0"/>
+                            </p:stCondLst>
+                            <p:childTnLst>
+                              <p:par>
+                                <p:cTn id="31" presetID="1" presetClass="entr" presetSubtype="0" fill="hold" nodeType="clickEffect">
+                                  <p:stCondLst>
+                                    <p:cond delay="0"/>
+                                  </p:stCondLst>
+                                  <p:childTnLst>
+                                    <p:set>
+                                      <p:cBhvr>
+                                        <p:cTn id="32" dur="1" fill="hold">
+                                          <p:stCondLst>
+                                            <p:cond delay="0"/>
+                                          </p:stCondLst>
+                                        </p:cTn>
+                                        <p:tgtEl>
+                                          <p:spTgt spid="4">
+                                            <p:txEl>
+                                              <p:pRg st="3" end="3"/>
+                                            </p:txEl>
+                                          </p:spTgt>
+                                        </p:tgtEl>
+                                        <p:attrNameLst>
+                                          <p:attrName>style.visibility</p:attrName>
+                                        </p:attrNameLst>
+                                      </p:cBhvr>
+                                      <p:to>
+                                        <p:strVal val="visible"/>
+                                      </p:to>
+                                    </p:set>
+                                  </p:childTnLst>
+                                </p:cTn>
+                              </p:par>
+                            </p:childTnLst>
+                          </p:cTn>
+                        </p:par>
+                      </p:childTnLst>
+                    </p:cTn>
+                  </p:par>
+                  <p:par>
+                    <p:cTn id="33" fill="hold">
+                      <p:stCondLst>
+                        <p:cond delay="indefinite"/>
+                      </p:stCondLst>
+                      <p:childTnLst>
+                        <p:par>
+                          <p:cTn id="34" fill="hold">
+                            <p:stCondLst>
+                              <p:cond delay="0"/>
+                            </p:stCondLst>
+                            <p:childTnLst>
+                              <p:par>
+                                <p:cTn id="35" presetID="1" presetClass="entr" presetSubtype="0" fill="hold" nodeType="clickEffect">
+                                  <p:stCondLst>
+                                    <p:cond delay="0"/>
+                                  </p:stCondLst>
+                                  <p:childTnLst>
+                                    <p:set>
+                                      <p:cBhvr>
+                                        <p:cTn id="36" dur="1" fill="hold">
+                                          <p:stCondLst>
+                                            <p:cond delay="0"/>
+                                          </p:stCondLst>
+                                        </p:cTn>
+                                        <p:tgtEl>
+                                          <p:spTgt spid="4">
+                                            <p:txEl>
+                                              <p:pRg st="4" end="4"/>
+                                            </p:txEl>
+                                          </p:spTgt>
+                                        </p:tgtEl>
+                                        <p:attrNameLst>
+                                          <p:attrName>style.visibility</p:attrName>
+                                        </p:attrNameLst>
+                                      </p:cBhvr>
+                                      <p:to>
+                                        <p:strVal val="visible"/>
+                                      </p:to>
+                                    </p:set>
+                                  </p:childTnLst>
+                                </p:cTn>
+                              </p:par>
+                            </p:childTnLst>
+                          </p:cTn>
+                        </p:par>
+                      </p:childTnLst>
+                    </p:cTn>
+                  </p:par>
+                </p:childTnLst>
+              </p:cTn>
+              <p:prevCondLst>
+                <p:cond evt="onPrev" delay="0">
+                  <p:tgtEl>
+                    <p:sldTgt/>
+                  </p:tgtEl>
+                </p:cond>
+              </p:prevCondLst>
+              <p:nextCondLst>
+                <p:cond evt="onNext" delay="0">
+                  <p:tgtEl>
+                    <p:sldTgt/>
+                  </p:tgtEl>
+                </p:cond>
+              </p:nextCondLst>
+            </p:seq>
+          </p:childTnLst>
+        </p:cTn>
+      </p:par>
+    </p:tnLst>
+  </p:timing>
 </p:sld>
 </file>
 
 <file path=ppt/slides/slide5.xml><?xml version="1.0" encoding="utf-8"?>
-<p:sld xmlns:a="http://schemas.openxmlformats.org/drawingml/2006/main" xmlns:p="http://schemas.openxmlformats.org/presentationml/2006/main" xmlns:r="http://schemas.openxmlformats.org/officeDocument/2006/relationships">
+<p:sld xmlns:a="http://schemas.openxmlformats.org/drawingml/2006/main" xmlns:r="http://schemas.openxmlformats.org/officeDocument/2006/relationships" xmlns:p="http://schemas.openxmlformats.org/presentationml/2006/main">
   <p:cSld>
     <p:spTree>
       <p:nvGrpSpPr>
@@ -5920,7 +10816,14 @@
         <p:cNvGrpSpPr/>
         <p:nvPr/>
       </p:nvGrpSpPr>
-      <p:grpSpPr/>
+      <p:grpSpPr>
+        <a:xfrm>
+          <a:off x="0" y="0"/>
+          <a:ext cx="0" cy="0"/>
+          <a:chOff x="0" y="0"/>
+          <a:chExt cx="0" cy="0"/>
+        </a:xfrm>
+      </p:grpSpPr>
       <p:sp>
         <p:nvSpPr>
           <p:cNvPr id="2" name="Title 1"/>
@@ -5956,7 +10859,9 @@
         <p:txBody>
           <a:bodyPr/>
           <a:lstStyle/>
-          <a:p/>
+          <a:p>
+            <a:endParaRPr/>
+          </a:p>
         </p:txBody>
       </p:sp>
     </p:spTree>
@@ -5968,7 +10873,7 @@
 </file>
 
 <file path=ppt/slides/slide6.xml><?xml version="1.0" encoding="utf-8"?>
-<p:sld xmlns:a="http://schemas.openxmlformats.org/drawingml/2006/main" xmlns:p="http://schemas.openxmlformats.org/presentationml/2006/main" xmlns:r="http://schemas.openxmlformats.org/officeDocument/2006/relationships">
+<p:sld xmlns:a="http://schemas.openxmlformats.org/drawingml/2006/main" xmlns:r="http://schemas.openxmlformats.org/officeDocument/2006/relationships" xmlns:p="http://schemas.openxmlformats.org/presentationml/2006/main">
   <p:cSld>
     <p:spTree>
       <p:nvGrpSpPr>
@@ -5976,7 +10881,14 @@
         <p:cNvGrpSpPr/>
         <p:nvPr/>
       </p:nvGrpSpPr>
-      <p:grpSpPr/>
+      <p:grpSpPr>
+        <a:xfrm>
+          <a:off x="0" y="0"/>
+          <a:ext cx="0" cy="0"/>
+          <a:chOff x="0" y="0"/>
+          <a:chExt cx="0" cy="0"/>
+        </a:xfrm>
+      </p:grpSpPr>
       <p:sp>
         <p:nvSpPr>
           <p:cNvPr id="2" name="Title 1"/>
@@ -6010,7 +10922,9 @@
         </p:nvSpPr>
         <p:spPr/>
         <p:txBody>
-          <a:bodyPr/>
+          <a:bodyPr>
+            <a:normAutofit/>
+          </a:bodyPr>
           <a:lstStyle/>
           <a:p>
             <a:pPr>
@@ -6025,73 +10939,205 @@
               </a:spcAft>
             </a:pPr>
             <a:r>
-              <a:rPr sz="900">
-                <a:latin typeface="Consolas"/>
-              </a:rPr>
-              <a:t>Commands            Events               Current State</a:t>
-            </a:r>
-            <a:br/>
-            <a:r>
-              <a:rPr sz="900">
-                <a:latin typeface="Consolas"/>
-              </a:rPr>
-              <a:t>┌───────────┐    ┌─────────────┐      ┌─────────────────┐</a:t>
-            </a:r>
-            <a:br/>
-            <a:r>
-              <a:rPr sz="900">
-                <a:latin typeface="Consolas"/>
-              </a:rPr>
-              <a:t>│ Create    │───&gt;│ DeviceCreated│───&gt; │                 │</a:t>
-            </a:r>
-            <a:br/>
-            <a:r>
-              <a:rPr sz="900">
-                <a:latin typeface="Consolas"/>
-              </a:rPr>
-              <a:t>│ Device    │    │   Event     │     │     Current     │</a:t>
-            </a:r>
-            <a:br/>
-            <a:r>
-              <a:rPr sz="900">
-                <a:latin typeface="Consolas"/>
-              </a:rPr>
-              <a:t>└───────────┘    └─────────────┘     │      State      │</a:t>
-            </a:r>
-            <a:br/>
-            <a:r>
-              <a:rPr sz="900">
+              <a:rPr dirty="0">
+                <a:latin typeface="Consolas"/>
+              </a:rPr>
+              <a:t>Commands            Events              Current State</a:t>
+            </a:r>
+            <a:br>
+              <a:rPr sz="6600" dirty="0"/>
+            </a:br>
+            <a:r>
+              <a:rPr dirty="0">
+                <a:latin typeface="Consolas"/>
+              </a:rPr>
+              <a:t>┌───────────┐    ┌───────────</a:t>
+            </a:r>
+            <a:r>
+              <a:rPr lang="en-US" dirty="0">
+                <a:latin typeface="Consolas"/>
+              </a:rPr>
+              <a:t>─</a:t>
+            </a:r>
+            <a:r>
+              <a:rPr dirty="0">
+                <a:latin typeface="Consolas"/>
+              </a:rPr>
+              <a:t>──┐    ┌─────────────────┐</a:t>
+            </a:r>
+            <a:br>
+              <a:rPr sz="6600" dirty="0"/>
+            </a:br>
+            <a:r>
+              <a:rPr dirty="0">
+                <a:latin typeface="Consolas"/>
+              </a:rPr>
+              <a:t>│ Create    │───&gt;│ </a:t>
+            </a:r>
+            <a:r>
+              <a:rPr dirty="0" err="1">
+                <a:latin typeface="Consolas"/>
+              </a:rPr>
+              <a:t>DeviceCreated</a:t>
+            </a:r>
+            <a:r>
+              <a:rPr dirty="0">
+                <a:latin typeface="Consolas"/>
+              </a:rPr>
+              <a:t>│───&gt;│                 │</a:t>
+            </a:r>
+            <a:br>
+              <a:rPr sz="6600" dirty="0"/>
+            </a:br>
+            <a:r>
+              <a:rPr dirty="0">
+                <a:latin typeface="Consolas"/>
+              </a:rPr>
+              <a:t>│ Device    │    │   Event    </a:t>
+            </a:r>
+            <a:r>
+              <a:rPr lang="en-US" dirty="0">
+                <a:latin typeface="Consolas"/>
+              </a:rPr>
+              <a:t> </a:t>
+            </a:r>
+            <a:r>
+              <a:rPr dirty="0">
+                <a:latin typeface="Consolas"/>
+              </a:rPr>
+              <a:t> │    │     Current     │</a:t>
+            </a:r>
+            <a:br>
+              <a:rPr sz="6600" dirty="0"/>
+            </a:br>
+            <a:r>
+              <a:rPr dirty="0">
+                <a:latin typeface="Consolas"/>
+              </a:rPr>
+              <a:t>└───────────┘    └───────────</a:t>
+            </a:r>
+            <a:r>
+              <a:rPr lang="en-US" dirty="0">
+                <a:latin typeface="Consolas"/>
+              </a:rPr>
+              <a:t>─</a:t>
+            </a:r>
+            <a:r>
+              <a:rPr dirty="0">
+                <a:latin typeface="Consolas"/>
+              </a:rPr>
+              <a:t>──┘    │      State      │</a:t>
+            </a:r>
+            <a:br>
+              <a:rPr sz="6600" dirty="0"/>
+            </a:br>
+            <a:r>
+              <a:rPr dirty="0">
                 <a:latin typeface="Consolas"/>
               </a:rPr>
               <a:t>                                     │                 │</a:t>
             </a:r>
-            <a:br/>
-            <a:r>
-              <a:rPr sz="900">
-                <a:latin typeface="Consolas"/>
-              </a:rPr>
-              <a:t>┌───────────┐    ┌─────────────┐     │   (Projection   │</a:t>
-            </a:r>
-            <a:br/>
-            <a:r>
-              <a:rPr sz="900">
-                <a:latin typeface="Consolas"/>
-              </a:rPr>
-              <a:t>│ Configure │───&gt;│ConfigChanged│───&gt; │   from Events)  │</a:t>
-            </a:r>
-            <a:br/>
-            <a:r>
-              <a:rPr sz="900">
-                <a:latin typeface="Consolas"/>
-              </a:rPr>
-              <a:t>│ Device    │    │   Event     │     │                 │</a:t>
-            </a:r>
-            <a:br/>
-            <a:r>
-              <a:rPr sz="900">
-                <a:latin typeface="Consolas"/>
-              </a:rPr>
-              <a:t>└───────────┘    └─────────────┘     └─────────────────┘</a:t>
+            <a:br>
+              <a:rPr sz="6600" dirty="0"/>
+            </a:br>
+            <a:r>
+              <a:rPr dirty="0">
+                <a:latin typeface="Consolas"/>
+              </a:rPr>
+              <a:t>┌───────────┐    ┌─────────────</a:t>
+            </a:r>
+            <a:r>
+              <a:rPr lang="en-US" dirty="0">
+                <a:latin typeface="Consolas"/>
+              </a:rPr>
+              <a:t>─</a:t>
+            </a:r>
+            <a:r>
+              <a:rPr dirty="0">
+                <a:latin typeface="Consolas"/>
+              </a:rPr>
+              <a:t>┐    │   (Projection   │</a:t>
+            </a:r>
+            <a:br>
+              <a:rPr sz="6600" dirty="0"/>
+            </a:br>
+            <a:r>
+              <a:rPr dirty="0">
+                <a:latin typeface="Consolas"/>
+              </a:rPr>
+              <a:t>│ Configure │───&gt;│</a:t>
+            </a:r>
+            <a:r>
+              <a:rPr dirty="0" err="1">
+                <a:latin typeface="Consolas"/>
+              </a:rPr>
+              <a:t>ConfigChanged</a:t>
+            </a:r>
+            <a:r>
+              <a:rPr lang="en-US" dirty="0">
+                <a:latin typeface="Consolas"/>
+              </a:rPr>
+              <a:t> </a:t>
+            </a:r>
+            <a:r>
+              <a:rPr dirty="0">
+                <a:latin typeface="Consolas"/>
+              </a:rPr>
+              <a:t>│───&gt;│   from Events)  │</a:t>
+            </a:r>
+            <a:br>
+              <a:rPr sz="6600" dirty="0"/>
+            </a:br>
+            <a:r>
+              <a:rPr dirty="0">
+                <a:latin typeface="Consolas"/>
+              </a:rPr>
+              <a:t>│ Device    │    │   Event     </a:t>
+            </a:r>
+            <a:r>
+              <a:rPr lang="en-US" dirty="0">
+                <a:latin typeface="Consolas"/>
+              </a:rPr>
+              <a:t> </a:t>
+            </a:r>
+            <a:r>
+              <a:rPr dirty="0">
+                <a:latin typeface="Consolas"/>
+              </a:rPr>
+              <a:t>│    │                 │</a:t>
+            </a:r>
+            <a:br>
+              <a:rPr sz="6600" dirty="0"/>
+            </a:br>
+            <a:r>
+              <a:rPr dirty="0">
+                <a:latin typeface="Consolas"/>
+              </a:rPr>
+              <a:t>└───────────┘    └─────────────</a:t>
+            </a:r>
+            <a:r>
+              <a:rPr lang="en-US" dirty="0">
+                <a:latin typeface="Consolas"/>
+              </a:rPr>
+              <a:t>─</a:t>
+            </a:r>
+            <a:r>
+              <a:rPr dirty="0">
+                <a:latin typeface="Consolas"/>
+              </a:rPr>
+              <a:t>┘   </a:t>
+            </a:r>
+            <a:r>
+              <a:rPr lang="en-US" dirty="0">
+                <a:latin typeface="Consolas"/>
+              </a:rPr>
+              <a:t> </a:t>
+            </a:r>
+            <a:r>
+              <a:rPr dirty="0">
+                <a:latin typeface="Consolas"/>
+              </a:rPr>
+              <a:t>└─────────────────┘</a:t>
             </a:r>
           </a:p>
         </p:txBody>
@@ -6105,7 +11151,7 @@
 </file>
 
 <file path=ppt/slides/slide7.xml><?xml version="1.0" encoding="utf-8"?>
-<p:sld xmlns:a="http://schemas.openxmlformats.org/drawingml/2006/main" xmlns:p="http://schemas.openxmlformats.org/presentationml/2006/main" xmlns:r="http://schemas.openxmlformats.org/officeDocument/2006/relationships">
+<p:sld xmlns:a="http://schemas.openxmlformats.org/drawingml/2006/main" xmlns:r="http://schemas.openxmlformats.org/officeDocument/2006/relationships" xmlns:p="http://schemas.openxmlformats.org/presentationml/2006/main">
   <p:cSld>
     <p:spTree>
       <p:nvGrpSpPr>
@@ -6113,7 +11159,14 @@
         <p:cNvGrpSpPr/>
         <p:nvPr/>
       </p:nvGrpSpPr>
-      <p:grpSpPr/>
+      <p:grpSpPr>
+        <a:xfrm>
+          <a:off x="0" y="0"/>
+          <a:ext cx="0" cy="0"/>
+          <a:chOff x="0" y="0"/>
+          <a:chExt cx="0" cy="0"/>
+        </a:xfrm>
+      </p:grpSpPr>
       <p:sp>
         <p:nvSpPr>
           <p:cNvPr id="2" name="Title 1"/>
@@ -6149,7 +11202,9 @@
         <p:txBody>
           <a:bodyPr/>
           <a:lstStyle/>
-          <a:p/>
+          <a:p>
+            <a:endParaRPr/>
+          </a:p>
         </p:txBody>
       </p:sp>
     </p:spTree>
@@ -6161,7 +11216,7 @@
 </file>
 
 <file path=ppt/slides/slide8.xml><?xml version="1.0" encoding="utf-8"?>
-<p:sld xmlns:a="http://schemas.openxmlformats.org/drawingml/2006/main" xmlns:p="http://schemas.openxmlformats.org/presentationml/2006/main" xmlns:r="http://schemas.openxmlformats.org/officeDocument/2006/relationships">
+<p:sld xmlns:a="http://schemas.openxmlformats.org/drawingml/2006/main" xmlns:r="http://schemas.openxmlformats.org/officeDocument/2006/relationships" xmlns:p="http://schemas.openxmlformats.org/presentationml/2006/main">
   <p:cSld>
     <p:spTree>
       <p:nvGrpSpPr>
@@ -6169,7 +11224,14 @@
         <p:cNvGrpSpPr/>
         <p:nvPr/>
       </p:nvGrpSpPr>
-      <p:grpSpPr/>
+      <p:grpSpPr>
+        <a:xfrm>
+          <a:off x="0" y="0"/>
+          <a:ext cx="0" cy="0"/>
+          <a:chOff x="0" y="0"/>
+          <a:chExt cx="0" cy="0"/>
+        </a:xfrm>
+      </p:grpSpPr>
       <p:sp>
         <p:nvSpPr>
           <p:cNvPr id="2" name="Title 1"/>
@@ -6203,7 +11265,9 @@
         </p:nvSpPr>
         <p:spPr/>
         <p:txBody>
-          <a:bodyPr/>
+          <a:bodyPr>
+            <a:normAutofit/>
+          </a:bodyPr>
           <a:lstStyle/>
           <a:p>
             <a:pPr>
@@ -6218,77 +11282,97 @@
               </a:spcAft>
             </a:pPr>
             <a:r>
-              <a:rPr sz="900">
+              <a:rPr sz="2000" dirty="0">
                 <a:latin typeface="Consolas"/>
               </a:rPr>
               <a:t>CLOSED                    OPEN                    HALF-OPEN</a:t>
             </a:r>
-            <a:br/>
-            <a:r>
-              <a:rPr sz="900">
+            <a:br>
+              <a:rPr sz="6000" dirty="0"/>
+            </a:br>
+            <a:r>
+              <a:rPr sz="2000" dirty="0">
                 <a:latin typeface="Consolas"/>
               </a:rPr>
               <a:t>┌─────────────────┐      ┌─────────────────┐      ┌─────────────────┐</a:t>
             </a:r>
-            <a:br/>
-            <a:r>
-              <a:rPr sz="900">
+            <a:br>
+              <a:rPr sz="6000" dirty="0"/>
+            </a:br>
+            <a:r>
+              <a:rPr sz="2000" dirty="0">
                 <a:latin typeface="Consolas"/>
               </a:rPr>
               <a:t>│ Normal          │      │ Service Down    │      │ Testing         │</a:t>
             </a:r>
-            <a:br/>
-            <a:r>
-              <a:rPr sz="900">
+            <a:br>
+              <a:rPr sz="6000" dirty="0"/>
+            </a:br>
+            <a:r>
+              <a:rPr sz="2000" dirty="0">
                 <a:latin typeface="Consolas"/>
               </a:rPr>
               <a:t>│ Operation       │─────&gt;│ Fast Fail       │─────&gt;│ Recovery        │</a:t>
             </a:r>
-            <a:br/>
-            <a:r>
-              <a:rPr sz="900">
+            <a:br>
+              <a:rPr sz="6000" dirty="0"/>
+            </a:br>
+            <a:r>
+              <a:rPr sz="2000" dirty="0">
                 <a:latin typeface="Consolas"/>
               </a:rPr>
               <a:t>│                 │      │                 │      │                 │</a:t>
             </a:r>
-            <a:br/>
-            <a:r>
-              <a:rPr sz="900">
+            <a:br>
+              <a:rPr sz="6000" dirty="0"/>
+            </a:br>
+            <a:r>
+              <a:rPr sz="2000" dirty="0">
                 <a:latin typeface="Consolas"/>
               </a:rPr>
               <a:t>│ Success Rate    │      │ Timeout Period  │      │ Limited Calls   │</a:t>
             </a:r>
-            <a:br/>
-            <a:r>
-              <a:rPr sz="900">
+            <a:br>
+              <a:rPr sz="6000" dirty="0"/>
+            </a:br>
+            <a:r>
+              <a:rPr sz="2000" dirty="0">
                 <a:latin typeface="Consolas"/>
               </a:rPr>
               <a:t>│ &gt; Threshold     │      │ Elapsed         │      │                 │</a:t>
             </a:r>
-            <a:br/>
-            <a:r>
-              <a:rPr sz="900">
+            <a:br>
+              <a:rPr sz="6000" dirty="0"/>
+            </a:br>
+            <a:r>
+              <a:rPr sz="2000" dirty="0">
                 <a:latin typeface="Consolas"/>
               </a:rPr>
               <a:t>└─────────────────┘      └─────────────────┘      └─────────────────┘</a:t>
             </a:r>
-            <a:br/>
-            <a:r>
-              <a:rPr sz="900">
+            <a:br>
+              <a:rPr sz="6000" dirty="0"/>
+            </a:br>
+            <a:r>
+              <a:rPr sz="2000" dirty="0">
                 <a:latin typeface="Consolas"/>
               </a:rPr>
               <a:t>         ▲                                                  │</a:t>
             </a:r>
-            <a:br/>
-            <a:r>
-              <a:rPr sz="900">
+            <a:br>
+              <a:rPr sz="6000" dirty="0"/>
+            </a:br>
+            <a:r>
+              <a:rPr sz="2000" dirty="0">
                 <a:latin typeface="Consolas"/>
               </a:rPr>
               <a:t>         └──────────────────────────────────────────────────┘</a:t>
             </a:r>
-            <a:br/>
-            <a:r>
-              <a:rPr sz="900">
+            <a:br>
+              <a:rPr sz="6000" dirty="0"/>
+            </a:br>
+            <a:r>
+              <a:rPr sz="2000" dirty="0">
                 <a:latin typeface="Consolas"/>
               </a:rPr>
               <a:t>                         Success Rate &gt; Threshold</a:t>
@@ -6305,7 +11389,7 @@
 </file>
 
 <file path=ppt/slides/slide9.xml><?xml version="1.0" encoding="utf-8"?>
-<p:sld xmlns:a="http://schemas.openxmlformats.org/drawingml/2006/main" xmlns:p="http://schemas.openxmlformats.org/presentationml/2006/main" xmlns:r="http://schemas.openxmlformats.org/officeDocument/2006/relationships">
+<p:sld xmlns:a="http://schemas.openxmlformats.org/drawingml/2006/main" xmlns:r="http://schemas.openxmlformats.org/officeDocument/2006/relationships" xmlns:p="http://schemas.openxmlformats.org/presentationml/2006/main">
   <p:cSld>
     <p:spTree>
       <p:nvGrpSpPr>
@@ -6313,7 +11397,14 @@
         <p:cNvGrpSpPr/>
         <p:nvPr/>
       </p:nvGrpSpPr>
-      <p:grpSpPr/>
+      <p:grpSpPr>
+        <a:xfrm>
+          <a:off x="0" y="0"/>
+          <a:ext cx="0" cy="0"/>
+          <a:chOff x="0" y="0"/>
+          <a:chExt cx="0" cy="0"/>
+        </a:xfrm>
+      </p:grpSpPr>
       <p:sp>
         <p:nvSpPr>
           <p:cNvPr id="2" name="Title 1"/>
@@ -6349,7 +11440,9 @@
         <p:txBody>
           <a:bodyPr/>
           <a:lstStyle/>
-          <a:p/>
+          <a:p>
+            <a:endParaRPr/>
+          </a:p>
         </p:txBody>
       </p:sp>
     </p:spTree>
@@ -6673,4 +11766,324 @@
     </a:ext>
   </a:extLst>
 </a:theme>
+</file>
+
+<file path=ppt/theme/theme2.xml><?xml version="1.0" encoding="utf-8"?>
+<a:theme xmlns:a="http://schemas.openxmlformats.org/drawingml/2006/main" name="Office Theme">
+  <a:themeElements>
+    <a:clrScheme name="Office">
+      <a:dk1>
+        <a:sysClr val="windowText" lastClr="000000"/>
+      </a:dk1>
+      <a:lt1>
+        <a:sysClr val="window" lastClr="FFFFFF"/>
+      </a:lt1>
+      <a:dk2>
+        <a:srgbClr val="1F497D"/>
+      </a:dk2>
+      <a:lt2>
+        <a:srgbClr val="EEECE1"/>
+      </a:lt2>
+      <a:accent1>
+        <a:srgbClr val="4F81BD"/>
+      </a:accent1>
+      <a:accent2>
+        <a:srgbClr val="C0504D"/>
+      </a:accent2>
+      <a:accent3>
+        <a:srgbClr val="9BBB59"/>
+      </a:accent3>
+      <a:accent4>
+        <a:srgbClr val="8064A2"/>
+      </a:accent4>
+      <a:accent5>
+        <a:srgbClr val="4BACC6"/>
+      </a:accent5>
+      <a:accent6>
+        <a:srgbClr val="F79646"/>
+      </a:accent6>
+      <a:hlink>
+        <a:srgbClr val="0000FF"/>
+      </a:hlink>
+      <a:folHlink>
+        <a:srgbClr val="800080"/>
+      </a:folHlink>
+    </a:clrScheme>
+    <a:fontScheme name="Office">
+      <a:majorFont>
+        <a:latin typeface="Calibri"/>
+        <a:ea typeface=""/>
+        <a:cs typeface=""/>
+        <a:font script="Jpan" typeface="ＭＳ Ｐゴシック"/>
+        <a:font script="Hang" typeface="맑은 고딕"/>
+        <a:font script="Hans" typeface="宋体"/>
+        <a:font script="Hant" typeface="新細明體"/>
+        <a:font script="Arab" typeface="Times New Roman"/>
+        <a:font script="Hebr" typeface="Times New Roman"/>
+        <a:font script="Thai" typeface="Angsana New"/>
+        <a:font script="Ethi" typeface="Nyala"/>
+        <a:font script="Beng" typeface="Vrinda"/>
+        <a:font script="Gujr" typeface="Shruti"/>
+        <a:font script="Khmr" typeface="MoolBoran"/>
+        <a:font script="Knda" typeface="Tunga"/>
+        <a:font script="Guru" typeface="Raavi"/>
+        <a:font script="Cans" typeface="Euphemia"/>
+        <a:font script="Cher" typeface="Plantagenet Cherokee"/>
+        <a:font script="Yiii" typeface="Microsoft Yi Baiti"/>
+        <a:font script="Tibt" typeface="Microsoft Himalaya"/>
+        <a:font script="Thaa" typeface="MV Boli"/>
+        <a:font script="Deva" typeface="Mangal"/>
+        <a:font script="Telu" typeface="Gautami"/>
+        <a:font script="Taml" typeface="Latha"/>
+        <a:font script="Syrc" typeface="Estrangelo Edessa"/>
+        <a:font script="Orya" typeface="Kalinga"/>
+        <a:font script="Mlym" typeface="Kartika"/>
+        <a:font script="Laoo" typeface="DokChampa"/>
+        <a:font script="Sinh" typeface="Iskoola Pota"/>
+        <a:font script="Mong" typeface="Mongolian Baiti"/>
+        <a:font script="Viet" typeface="Times New Roman"/>
+        <a:font script="Uigh" typeface="Microsoft Uighur"/>
+        <a:font script="Geor" typeface="Sylfaen"/>
+      </a:majorFont>
+      <a:minorFont>
+        <a:latin typeface="Calibri"/>
+        <a:ea typeface=""/>
+        <a:cs typeface=""/>
+        <a:font script="Jpan" typeface="ＭＳ Ｐゴシック"/>
+        <a:font script="Hang" typeface="맑은 고딕"/>
+        <a:font script="Hans" typeface="宋体"/>
+        <a:font script="Hant" typeface="新細明體"/>
+        <a:font script="Arab" typeface="Arial"/>
+        <a:font script="Hebr" typeface="Arial"/>
+        <a:font script="Thai" typeface="Cordia New"/>
+        <a:font script="Ethi" typeface="Nyala"/>
+        <a:font script="Beng" typeface="Vrinda"/>
+        <a:font script="Gujr" typeface="Shruti"/>
+        <a:font script="Khmr" typeface="DaunPenh"/>
+        <a:font script="Knda" typeface="Tunga"/>
+        <a:font script="Guru" typeface="Raavi"/>
+        <a:font script="Cans" typeface="Euphemia"/>
+        <a:font script="Cher" typeface="Plantagenet Cherokee"/>
+        <a:font script="Yiii" typeface="Microsoft Yi Baiti"/>
+        <a:font script="Tibt" typeface="Microsoft Himalaya"/>
+        <a:font script="Thaa" typeface="MV Boli"/>
+        <a:font script="Deva" typeface="Mangal"/>
+        <a:font script="Telu" typeface="Gautami"/>
+        <a:font script="Taml" typeface="Latha"/>
+        <a:font script="Syrc" typeface="Estrangelo Edessa"/>
+        <a:font script="Orya" typeface="Kalinga"/>
+        <a:font script="Mlym" typeface="Kartika"/>
+        <a:font script="Laoo" typeface="DokChampa"/>
+        <a:font script="Sinh" typeface="Iskoola Pota"/>
+        <a:font script="Mong" typeface="Mongolian Baiti"/>
+        <a:font script="Viet" typeface="Arial"/>
+        <a:font script="Uigh" typeface="Microsoft Uighur"/>
+        <a:font script="Geor" typeface="Sylfaen"/>
+      </a:minorFont>
+    </a:fontScheme>
+    <a:fmtScheme name="Office">
+      <a:fillStyleLst>
+        <a:solidFill>
+          <a:schemeClr val="phClr"/>
+        </a:solidFill>
+        <a:gradFill rotWithShape="1">
+          <a:gsLst>
+            <a:gs pos="0">
+              <a:schemeClr val="phClr">
+                <a:tint val="50000"/>
+                <a:satMod val="300000"/>
+              </a:schemeClr>
+            </a:gs>
+            <a:gs pos="35000">
+              <a:schemeClr val="phClr">
+                <a:tint val="37000"/>
+                <a:satMod val="300000"/>
+              </a:schemeClr>
+            </a:gs>
+            <a:gs pos="100000">
+              <a:schemeClr val="phClr">
+                <a:tint val="15000"/>
+                <a:satMod val="350000"/>
+              </a:schemeClr>
+            </a:gs>
+          </a:gsLst>
+          <a:lin ang="16200000" scaled="1"/>
+        </a:gradFill>
+        <a:gradFill rotWithShape="1">
+          <a:gsLst>
+            <a:gs pos="0">
+              <a:schemeClr val="phClr">
+                <a:tint val="100000"/>
+                <a:shade val="100000"/>
+                <a:satMod val="130000"/>
+              </a:schemeClr>
+            </a:gs>
+            <a:gs pos="100000">
+              <a:schemeClr val="phClr">
+                <a:tint val="50000"/>
+                <a:shade val="100000"/>
+                <a:satMod val="350000"/>
+              </a:schemeClr>
+            </a:gs>
+          </a:gsLst>
+          <a:lin ang="16200000" scaled="0"/>
+        </a:gradFill>
+      </a:fillStyleLst>
+      <a:lnStyleLst>
+        <a:ln w="9525" cap="flat" cmpd="sng" algn="ctr">
+          <a:solidFill>
+            <a:schemeClr val="phClr">
+              <a:shade val="95000"/>
+              <a:satMod val="105000"/>
+            </a:schemeClr>
+          </a:solidFill>
+          <a:prstDash val="solid"/>
+        </a:ln>
+        <a:ln w="25400" cap="flat" cmpd="sng" algn="ctr">
+          <a:solidFill>
+            <a:schemeClr val="phClr"/>
+          </a:solidFill>
+          <a:prstDash val="solid"/>
+        </a:ln>
+        <a:ln w="38100" cap="flat" cmpd="sng" algn="ctr">
+          <a:solidFill>
+            <a:schemeClr val="phClr"/>
+          </a:solidFill>
+          <a:prstDash val="solid"/>
+        </a:ln>
+      </a:lnStyleLst>
+      <a:effectStyleLst>
+        <a:effectStyle>
+          <a:effectLst>
+            <a:outerShdw blurRad="40000" dist="20000" dir="5400000" rotWithShape="0">
+              <a:srgbClr val="000000">
+                <a:alpha val="38000"/>
+              </a:srgbClr>
+            </a:outerShdw>
+          </a:effectLst>
+        </a:effectStyle>
+        <a:effectStyle>
+          <a:effectLst>
+            <a:outerShdw blurRad="40000" dist="23000" dir="5400000" rotWithShape="0">
+              <a:srgbClr val="000000">
+                <a:alpha val="35000"/>
+              </a:srgbClr>
+            </a:outerShdw>
+          </a:effectLst>
+        </a:effectStyle>
+        <a:effectStyle>
+          <a:effectLst>
+            <a:outerShdw blurRad="40000" dist="23000" dir="5400000" rotWithShape="0">
+              <a:srgbClr val="000000">
+                <a:alpha val="35000"/>
+              </a:srgbClr>
+            </a:outerShdw>
+          </a:effectLst>
+          <a:scene3d>
+            <a:camera prst="orthographicFront">
+              <a:rot lat="0" lon="0" rev="0"/>
+            </a:camera>
+            <a:lightRig rig="threePt" dir="t">
+              <a:rot lat="0" lon="0" rev="1200000"/>
+            </a:lightRig>
+          </a:scene3d>
+          <a:sp3d>
+            <a:bevelT w="63500" h="25400"/>
+          </a:sp3d>
+        </a:effectStyle>
+      </a:effectStyleLst>
+      <a:bgFillStyleLst>
+        <a:solidFill>
+          <a:schemeClr val="phClr"/>
+        </a:solidFill>
+        <a:gradFill rotWithShape="1">
+          <a:gsLst>
+            <a:gs pos="0">
+              <a:schemeClr val="phClr">
+                <a:tint val="40000"/>
+                <a:satMod val="350000"/>
+              </a:schemeClr>
+            </a:gs>
+            <a:gs pos="40000">
+              <a:schemeClr val="phClr">
+                <a:tint val="45000"/>
+                <a:shade val="99000"/>
+                <a:satMod val="350000"/>
+              </a:schemeClr>
+            </a:gs>
+            <a:gs pos="100000">
+              <a:schemeClr val="phClr">
+                <a:shade val="20000"/>
+                <a:satMod val="255000"/>
+              </a:schemeClr>
+            </a:gs>
+          </a:gsLst>
+          <a:path path="circle">
+            <a:fillToRect l="50000" t="-80000" r="50000" b="180000"/>
+          </a:path>
+        </a:gradFill>
+        <a:gradFill rotWithShape="1">
+          <a:gsLst>
+            <a:gs pos="0">
+              <a:schemeClr val="phClr">
+                <a:tint val="80000"/>
+                <a:satMod val="300000"/>
+              </a:schemeClr>
+            </a:gs>
+            <a:gs pos="100000">
+              <a:schemeClr val="phClr">
+                <a:shade val="30000"/>
+                <a:satMod val="200000"/>
+              </a:schemeClr>
+            </a:gs>
+          </a:gsLst>
+          <a:path path="circle">
+            <a:fillToRect l="50000" t="50000" r="50000" b="50000"/>
+          </a:path>
+        </a:gradFill>
+      </a:bgFillStyleLst>
+    </a:fmtScheme>
+  </a:themeElements>
+  <a:objectDefaults>
+    <a:spDef>
+      <a:spPr/>
+      <a:bodyPr/>
+      <a:lstStyle/>
+      <a:style>
+        <a:lnRef idx="1">
+          <a:schemeClr val="accent1"/>
+        </a:lnRef>
+        <a:fillRef idx="3">
+          <a:schemeClr val="accent1"/>
+        </a:fillRef>
+        <a:effectRef idx="2">
+          <a:schemeClr val="accent1"/>
+        </a:effectRef>
+        <a:fontRef idx="minor">
+          <a:schemeClr val="lt1"/>
+        </a:fontRef>
+      </a:style>
+    </a:spDef>
+    <a:lnDef>
+      <a:spPr/>
+      <a:bodyPr/>
+      <a:lstStyle/>
+      <a:style>
+        <a:lnRef idx="2">
+          <a:schemeClr val="accent1"/>
+        </a:lnRef>
+        <a:fillRef idx="0">
+          <a:schemeClr val="accent1"/>
+        </a:fillRef>
+        <a:effectRef idx="1">
+          <a:schemeClr val="accent1"/>
+        </a:effectRef>
+        <a:fontRef idx="minor">
+          <a:schemeClr val="tx1"/>
+        </a:fontRef>
+      </a:style>
+    </a:lnDef>
+  </a:objectDefaults>
+  <a:extraClrSchemeLst/>
+</a:theme>
 </file>
--- a/presentations/powerpoint/arch-patterns-part2.pptx
+++ b/presentations/powerpoint/arch-patterns-part2.pptx
@@ -21,15 +21,24 @@
     <p:sldId id="270" r:id="rId16"/>
     <p:sldId id="271" r:id="rId17"/>
     <p:sldId id="272" r:id="rId18"/>
-    <p:sldId id="281" r:id="rId32"/>
-    <p:sldId id="282" r:id="rId33"/>
-    <p:sldId id="283" r:id="rId34"/>
-    <p:sldId id="284" r:id="rId35"/>
-    <p:sldId id="285" r:id="rId36"/>
-    <p:sldId id="286" r:id="rId37"/>
-    <p:sldId id="287" r:id="rId38"/>
-    <p:sldId id="288" r:id="rId39"/>
-    <p:sldId id="289" r:id="rId40"/>
+    <p:sldId id="273" r:id="rId31"/>
+    <p:sldId id="274" r:id="rId30"/>
+    <p:sldId id="275" r:id="rId29"/>
+    <p:sldId id="276" r:id="rId28"/>
+    <p:sldId id="277" r:id="rId27"/>
+    <p:sldId id="278" r:id="rId26"/>
+    <p:sldId id="279" r:id="rId24"/>
+    <p:sldId id="280" r:id="rId23"/>
+    <p:sldId id="281" r:id="rId5"/>
+    <p:sldId id="282" r:id="rId41"/>
+    <p:sldId id="283" r:id="rId42"/>
+    <p:sldId id="284" r:id="rId43"/>
+    <p:sldId id="285" r:id="rId44"/>
+    <p:sldId id="286" r:id="rId45"/>
+    <p:sldId id="287" r:id="rId46"/>
+    <p:sldId id="288" r:id="rId47"/>
+    <p:sldId id="289" r:id="rId48"/>
+    <p:sldId id="290" r:id="rId49"/>
   </p:sldIdLst>
   <p:sldSz cx="12192000" cy="6858000"/>
   <p:notesSz cx="6858000" cy="9144000"/>
@@ -2436,666 +2445,6 @@
 </p:notes>
 </file>
 
-<file path=ppt/notesSlides/notesSlide26.xml><?xml version="1.0" encoding="utf-8"?>
-<p:notes xmlns:a="http://schemas.openxmlformats.org/drawingml/2006/main" xmlns:p="http://schemas.openxmlformats.org/presentationml/2006/main" xmlns:r="http://schemas.openxmlformats.org/officeDocument/2006/relationships">
-  <p:cSld>
-    <p:spTree>
-      <p:nvGrpSpPr>
-        <p:cNvPr id="1" name=""/>
-        <p:cNvGrpSpPr/>
-        <p:nvPr/>
-      </p:nvGrpSpPr>
-      <p:grpSpPr>
-        <a:xfrm>
-          <a:off x="0" y="0"/>
-          <a:ext cx="0" cy="0"/>
-          <a:chOff x="0" y="0"/>
-          <a:chExt cx="0" cy="0"/>
-        </a:xfrm>
-      </p:grpSpPr>
-      <p:sp>
-        <p:nvSpPr>
-          <p:cNvPr id="2" name="Slide Image Placeholder 1"/>
-          <p:cNvSpPr>
-            <a:spLocks noGrp="1"/>
-          </p:cNvSpPr>
-          <p:nvPr>
-            <p:ph type="sldImg" idx="2"/>
-          </p:nvPr>
-        </p:nvSpPr>
-        <p:spPr/>
-      </p:sp>
-      <p:sp>
-        <p:nvSpPr>
-          <p:cNvPr id="3" name="Notes Placeholder 2"/>
-          <p:cNvSpPr>
-            <a:spLocks noGrp="1"/>
-          </p:cNvSpPr>
-          <p:nvPr>
-            <p:ph type="body" idx="3" sz="quarter"/>
-          </p:nvPr>
-        </p:nvSpPr>
-        <p:spPr/>
-        <p:txBody>
-          <a:bodyPr/>
-          <a:lstStyle/>
-          <a:p>
-            <a:r>
-              <a:t>Sprecher-Notizen für CQRS Trade-offs:</a:t>
-            </a:r>
-          </a:p>
-          <a:p/>
-          <a:p>
-            <a:r>
-              <a:t>EINFÜHRUNG:</a:t>
-            </a:r>
-          </a:p>
-          <a:p>
-            <a:r>
-              <a:t>- Kurz den Kontext des Patterns wiederholen</a:t>
-            </a:r>
-          </a:p>
-          <a:p>
-            <a:r>
-              <a:t>- Betonen: Jede Architekturentscheidung hat Vor- und Nachteile</a:t>
-            </a:r>
-          </a:p>
-          <a:p/>
-          <a:p>
-            <a:r>
-              <a:t>VORTEILE (0 Punkte):</a:t>
-            </a:r>
-          </a:p>
-          <a:p>
-            <a:r>
-              <a:t>- Jeden Vorteil mit konkreten Telekom-Beispielen untermauern</a:t>
-            </a:r>
-          </a:p>
-          <a:p>
-            <a:r>
-              <a:t>- Bei Performance-Vorteilen: Zahlen und Metriken erwähnen</a:t>
-            </a:r>
-          </a:p>
-          <a:p>
-            <a:r>
-              <a:t>- Bei Team-Vorteilen: Auswirkungen auf Entwicklungsprozesse erklären</a:t>
-            </a:r>
-          </a:p>
-          <a:p/>
-          <a:p>
-            <a:r>
-              <a:t>NACHTEILE (0 Punkte):</a:t>
-            </a:r>
-          </a:p>
-          <a:p>
-            <a:r>
-              <a:t>- Ehrlich über Herausforderungen sprechen</a:t>
-            </a:r>
-          </a:p>
-          <a:p>
-            <a:r>
-              <a:t>- Mitigation-Strategien für kritische Nachteile erwähnen</a:t>
-            </a:r>
-          </a:p>
-          <a:p>
-            <a:r>
-              <a:t>- Kosten-Nutzen-Abwägung diskutieren</a:t>
-            </a:r>
-          </a:p>
-          <a:p/>
-          <a:p>
-            <a:r>
-              <a:t>TELEKOM-SPEZIFISCH:</a:t>
-            </a:r>
-          </a:p>
-          <a:p>
-            <a:r>
-              <a:t>- Welche Nachteile sind für Telekom besonders relevant?</a:t>
-            </a:r>
-          </a:p>
-          <a:p>
-            <a:r>
-              <a:t>- Gibt es interne Tools/Prozesse, die Nachteile abmildern?</a:t>
-            </a:r>
-          </a:p>
-          <a:p>
-            <a:r>
-              <a:t>- Lessons learned aus ähnlichen Projekten erwähnen</a:t>
-            </a:r>
-          </a:p>
-          <a:p/>
-          <a:p>
-            <a:r>
-              <a:t>ÜBERLEITUNG:</a:t>
-            </a:r>
-          </a:p>
-          <a:p>
-            <a:r>
-              <a:t>- Vorbereitung auf 'When to Use' Slide</a:t>
-            </a:r>
-          </a:p>
-          <a:p>
-            <a:r>
-              <a:t>- Hint: Context ist entscheidend für Entscheidung</a:t>
-            </a:r>
-          </a:p>
-        </p:txBody>
-      </p:sp>
-      <p:sp>
-        <p:nvSpPr>
-          <p:cNvPr id="4" name="Slide Number Placeholder 3"/>
-          <p:cNvSpPr>
-            <a:spLocks noGrp="1"/>
-          </p:cNvSpPr>
-          <p:nvPr>
-            <p:ph type="sldNum" idx="5" sz="quarter"/>
-          </p:nvPr>
-        </p:nvSpPr>
-        <p:spPr/>
-      </p:sp>
-    </p:spTree>
-  </p:cSld>
-  <p:clrMapOvr>
-    <a:masterClrMapping/>
-  </p:clrMapOvr>
-</p:notes>
-</file>
-
-<file path=ppt/notesSlides/notesSlide27.xml><?xml version="1.0" encoding="utf-8"?>
-<p:notes xmlns:a="http://schemas.openxmlformats.org/drawingml/2006/main" xmlns:p="http://schemas.openxmlformats.org/presentationml/2006/main" xmlns:r="http://schemas.openxmlformats.org/officeDocument/2006/relationships">
-  <p:cSld>
-    <p:spTree>
-      <p:nvGrpSpPr>
-        <p:cNvPr id="1" name=""/>
-        <p:cNvGrpSpPr/>
-        <p:nvPr/>
-      </p:nvGrpSpPr>
-      <p:grpSpPr>
-        <a:xfrm>
-          <a:off x="0" y="0"/>
-          <a:ext cx="0" cy="0"/>
-          <a:chOff x="0" y="0"/>
-          <a:chExt cx="0" cy="0"/>
-        </a:xfrm>
-      </p:grpSpPr>
-      <p:sp>
-        <p:nvSpPr>
-          <p:cNvPr id="2" name="Slide Image Placeholder 1"/>
-          <p:cNvSpPr>
-            <a:spLocks noGrp="1"/>
-          </p:cNvSpPr>
-          <p:nvPr>
-            <p:ph type="sldImg" idx="2"/>
-          </p:nvPr>
-        </p:nvSpPr>
-        <p:spPr/>
-      </p:sp>
-      <p:sp>
-        <p:nvSpPr>
-          <p:cNvPr id="3" name="Notes Placeholder 2"/>
-          <p:cNvSpPr>
-            <a:spLocks noGrp="1"/>
-          </p:cNvSpPr>
-          <p:nvPr>
-            <p:ph type="body" idx="3" sz="quarter"/>
-          </p:nvPr>
-        </p:nvSpPr>
-        <p:spPr/>
-        <p:txBody>
-          <a:bodyPr/>
-          <a:lstStyle/>
-          <a:p>
-            <a:r>
-              <a:t>Sprecher-Notizen für CQRS Trade-offs:</a:t>
-            </a:r>
-          </a:p>
-          <a:p/>
-          <a:p>
-            <a:r>
-              <a:t>EINFÜHRUNG:</a:t>
-            </a:r>
-          </a:p>
-          <a:p>
-            <a:r>
-              <a:t>- Kurz den Kontext des Patterns wiederholen</a:t>
-            </a:r>
-          </a:p>
-          <a:p>
-            <a:r>
-              <a:t>- Betonen: Jede Architekturentscheidung hat Vor- und Nachteile</a:t>
-            </a:r>
-          </a:p>
-          <a:p/>
-          <a:p>
-            <a:r>
-              <a:t>VORTEILE (0 Punkte):</a:t>
-            </a:r>
-          </a:p>
-          <a:p>
-            <a:r>
-              <a:t>- Jeden Vorteil mit konkreten Telekom-Beispielen untermauern</a:t>
-            </a:r>
-          </a:p>
-          <a:p>
-            <a:r>
-              <a:t>- Bei Performance-Vorteilen: Zahlen und Metriken erwähnen</a:t>
-            </a:r>
-          </a:p>
-          <a:p>
-            <a:r>
-              <a:t>- Bei Team-Vorteilen: Auswirkungen auf Entwicklungsprozesse erklären</a:t>
-            </a:r>
-          </a:p>
-          <a:p/>
-          <a:p>
-            <a:r>
-              <a:t>NACHTEILE (0 Punkte):</a:t>
-            </a:r>
-          </a:p>
-          <a:p>
-            <a:r>
-              <a:t>- Ehrlich über Herausforderungen sprechen</a:t>
-            </a:r>
-          </a:p>
-          <a:p>
-            <a:r>
-              <a:t>- Mitigation-Strategien für kritische Nachteile erwähnen</a:t>
-            </a:r>
-          </a:p>
-          <a:p>
-            <a:r>
-              <a:t>- Kosten-Nutzen-Abwägung diskutieren</a:t>
-            </a:r>
-          </a:p>
-          <a:p/>
-          <a:p>
-            <a:r>
-              <a:t>TELEKOM-SPEZIFISCH:</a:t>
-            </a:r>
-          </a:p>
-          <a:p>
-            <a:r>
-              <a:t>- Welche Nachteile sind für Telekom besonders relevant?</a:t>
-            </a:r>
-          </a:p>
-          <a:p>
-            <a:r>
-              <a:t>- Gibt es interne Tools/Prozesse, die Nachteile abmildern?</a:t>
-            </a:r>
-          </a:p>
-          <a:p>
-            <a:r>
-              <a:t>- Lessons learned aus ähnlichen Projekten erwähnen</a:t>
-            </a:r>
-          </a:p>
-          <a:p/>
-          <a:p>
-            <a:r>
-              <a:t>ÜBERLEITUNG:</a:t>
-            </a:r>
-          </a:p>
-          <a:p>
-            <a:r>
-              <a:t>- Vorbereitung auf 'When to Use' Slide</a:t>
-            </a:r>
-          </a:p>
-          <a:p>
-            <a:r>
-              <a:t>- Hint: Context ist entscheidend für Entscheidung</a:t>
-            </a:r>
-          </a:p>
-        </p:txBody>
-      </p:sp>
-      <p:sp>
-        <p:nvSpPr>
-          <p:cNvPr id="4" name="Slide Number Placeholder 3"/>
-          <p:cNvSpPr>
-            <a:spLocks noGrp="1"/>
-          </p:cNvSpPr>
-          <p:nvPr>
-            <p:ph type="sldNum" idx="5" sz="quarter"/>
-          </p:nvPr>
-        </p:nvSpPr>
-        <p:spPr/>
-      </p:sp>
-    </p:spTree>
-  </p:cSld>
-  <p:clrMapOvr>
-    <a:masterClrMapping/>
-  </p:clrMapOvr>
-</p:notes>
-</file>
-
-<file path=ppt/notesSlides/notesSlide28.xml><?xml version="1.0" encoding="utf-8"?>
-<p:notes xmlns:a="http://schemas.openxmlformats.org/drawingml/2006/main" xmlns:p="http://schemas.openxmlformats.org/presentationml/2006/main" xmlns:r="http://schemas.openxmlformats.org/officeDocument/2006/relationships">
-  <p:cSld>
-    <p:spTree>
-      <p:nvGrpSpPr>
-        <p:cNvPr id="1" name=""/>
-        <p:cNvGrpSpPr/>
-        <p:nvPr/>
-      </p:nvGrpSpPr>
-      <p:grpSpPr>
-        <a:xfrm>
-          <a:off x="0" y="0"/>
-          <a:ext cx="0" cy="0"/>
-          <a:chOff x="0" y="0"/>
-          <a:chExt cx="0" cy="0"/>
-        </a:xfrm>
-      </p:grpSpPr>
-      <p:sp>
-        <p:nvSpPr>
-          <p:cNvPr id="2" name="Slide Image Placeholder 1"/>
-          <p:cNvSpPr>
-            <a:spLocks noGrp="1"/>
-          </p:cNvSpPr>
-          <p:nvPr>
-            <p:ph type="sldImg" idx="2"/>
-          </p:nvPr>
-        </p:nvSpPr>
-        <p:spPr/>
-      </p:sp>
-      <p:sp>
-        <p:nvSpPr>
-          <p:cNvPr id="3" name="Notes Placeholder 2"/>
-          <p:cNvSpPr>
-            <a:spLocks noGrp="1"/>
-          </p:cNvSpPr>
-          <p:nvPr>
-            <p:ph type="body" idx="3" sz="quarter"/>
-          </p:nvPr>
-        </p:nvSpPr>
-        <p:spPr/>
-        <p:txBody>
-          <a:bodyPr/>
-          <a:lstStyle/>
-          <a:p>
-            <a:r>
-              <a:t>Sprecher-Notizen für Event Sourcing Trade-offs:</a:t>
-            </a:r>
-          </a:p>
-          <a:p/>
-          <a:p>
-            <a:r>
-              <a:t>EINFÜHRUNG:</a:t>
-            </a:r>
-          </a:p>
-          <a:p>
-            <a:r>
-              <a:t>- Kurz den Kontext des Patterns wiederholen</a:t>
-            </a:r>
-          </a:p>
-          <a:p>
-            <a:r>
-              <a:t>- Betonen: Jede Architekturentscheidung hat Vor- und Nachteile</a:t>
-            </a:r>
-          </a:p>
-          <a:p/>
-          <a:p>
-            <a:r>
-              <a:t>VORTEILE (0 Punkte):</a:t>
-            </a:r>
-          </a:p>
-          <a:p>
-            <a:r>
-              <a:t>- Jeden Vorteil mit konkreten Telekom-Beispielen untermauern</a:t>
-            </a:r>
-          </a:p>
-          <a:p>
-            <a:r>
-              <a:t>- Bei Performance-Vorteilen: Zahlen und Metriken erwähnen</a:t>
-            </a:r>
-          </a:p>
-          <a:p>
-            <a:r>
-              <a:t>- Bei Team-Vorteilen: Auswirkungen auf Entwicklungsprozesse erklären</a:t>
-            </a:r>
-          </a:p>
-          <a:p/>
-          <a:p>
-            <a:r>
-              <a:t>NACHTEILE (0 Punkte):</a:t>
-            </a:r>
-          </a:p>
-          <a:p>
-            <a:r>
-              <a:t>- Ehrlich über Herausforderungen sprechen</a:t>
-            </a:r>
-          </a:p>
-          <a:p>
-            <a:r>
-              <a:t>- Mitigation-Strategien für kritische Nachteile erwähnen</a:t>
-            </a:r>
-          </a:p>
-          <a:p>
-            <a:r>
-              <a:t>- Kosten-Nutzen-Abwägung diskutieren</a:t>
-            </a:r>
-          </a:p>
-          <a:p/>
-          <a:p>
-            <a:r>
-              <a:t>TELEKOM-SPEZIFISCH:</a:t>
-            </a:r>
-          </a:p>
-          <a:p>
-            <a:r>
-              <a:t>- Welche Nachteile sind für Telekom besonders relevant?</a:t>
-            </a:r>
-          </a:p>
-          <a:p>
-            <a:r>
-              <a:t>- Gibt es interne Tools/Prozesse, die Nachteile abmildern?</a:t>
-            </a:r>
-          </a:p>
-          <a:p>
-            <a:r>
-              <a:t>- Lessons learned aus ähnlichen Projekten erwähnen</a:t>
-            </a:r>
-          </a:p>
-          <a:p/>
-          <a:p>
-            <a:r>
-              <a:t>ÜBERLEITUNG:</a:t>
-            </a:r>
-          </a:p>
-          <a:p>
-            <a:r>
-              <a:t>- Vorbereitung auf 'When to Use' Slide</a:t>
-            </a:r>
-          </a:p>
-          <a:p>
-            <a:r>
-              <a:t>- Hint: Context ist entscheidend für Entscheidung</a:t>
-            </a:r>
-          </a:p>
-        </p:txBody>
-      </p:sp>
-      <p:sp>
-        <p:nvSpPr>
-          <p:cNvPr id="4" name="Slide Number Placeholder 3"/>
-          <p:cNvSpPr>
-            <a:spLocks noGrp="1"/>
-          </p:cNvSpPr>
-          <p:nvPr>
-            <p:ph type="sldNum" idx="5" sz="quarter"/>
-          </p:nvPr>
-        </p:nvSpPr>
-        <p:spPr/>
-      </p:sp>
-    </p:spTree>
-  </p:cSld>
-  <p:clrMapOvr>
-    <a:masterClrMapping/>
-  </p:clrMapOvr>
-</p:notes>
-</file>
-
-<file path=ppt/notesSlides/notesSlide29.xml><?xml version="1.0" encoding="utf-8"?>
-<p:notes xmlns:a="http://schemas.openxmlformats.org/drawingml/2006/main" xmlns:p="http://schemas.openxmlformats.org/presentationml/2006/main" xmlns:r="http://schemas.openxmlformats.org/officeDocument/2006/relationships">
-  <p:cSld>
-    <p:spTree>
-      <p:nvGrpSpPr>
-        <p:cNvPr id="1" name=""/>
-        <p:cNvGrpSpPr/>
-        <p:nvPr/>
-      </p:nvGrpSpPr>
-      <p:grpSpPr>
-        <a:xfrm>
-          <a:off x="0" y="0"/>
-          <a:ext cx="0" cy="0"/>
-          <a:chOff x="0" y="0"/>
-          <a:chExt cx="0" cy="0"/>
-        </a:xfrm>
-      </p:grpSpPr>
-      <p:sp>
-        <p:nvSpPr>
-          <p:cNvPr id="2" name="Slide Image Placeholder 1"/>
-          <p:cNvSpPr>
-            <a:spLocks noGrp="1"/>
-          </p:cNvSpPr>
-          <p:nvPr>
-            <p:ph type="sldImg" idx="2"/>
-          </p:nvPr>
-        </p:nvSpPr>
-        <p:spPr/>
-      </p:sp>
-      <p:sp>
-        <p:nvSpPr>
-          <p:cNvPr id="3" name="Notes Placeholder 2"/>
-          <p:cNvSpPr>
-            <a:spLocks noGrp="1"/>
-          </p:cNvSpPr>
-          <p:nvPr>
-            <p:ph type="body" idx="3" sz="quarter"/>
-          </p:nvPr>
-        </p:nvSpPr>
-        <p:spPr/>
-        <p:txBody>
-          <a:bodyPr/>
-          <a:lstStyle/>
-          <a:p>
-            <a:r>
-              <a:t>Sprecher-Notizen für Circuit Breaker Trade-offs:</a:t>
-            </a:r>
-          </a:p>
-          <a:p/>
-          <a:p>
-            <a:r>
-              <a:t>EINFÜHRUNG:</a:t>
-            </a:r>
-          </a:p>
-          <a:p>
-            <a:r>
-              <a:t>- Kurz den Kontext des Patterns wiederholen</a:t>
-            </a:r>
-          </a:p>
-          <a:p>
-            <a:r>
-              <a:t>- Betonen: Jede Architekturentscheidung hat Vor- und Nachteile</a:t>
-            </a:r>
-          </a:p>
-          <a:p/>
-          <a:p>
-            <a:r>
-              <a:t>VORTEILE (0 Punkte):</a:t>
-            </a:r>
-          </a:p>
-          <a:p>
-            <a:r>
-              <a:t>- Jeden Vorteil mit konkreten Telekom-Beispielen untermauern</a:t>
-            </a:r>
-          </a:p>
-          <a:p>
-            <a:r>
-              <a:t>- Bei Performance-Vorteilen: Zahlen und Metriken erwähnen</a:t>
-            </a:r>
-          </a:p>
-          <a:p>
-            <a:r>
-              <a:t>- Bei Team-Vorteilen: Auswirkungen auf Entwicklungsprozesse erklären</a:t>
-            </a:r>
-          </a:p>
-          <a:p/>
-          <a:p>
-            <a:r>
-              <a:t>NACHTEILE (0 Punkte):</a:t>
-            </a:r>
-          </a:p>
-          <a:p>
-            <a:r>
-              <a:t>- Ehrlich über Herausforderungen sprechen</a:t>
-            </a:r>
-          </a:p>
-          <a:p>
-            <a:r>
-              <a:t>- Mitigation-Strategien für kritische Nachteile erwähnen</a:t>
-            </a:r>
-          </a:p>
-          <a:p>
-            <a:r>
-              <a:t>- Kosten-Nutzen-Abwägung diskutieren</a:t>
-            </a:r>
-          </a:p>
-          <a:p/>
-          <a:p>
-            <a:r>
-              <a:t>TELEKOM-SPEZIFISCH:</a:t>
-            </a:r>
-          </a:p>
-          <a:p>
-            <a:r>
-              <a:t>- Welche Nachteile sind für Telekom besonders relevant?</a:t>
-            </a:r>
-          </a:p>
-          <a:p>
-            <a:r>
-              <a:t>- Gibt es interne Tools/Prozesse, die Nachteile abmildern?</a:t>
-            </a:r>
-          </a:p>
-          <a:p>
-            <a:r>
-              <a:t>- Lessons learned aus ähnlichen Projekten erwähnen</a:t>
-            </a:r>
-          </a:p>
-          <a:p/>
-          <a:p>
-            <a:r>
-              <a:t>ÜBERLEITUNG:</a:t>
-            </a:r>
-          </a:p>
-          <a:p>
-            <a:r>
-              <a:t>- Vorbereitung auf 'When to Use' Slide</a:t>
-            </a:r>
-          </a:p>
-          <a:p>
-            <a:r>
-              <a:t>- Hint: Context ist entscheidend für Entscheidung</a:t>
-            </a:r>
-          </a:p>
-        </p:txBody>
-      </p:sp>
-      <p:sp>
-        <p:nvSpPr>
-          <p:cNvPr id="4" name="Slide Number Placeholder 3"/>
-          <p:cNvSpPr>
-            <a:spLocks noGrp="1"/>
-          </p:cNvSpPr>
-          <p:nvPr>
-            <p:ph type="sldNum" idx="5" sz="quarter"/>
-          </p:nvPr>
-        </p:nvSpPr>
-        <p:spPr/>
-      </p:sp>
-    </p:spTree>
-  </p:cSld>
-  <p:clrMapOvr>
-    <a:masterClrMapping/>
-  </p:clrMapOvr>
-</p:notes>
-</file>
-
 <file path=ppt/notesSlides/notesSlide3.xml><?xml version="1.0" encoding="utf-8"?>
 <p:notes xmlns:a="http://schemas.openxmlformats.org/drawingml/2006/main" xmlns:p="http://schemas.openxmlformats.org/presentationml/2006/main" xmlns:r="http://schemas.openxmlformats.org/officeDocument/2006/relationships">
   <p:cSld>
@@ -3268,831 +2617,6 @@
           <a:p>
             <a:r>
               <a:t>- Zeit für Fragen einplanen</a:t>
-            </a:r>
-          </a:p>
-        </p:txBody>
-      </p:sp>
-      <p:sp>
-        <p:nvSpPr>
-          <p:cNvPr id="4" name="Slide Number Placeholder 3"/>
-          <p:cNvSpPr>
-            <a:spLocks noGrp="1"/>
-          </p:cNvSpPr>
-          <p:nvPr>
-            <p:ph type="sldNum" idx="5" sz="quarter"/>
-          </p:nvPr>
-        </p:nvSpPr>
-        <p:spPr/>
-      </p:sp>
-    </p:spTree>
-  </p:cSld>
-  <p:clrMapOvr>
-    <a:masterClrMapping/>
-  </p:clrMapOvr>
-</p:notes>
-</file>
-
-<file path=ppt/notesSlides/notesSlide30.xml><?xml version="1.0" encoding="utf-8"?>
-<p:notes xmlns:a="http://schemas.openxmlformats.org/drawingml/2006/main" xmlns:p="http://schemas.openxmlformats.org/presentationml/2006/main" xmlns:r="http://schemas.openxmlformats.org/officeDocument/2006/relationships">
-  <p:cSld>
-    <p:spTree>
-      <p:nvGrpSpPr>
-        <p:cNvPr id="1" name=""/>
-        <p:cNvGrpSpPr/>
-        <p:nvPr/>
-      </p:nvGrpSpPr>
-      <p:grpSpPr>
-        <a:xfrm>
-          <a:off x="0" y="0"/>
-          <a:ext cx="0" cy="0"/>
-          <a:chOff x="0" y="0"/>
-          <a:chExt cx="0" cy="0"/>
-        </a:xfrm>
-      </p:grpSpPr>
-      <p:sp>
-        <p:nvSpPr>
-          <p:cNvPr id="2" name="Slide Image Placeholder 1"/>
-          <p:cNvSpPr>
-            <a:spLocks noGrp="1"/>
-          </p:cNvSpPr>
-          <p:nvPr>
-            <p:ph type="sldImg" idx="2"/>
-          </p:nvPr>
-        </p:nvSpPr>
-        <p:spPr/>
-      </p:sp>
-      <p:sp>
-        <p:nvSpPr>
-          <p:cNvPr id="3" name="Notes Placeholder 2"/>
-          <p:cNvSpPr>
-            <a:spLocks noGrp="1"/>
-          </p:cNvSpPr>
-          <p:nvPr>
-            <p:ph type="body" idx="3" sz="quarter"/>
-          </p:nvPr>
-        </p:nvSpPr>
-        <p:spPr/>
-        <p:txBody>
-          <a:bodyPr/>
-          <a:lstStyle/>
-          <a:p>
-            <a:r>
-              <a:t>Sprecher-Notizen für Saga Pattern Trade-offs:</a:t>
-            </a:r>
-          </a:p>
-          <a:p/>
-          <a:p>
-            <a:r>
-              <a:t>EINFÜHRUNG:</a:t>
-            </a:r>
-          </a:p>
-          <a:p>
-            <a:r>
-              <a:t>- Kurz den Kontext des Patterns wiederholen</a:t>
-            </a:r>
-          </a:p>
-          <a:p>
-            <a:r>
-              <a:t>- Betonen: Jede Architekturentscheidung hat Vor- und Nachteile</a:t>
-            </a:r>
-          </a:p>
-          <a:p/>
-          <a:p>
-            <a:r>
-              <a:t>VORTEILE (0 Punkte):</a:t>
-            </a:r>
-          </a:p>
-          <a:p>
-            <a:r>
-              <a:t>- Jeden Vorteil mit konkreten Telekom-Beispielen untermauern</a:t>
-            </a:r>
-          </a:p>
-          <a:p>
-            <a:r>
-              <a:t>- Bei Performance-Vorteilen: Zahlen und Metriken erwähnen</a:t>
-            </a:r>
-          </a:p>
-          <a:p>
-            <a:r>
-              <a:t>- Bei Team-Vorteilen: Auswirkungen auf Entwicklungsprozesse erklären</a:t>
-            </a:r>
-          </a:p>
-          <a:p/>
-          <a:p>
-            <a:r>
-              <a:t>NACHTEILE (0 Punkte):</a:t>
-            </a:r>
-          </a:p>
-          <a:p>
-            <a:r>
-              <a:t>- Ehrlich über Herausforderungen sprechen</a:t>
-            </a:r>
-          </a:p>
-          <a:p>
-            <a:r>
-              <a:t>- Mitigation-Strategien für kritische Nachteile erwähnen</a:t>
-            </a:r>
-          </a:p>
-          <a:p>
-            <a:r>
-              <a:t>- Kosten-Nutzen-Abwägung diskutieren</a:t>
-            </a:r>
-          </a:p>
-          <a:p/>
-          <a:p>
-            <a:r>
-              <a:t>TELEKOM-SPEZIFISCH:</a:t>
-            </a:r>
-          </a:p>
-          <a:p>
-            <a:r>
-              <a:t>- Welche Nachteile sind für Telekom besonders relevant?</a:t>
-            </a:r>
-          </a:p>
-          <a:p>
-            <a:r>
-              <a:t>- Gibt es interne Tools/Prozesse, die Nachteile abmildern?</a:t>
-            </a:r>
-          </a:p>
-          <a:p>
-            <a:r>
-              <a:t>- Lessons learned aus ähnlichen Projekten erwähnen</a:t>
-            </a:r>
-          </a:p>
-          <a:p/>
-          <a:p>
-            <a:r>
-              <a:t>ÜBERLEITUNG:</a:t>
-            </a:r>
-          </a:p>
-          <a:p>
-            <a:r>
-              <a:t>- Vorbereitung auf 'When to Use' Slide</a:t>
-            </a:r>
-          </a:p>
-          <a:p>
-            <a:r>
-              <a:t>- Hint: Context ist entscheidend für Entscheidung</a:t>
-            </a:r>
-          </a:p>
-        </p:txBody>
-      </p:sp>
-      <p:sp>
-        <p:nvSpPr>
-          <p:cNvPr id="4" name="Slide Number Placeholder 3"/>
-          <p:cNvSpPr>
-            <a:spLocks noGrp="1"/>
-          </p:cNvSpPr>
-          <p:nvPr>
-            <p:ph type="sldNum" idx="5" sz="quarter"/>
-          </p:nvPr>
-        </p:nvSpPr>
-        <p:spPr/>
-      </p:sp>
-    </p:spTree>
-  </p:cSld>
-  <p:clrMapOvr>
-    <a:masterClrMapping/>
-  </p:clrMapOvr>
-</p:notes>
-</file>
-
-<file path=ppt/notesSlides/notesSlide31.xml><?xml version="1.0" encoding="utf-8"?>
-<p:notes xmlns:a="http://schemas.openxmlformats.org/drawingml/2006/main" xmlns:p="http://schemas.openxmlformats.org/presentationml/2006/main" xmlns:r="http://schemas.openxmlformats.org/officeDocument/2006/relationships">
-  <p:cSld>
-    <p:spTree>
-      <p:nvGrpSpPr>
-        <p:cNvPr id="1" name=""/>
-        <p:cNvGrpSpPr/>
-        <p:nvPr/>
-      </p:nvGrpSpPr>
-      <p:grpSpPr>
-        <a:xfrm>
-          <a:off x="0" y="0"/>
-          <a:ext cx="0" cy="0"/>
-          <a:chOff x="0" y="0"/>
-          <a:chExt cx="0" cy="0"/>
-        </a:xfrm>
-      </p:grpSpPr>
-      <p:sp>
-        <p:nvSpPr>
-          <p:cNvPr id="2" name="Slide Image Placeholder 1"/>
-          <p:cNvSpPr>
-            <a:spLocks noGrp="1"/>
-          </p:cNvSpPr>
-          <p:nvPr>
-            <p:ph type="sldImg" idx="2"/>
-          </p:nvPr>
-        </p:nvSpPr>
-        <p:spPr/>
-      </p:sp>
-      <p:sp>
-        <p:nvSpPr>
-          <p:cNvPr id="3" name="Notes Placeholder 2"/>
-          <p:cNvSpPr>
-            <a:spLocks noGrp="1"/>
-          </p:cNvSpPr>
-          <p:nvPr>
-            <p:ph type="body" idx="3" sz="quarter"/>
-          </p:nvPr>
-        </p:nvSpPr>
-        <p:spPr/>
-        <p:txBody>
-          <a:bodyPr/>
-          <a:lstStyle/>
-          <a:p>
-            <a:r>
-              <a:t>Sprecher-Notizen für API Gateway Trade-offs:</a:t>
-            </a:r>
-          </a:p>
-          <a:p/>
-          <a:p>
-            <a:r>
-              <a:t>EINFÜHRUNG:</a:t>
-            </a:r>
-          </a:p>
-          <a:p>
-            <a:r>
-              <a:t>- Kurz den Kontext des Patterns wiederholen</a:t>
-            </a:r>
-          </a:p>
-          <a:p>
-            <a:r>
-              <a:t>- Betonen: Jede Architekturentscheidung hat Vor- und Nachteile</a:t>
-            </a:r>
-          </a:p>
-          <a:p/>
-          <a:p>
-            <a:r>
-              <a:t>VORTEILE (0 Punkte):</a:t>
-            </a:r>
-          </a:p>
-          <a:p>
-            <a:r>
-              <a:t>- Jeden Vorteil mit konkreten Telekom-Beispielen untermauern</a:t>
-            </a:r>
-          </a:p>
-          <a:p>
-            <a:r>
-              <a:t>- Bei Performance-Vorteilen: Zahlen und Metriken erwähnen</a:t>
-            </a:r>
-          </a:p>
-          <a:p>
-            <a:r>
-              <a:t>- Bei Team-Vorteilen: Auswirkungen auf Entwicklungsprozesse erklären</a:t>
-            </a:r>
-          </a:p>
-          <a:p/>
-          <a:p>
-            <a:r>
-              <a:t>NACHTEILE (0 Punkte):</a:t>
-            </a:r>
-          </a:p>
-          <a:p>
-            <a:r>
-              <a:t>- Ehrlich über Herausforderungen sprechen</a:t>
-            </a:r>
-          </a:p>
-          <a:p>
-            <a:r>
-              <a:t>- Mitigation-Strategien für kritische Nachteile erwähnen</a:t>
-            </a:r>
-          </a:p>
-          <a:p>
-            <a:r>
-              <a:t>- Kosten-Nutzen-Abwägung diskutieren</a:t>
-            </a:r>
-          </a:p>
-          <a:p/>
-          <a:p>
-            <a:r>
-              <a:t>TELEKOM-SPEZIFISCH:</a:t>
-            </a:r>
-          </a:p>
-          <a:p>
-            <a:r>
-              <a:t>- Welche Nachteile sind für Telekom besonders relevant?</a:t>
-            </a:r>
-          </a:p>
-          <a:p>
-            <a:r>
-              <a:t>- Gibt es interne Tools/Prozesse, die Nachteile abmildern?</a:t>
-            </a:r>
-          </a:p>
-          <a:p>
-            <a:r>
-              <a:t>- Lessons learned aus ähnlichen Projekten erwähnen</a:t>
-            </a:r>
-          </a:p>
-          <a:p/>
-          <a:p>
-            <a:r>
-              <a:t>ÜBERLEITUNG:</a:t>
-            </a:r>
-          </a:p>
-          <a:p>
-            <a:r>
-              <a:t>- Vorbereitung auf 'When to Use' Slide</a:t>
-            </a:r>
-          </a:p>
-          <a:p>
-            <a:r>
-              <a:t>- Hint: Context ist entscheidend für Entscheidung</a:t>
-            </a:r>
-          </a:p>
-        </p:txBody>
-      </p:sp>
-      <p:sp>
-        <p:nvSpPr>
-          <p:cNvPr id="4" name="Slide Number Placeholder 3"/>
-          <p:cNvSpPr>
-            <a:spLocks noGrp="1"/>
-          </p:cNvSpPr>
-          <p:nvPr>
-            <p:ph type="sldNum" idx="5" sz="quarter"/>
-          </p:nvPr>
-        </p:nvSpPr>
-        <p:spPr/>
-      </p:sp>
-    </p:spTree>
-  </p:cSld>
-  <p:clrMapOvr>
-    <a:masterClrMapping/>
-  </p:clrMapOvr>
-</p:notes>
-</file>
-
-<file path=ppt/notesSlides/notesSlide32.xml><?xml version="1.0" encoding="utf-8"?>
-<p:notes xmlns:a="http://schemas.openxmlformats.org/drawingml/2006/main" xmlns:p="http://schemas.openxmlformats.org/presentationml/2006/main" xmlns:r="http://schemas.openxmlformats.org/officeDocument/2006/relationships">
-  <p:cSld>
-    <p:spTree>
-      <p:nvGrpSpPr>
-        <p:cNvPr id="1" name=""/>
-        <p:cNvGrpSpPr/>
-        <p:nvPr/>
-      </p:nvGrpSpPr>
-      <p:grpSpPr>
-        <a:xfrm>
-          <a:off x="0" y="0"/>
-          <a:ext cx="0" cy="0"/>
-          <a:chOff x="0" y="0"/>
-          <a:chExt cx="0" cy="0"/>
-        </a:xfrm>
-      </p:grpSpPr>
-      <p:sp>
-        <p:nvSpPr>
-          <p:cNvPr id="2" name="Slide Image Placeholder 1"/>
-          <p:cNvSpPr>
-            <a:spLocks noGrp="1"/>
-          </p:cNvSpPr>
-          <p:nvPr>
-            <p:ph type="sldImg" idx="2"/>
-          </p:nvPr>
-        </p:nvSpPr>
-        <p:spPr/>
-      </p:sp>
-      <p:sp>
-        <p:nvSpPr>
-          <p:cNvPr id="3" name="Notes Placeholder 2"/>
-          <p:cNvSpPr>
-            <a:spLocks noGrp="1"/>
-          </p:cNvSpPr>
-          <p:nvPr>
-            <p:ph type="body" idx="3" sz="quarter"/>
-          </p:nvPr>
-        </p:nvSpPr>
-        <p:spPr/>
-        <p:txBody>
-          <a:bodyPr/>
-          <a:lstStyle/>
-          <a:p>
-            <a:r>
-              <a:t>Sprecher-Notizen für Service Mesh Trade-offs:</a:t>
-            </a:r>
-          </a:p>
-          <a:p/>
-          <a:p>
-            <a:r>
-              <a:t>EINFÜHRUNG:</a:t>
-            </a:r>
-          </a:p>
-          <a:p>
-            <a:r>
-              <a:t>- Kurz den Kontext des Patterns wiederholen</a:t>
-            </a:r>
-          </a:p>
-          <a:p>
-            <a:r>
-              <a:t>- Betonen: Jede Architekturentscheidung hat Vor- und Nachteile</a:t>
-            </a:r>
-          </a:p>
-          <a:p/>
-          <a:p>
-            <a:r>
-              <a:t>VORTEILE (0 Punkte):</a:t>
-            </a:r>
-          </a:p>
-          <a:p>
-            <a:r>
-              <a:t>- Jeden Vorteil mit konkreten Telekom-Beispielen untermauern</a:t>
-            </a:r>
-          </a:p>
-          <a:p>
-            <a:r>
-              <a:t>- Bei Performance-Vorteilen: Zahlen und Metriken erwähnen</a:t>
-            </a:r>
-          </a:p>
-          <a:p>
-            <a:r>
-              <a:t>- Bei Team-Vorteilen: Auswirkungen auf Entwicklungsprozesse erklären</a:t>
-            </a:r>
-          </a:p>
-          <a:p/>
-          <a:p>
-            <a:r>
-              <a:t>NACHTEILE (0 Punkte):</a:t>
-            </a:r>
-          </a:p>
-          <a:p>
-            <a:r>
-              <a:t>- Ehrlich über Herausforderungen sprechen</a:t>
-            </a:r>
-          </a:p>
-          <a:p>
-            <a:r>
-              <a:t>- Mitigation-Strategien für kritische Nachteile erwähnen</a:t>
-            </a:r>
-          </a:p>
-          <a:p>
-            <a:r>
-              <a:t>- Kosten-Nutzen-Abwägung diskutieren</a:t>
-            </a:r>
-          </a:p>
-          <a:p/>
-          <a:p>
-            <a:r>
-              <a:t>TELEKOM-SPEZIFISCH:</a:t>
-            </a:r>
-          </a:p>
-          <a:p>
-            <a:r>
-              <a:t>- Welche Nachteile sind für Telekom besonders relevant?</a:t>
-            </a:r>
-          </a:p>
-          <a:p>
-            <a:r>
-              <a:t>- Gibt es interne Tools/Prozesse, die Nachteile abmildern?</a:t>
-            </a:r>
-          </a:p>
-          <a:p>
-            <a:r>
-              <a:t>- Lessons learned aus ähnlichen Projekten erwähnen</a:t>
-            </a:r>
-          </a:p>
-          <a:p/>
-          <a:p>
-            <a:r>
-              <a:t>ÜBERLEITUNG:</a:t>
-            </a:r>
-          </a:p>
-          <a:p>
-            <a:r>
-              <a:t>- Vorbereitung auf 'When to Use' Slide</a:t>
-            </a:r>
-          </a:p>
-          <a:p>
-            <a:r>
-              <a:t>- Hint: Context ist entscheidend für Entscheidung</a:t>
-            </a:r>
-          </a:p>
-        </p:txBody>
-      </p:sp>
-      <p:sp>
-        <p:nvSpPr>
-          <p:cNvPr id="4" name="Slide Number Placeholder 3"/>
-          <p:cNvSpPr>
-            <a:spLocks noGrp="1"/>
-          </p:cNvSpPr>
-          <p:nvPr>
-            <p:ph type="sldNum" idx="5" sz="quarter"/>
-          </p:nvPr>
-        </p:nvSpPr>
-        <p:spPr/>
-      </p:sp>
-    </p:spTree>
-  </p:cSld>
-  <p:clrMapOvr>
-    <a:masterClrMapping/>
-  </p:clrMapOvr>
-</p:notes>
-</file>
-
-<file path=ppt/notesSlides/notesSlide33.xml><?xml version="1.0" encoding="utf-8"?>
-<p:notes xmlns:a="http://schemas.openxmlformats.org/drawingml/2006/main" xmlns:p="http://schemas.openxmlformats.org/presentationml/2006/main" xmlns:r="http://schemas.openxmlformats.org/officeDocument/2006/relationships">
-  <p:cSld>
-    <p:spTree>
-      <p:nvGrpSpPr>
-        <p:cNvPr id="1" name=""/>
-        <p:cNvGrpSpPr/>
-        <p:nvPr/>
-      </p:nvGrpSpPr>
-      <p:grpSpPr>
-        <a:xfrm>
-          <a:off x="0" y="0"/>
-          <a:ext cx="0" cy="0"/>
-          <a:chOff x="0" y="0"/>
-          <a:chExt cx="0" cy="0"/>
-        </a:xfrm>
-      </p:grpSpPr>
-      <p:sp>
-        <p:nvSpPr>
-          <p:cNvPr id="2" name="Slide Image Placeholder 1"/>
-          <p:cNvSpPr>
-            <a:spLocks noGrp="1"/>
-          </p:cNvSpPr>
-          <p:nvPr>
-            <p:ph type="sldImg" idx="2"/>
-          </p:nvPr>
-        </p:nvSpPr>
-        <p:spPr/>
-      </p:sp>
-      <p:sp>
-        <p:nvSpPr>
-          <p:cNvPr id="3" name="Notes Placeholder 2"/>
-          <p:cNvSpPr>
-            <a:spLocks noGrp="1"/>
-          </p:cNvSpPr>
-          <p:nvPr>
-            <p:ph type="body" idx="3" sz="quarter"/>
-          </p:nvPr>
-        </p:nvSpPr>
-        <p:spPr/>
-        <p:txBody>
-          <a:bodyPr/>
-          <a:lstStyle/>
-          <a:p>
-            <a:r>
-              <a:t>Sprecher-Notizen für Bulkhead Pattern Trade-offs:</a:t>
-            </a:r>
-          </a:p>
-          <a:p/>
-          <a:p>
-            <a:r>
-              <a:t>EINFÜHRUNG:</a:t>
-            </a:r>
-          </a:p>
-          <a:p>
-            <a:r>
-              <a:t>- Kurz den Kontext des Patterns wiederholen</a:t>
-            </a:r>
-          </a:p>
-          <a:p>
-            <a:r>
-              <a:t>- Betonen: Jede Architekturentscheidung hat Vor- und Nachteile</a:t>
-            </a:r>
-          </a:p>
-          <a:p/>
-          <a:p>
-            <a:r>
-              <a:t>VORTEILE (0 Punkte):</a:t>
-            </a:r>
-          </a:p>
-          <a:p>
-            <a:r>
-              <a:t>- Jeden Vorteil mit konkreten Telekom-Beispielen untermauern</a:t>
-            </a:r>
-          </a:p>
-          <a:p>
-            <a:r>
-              <a:t>- Bei Performance-Vorteilen: Zahlen und Metriken erwähnen</a:t>
-            </a:r>
-          </a:p>
-          <a:p>
-            <a:r>
-              <a:t>- Bei Team-Vorteilen: Auswirkungen auf Entwicklungsprozesse erklären</a:t>
-            </a:r>
-          </a:p>
-          <a:p/>
-          <a:p>
-            <a:r>
-              <a:t>NACHTEILE (0 Punkte):</a:t>
-            </a:r>
-          </a:p>
-          <a:p>
-            <a:r>
-              <a:t>- Ehrlich über Herausforderungen sprechen</a:t>
-            </a:r>
-          </a:p>
-          <a:p>
-            <a:r>
-              <a:t>- Mitigation-Strategien für kritische Nachteile erwähnen</a:t>
-            </a:r>
-          </a:p>
-          <a:p>
-            <a:r>
-              <a:t>- Kosten-Nutzen-Abwägung diskutieren</a:t>
-            </a:r>
-          </a:p>
-          <a:p/>
-          <a:p>
-            <a:r>
-              <a:t>TELEKOM-SPEZIFISCH:</a:t>
-            </a:r>
-          </a:p>
-          <a:p>
-            <a:r>
-              <a:t>- Welche Nachteile sind für Telekom besonders relevant?</a:t>
-            </a:r>
-          </a:p>
-          <a:p>
-            <a:r>
-              <a:t>- Gibt es interne Tools/Prozesse, die Nachteile abmildern?</a:t>
-            </a:r>
-          </a:p>
-          <a:p>
-            <a:r>
-              <a:t>- Lessons learned aus ähnlichen Projekten erwähnen</a:t>
-            </a:r>
-          </a:p>
-          <a:p/>
-          <a:p>
-            <a:r>
-              <a:t>ÜBERLEITUNG:</a:t>
-            </a:r>
-          </a:p>
-          <a:p>
-            <a:r>
-              <a:t>- Vorbereitung auf 'When to Use' Slide</a:t>
-            </a:r>
-          </a:p>
-          <a:p>
-            <a:r>
-              <a:t>- Hint: Context ist entscheidend für Entscheidung</a:t>
-            </a:r>
-          </a:p>
-        </p:txBody>
-      </p:sp>
-      <p:sp>
-        <p:nvSpPr>
-          <p:cNvPr id="4" name="Slide Number Placeholder 3"/>
-          <p:cNvSpPr>
-            <a:spLocks noGrp="1"/>
-          </p:cNvSpPr>
-          <p:nvPr>
-            <p:ph type="sldNum" idx="5" sz="quarter"/>
-          </p:nvPr>
-        </p:nvSpPr>
-        <p:spPr/>
-      </p:sp>
-    </p:spTree>
-  </p:cSld>
-  <p:clrMapOvr>
-    <a:masterClrMapping/>
-  </p:clrMapOvr>
-</p:notes>
-</file>
-
-<file path=ppt/notesSlides/notesSlide34.xml><?xml version="1.0" encoding="utf-8"?>
-<p:notes xmlns:a="http://schemas.openxmlformats.org/drawingml/2006/main" xmlns:p="http://schemas.openxmlformats.org/presentationml/2006/main" xmlns:r="http://schemas.openxmlformats.org/officeDocument/2006/relationships">
-  <p:cSld>
-    <p:spTree>
-      <p:nvGrpSpPr>
-        <p:cNvPr id="1" name=""/>
-        <p:cNvGrpSpPr/>
-        <p:nvPr/>
-      </p:nvGrpSpPr>
-      <p:grpSpPr>
-        <a:xfrm>
-          <a:off x="0" y="0"/>
-          <a:ext cx="0" cy="0"/>
-          <a:chOff x="0" y="0"/>
-          <a:chExt cx="0" cy="0"/>
-        </a:xfrm>
-      </p:grpSpPr>
-      <p:sp>
-        <p:nvSpPr>
-          <p:cNvPr id="2" name="Slide Image Placeholder 1"/>
-          <p:cNvSpPr>
-            <a:spLocks noGrp="1"/>
-          </p:cNvSpPr>
-          <p:nvPr>
-            <p:ph type="sldImg" idx="2"/>
-          </p:nvPr>
-        </p:nvSpPr>
-        <p:spPr/>
-      </p:sp>
-      <p:sp>
-        <p:nvSpPr>
-          <p:cNvPr id="3" name="Notes Placeholder 2"/>
-          <p:cNvSpPr>
-            <a:spLocks noGrp="1"/>
-          </p:cNvSpPr>
-          <p:nvPr>
-            <p:ph type="body" idx="3" sz="quarter"/>
-          </p:nvPr>
-        </p:nvSpPr>
-        <p:spPr/>
-        <p:txBody>
-          <a:bodyPr/>
-          <a:lstStyle/>
-          <a:p>
-            <a:r>
-              <a:t>Sprecher-Notizen für Domain-Driven Design Trade-offs:</a:t>
-            </a:r>
-          </a:p>
-          <a:p/>
-          <a:p>
-            <a:r>
-              <a:t>EINFÜHRUNG:</a:t>
-            </a:r>
-          </a:p>
-          <a:p>
-            <a:r>
-              <a:t>- Kurz den Kontext des Patterns wiederholen</a:t>
-            </a:r>
-          </a:p>
-          <a:p>
-            <a:r>
-              <a:t>- Betonen: Jede Architekturentscheidung hat Vor- und Nachteile</a:t>
-            </a:r>
-          </a:p>
-          <a:p/>
-          <a:p>
-            <a:r>
-              <a:t>VORTEILE (0 Punkte):</a:t>
-            </a:r>
-          </a:p>
-          <a:p>
-            <a:r>
-              <a:t>- Jeden Vorteil mit konkreten Telekom-Beispielen untermauern</a:t>
-            </a:r>
-          </a:p>
-          <a:p>
-            <a:r>
-              <a:t>- Bei Performance-Vorteilen: Zahlen und Metriken erwähnen</a:t>
-            </a:r>
-          </a:p>
-          <a:p>
-            <a:r>
-              <a:t>- Bei Team-Vorteilen: Auswirkungen auf Entwicklungsprozesse erklären</a:t>
-            </a:r>
-          </a:p>
-          <a:p/>
-          <a:p>
-            <a:r>
-              <a:t>NACHTEILE (0 Punkte):</a:t>
-            </a:r>
-          </a:p>
-          <a:p>
-            <a:r>
-              <a:t>- Ehrlich über Herausforderungen sprechen</a:t>
-            </a:r>
-          </a:p>
-          <a:p>
-            <a:r>
-              <a:t>- Mitigation-Strategien für kritische Nachteile erwähnen</a:t>
-            </a:r>
-          </a:p>
-          <a:p>
-            <a:r>
-              <a:t>- Kosten-Nutzen-Abwägung diskutieren</a:t>
-            </a:r>
-          </a:p>
-          <a:p/>
-          <a:p>
-            <a:r>
-              <a:t>TELEKOM-SPEZIFISCH:</a:t>
-            </a:r>
-          </a:p>
-          <a:p>
-            <a:r>
-              <a:t>- Welche Nachteile sind für Telekom besonders relevant?</a:t>
-            </a:r>
-          </a:p>
-          <a:p>
-            <a:r>
-              <a:t>- Gibt es interne Tools/Prozesse, die Nachteile abmildern?</a:t>
-            </a:r>
-          </a:p>
-          <a:p>
-            <a:r>
-              <a:t>- Lessons learned aus ähnlichen Projekten erwähnen</a:t>
-            </a:r>
-          </a:p>
-          <a:p/>
-          <a:p>
-            <a:r>
-              <a:t>ÜBERLEITUNG:</a:t>
-            </a:r>
-          </a:p>
-          <a:p>
-            <a:r>
-              <a:t>- Vorbereitung auf 'When to Use' Slide</a:t>
-            </a:r>
-          </a:p>
-          <a:p>
-            <a:r>
-              <a:t>- Hint: Context ist entscheidend für Entscheidung</a:t>
             </a:r>
           </a:p>
         </p:txBody>
@@ -13474,7 +11998,7 @@
             <a:spLocks noGrp="1"/>
           </p:cNvSpPr>
           <p:nvPr>
-            <p:ph type="title"/>
+            <p:ph type="ctrTitle"/>
           </p:nvPr>
         </p:nvSpPr>
         <p:spPr/>
@@ -13483,183 +12007,27 @@
           <a:lstStyle/>
           <a:p>
             <a:r>
-              <a:t>Saga Pattern Types</a:t>
-            </a:r>
-          </a:p>
-        </p:txBody>
-      </p:sp>
-      <p:sp>
-        <p:nvSpPr>
-          <p:cNvPr id="3" name="Content Placeholder 2"/>
-          <p:cNvSpPr>
-            <a:spLocks noGrp="1"/>
-          </p:cNvSpPr>
-          <p:nvPr>
-            <p:ph idx="1"/>
+              <a:t>API Gateway Pattern</a:t>
+            </a:r>
+          </a:p>
+        </p:txBody>
+      </p:sp>
+      <p:sp>
+        <p:nvSpPr>
+          <p:cNvPr id="3" name="Subtitle 2"/>
+          <p:cNvSpPr>
+            <a:spLocks noGrp="1"/>
+          </p:cNvSpPr>
+          <p:nvPr>
+            <p:ph type="subTitle" idx="1"/>
           </p:nvPr>
         </p:nvSpPr>
         <p:spPr/>
         <p:txBody>
-          <a:bodyPr>
-            <a:normAutofit lnSpcReduction="10000"/>
-          </a:bodyPr>
+          <a:bodyPr/>
           <a:lstStyle/>
           <a:p>
-            <a:pPr>
-              <a:lnSpc>
-                <a:spcPct val="100000"/>
-              </a:lnSpc>
-              <a:spcBef>
-                <a:spcPts val="0"/>
-              </a:spcBef>
-              <a:spcAft>
-                <a:spcPts val="0"/>
-              </a:spcAft>
-            </a:pPr>
-            <a:r>
-              <a:rPr dirty="0">
-                <a:latin typeface="Consolas"/>
-              </a:rPr>
-              <a:t>Choreography Saga:           Orchestration Saga:</a:t>
-            </a:r>
-            <a:br>
-              <a:rPr sz="6600" dirty="0"/>
-            </a:br>
-            <a:r>
-              <a:rPr dirty="0">
-                <a:latin typeface="Consolas"/>
-              </a:rPr>
-              <a:t>                            </a:t>
-            </a:r>
-            <a:br>
-              <a:rPr sz="6600" dirty="0"/>
-            </a:br>
-            <a:r>
-              <a:rPr dirty="0">
-                <a:latin typeface="Consolas"/>
-              </a:rPr>
-              <a:t>Service A ──&gt; Service B      ┌─────────────────┐</a:t>
-            </a:r>
-            <a:br>
-              <a:rPr sz="6600" dirty="0"/>
-            </a:br>
-            <a:r>
-              <a:rPr dirty="0">
-                <a:latin typeface="Consolas"/>
-              </a:rPr>
-              <a:t>    │             │          │ Saga Manager   </a:t>
-            </a:r>
-            <a:r>
-              <a:rPr lang="en-US" dirty="0">
-                <a:latin typeface="Consolas"/>
-              </a:rPr>
-              <a:t> </a:t>
-            </a:r>
-            <a:r>
-              <a:rPr dirty="0">
-                <a:latin typeface="Consolas"/>
-              </a:rPr>
-              <a:t>│</a:t>
-            </a:r>
-            <a:br>
-              <a:rPr sz="6600" dirty="0"/>
-            </a:br>
-            <a:r>
-              <a:rPr dirty="0">
-                <a:latin typeface="Consolas"/>
-              </a:rPr>
-              <a:t>    ▼             ▼         </a:t>
-            </a:r>
-            <a:r>
-              <a:rPr lang="en-US" sz="2000" dirty="0">
-                <a:latin typeface="Consolas"/>
-              </a:rPr>
-              <a:t> </a:t>
-            </a:r>
-            <a:r>
-              <a:rPr lang="en-US" dirty="0">
-                <a:latin typeface="Consolas"/>
-              </a:rPr>
-              <a:t>│</a:t>
-            </a:r>
-            <a:r>
-              <a:rPr dirty="0">
-                <a:latin typeface="Consolas"/>
-              </a:rPr>
-              <a:t>                 │</a:t>
-            </a:r>
-            <a:br>
-              <a:rPr sz="6600" dirty="0"/>
-            </a:br>
-            <a:r>
-              <a:rPr dirty="0">
-                <a:latin typeface="Consolas"/>
-              </a:rPr>
-              <a:t>Service C ──&gt; Service D      │ 1. Service A    │</a:t>
-            </a:r>
-            <a:br>
-              <a:rPr sz="6600" dirty="0"/>
-            </a:br>
-            <a:r>
-              <a:rPr dirty="0">
-                <a:latin typeface="Consolas"/>
-              </a:rPr>
-              <a:t>                             │ 2. Service B    │</a:t>
-            </a:r>
-            <a:br>
-              <a:rPr sz="6600" dirty="0"/>
-            </a:br>
-            <a:r>
-              <a:rPr dirty="0">
-                <a:latin typeface="Consolas"/>
-              </a:rPr>
-              <a:t>Event-driven,                │ 3. Service C    │</a:t>
-            </a:r>
-            <a:br>
-              <a:rPr sz="6600" dirty="0"/>
-            </a:br>
-            <a:r>
-              <a:rPr dirty="0">
-                <a:latin typeface="Consolas"/>
-              </a:rPr>
-              <a:t>Distributed control          │ 4. Rollback?    │</a:t>
-            </a:r>
-            <a:br>
-              <a:rPr sz="6600" dirty="0"/>
-            </a:br>
-            <a:r>
-              <a:rPr dirty="0">
-                <a:latin typeface="Consolas"/>
-              </a:rPr>
-              <a:t>                             └─────────────────┘</a:t>
-            </a:r>
-            <a:br>
-              <a:rPr sz="6600" dirty="0"/>
-            </a:br>
-            <a:r>
-              <a:rPr dirty="0">
-                <a:latin typeface="Consolas"/>
-              </a:rPr>
-              <a:t>                             </a:t>
-            </a:r>
-            <a:br>
-              <a:rPr sz="6600" dirty="0"/>
-            </a:br>
-            <a:r>
-              <a:rPr dirty="0">
-                <a:latin typeface="Consolas"/>
-              </a:rPr>
-              <a:t>                             Centralized control,</a:t>
-            </a:r>
-            <a:br>
-              <a:rPr sz="6600" dirty="0"/>
-            </a:br>
-            <a:r>
-              <a:rPr dirty="0">
-                <a:latin typeface="Consolas"/>
-              </a:rPr>
-              <a:t>                             Explicit workflow</a:t>
-            </a:r>
+            <a:endParaRPr/>
           </a:p>
         </p:txBody>
       </p:sp>
@@ -13695,7 +12063,7 @@
             <a:spLocks noGrp="1"/>
           </p:cNvSpPr>
           <p:nvPr>
-            <p:ph type="ctrTitle"/>
+            <p:ph type="title"/>
           </p:nvPr>
         </p:nvSpPr>
         <p:spPr/>
@@ -13704,27 +12072,231 @@
           <a:lstStyle/>
           <a:p>
             <a:r>
-              <a:t>API Gateway Pattern</a:t>
-            </a:r>
-          </a:p>
-        </p:txBody>
-      </p:sp>
-      <p:sp>
-        <p:nvSpPr>
-          <p:cNvPr id="3" name="Subtitle 2"/>
-          <p:cNvSpPr>
-            <a:spLocks noGrp="1"/>
-          </p:cNvSpPr>
-          <p:nvPr>
-            <p:ph type="subTitle" idx="1"/>
+              <a:t>API Gateway Architecture</a:t>
+            </a:r>
+          </a:p>
+        </p:txBody>
+      </p:sp>
+      <p:sp>
+        <p:nvSpPr>
+          <p:cNvPr id="3" name="Content Placeholder 2"/>
+          <p:cNvSpPr>
+            <a:spLocks noGrp="1"/>
+          </p:cNvSpPr>
+          <p:nvPr>
+            <p:ph idx="1"/>
           </p:nvPr>
         </p:nvSpPr>
         <p:spPr/>
         <p:txBody>
-          <a:bodyPr/>
+          <a:bodyPr>
+            <a:normAutofit fontScale="92500" lnSpcReduction="10000"/>
+          </a:bodyPr>
           <a:lstStyle/>
           <a:p>
-            <a:endParaRPr/>
+            <a:pPr>
+              <a:lnSpc>
+                <a:spcPct val="100000"/>
+              </a:lnSpc>
+              <a:spcBef>
+                <a:spcPts val="0"/>
+              </a:spcBef>
+              <a:spcAft>
+                <a:spcPts val="0"/>
+              </a:spcAft>
+            </a:pPr>
+            <a:r>
+              <a:rPr sz="1800" dirty="0">
+                <a:latin typeface="Consolas"/>
+              </a:rPr>
+              <a:t>Client Requests</a:t>
+            </a:r>
+            <a:br>
+              <a:rPr sz="5400" dirty="0"/>
+            </a:br>
+            <a:r>
+              <a:rPr sz="1800" dirty="0">
+                <a:latin typeface="Consolas"/>
+              </a:rPr>
+              <a:t>               │</a:t>
+            </a:r>
+            <a:br>
+              <a:rPr sz="5400" dirty="0"/>
+            </a:br>
+            <a:r>
+              <a:rPr sz="1800" dirty="0">
+                <a:latin typeface="Consolas"/>
+              </a:rPr>
+              <a:t>               ▼</a:t>
+            </a:r>
+            <a:br>
+              <a:rPr sz="5400" dirty="0"/>
+            </a:br>
+            <a:r>
+              <a:rPr sz="1800" dirty="0">
+                <a:latin typeface="Consolas"/>
+              </a:rPr>
+              <a:t>    ┌─────────────────────┐</a:t>
+            </a:r>
+            <a:br>
+              <a:rPr sz="5400" dirty="0"/>
+            </a:br>
+            <a:r>
+              <a:rPr sz="1800" dirty="0">
+                <a:latin typeface="Consolas"/>
+              </a:rPr>
+              <a:t>    │   API Gateway       │</a:t>
+            </a:r>
+            <a:br>
+              <a:rPr sz="5400" dirty="0"/>
+            </a:br>
+            <a:r>
+              <a:rPr sz="1800" dirty="0">
+                <a:latin typeface="Consolas"/>
+              </a:rPr>
+              <a:t>    │                     │</a:t>
+            </a:r>
+            <a:br>
+              <a:rPr sz="5400" dirty="0"/>
+            </a:br>
+            <a:r>
+              <a:rPr sz="1800" dirty="0">
+                <a:latin typeface="Consolas"/>
+              </a:rPr>
+              <a:t>    │ - Authentication    │</a:t>
+            </a:r>
+            <a:br>
+              <a:rPr sz="5400" dirty="0"/>
+            </a:br>
+            <a:r>
+              <a:rPr sz="1800" dirty="0">
+                <a:latin typeface="Consolas"/>
+              </a:rPr>
+              <a:t>    │ - Authorization     │</a:t>
+            </a:r>
+            <a:br>
+              <a:rPr sz="5400" dirty="0"/>
+            </a:br>
+            <a:r>
+              <a:rPr sz="1800" dirty="0">
+                <a:latin typeface="Consolas"/>
+              </a:rPr>
+              <a:t>    │ - Rate Limiting     │</a:t>
+            </a:r>
+            <a:br>
+              <a:rPr sz="5400" dirty="0"/>
+            </a:br>
+            <a:r>
+              <a:rPr sz="1800" dirty="0">
+                <a:latin typeface="Consolas"/>
+              </a:rPr>
+              <a:t>    │ - Load Balancing    │</a:t>
+            </a:r>
+            <a:br>
+              <a:rPr sz="5400" dirty="0"/>
+            </a:br>
+            <a:r>
+              <a:rPr sz="1800" dirty="0">
+                <a:latin typeface="Consolas"/>
+              </a:rPr>
+              <a:t>    │ - Request Routing   │</a:t>
+            </a:r>
+            <a:br>
+              <a:rPr sz="5400" dirty="0"/>
+            </a:br>
+            <a:r>
+              <a:rPr sz="1800" dirty="0">
+                <a:latin typeface="Consolas"/>
+              </a:rPr>
+              <a:t>    │ - Response Caching  │</a:t>
+            </a:r>
+            <a:br>
+              <a:rPr sz="5400" dirty="0"/>
+            </a:br>
+            <a:r>
+              <a:rPr sz="1800" dirty="0">
+                <a:latin typeface="Consolas"/>
+              </a:rPr>
+              <a:t>    │ - Monitoring        │</a:t>
+            </a:r>
+            <a:br>
+              <a:rPr sz="5400" dirty="0"/>
+            </a:br>
+            <a:r>
+              <a:rPr sz="1800" dirty="0">
+                <a:latin typeface="Consolas"/>
+              </a:rPr>
+              <a:t>    └─────────────────────┘</a:t>
+            </a:r>
+            <a:br>
+              <a:rPr sz="5400" dirty="0"/>
+            </a:br>
+            <a:r>
+              <a:rPr sz="1800" dirty="0">
+                <a:latin typeface="Consolas"/>
+              </a:rPr>
+              <a:t>               │</a:t>
+            </a:r>
+            <a:br>
+              <a:rPr sz="5400" dirty="0"/>
+            </a:br>
+            <a:r>
+              <a:rPr sz="1800" dirty="0">
+                <a:latin typeface="Consolas"/>
+              </a:rPr>
+              <a:t>               ▼</a:t>
+            </a:r>
+            <a:br>
+              <a:rPr sz="5400" dirty="0"/>
+            </a:br>
+            <a:r>
+              <a:rPr sz="1800" dirty="0">
+                <a:latin typeface="Consolas"/>
+              </a:rPr>
+              <a:t>    ┌─────────┬─────────┬─────────┐</a:t>
+            </a:r>
+            <a:br>
+              <a:rPr sz="5400" dirty="0"/>
+            </a:br>
+            <a:r>
+              <a:rPr sz="1800" dirty="0">
+                <a:latin typeface="Consolas"/>
+              </a:rPr>
+              <a:t>    │Service </a:t>
+            </a:r>
+            <a:r>
+              <a:rPr sz="1800" dirty="0" err="1">
+                <a:latin typeface="Consolas"/>
+              </a:rPr>
+              <a:t>A│Service</a:t>
+            </a:r>
+            <a:r>
+              <a:rPr sz="1800" dirty="0">
+                <a:latin typeface="Consolas"/>
+              </a:rPr>
+              <a:t> </a:t>
+            </a:r>
+            <a:r>
+              <a:rPr sz="1800" dirty="0" err="1">
+                <a:latin typeface="Consolas"/>
+              </a:rPr>
+              <a:t>B│Service</a:t>
+            </a:r>
+            <a:r>
+              <a:rPr sz="1800" dirty="0">
+                <a:latin typeface="Consolas"/>
+              </a:rPr>
+              <a:t> C│</a:t>
+            </a:r>
+            <a:br>
+              <a:rPr sz="5400" dirty="0"/>
+            </a:br>
+            <a:r>
+              <a:rPr sz="1800" dirty="0">
+                <a:latin typeface="Consolas"/>
+              </a:rPr>
+              <a:t>    └─────────┴─────────┴─────────┘</a:t>
+            </a:r>
           </a:p>
         </p:txBody>
       </p:sp>
@@ -13760,7 +12332,7 @@
             <a:spLocks noGrp="1"/>
           </p:cNvSpPr>
           <p:nvPr>
-            <p:ph type="title"/>
+            <p:ph type="ctrTitle"/>
           </p:nvPr>
         </p:nvSpPr>
         <p:spPr/>
@@ -13769,231 +12341,27 @@
           <a:lstStyle/>
           <a:p>
             <a:r>
-              <a:t>API Gateway Architecture</a:t>
-            </a:r>
-          </a:p>
-        </p:txBody>
-      </p:sp>
-      <p:sp>
-        <p:nvSpPr>
-          <p:cNvPr id="3" name="Content Placeholder 2"/>
-          <p:cNvSpPr>
-            <a:spLocks noGrp="1"/>
-          </p:cNvSpPr>
-          <p:nvPr>
-            <p:ph idx="1"/>
+              <a:t>Service Mesh</a:t>
+            </a:r>
+          </a:p>
+        </p:txBody>
+      </p:sp>
+      <p:sp>
+        <p:nvSpPr>
+          <p:cNvPr id="3" name="Subtitle 2"/>
+          <p:cNvSpPr>
+            <a:spLocks noGrp="1"/>
+          </p:cNvSpPr>
+          <p:nvPr>
+            <p:ph type="subTitle" idx="1"/>
           </p:nvPr>
         </p:nvSpPr>
         <p:spPr/>
         <p:txBody>
-          <a:bodyPr>
-            <a:normAutofit fontScale="92500" lnSpcReduction="10000"/>
-          </a:bodyPr>
+          <a:bodyPr/>
           <a:lstStyle/>
           <a:p>
-            <a:pPr>
-              <a:lnSpc>
-                <a:spcPct val="100000"/>
-              </a:lnSpc>
-              <a:spcBef>
-                <a:spcPts val="0"/>
-              </a:spcBef>
-              <a:spcAft>
-                <a:spcPts val="0"/>
-              </a:spcAft>
-            </a:pPr>
-            <a:r>
-              <a:rPr sz="1800" dirty="0">
-                <a:latin typeface="Consolas"/>
-              </a:rPr>
-              <a:t>Client Requests</a:t>
-            </a:r>
-            <a:br>
-              <a:rPr sz="5400" dirty="0"/>
-            </a:br>
-            <a:r>
-              <a:rPr sz="1800" dirty="0">
-                <a:latin typeface="Consolas"/>
-              </a:rPr>
-              <a:t>               │</a:t>
-            </a:r>
-            <a:br>
-              <a:rPr sz="5400" dirty="0"/>
-            </a:br>
-            <a:r>
-              <a:rPr sz="1800" dirty="0">
-                <a:latin typeface="Consolas"/>
-              </a:rPr>
-              <a:t>               ▼</a:t>
-            </a:r>
-            <a:br>
-              <a:rPr sz="5400" dirty="0"/>
-            </a:br>
-            <a:r>
-              <a:rPr sz="1800" dirty="0">
-                <a:latin typeface="Consolas"/>
-              </a:rPr>
-              <a:t>    ┌─────────────────────┐</a:t>
-            </a:r>
-            <a:br>
-              <a:rPr sz="5400" dirty="0"/>
-            </a:br>
-            <a:r>
-              <a:rPr sz="1800" dirty="0">
-                <a:latin typeface="Consolas"/>
-              </a:rPr>
-              <a:t>    │   API Gateway       │</a:t>
-            </a:r>
-            <a:br>
-              <a:rPr sz="5400" dirty="0"/>
-            </a:br>
-            <a:r>
-              <a:rPr sz="1800" dirty="0">
-                <a:latin typeface="Consolas"/>
-              </a:rPr>
-              <a:t>    │                     │</a:t>
-            </a:r>
-            <a:br>
-              <a:rPr sz="5400" dirty="0"/>
-            </a:br>
-            <a:r>
-              <a:rPr sz="1800" dirty="0">
-                <a:latin typeface="Consolas"/>
-              </a:rPr>
-              <a:t>    │ - Authentication    │</a:t>
-            </a:r>
-            <a:br>
-              <a:rPr sz="5400" dirty="0"/>
-            </a:br>
-            <a:r>
-              <a:rPr sz="1800" dirty="0">
-                <a:latin typeface="Consolas"/>
-              </a:rPr>
-              <a:t>    │ - Authorization     │</a:t>
-            </a:r>
-            <a:br>
-              <a:rPr sz="5400" dirty="0"/>
-            </a:br>
-            <a:r>
-              <a:rPr sz="1800" dirty="0">
-                <a:latin typeface="Consolas"/>
-              </a:rPr>
-              <a:t>    │ - Rate Limiting     │</a:t>
-            </a:r>
-            <a:br>
-              <a:rPr sz="5400" dirty="0"/>
-            </a:br>
-            <a:r>
-              <a:rPr sz="1800" dirty="0">
-                <a:latin typeface="Consolas"/>
-              </a:rPr>
-              <a:t>    │ - Load Balancing    │</a:t>
-            </a:r>
-            <a:br>
-              <a:rPr sz="5400" dirty="0"/>
-            </a:br>
-            <a:r>
-              <a:rPr sz="1800" dirty="0">
-                <a:latin typeface="Consolas"/>
-              </a:rPr>
-              <a:t>    │ - Request Routing   │</a:t>
-            </a:r>
-            <a:br>
-              <a:rPr sz="5400" dirty="0"/>
-            </a:br>
-            <a:r>
-              <a:rPr sz="1800" dirty="0">
-                <a:latin typeface="Consolas"/>
-              </a:rPr>
-              <a:t>    │ - Response Caching  │</a:t>
-            </a:r>
-            <a:br>
-              <a:rPr sz="5400" dirty="0"/>
-            </a:br>
-            <a:r>
-              <a:rPr sz="1800" dirty="0">
-                <a:latin typeface="Consolas"/>
-              </a:rPr>
-              <a:t>    │ - Monitoring        │</a:t>
-            </a:r>
-            <a:br>
-              <a:rPr sz="5400" dirty="0"/>
-            </a:br>
-            <a:r>
-              <a:rPr sz="1800" dirty="0">
-                <a:latin typeface="Consolas"/>
-              </a:rPr>
-              <a:t>    └─────────────────────┘</a:t>
-            </a:r>
-            <a:br>
-              <a:rPr sz="5400" dirty="0"/>
-            </a:br>
-            <a:r>
-              <a:rPr sz="1800" dirty="0">
-                <a:latin typeface="Consolas"/>
-              </a:rPr>
-              <a:t>               │</a:t>
-            </a:r>
-            <a:br>
-              <a:rPr sz="5400" dirty="0"/>
-            </a:br>
-            <a:r>
-              <a:rPr sz="1800" dirty="0">
-                <a:latin typeface="Consolas"/>
-              </a:rPr>
-              <a:t>               ▼</a:t>
-            </a:r>
-            <a:br>
-              <a:rPr sz="5400" dirty="0"/>
-            </a:br>
-            <a:r>
-              <a:rPr sz="1800" dirty="0">
-                <a:latin typeface="Consolas"/>
-              </a:rPr>
-              <a:t>    ┌─────────┬─────────┬─────────┐</a:t>
-            </a:r>
-            <a:br>
-              <a:rPr sz="5400" dirty="0"/>
-            </a:br>
-            <a:r>
-              <a:rPr sz="1800" dirty="0">
-                <a:latin typeface="Consolas"/>
-              </a:rPr>
-              <a:t>    │Service </a:t>
-            </a:r>
-            <a:r>
-              <a:rPr sz="1800" dirty="0" err="1">
-                <a:latin typeface="Consolas"/>
-              </a:rPr>
-              <a:t>A│Service</a:t>
-            </a:r>
-            <a:r>
-              <a:rPr sz="1800" dirty="0">
-                <a:latin typeface="Consolas"/>
-              </a:rPr>
-              <a:t> </a:t>
-            </a:r>
-            <a:r>
-              <a:rPr sz="1800" dirty="0" err="1">
-                <a:latin typeface="Consolas"/>
-              </a:rPr>
-              <a:t>B│Service</a:t>
-            </a:r>
-            <a:r>
-              <a:rPr sz="1800" dirty="0">
-                <a:latin typeface="Consolas"/>
-              </a:rPr>
-              <a:t> C│</a:t>
-            </a:r>
-            <a:br>
-              <a:rPr sz="5400" dirty="0"/>
-            </a:br>
-            <a:r>
-              <a:rPr sz="1800" dirty="0">
-                <a:latin typeface="Consolas"/>
-              </a:rPr>
-              <a:t>    └─────────┴─────────┴─────────┘</a:t>
-            </a:r>
+            <a:endParaRPr/>
           </a:p>
         </p:txBody>
       </p:sp>
@@ -14029,7 +12397,7 @@
             <a:spLocks noGrp="1"/>
           </p:cNvSpPr>
           <p:nvPr>
-            <p:ph type="ctrTitle"/>
+            <p:ph type="title"/>
           </p:nvPr>
         </p:nvSpPr>
         <p:spPr/>
@@ -14038,27 +12406,210 @@
           <a:lstStyle/>
           <a:p>
             <a:r>
-              <a:t>Service Mesh</a:t>
-            </a:r>
-          </a:p>
-        </p:txBody>
-      </p:sp>
-      <p:sp>
-        <p:nvSpPr>
-          <p:cNvPr id="3" name="Subtitle 2"/>
-          <p:cNvSpPr>
-            <a:spLocks noGrp="1"/>
-          </p:cNvSpPr>
-          <p:nvPr>
-            <p:ph type="subTitle" idx="1"/>
+              <a:t>Service Mesh Architecture (Istio)</a:t>
+            </a:r>
+          </a:p>
+        </p:txBody>
+      </p:sp>
+      <p:sp>
+        <p:nvSpPr>
+          <p:cNvPr id="3" name="Content Placeholder 2"/>
+          <p:cNvSpPr>
+            <a:spLocks noGrp="1"/>
+          </p:cNvSpPr>
+          <p:nvPr>
+            <p:ph idx="1"/>
           </p:nvPr>
         </p:nvSpPr>
         <p:spPr/>
         <p:txBody>
-          <a:bodyPr/>
+          <a:bodyPr>
+            <a:normAutofit lnSpcReduction="10000"/>
+          </a:bodyPr>
           <a:lstStyle/>
           <a:p>
-            <a:endParaRPr/>
+            <a:pPr>
+              <a:lnSpc>
+                <a:spcPct val="100000"/>
+              </a:lnSpc>
+              <a:spcBef>
+                <a:spcPts val="0"/>
+              </a:spcBef>
+              <a:spcAft>
+                <a:spcPts val="0"/>
+              </a:spcAft>
+            </a:pPr>
+            <a:r>
+              <a:rPr sz="1400" dirty="0">
+                <a:latin typeface="Consolas"/>
+              </a:rPr>
+              <a:t>┌──────────────────────────────────────────────────────┐</a:t>
+            </a:r>
+            <a:br>
+              <a:rPr sz="4400" dirty="0"/>
+            </a:br>
+            <a:r>
+              <a:rPr sz="1400" dirty="0">
+                <a:latin typeface="Consolas"/>
+              </a:rPr>
+              <a:t>│                Control Plane                         │</a:t>
+            </a:r>
+            <a:br>
+              <a:rPr sz="4400" dirty="0"/>
+            </a:br>
+            <a:r>
+              <a:rPr sz="1400" dirty="0">
+                <a:latin typeface="Consolas"/>
+              </a:rPr>
+              <a:t>│ ┌─────────────┐ ┌─────────────┐ ┌─────────────┐      │</a:t>
+            </a:r>
+            <a:br>
+              <a:rPr sz="4400" dirty="0"/>
+            </a:br>
+            <a:r>
+              <a:rPr sz="1400" dirty="0">
+                <a:latin typeface="Consolas"/>
+              </a:rPr>
+              <a:t>│ │   Pilot     │ │   Citadel   │ │   Mixer     │      │</a:t>
+            </a:r>
+            <a:br>
+              <a:rPr sz="4400" dirty="0"/>
+            </a:br>
+            <a:r>
+              <a:rPr sz="1400" dirty="0">
+                <a:latin typeface="Consolas"/>
+              </a:rPr>
+              <a:t>│ │ (Discovery) │ │ (Security)  │ │ (Telemetry) │      │</a:t>
+            </a:r>
+            <a:br>
+              <a:rPr sz="4400" dirty="0"/>
+            </a:br>
+            <a:r>
+              <a:rPr sz="1400" dirty="0">
+                <a:latin typeface="Consolas"/>
+              </a:rPr>
+              <a:t>│ └─────────────┘ └─────────────┘ └─────────────┘      │</a:t>
+            </a:r>
+            <a:br>
+              <a:rPr sz="4400" dirty="0"/>
+            </a:br>
+            <a:r>
+              <a:rPr sz="1400" dirty="0">
+                <a:latin typeface="Consolas"/>
+              </a:rPr>
+              <a:t>└──────────────────────────────────────────────────────┘</a:t>
+            </a:r>
+            <a:br>
+              <a:rPr sz="4400" dirty="0"/>
+            </a:br>
+            <a:r>
+              <a:rPr sz="1400" dirty="0">
+                <a:latin typeface="Consolas"/>
+              </a:rPr>
+              <a:t>                        │</a:t>
+            </a:r>
+            <a:br>
+              <a:rPr sz="4400" dirty="0"/>
+            </a:br>
+            <a:r>
+              <a:rPr sz="1400" dirty="0">
+                <a:latin typeface="Consolas"/>
+              </a:rPr>
+              <a:t>                        ▼ (Configuration)</a:t>
+            </a:r>
+            <a:br>
+              <a:rPr sz="4400" dirty="0"/>
+            </a:br>
+            <a:r>
+              <a:rPr sz="1400" dirty="0">
+                <a:latin typeface="Consolas"/>
+              </a:rPr>
+              <a:t>┌─────────────┐     ┌─────────────┐     ┌─────────────┐</a:t>
+            </a:r>
+            <a:br>
+              <a:rPr sz="4400" dirty="0"/>
+            </a:br>
+            <a:r>
+              <a:rPr sz="1400" dirty="0">
+                <a:latin typeface="Consolas"/>
+              </a:rPr>
+              <a:t>│ Service A   │     │ Service B   │     │ Service C   │</a:t>
+            </a:r>
+            <a:br>
+              <a:rPr sz="4400" dirty="0"/>
+            </a:br>
+            <a:r>
+              <a:rPr sz="1400" dirty="0">
+                <a:latin typeface="Consolas"/>
+              </a:rPr>
+              <a:t>│             │     │             │     │             │</a:t>
+            </a:r>
+            <a:br>
+              <a:rPr sz="4400" dirty="0"/>
+            </a:br>
+            <a:r>
+              <a:rPr sz="1400" dirty="0">
+                <a:latin typeface="Consolas"/>
+              </a:rPr>
+              <a:t>│ ┌─────────┐ │◄────┤ ┌─────────┐ │◄────┤ ┌─────────┐ │</a:t>
+            </a:r>
+            <a:br>
+              <a:rPr sz="4400" dirty="0"/>
+            </a:br>
+            <a:r>
+              <a:rPr sz="1400" dirty="0">
+                <a:latin typeface="Consolas"/>
+              </a:rPr>
+              <a:t>│ │ Proxy   │ │     │ │ Proxy   │ │     │ │ Proxy   │ │</a:t>
+            </a:r>
+            <a:br>
+              <a:rPr sz="4400" dirty="0"/>
+            </a:br>
+            <a:r>
+              <a:rPr sz="1400" dirty="0">
+                <a:latin typeface="Consolas"/>
+              </a:rPr>
+              <a:t>│ │(Envoy)  │ │     │ │(Envoy)  │ │     │ │(Envoy)  │ │</a:t>
+            </a:r>
+            <a:br>
+              <a:rPr sz="4400" dirty="0"/>
+            </a:br>
+            <a:r>
+              <a:rPr sz="1400" dirty="0">
+                <a:latin typeface="Consolas"/>
+              </a:rPr>
+              <a:t>│ └─────────┘ │     │ └─────────┘ │     │ └─────────┘ │</a:t>
+            </a:r>
+            <a:br>
+              <a:rPr sz="4400" dirty="0"/>
+            </a:br>
+            <a:r>
+              <a:rPr sz="1400" dirty="0">
+                <a:latin typeface="Consolas"/>
+              </a:rPr>
+              <a:t>└─────────────┘     └─────────────┘     └─────────────┘</a:t>
+            </a:r>
+            <a:br>
+              <a:rPr sz="4400" dirty="0"/>
+            </a:br>
+            <a:br>
+              <a:rPr sz="4400" dirty="0"/>
+            </a:br>
+            <a:r>
+              <a:rPr sz="1400" dirty="0">
+                <a:latin typeface="Consolas"/>
+              </a:rPr>
+              <a:t>Data Plane: Envoy Proxies handle all traffic</a:t>
+            </a:r>
+            <a:br>
+              <a:rPr sz="4400" dirty="0"/>
+            </a:br>
+            <a:r>
+              <a:rPr sz="1400" dirty="0">
+                <a:latin typeface="Consolas"/>
+              </a:rPr>
+              <a:t>Control Plane: Configures and monitors proxies</a:t>
+            </a:r>
           </a:p>
         </p:txBody>
       </p:sp>
@@ -14094,7 +12645,7 @@
             <a:spLocks noGrp="1"/>
           </p:cNvSpPr>
           <p:nvPr>
-            <p:ph type="title"/>
+            <p:ph type="ctrTitle"/>
           </p:nvPr>
         </p:nvSpPr>
         <p:spPr/>
@@ -14103,210 +12654,27 @@
           <a:lstStyle/>
           <a:p>
             <a:r>
-              <a:t>Service Mesh Architecture (Istio)</a:t>
-            </a:r>
-          </a:p>
-        </p:txBody>
-      </p:sp>
-      <p:sp>
-        <p:nvSpPr>
-          <p:cNvPr id="3" name="Content Placeholder 2"/>
-          <p:cNvSpPr>
-            <a:spLocks noGrp="1"/>
-          </p:cNvSpPr>
-          <p:nvPr>
-            <p:ph idx="1"/>
+              <a:t>Bulkhead Pattern</a:t>
+            </a:r>
+          </a:p>
+        </p:txBody>
+      </p:sp>
+      <p:sp>
+        <p:nvSpPr>
+          <p:cNvPr id="3" name="Subtitle 2"/>
+          <p:cNvSpPr>
+            <a:spLocks noGrp="1"/>
+          </p:cNvSpPr>
+          <p:nvPr>
+            <p:ph type="subTitle" idx="1"/>
           </p:nvPr>
         </p:nvSpPr>
         <p:spPr/>
         <p:txBody>
-          <a:bodyPr>
-            <a:normAutofit lnSpcReduction="10000"/>
-          </a:bodyPr>
+          <a:bodyPr/>
           <a:lstStyle/>
           <a:p>
-            <a:pPr>
-              <a:lnSpc>
-                <a:spcPct val="100000"/>
-              </a:lnSpc>
-              <a:spcBef>
-                <a:spcPts val="0"/>
-              </a:spcBef>
-              <a:spcAft>
-                <a:spcPts val="0"/>
-              </a:spcAft>
-            </a:pPr>
-            <a:r>
-              <a:rPr sz="1400" dirty="0">
-                <a:latin typeface="Consolas"/>
-              </a:rPr>
-              <a:t>┌──────────────────────────────────────────────────────┐</a:t>
-            </a:r>
-            <a:br>
-              <a:rPr sz="4400" dirty="0"/>
-            </a:br>
-            <a:r>
-              <a:rPr sz="1400" dirty="0">
-                <a:latin typeface="Consolas"/>
-              </a:rPr>
-              <a:t>│                Control Plane                         │</a:t>
-            </a:r>
-            <a:br>
-              <a:rPr sz="4400" dirty="0"/>
-            </a:br>
-            <a:r>
-              <a:rPr sz="1400" dirty="0">
-                <a:latin typeface="Consolas"/>
-              </a:rPr>
-              <a:t>│ ┌─────────────┐ ┌─────────────┐ ┌─────────────┐      │</a:t>
-            </a:r>
-            <a:br>
-              <a:rPr sz="4400" dirty="0"/>
-            </a:br>
-            <a:r>
-              <a:rPr sz="1400" dirty="0">
-                <a:latin typeface="Consolas"/>
-              </a:rPr>
-              <a:t>│ │   Pilot     │ │   Citadel   │ │   Mixer     │      │</a:t>
-            </a:r>
-            <a:br>
-              <a:rPr sz="4400" dirty="0"/>
-            </a:br>
-            <a:r>
-              <a:rPr sz="1400" dirty="0">
-                <a:latin typeface="Consolas"/>
-              </a:rPr>
-              <a:t>│ │ (Discovery) │ │ (Security)  │ │ (Telemetry) │      │</a:t>
-            </a:r>
-            <a:br>
-              <a:rPr sz="4400" dirty="0"/>
-            </a:br>
-            <a:r>
-              <a:rPr sz="1400" dirty="0">
-                <a:latin typeface="Consolas"/>
-              </a:rPr>
-              <a:t>│ └─────────────┘ └─────────────┘ └─────────────┘      │</a:t>
-            </a:r>
-            <a:br>
-              <a:rPr sz="4400" dirty="0"/>
-            </a:br>
-            <a:r>
-              <a:rPr sz="1400" dirty="0">
-                <a:latin typeface="Consolas"/>
-              </a:rPr>
-              <a:t>└──────────────────────────────────────────────────────┘</a:t>
-            </a:r>
-            <a:br>
-              <a:rPr sz="4400" dirty="0"/>
-            </a:br>
-            <a:r>
-              <a:rPr sz="1400" dirty="0">
-                <a:latin typeface="Consolas"/>
-              </a:rPr>
-              <a:t>                        │</a:t>
-            </a:r>
-            <a:br>
-              <a:rPr sz="4400" dirty="0"/>
-            </a:br>
-            <a:r>
-              <a:rPr sz="1400" dirty="0">
-                <a:latin typeface="Consolas"/>
-              </a:rPr>
-              <a:t>                        ▼ (Configuration)</a:t>
-            </a:r>
-            <a:br>
-              <a:rPr sz="4400" dirty="0"/>
-            </a:br>
-            <a:r>
-              <a:rPr sz="1400" dirty="0">
-                <a:latin typeface="Consolas"/>
-              </a:rPr>
-              <a:t>┌─────────────┐     ┌─────────────┐     ┌─────────────┐</a:t>
-            </a:r>
-            <a:br>
-              <a:rPr sz="4400" dirty="0"/>
-            </a:br>
-            <a:r>
-              <a:rPr sz="1400" dirty="0">
-                <a:latin typeface="Consolas"/>
-              </a:rPr>
-              <a:t>│ Service A   │     │ Service B   │     │ Service C   │</a:t>
-            </a:r>
-            <a:br>
-              <a:rPr sz="4400" dirty="0"/>
-            </a:br>
-            <a:r>
-              <a:rPr sz="1400" dirty="0">
-                <a:latin typeface="Consolas"/>
-              </a:rPr>
-              <a:t>│             │     │             │     │             │</a:t>
-            </a:r>
-            <a:br>
-              <a:rPr sz="4400" dirty="0"/>
-            </a:br>
-            <a:r>
-              <a:rPr sz="1400" dirty="0">
-                <a:latin typeface="Consolas"/>
-              </a:rPr>
-              <a:t>│ ┌─────────┐ │◄────┤ ┌─────────┐ │◄────┤ ┌─────────┐ │</a:t>
-            </a:r>
-            <a:br>
-              <a:rPr sz="4400" dirty="0"/>
-            </a:br>
-            <a:r>
-              <a:rPr sz="1400" dirty="0">
-                <a:latin typeface="Consolas"/>
-              </a:rPr>
-              <a:t>│ │ Proxy   │ │     │ │ Proxy   │ │     │ │ Proxy   │ │</a:t>
-            </a:r>
-            <a:br>
-              <a:rPr sz="4400" dirty="0"/>
-            </a:br>
-            <a:r>
-              <a:rPr sz="1400" dirty="0">
-                <a:latin typeface="Consolas"/>
-              </a:rPr>
-              <a:t>│ │(Envoy)  │ │     │ │(Envoy)  │ │     │ │(Envoy)  │ │</a:t>
-            </a:r>
-            <a:br>
-              <a:rPr sz="4400" dirty="0"/>
-            </a:br>
-            <a:r>
-              <a:rPr sz="1400" dirty="0">
-                <a:latin typeface="Consolas"/>
-              </a:rPr>
-              <a:t>│ └─────────┘ │     │ └─────────┘ │     │ └─────────┘ │</a:t>
-            </a:r>
-            <a:br>
-              <a:rPr sz="4400" dirty="0"/>
-            </a:br>
-            <a:r>
-              <a:rPr sz="1400" dirty="0">
-                <a:latin typeface="Consolas"/>
-              </a:rPr>
-              <a:t>└─────────────┘     └─────────────┘     └─────────────┘</a:t>
-            </a:r>
-            <a:br>
-              <a:rPr sz="4400" dirty="0"/>
-            </a:br>
-            <a:br>
-              <a:rPr sz="4400" dirty="0"/>
-            </a:br>
-            <a:r>
-              <a:rPr sz="1400" dirty="0">
-                <a:latin typeface="Consolas"/>
-              </a:rPr>
-              <a:t>Data Plane: Envoy Proxies handle all traffic</a:t>
-            </a:r>
-            <a:br>
-              <a:rPr sz="4400" dirty="0"/>
-            </a:br>
-            <a:r>
-              <a:rPr sz="1400" dirty="0">
-                <a:latin typeface="Consolas"/>
-              </a:rPr>
-              <a:t>Control Plane: Configures and monitors proxies</a:t>
-            </a:r>
+            <a:endParaRPr/>
           </a:p>
         </p:txBody>
       </p:sp>
@@ -14342,7 +12710,7 @@
             <a:spLocks noGrp="1"/>
           </p:cNvSpPr>
           <p:nvPr>
-            <p:ph type="ctrTitle"/>
+            <p:ph type="title"/>
           </p:nvPr>
         </p:nvSpPr>
         <p:spPr/>
@@ -14351,27 +12719,156 @@
           <a:lstStyle/>
           <a:p>
             <a:r>
-              <a:t>Bulkhead Pattern</a:t>
-            </a:r>
-          </a:p>
-        </p:txBody>
-      </p:sp>
-      <p:sp>
-        <p:nvSpPr>
-          <p:cNvPr id="3" name="Subtitle 2"/>
-          <p:cNvSpPr>
-            <a:spLocks noGrp="1"/>
-          </p:cNvSpPr>
-          <p:nvPr>
-            <p:ph type="subTitle" idx="1"/>
+              <a:t>Bulkhead Pattern - Resource Isolation</a:t>
+            </a:r>
+          </a:p>
+        </p:txBody>
+      </p:sp>
+      <p:sp>
+        <p:nvSpPr>
+          <p:cNvPr id="3" name="Content Placeholder 2"/>
+          <p:cNvSpPr>
+            <a:spLocks noGrp="1"/>
+          </p:cNvSpPr>
+          <p:nvPr>
+            <p:ph idx="1"/>
           </p:nvPr>
         </p:nvSpPr>
         <p:spPr/>
         <p:txBody>
-          <a:bodyPr/>
+          <a:bodyPr>
+            <a:normAutofit/>
+          </a:bodyPr>
           <a:lstStyle/>
           <a:p>
-            <a:endParaRPr/>
+            <a:pPr>
+              <a:lnSpc>
+                <a:spcPct val="100000"/>
+              </a:lnSpc>
+              <a:spcBef>
+                <a:spcPts val="0"/>
+              </a:spcBef>
+              <a:spcAft>
+                <a:spcPts val="0"/>
+              </a:spcAft>
+            </a:pPr>
+            <a:r>
+              <a:rPr sz="1800" dirty="0">
+                <a:latin typeface="Consolas"/>
+              </a:rPr>
+              <a:t>Thread Pools per Client Type:</a:t>
+            </a:r>
+            <a:br>
+              <a:rPr sz="5400" dirty="0"/>
+            </a:br>
+            <a:r>
+              <a:rPr sz="1800" dirty="0">
+                <a:latin typeface="Consolas"/>
+              </a:rPr>
+              <a:t>┌─────────────────────────────────────────────────┐</a:t>
+            </a:r>
+            <a:br>
+              <a:rPr sz="5400" dirty="0"/>
+            </a:br>
+            <a:r>
+              <a:rPr sz="1800" dirty="0">
+                <a:latin typeface="Consolas"/>
+              </a:rPr>
+              <a:t>│                Service                          │</a:t>
+            </a:r>
+            <a:br>
+              <a:rPr sz="5400" dirty="0"/>
+            </a:br>
+            <a:r>
+              <a:rPr sz="1800" dirty="0">
+                <a:latin typeface="Consolas"/>
+              </a:rPr>
+              <a:t>│                                                 │</a:t>
+            </a:r>
+            <a:br>
+              <a:rPr sz="5400" dirty="0"/>
+            </a:br>
+            <a:r>
+              <a:rPr sz="1800" dirty="0">
+                <a:latin typeface="Consolas"/>
+              </a:rPr>
+              <a:t>│ ┌─────────────┐ ┌─────────────┐ ┌─────────────┐ │</a:t>
+            </a:r>
+            <a:br>
+              <a:rPr sz="5400" dirty="0"/>
+            </a:br>
+            <a:r>
+              <a:rPr sz="1800" dirty="0">
+                <a:latin typeface="Consolas"/>
+              </a:rPr>
+              <a:t>│ │Premium      │ │Standard     │ │Basic        │ │</a:t>
+            </a:r>
+            <a:br>
+              <a:rPr sz="5400" dirty="0"/>
+            </a:br>
+            <a:r>
+              <a:rPr sz="1800" dirty="0">
+                <a:latin typeface="Consolas"/>
+              </a:rPr>
+              <a:t>│ │Clients      │ │Clients      │ │Clients      │ │</a:t>
+            </a:r>
+            <a:br>
+              <a:rPr sz="5400" dirty="0"/>
+            </a:br>
+            <a:r>
+              <a:rPr sz="1800" dirty="0">
+                <a:latin typeface="Consolas"/>
+              </a:rPr>
+              <a:t>│ │             │ │             │ │             │ │</a:t>
+            </a:r>
+            <a:br>
+              <a:rPr sz="5400" dirty="0"/>
+            </a:br>
+            <a:r>
+              <a:rPr sz="1800" dirty="0">
+                <a:latin typeface="Consolas"/>
+              </a:rPr>
+              <a:t>│ │Thread Pool  │ │Thread Pool  │ │Thread Pool  │ │</a:t>
+            </a:r>
+            <a:br>
+              <a:rPr sz="5400" dirty="0"/>
+            </a:br>
+            <a:r>
+              <a:rPr sz="1800" dirty="0">
+                <a:latin typeface="Consolas"/>
+              </a:rPr>
+              <a:t>│ │Size: 50     │ │Size: 30     │ │Size: 20     │ │</a:t>
+            </a:r>
+            <a:br>
+              <a:rPr sz="5400" dirty="0"/>
+            </a:br>
+            <a:r>
+              <a:rPr sz="1800" dirty="0">
+                <a:latin typeface="Consolas"/>
+              </a:rPr>
+              <a:t>│ └─────────────┘ └─────────────┘ └─────────────┘ │</a:t>
+            </a:r>
+            <a:br>
+              <a:rPr sz="5400" dirty="0"/>
+            </a:br>
+            <a:r>
+              <a:rPr sz="1800" dirty="0">
+                <a:latin typeface="Consolas"/>
+              </a:rPr>
+              <a:t>└─────────────────────────────────────────────────┘</a:t>
+            </a:r>
+            <a:br>
+              <a:rPr sz="5400" dirty="0"/>
+            </a:br>
+            <a:br>
+              <a:rPr sz="5400" dirty="0"/>
+            </a:br>
+            <a:r>
+              <a:rPr sz="1800" dirty="0">
+                <a:latin typeface="Consolas"/>
+              </a:rPr>
+              <a:t>Benefit: Basic clients cannot starve Premium clients</a:t>
+            </a:r>
           </a:p>
         </p:txBody>
       </p:sp>
@@ -14407,7 +12904,7 @@
             <a:spLocks noGrp="1"/>
           </p:cNvSpPr>
           <p:nvPr>
-            <p:ph type="title"/>
+            <p:ph type="ctrTitle"/>
           </p:nvPr>
         </p:nvSpPr>
         <p:spPr/>
@@ -14416,156 +12913,27 @@
           <a:lstStyle/>
           <a:p>
             <a:r>
-              <a:t>Bulkhead Pattern - Resource Isolation</a:t>
-            </a:r>
-          </a:p>
-        </p:txBody>
-      </p:sp>
-      <p:sp>
-        <p:nvSpPr>
-          <p:cNvPr id="3" name="Content Placeholder 2"/>
-          <p:cNvSpPr>
-            <a:spLocks noGrp="1"/>
-          </p:cNvSpPr>
-          <p:nvPr>
-            <p:ph idx="1"/>
+              <a:t>Domain-Driven Design (DDD)</a:t>
+            </a:r>
+          </a:p>
+        </p:txBody>
+      </p:sp>
+      <p:sp>
+        <p:nvSpPr>
+          <p:cNvPr id="3" name="Subtitle 2"/>
+          <p:cNvSpPr>
+            <a:spLocks noGrp="1"/>
+          </p:cNvSpPr>
+          <p:nvPr>
+            <p:ph type="subTitle" idx="1"/>
           </p:nvPr>
         </p:nvSpPr>
         <p:spPr/>
         <p:txBody>
-          <a:bodyPr>
-            <a:normAutofit/>
-          </a:bodyPr>
+          <a:bodyPr/>
           <a:lstStyle/>
           <a:p>
-            <a:pPr>
-              <a:lnSpc>
-                <a:spcPct val="100000"/>
-              </a:lnSpc>
-              <a:spcBef>
-                <a:spcPts val="0"/>
-              </a:spcBef>
-              <a:spcAft>
-                <a:spcPts val="0"/>
-              </a:spcAft>
-            </a:pPr>
-            <a:r>
-              <a:rPr sz="1800" dirty="0">
-                <a:latin typeface="Consolas"/>
-              </a:rPr>
-              <a:t>Thread Pools per Client Type:</a:t>
-            </a:r>
-            <a:br>
-              <a:rPr sz="5400" dirty="0"/>
-            </a:br>
-            <a:r>
-              <a:rPr sz="1800" dirty="0">
-                <a:latin typeface="Consolas"/>
-              </a:rPr>
-              <a:t>┌─────────────────────────────────────────────────┐</a:t>
-            </a:r>
-            <a:br>
-              <a:rPr sz="5400" dirty="0"/>
-            </a:br>
-            <a:r>
-              <a:rPr sz="1800" dirty="0">
-                <a:latin typeface="Consolas"/>
-              </a:rPr>
-              <a:t>│                Service                          │</a:t>
-            </a:r>
-            <a:br>
-              <a:rPr sz="5400" dirty="0"/>
-            </a:br>
-            <a:r>
-              <a:rPr sz="1800" dirty="0">
-                <a:latin typeface="Consolas"/>
-              </a:rPr>
-              <a:t>│                                                 │</a:t>
-            </a:r>
-            <a:br>
-              <a:rPr sz="5400" dirty="0"/>
-            </a:br>
-            <a:r>
-              <a:rPr sz="1800" dirty="0">
-                <a:latin typeface="Consolas"/>
-              </a:rPr>
-              <a:t>│ ┌─────────────┐ ┌─────────────┐ ┌─────────────┐ │</a:t>
-            </a:r>
-            <a:br>
-              <a:rPr sz="5400" dirty="0"/>
-            </a:br>
-            <a:r>
-              <a:rPr sz="1800" dirty="0">
-                <a:latin typeface="Consolas"/>
-              </a:rPr>
-              <a:t>│ │Premium      │ │Standard     │ │Basic        │ │</a:t>
-            </a:r>
-            <a:br>
-              <a:rPr sz="5400" dirty="0"/>
-            </a:br>
-            <a:r>
-              <a:rPr sz="1800" dirty="0">
-                <a:latin typeface="Consolas"/>
-              </a:rPr>
-              <a:t>│ │Clients      │ │Clients      │ │Clients      │ │</a:t>
-            </a:r>
-            <a:br>
-              <a:rPr sz="5400" dirty="0"/>
-            </a:br>
-            <a:r>
-              <a:rPr sz="1800" dirty="0">
-                <a:latin typeface="Consolas"/>
-              </a:rPr>
-              <a:t>│ │             │ │             │ │             │ │</a:t>
-            </a:r>
-            <a:br>
-              <a:rPr sz="5400" dirty="0"/>
-            </a:br>
-            <a:r>
-              <a:rPr sz="1800" dirty="0">
-                <a:latin typeface="Consolas"/>
-              </a:rPr>
-              <a:t>│ │Thread Pool  │ │Thread Pool  │ │Thread Pool  │ │</a:t>
-            </a:r>
-            <a:br>
-              <a:rPr sz="5400" dirty="0"/>
-            </a:br>
-            <a:r>
-              <a:rPr sz="1800" dirty="0">
-                <a:latin typeface="Consolas"/>
-              </a:rPr>
-              <a:t>│ │Size: 50     │ │Size: 30     │ │Size: 20     │ │</a:t>
-            </a:r>
-            <a:br>
-              <a:rPr sz="5400" dirty="0"/>
-            </a:br>
-            <a:r>
-              <a:rPr sz="1800" dirty="0">
-                <a:latin typeface="Consolas"/>
-              </a:rPr>
-              <a:t>│ └─────────────┘ └─────────────┘ └─────────────┘ │</a:t>
-            </a:r>
-            <a:br>
-              <a:rPr sz="5400" dirty="0"/>
-            </a:br>
-            <a:r>
-              <a:rPr sz="1800" dirty="0">
-                <a:latin typeface="Consolas"/>
-              </a:rPr>
-              <a:t>└─────────────────────────────────────────────────┘</a:t>
-            </a:r>
-            <a:br>
-              <a:rPr sz="5400" dirty="0"/>
-            </a:br>
-            <a:br>
-              <a:rPr sz="5400" dirty="0"/>
-            </a:br>
-            <a:r>
-              <a:rPr sz="1800" dirty="0">
-                <a:latin typeface="Consolas"/>
-              </a:rPr>
-              <a:t>Benefit: Basic clients cannot starve Premium clients</a:t>
-            </a:r>
+            <a:endParaRPr/>
           </a:p>
         </p:txBody>
       </p:sp>
@@ -14578,7 +12946,7 @@
 </file>
 
 <file path=ppt/slides/slide17.xml><?xml version="1.0" encoding="utf-8"?>
-<p:sld xmlns:a="http://schemas.openxmlformats.org/drawingml/2006/main" xmlns:r="http://schemas.openxmlformats.org/officeDocument/2006/relationships" xmlns:p="http://schemas.openxmlformats.org/presentationml/2006/main">
+<p:sld xmlns:a="http://schemas.openxmlformats.org/drawingml/2006/main" xmlns:p="http://schemas.openxmlformats.org/presentationml/2006/main" xmlns:r="http://schemas.openxmlformats.org/officeDocument/2006/relationships">
   <p:cSld>
     <p:spTree>
       <p:nvGrpSpPr>
@@ -14586,14 +12954,7 @@
         <p:cNvGrpSpPr/>
         <p:nvPr/>
       </p:nvGrpSpPr>
-      <p:grpSpPr>
-        <a:xfrm>
-          <a:off x="0" y="0"/>
-          <a:ext cx="0" cy="0"/>
-          <a:chOff x="0" y="0"/>
-          <a:chExt cx="0" cy="0"/>
-        </a:xfrm>
-      </p:grpSpPr>
+      <p:grpSpPr/>
       <p:sp>
         <p:nvSpPr>
           <p:cNvPr id="2" name="Title 1"/>
@@ -14601,7 +12962,7 @@
             <a:spLocks noGrp="1"/>
           </p:cNvSpPr>
           <p:nvPr>
-            <p:ph type="ctrTitle"/>
+            <p:ph type="title"/>
           </p:nvPr>
         </p:nvSpPr>
         <p:spPr/>
@@ -14610,28 +12971,138 @@
           <a:lstStyle/>
           <a:p>
             <a:r>
-              <a:t>Domain-Driven Design (DDD)</a:t>
-            </a:r>
-          </a:p>
-        </p:txBody>
-      </p:sp>
-      <p:sp>
-        <p:nvSpPr>
-          <p:cNvPr id="3" name="Subtitle 2"/>
-          <p:cNvSpPr>
-            <a:spLocks noGrp="1"/>
-          </p:cNvSpPr>
-          <p:nvPr>
-            <p:ph type="subTitle" idx="1"/>
+              <a:t>CQRS - Trade-offs</a:t>
+            </a:r>
+          </a:p>
+        </p:txBody>
+      </p:sp>
+      <p:sp>
+        <p:nvSpPr>
+          <p:cNvPr id="3" name="Content Placeholder 2"/>
+          <p:cNvSpPr>
+            <a:spLocks noGrp="1"/>
+          </p:cNvSpPr>
+          <p:nvPr>
+            <p:ph idx="1"/>
           </p:nvPr>
         </p:nvSpPr>
         <p:spPr/>
         <p:txBody>
           <a:bodyPr/>
           <a:lstStyle/>
-          <a:p>
-            <a:endParaRPr/>
-          </a:p>
+          <a:p/>
+        </p:txBody>
+      </p:sp>
+    </p:spTree>
+  </p:cSld>
+  <p:clrMapOvr>
+    <a:masterClrMapping/>
+  </p:clrMapOvr>
+</p:sld>
+</file>
+
+<file path=ppt/slides/slide18.xml><?xml version="1.0" encoding="utf-8"?>
+<p:sld xmlns:a="http://schemas.openxmlformats.org/drawingml/2006/main" xmlns:p="http://schemas.openxmlformats.org/presentationml/2006/main" xmlns:r="http://schemas.openxmlformats.org/officeDocument/2006/relationships">
+  <p:cSld>
+    <p:spTree>
+      <p:nvGrpSpPr>
+        <p:cNvPr id="1" name=""/>
+        <p:cNvGrpSpPr/>
+        <p:nvPr/>
+      </p:nvGrpSpPr>
+      <p:grpSpPr/>
+      <p:sp>
+        <p:nvSpPr>
+          <p:cNvPr id="2" name="Title 1"/>
+          <p:cNvSpPr>
+            <a:spLocks noGrp="1"/>
+          </p:cNvSpPr>
+          <p:nvPr>
+            <p:ph type="title"/>
+          </p:nvPr>
+        </p:nvSpPr>
+        <p:spPr/>
+        <p:txBody>
+          <a:bodyPr/>
+          <a:lstStyle/>
+          <a:p>
+            <a:r>
+              <a:t>CQRS - Vorteile/Nachteile</a:t>
+            </a:r>
+          </a:p>
+        </p:txBody>
+      </p:sp>
+      <p:sp>
+        <p:nvSpPr>
+          <p:cNvPr id="3" name="Content Placeholder 2"/>
+          <p:cNvSpPr>
+            <a:spLocks noGrp="1"/>
+          </p:cNvSpPr>
+          <p:nvPr>
+            <p:ph idx="1"/>
+          </p:nvPr>
+        </p:nvSpPr>
+        <p:spPr/>
+        <p:txBody>
+          <a:bodyPr/>
+          <a:lstStyle/>
+          <a:p/>
+        </p:txBody>
+      </p:sp>
+    </p:spTree>
+  </p:cSld>
+  <p:clrMapOvr>
+    <a:masterClrMapping/>
+  </p:clrMapOvr>
+</p:sld>
+</file>
+
+<file path=ppt/slides/slide19.xml><?xml version="1.0" encoding="utf-8"?>
+<p:sld xmlns:a="http://schemas.openxmlformats.org/drawingml/2006/main" xmlns:p="http://schemas.openxmlformats.org/presentationml/2006/main" xmlns:r="http://schemas.openxmlformats.org/officeDocument/2006/relationships">
+  <p:cSld>
+    <p:spTree>
+      <p:nvGrpSpPr>
+        <p:cNvPr id="1" name=""/>
+        <p:cNvGrpSpPr/>
+        <p:nvPr/>
+      </p:nvGrpSpPr>
+      <p:grpSpPr/>
+      <p:sp>
+        <p:nvSpPr>
+          <p:cNvPr id="2" name="Title 1"/>
+          <p:cNvSpPr>
+            <a:spLocks noGrp="1"/>
+          </p:cNvSpPr>
+          <p:nvPr>
+            <p:ph type="title"/>
+          </p:nvPr>
+        </p:nvSpPr>
+        <p:spPr/>
+        <p:txBody>
+          <a:bodyPr/>
+          <a:lstStyle/>
+          <a:p>
+            <a:r>
+              <a:t>Event Sourcing - Vorteile/Nachteile</a:t>
+            </a:r>
+          </a:p>
+        </p:txBody>
+      </p:sp>
+      <p:sp>
+        <p:nvSpPr>
+          <p:cNvPr id="3" name="Content Placeholder 2"/>
+          <p:cNvSpPr>
+            <a:spLocks noGrp="1"/>
+          </p:cNvSpPr>
+          <p:nvPr>
+            <p:ph idx="1"/>
+          </p:nvPr>
+        </p:nvSpPr>
+        <p:spPr/>
+        <p:txBody>
+          <a:bodyPr/>
+          <a:lstStyle/>
+          <a:p/>
         </p:txBody>
       </p:sp>
     </p:spTree>
@@ -14709,6 +13180,342 @@
 </p:sld>
 </file>
 
+<file path=ppt/slides/slide20.xml><?xml version="1.0" encoding="utf-8"?>
+<p:sld xmlns:a="http://schemas.openxmlformats.org/drawingml/2006/main" xmlns:p="http://schemas.openxmlformats.org/presentationml/2006/main" xmlns:r="http://schemas.openxmlformats.org/officeDocument/2006/relationships">
+  <p:cSld>
+    <p:spTree>
+      <p:nvGrpSpPr>
+        <p:cNvPr id="1" name=""/>
+        <p:cNvGrpSpPr/>
+        <p:nvPr/>
+      </p:nvGrpSpPr>
+      <p:grpSpPr/>
+      <p:sp>
+        <p:nvSpPr>
+          <p:cNvPr id="2" name="Title 1"/>
+          <p:cNvSpPr>
+            <a:spLocks noGrp="1"/>
+          </p:cNvSpPr>
+          <p:nvPr>
+            <p:ph type="title"/>
+          </p:nvPr>
+        </p:nvSpPr>
+        <p:spPr/>
+        <p:txBody>
+          <a:bodyPr/>
+          <a:lstStyle/>
+          <a:p>
+            <a:r>
+              <a:t>Circuit Breaker - Vorteile/Nachteile</a:t>
+            </a:r>
+          </a:p>
+        </p:txBody>
+      </p:sp>
+      <p:sp>
+        <p:nvSpPr>
+          <p:cNvPr id="3" name="Content Placeholder 2"/>
+          <p:cNvSpPr>
+            <a:spLocks noGrp="1"/>
+          </p:cNvSpPr>
+          <p:nvPr>
+            <p:ph idx="1"/>
+          </p:nvPr>
+        </p:nvSpPr>
+        <p:spPr/>
+        <p:txBody>
+          <a:bodyPr/>
+          <a:lstStyle/>
+          <a:p/>
+        </p:txBody>
+      </p:sp>
+    </p:spTree>
+  </p:cSld>
+  <p:clrMapOvr>
+    <a:masterClrMapping/>
+  </p:clrMapOvr>
+</p:sld>
+</file>
+
+<file path=ppt/slides/slide21.xml><?xml version="1.0" encoding="utf-8"?>
+<p:sld xmlns:a="http://schemas.openxmlformats.org/drawingml/2006/main" xmlns:p="http://schemas.openxmlformats.org/presentationml/2006/main" xmlns:r="http://schemas.openxmlformats.org/officeDocument/2006/relationships">
+  <p:cSld>
+    <p:spTree>
+      <p:nvGrpSpPr>
+        <p:cNvPr id="1" name=""/>
+        <p:cNvGrpSpPr/>
+        <p:nvPr/>
+      </p:nvGrpSpPr>
+      <p:grpSpPr/>
+      <p:sp>
+        <p:nvSpPr>
+          <p:cNvPr id="2" name="Title 1"/>
+          <p:cNvSpPr>
+            <a:spLocks noGrp="1"/>
+          </p:cNvSpPr>
+          <p:nvPr>
+            <p:ph type="title"/>
+          </p:nvPr>
+        </p:nvSpPr>
+        <p:spPr/>
+        <p:txBody>
+          <a:bodyPr/>
+          <a:lstStyle/>
+          <a:p>
+            <a:r>
+              <a:t>Saga Pattern - Vorteile/Nachteile</a:t>
+            </a:r>
+          </a:p>
+        </p:txBody>
+      </p:sp>
+      <p:sp>
+        <p:nvSpPr>
+          <p:cNvPr id="3" name="Content Placeholder 2"/>
+          <p:cNvSpPr>
+            <a:spLocks noGrp="1"/>
+          </p:cNvSpPr>
+          <p:nvPr>
+            <p:ph idx="1"/>
+          </p:nvPr>
+        </p:nvSpPr>
+        <p:spPr/>
+        <p:txBody>
+          <a:bodyPr/>
+          <a:lstStyle/>
+          <a:p/>
+        </p:txBody>
+      </p:sp>
+    </p:spTree>
+  </p:cSld>
+  <p:clrMapOvr>
+    <a:masterClrMapping/>
+  </p:clrMapOvr>
+</p:sld>
+</file>
+
+<file path=ppt/slides/slide22.xml><?xml version="1.0" encoding="utf-8"?>
+<p:sld xmlns:a="http://schemas.openxmlformats.org/drawingml/2006/main" xmlns:p="http://schemas.openxmlformats.org/presentationml/2006/main" xmlns:r="http://schemas.openxmlformats.org/officeDocument/2006/relationships">
+  <p:cSld>
+    <p:spTree>
+      <p:nvGrpSpPr>
+        <p:cNvPr id="1" name=""/>
+        <p:cNvGrpSpPr/>
+        <p:nvPr/>
+      </p:nvGrpSpPr>
+      <p:grpSpPr/>
+      <p:sp>
+        <p:nvSpPr>
+          <p:cNvPr id="2" name="Title 1"/>
+          <p:cNvSpPr>
+            <a:spLocks noGrp="1"/>
+          </p:cNvSpPr>
+          <p:nvPr>
+            <p:ph type="title"/>
+          </p:nvPr>
+        </p:nvSpPr>
+        <p:spPr/>
+        <p:txBody>
+          <a:bodyPr/>
+          <a:lstStyle/>
+          <a:p>
+            <a:r>
+              <a:t>API Gateway - Vorteile/Nachteile</a:t>
+            </a:r>
+          </a:p>
+        </p:txBody>
+      </p:sp>
+      <p:sp>
+        <p:nvSpPr>
+          <p:cNvPr id="3" name="Content Placeholder 2"/>
+          <p:cNvSpPr>
+            <a:spLocks noGrp="1"/>
+          </p:cNvSpPr>
+          <p:nvPr>
+            <p:ph idx="1"/>
+          </p:nvPr>
+        </p:nvSpPr>
+        <p:spPr/>
+        <p:txBody>
+          <a:bodyPr/>
+          <a:lstStyle/>
+          <a:p/>
+        </p:txBody>
+      </p:sp>
+    </p:spTree>
+  </p:cSld>
+  <p:clrMapOvr>
+    <a:masterClrMapping/>
+  </p:clrMapOvr>
+</p:sld>
+</file>
+
+<file path=ppt/slides/slide23.xml><?xml version="1.0" encoding="utf-8"?>
+<p:sld xmlns:a="http://schemas.openxmlformats.org/drawingml/2006/main" xmlns:p="http://schemas.openxmlformats.org/presentationml/2006/main" xmlns:r="http://schemas.openxmlformats.org/officeDocument/2006/relationships">
+  <p:cSld>
+    <p:spTree>
+      <p:nvGrpSpPr>
+        <p:cNvPr id="1" name=""/>
+        <p:cNvGrpSpPr/>
+        <p:nvPr/>
+      </p:nvGrpSpPr>
+      <p:grpSpPr/>
+      <p:sp>
+        <p:nvSpPr>
+          <p:cNvPr id="2" name="Title 1"/>
+          <p:cNvSpPr>
+            <a:spLocks noGrp="1"/>
+          </p:cNvSpPr>
+          <p:nvPr>
+            <p:ph type="title"/>
+          </p:nvPr>
+        </p:nvSpPr>
+        <p:spPr/>
+        <p:txBody>
+          <a:bodyPr/>
+          <a:lstStyle/>
+          <a:p>
+            <a:r>
+              <a:t>Service Mesh - Vorteile/Nachteile</a:t>
+            </a:r>
+          </a:p>
+        </p:txBody>
+      </p:sp>
+      <p:sp>
+        <p:nvSpPr>
+          <p:cNvPr id="3" name="Content Placeholder 2"/>
+          <p:cNvSpPr>
+            <a:spLocks noGrp="1"/>
+          </p:cNvSpPr>
+          <p:nvPr>
+            <p:ph idx="1"/>
+          </p:nvPr>
+        </p:nvSpPr>
+        <p:spPr/>
+        <p:txBody>
+          <a:bodyPr/>
+          <a:lstStyle/>
+          <a:p/>
+        </p:txBody>
+      </p:sp>
+    </p:spTree>
+  </p:cSld>
+  <p:clrMapOvr>
+    <a:masterClrMapping/>
+  </p:clrMapOvr>
+</p:sld>
+</file>
+
+<file path=ppt/slides/slide24.xml><?xml version="1.0" encoding="utf-8"?>
+<p:sld xmlns:a="http://schemas.openxmlformats.org/drawingml/2006/main" xmlns:p="http://schemas.openxmlformats.org/presentationml/2006/main" xmlns:r="http://schemas.openxmlformats.org/officeDocument/2006/relationships">
+  <p:cSld>
+    <p:spTree>
+      <p:nvGrpSpPr>
+        <p:cNvPr id="1" name=""/>
+        <p:cNvGrpSpPr/>
+        <p:nvPr/>
+      </p:nvGrpSpPr>
+      <p:grpSpPr/>
+      <p:sp>
+        <p:nvSpPr>
+          <p:cNvPr id="2" name="Title 1"/>
+          <p:cNvSpPr>
+            <a:spLocks noGrp="1"/>
+          </p:cNvSpPr>
+          <p:nvPr>
+            <p:ph type="title"/>
+          </p:nvPr>
+        </p:nvSpPr>
+        <p:spPr/>
+        <p:txBody>
+          <a:bodyPr/>
+          <a:lstStyle/>
+          <a:p>
+            <a:r>
+              <a:t>Bulkhead Pattern - Vorteile/Nachteile</a:t>
+            </a:r>
+          </a:p>
+        </p:txBody>
+      </p:sp>
+      <p:sp>
+        <p:nvSpPr>
+          <p:cNvPr id="3" name="Content Placeholder 2"/>
+          <p:cNvSpPr>
+            <a:spLocks noGrp="1"/>
+          </p:cNvSpPr>
+          <p:nvPr>
+            <p:ph idx="1"/>
+          </p:nvPr>
+        </p:nvSpPr>
+        <p:spPr/>
+        <p:txBody>
+          <a:bodyPr/>
+          <a:lstStyle/>
+          <a:p/>
+        </p:txBody>
+      </p:sp>
+    </p:spTree>
+  </p:cSld>
+  <p:clrMapOvr>
+    <a:masterClrMapping/>
+  </p:clrMapOvr>
+</p:sld>
+</file>
+
+<file path=ppt/slides/slide25.xml><?xml version="1.0" encoding="utf-8"?>
+<p:sld xmlns:a="http://schemas.openxmlformats.org/drawingml/2006/main" xmlns:p="http://schemas.openxmlformats.org/presentationml/2006/main" xmlns:r="http://schemas.openxmlformats.org/officeDocument/2006/relationships">
+  <p:cSld>
+    <p:spTree>
+      <p:nvGrpSpPr>
+        <p:cNvPr id="1" name=""/>
+        <p:cNvGrpSpPr/>
+        <p:nvPr/>
+      </p:nvGrpSpPr>
+      <p:grpSpPr/>
+      <p:sp>
+        <p:nvSpPr>
+          <p:cNvPr id="2" name="Title 1"/>
+          <p:cNvSpPr>
+            <a:spLocks noGrp="1"/>
+          </p:cNvSpPr>
+          <p:nvPr>
+            <p:ph type="title"/>
+          </p:nvPr>
+        </p:nvSpPr>
+        <p:spPr/>
+        <p:txBody>
+          <a:bodyPr/>
+          <a:lstStyle/>
+          <a:p>
+            <a:r>
+              <a:t>Domain-Driven Design - Vorteile/Nachteile</a:t>
+            </a:r>
+          </a:p>
+        </p:txBody>
+      </p:sp>
+      <p:sp>
+        <p:nvSpPr>
+          <p:cNvPr id="3" name="Content Placeholder 2"/>
+          <p:cNvSpPr>
+            <a:spLocks noGrp="1"/>
+          </p:cNvSpPr>
+          <p:nvPr>
+            <p:ph idx="1"/>
+          </p:nvPr>
+        </p:nvSpPr>
+        <p:spPr/>
+        <p:txBody>
+          <a:bodyPr/>
+          <a:lstStyle/>
+          <a:p/>
+        </p:txBody>
+      </p:sp>
+    </p:spTree>
+  </p:cSld>
+  <p:clrMapOvr>
+    <a:masterClrMapping/>
+  </p:clrMapOvr>
+</p:sld>
+</file>
+
 <file path=ppt/slides/slide26.xml><?xml version="1.0" encoding="utf-8"?>
 <p:sld xmlns:a="http://schemas.openxmlformats.org/drawingml/2006/main" xmlns:p="http://schemas.openxmlformats.org/presentationml/2006/main" xmlns:r="http://schemas.openxmlformats.org/officeDocument/2006/relationships">
   <p:cSld>
@@ -14726,7 +13533,7 @@
             <a:spLocks noGrp="1"/>
           </p:cNvSpPr>
           <p:nvPr>
-            <p:ph type="title"/>
+            <p:ph type="ctrTitle"/>
           </p:nvPr>
         </p:nvSpPr>
         <p:spPr/>
@@ -14742,12 +13549,12 @@
       </p:sp>
       <p:sp>
         <p:nvSpPr>
-          <p:cNvPr id="3" name="Content Placeholder 2"/>
-          <p:cNvSpPr>
-            <a:spLocks noGrp="1"/>
-          </p:cNvSpPr>
-          <p:nvPr>
-            <p:ph idx="1"/>
+          <p:cNvPr id="3" name="Subtitle 2"/>
+          <p:cNvSpPr>
+            <a:spLocks noGrp="1"/>
+          </p:cNvSpPr>
+          <p:nvPr>
+            <p:ph type="subTitle" idx="1"/>
           </p:nvPr>
         </p:nvSpPr>
         <p:spPr/>
@@ -14755,6 +13562,164 @@
           <a:bodyPr/>
           <a:lstStyle/>
           <a:p/>
+        </p:txBody>
+      </p:sp>
+      <p:sp>
+        <p:nvSpPr>
+          <p:cNvPr id="4" name="TextBox 3"/>
+          <p:cNvSpPr txBox="1"/>
+          <p:nvPr/>
+        </p:nvSpPr>
+        <p:spPr>
+          <a:xfrm>
+            <a:off x="457200" y="1371600"/>
+            <a:ext cx="4114800" cy="5029200"/>
+          </a:xfrm>
+          <a:prstGeom prst="rect">
+            <a:avLst/>
+          </a:prstGeom>
+          <a:noFill/>
+        </p:spPr>
+        <p:txBody>
+          <a:bodyPr wrap="none">
+            <a:spAutoFit/>
+          </a:bodyPr>
+          <a:lstStyle/>
+          <a:p>
+            <a:pPr>
+              <a:defRPr sz="2000" b="1">
+                <a:solidFill>
+                  <a:srgbClr val="008000"/>
+                </a:solidFill>
+              </a:defRPr>
+            </a:pPr>
+            <a:r>
+              <a:t>Vorteile ✅</a:t>
+            </a:r>
+          </a:p>
+          <a:p>
+            <a:pPr>
+              <a:spcAft>
+                <a:spcPts val="600"/>
+              </a:spcAft>
+              <a:defRPr sz="1400"/>
+            </a:pPr>
+            <a:r>
+              <a:t>• Optimierte Read und Write Models</a:t>
+            </a:r>
+          </a:p>
+          <a:p>
+            <a:pPr>
+              <a:spcAft>
+                <a:spcPts val="600"/>
+              </a:spcAft>
+              <a:defRPr sz="1400"/>
+            </a:pPr>
+            <a:r>
+              <a:t>• Unabhängige Skalierung von Queries und Commands</a:t>
+            </a:r>
+          </a:p>
+          <a:p>
+            <a:pPr>
+              <a:spcAft>
+                <a:spcPts val="600"/>
+              </a:spcAft>
+              <a:defRPr sz="1400"/>
+            </a:pPr>
+            <a:r>
+              <a:t>• Bessere Performance durch spezialisierte Datenmodelle</a:t>
+            </a:r>
+          </a:p>
+          <a:p>
+            <a:pPr>
+              <a:spcAft>
+                <a:spcPts val="600"/>
+              </a:spcAft>
+              <a:defRPr sz="1400"/>
+            </a:pPr>
+            <a:r>
+              <a:t>• Event Sourcing Integration möglich</a:t>
+            </a:r>
+          </a:p>
+        </p:txBody>
+      </p:sp>
+      <p:sp>
+        <p:nvSpPr>
+          <p:cNvPr id="5" name="TextBox 4"/>
+          <p:cNvSpPr txBox="1"/>
+          <p:nvPr/>
+        </p:nvSpPr>
+        <p:spPr>
+          <a:xfrm>
+            <a:off x="4754880" y="1371600"/>
+            <a:ext cx="4114800" cy="5029200"/>
+          </a:xfrm>
+          <a:prstGeom prst="rect">
+            <a:avLst/>
+          </a:prstGeom>
+          <a:noFill/>
+        </p:spPr>
+        <p:txBody>
+          <a:bodyPr wrap="none">
+            <a:spAutoFit/>
+          </a:bodyPr>
+          <a:lstStyle/>
+          <a:p>
+            <a:pPr>
+              <a:defRPr sz="2000" b="1">
+                <a:solidFill>
+                  <a:srgbClr val="FF0000"/>
+                </a:solidFill>
+              </a:defRPr>
+            </a:pPr>
+            <a:r>
+              <a:t>Nachteile ❌</a:t>
+            </a:r>
+          </a:p>
+          <a:p>
+            <a:pPr>
+              <a:spcAft>
+                <a:spcPts val="600"/>
+              </a:spcAft>
+              <a:defRPr sz="1400"/>
+            </a:pPr>
+            <a:r>
+              <a:t>• Erhöhte Komplexität der Architektur</a:t>
+            </a:r>
+          </a:p>
+          <a:p>
+            <a:pPr>
+              <a:spcAft>
+                <a:spcPts val="600"/>
+              </a:spcAft>
+              <a:defRPr sz="1400"/>
+            </a:pPr>
+            <a:r>
+              <a:t>• Eventual Consistency zwischen Read/Write</a:t>
+            </a:r>
+          </a:p>
+          <a:p>
+            <a:pPr>
+              <a:spcAft>
+                <a:spcPts val="600"/>
+              </a:spcAft>
+              <a:defRPr sz="1400"/>
+            </a:pPr>
+            <a:r>
+              <a:t>• Synchronisation der Models erforderlich</a:t>
+            </a:r>
+          </a:p>
+          <a:p>
+            <a:pPr>
+              <a:spcAft>
+                <a:spcPts val="600"/>
+              </a:spcAft>
+              <a:defRPr sz="1400"/>
+            </a:pPr>
+            <a:r>
+              <a:t>• Mehr Code und Infrastruktur</a:t>
+            </a:r>
+          </a:p>
         </p:txBody>
       </p:sp>
     </p:spTree>
@@ -14782,7 +13747,7 @@
             <a:spLocks noGrp="1"/>
           </p:cNvSpPr>
           <p:nvPr>
-            <p:ph type="title"/>
+            <p:ph type="ctrTitle"/>
           </p:nvPr>
         </p:nvSpPr>
         <p:spPr/>
@@ -14798,12 +13763,12 @@
       </p:sp>
       <p:sp>
         <p:nvSpPr>
-          <p:cNvPr id="3" name="Content Placeholder 2"/>
-          <p:cNvSpPr>
-            <a:spLocks noGrp="1"/>
-          </p:cNvSpPr>
-          <p:nvPr>
-            <p:ph idx="1"/>
+          <p:cNvPr id="3" name="Subtitle 2"/>
+          <p:cNvSpPr>
+            <a:spLocks noGrp="1"/>
+          </p:cNvSpPr>
+          <p:nvPr>
+            <p:ph type="subTitle" idx="1"/>
           </p:nvPr>
         </p:nvSpPr>
         <p:spPr/>
@@ -14811,6 +13776,164 @@
           <a:bodyPr/>
           <a:lstStyle/>
           <a:p/>
+        </p:txBody>
+      </p:sp>
+      <p:sp>
+        <p:nvSpPr>
+          <p:cNvPr id="4" name="TextBox 3"/>
+          <p:cNvSpPr txBox="1"/>
+          <p:nvPr/>
+        </p:nvSpPr>
+        <p:spPr>
+          <a:xfrm>
+            <a:off x="457200" y="1371600"/>
+            <a:ext cx="4114800" cy="5029200"/>
+          </a:xfrm>
+          <a:prstGeom prst="rect">
+            <a:avLst/>
+          </a:prstGeom>
+          <a:noFill/>
+        </p:spPr>
+        <p:txBody>
+          <a:bodyPr wrap="none">
+            <a:spAutoFit/>
+          </a:bodyPr>
+          <a:lstStyle/>
+          <a:p>
+            <a:pPr>
+              <a:defRPr sz="2000" b="1">
+                <a:solidFill>
+                  <a:srgbClr val="008000"/>
+                </a:solidFill>
+              </a:defRPr>
+            </a:pPr>
+            <a:r>
+              <a:t>Vorteile ✅</a:t>
+            </a:r>
+          </a:p>
+          <a:p>
+            <a:pPr>
+              <a:spcAft>
+                <a:spcPts val="600"/>
+              </a:spcAft>
+              <a:defRPr sz="1400"/>
+            </a:pPr>
+            <a:r>
+              <a:t>• Optimierte Read und Write Models</a:t>
+            </a:r>
+          </a:p>
+          <a:p>
+            <a:pPr>
+              <a:spcAft>
+                <a:spcPts val="600"/>
+              </a:spcAft>
+              <a:defRPr sz="1400"/>
+            </a:pPr>
+            <a:r>
+              <a:t>• Unabhängige Skalierung von Queries und Commands</a:t>
+            </a:r>
+          </a:p>
+          <a:p>
+            <a:pPr>
+              <a:spcAft>
+                <a:spcPts val="600"/>
+              </a:spcAft>
+              <a:defRPr sz="1400"/>
+            </a:pPr>
+            <a:r>
+              <a:t>• Bessere Performance durch spezialisierte Datenmodelle</a:t>
+            </a:r>
+          </a:p>
+          <a:p>
+            <a:pPr>
+              <a:spcAft>
+                <a:spcPts val="600"/>
+              </a:spcAft>
+              <a:defRPr sz="1400"/>
+            </a:pPr>
+            <a:r>
+              <a:t>• Event Sourcing Integration möglich</a:t>
+            </a:r>
+          </a:p>
+        </p:txBody>
+      </p:sp>
+      <p:sp>
+        <p:nvSpPr>
+          <p:cNvPr id="5" name="TextBox 4"/>
+          <p:cNvSpPr txBox="1"/>
+          <p:nvPr/>
+        </p:nvSpPr>
+        <p:spPr>
+          <a:xfrm>
+            <a:off x="4754880" y="1371600"/>
+            <a:ext cx="4114800" cy="5029200"/>
+          </a:xfrm>
+          <a:prstGeom prst="rect">
+            <a:avLst/>
+          </a:prstGeom>
+          <a:noFill/>
+        </p:spPr>
+        <p:txBody>
+          <a:bodyPr wrap="none">
+            <a:spAutoFit/>
+          </a:bodyPr>
+          <a:lstStyle/>
+          <a:p>
+            <a:pPr>
+              <a:defRPr sz="2000" b="1">
+                <a:solidFill>
+                  <a:srgbClr val="FF0000"/>
+                </a:solidFill>
+              </a:defRPr>
+            </a:pPr>
+            <a:r>
+              <a:t>Nachteile ❌</a:t>
+            </a:r>
+          </a:p>
+          <a:p>
+            <a:pPr>
+              <a:spcAft>
+                <a:spcPts val="600"/>
+              </a:spcAft>
+              <a:defRPr sz="1400"/>
+            </a:pPr>
+            <a:r>
+              <a:t>• Erhöhte Komplexität der Architektur</a:t>
+            </a:r>
+          </a:p>
+          <a:p>
+            <a:pPr>
+              <a:spcAft>
+                <a:spcPts val="600"/>
+              </a:spcAft>
+              <a:defRPr sz="1400"/>
+            </a:pPr>
+            <a:r>
+              <a:t>• Eventual Consistency zwischen Read/Write</a:t>
+            </a:r>
+          </a:p>
+          <a:p>
+            <a:pPr>
+              <a:spcAft>
+                <a:spcPts val="600"/>
+              </a:spcAft>
+              <a:defRPr sz="1400"/>
+            </a:pPr>
+            <a:r>
+              <a:t>• Synchronisation der Models erforderlich</a:t>
+            </a:r>
+          </a:p>
+          <a:p>
+            <a:pPr>
+              <a:spcAft>
+                <a:spcPts val="600"/>
+              </a:spcAft>
+              <a:defRPr sz="1400"/>
+            </a:pPr>
+            <a:r>
+              <a:t>• Mehr Code und Infrastruktur</a:t>
+            </a:r>
+          </a:p>
         </p:txBody>
       </p:sp>
     </p:spTree>
@@ -14838,7 +13961,7 @@
             <a:spLocks noGrp="1"/>
           </p:cNvSpPr>
           <p:nvPr>
-            <p:ph type="title"/>
+            <p:ph type="ctrTitle"/>
           </p:nvPr>
         </p:nvSpPr>
         <p:spPr/>
@@ -14854,12 +13977,12 @@
       </p:sp>
       <p:sp>
         <p:nvSpPr>
-          <p:cNvPr id="3" name="Content Placeholder 2"/>
-          <p:cNvSpPr>
-            <a:spLocks noGrp="1"/>
-          </p:cNvSpPr>
-          <p:nvPr>
-            <p:ph idx="1"/>
+          <p:cNvPr id="3" name="Subtitle 2"/>
+          <p:cNvSpPr>
+            <a:spLocks noGrp="1"/>
+          </p:cNvSpPr>
+          <p:nvPr>
+            <p:ph type="subTitle" idx="1"/>
           </p:nvPr>
         </p:nvSpPr>
         <p:spPr/>
@@ -14867,6 +13990,164 @@
           <a:bodyPr/>
           <a:lstStyle/>
           <a:p/>
+        </p:txBody>
+      </p:sp>
+      <p:sp>
+        <p:nvSpPr>
+          <p:cNvPr id="4" name="TextBox 3"/>
+          <p:cNvSpPr txBox="1"/>
+          <p:nvPr/>
+        </p:nvSpPr>
+        <p:spPr>
+          <a:xfrm>
+            <a:off x="457200" y="1371600"/>
+            <a:ext cx="4114800" cy="5029200"/>
+          </a:xfrm>
+          <a:prstGeom prst="rect">
+            <a:avLst/>
+          </a:prstGeom>
+          <a:noFill/>
+        </p:spPr>
+        <p:txBody>
+          <a:bodyPr wrap="none">
+            <a:spAutoFit/>
+          </a:bodyPr>
+          <a:lstStyle/>
+          <a:p>
+            <a:pPr>
+              <a:defRPr sz="2000" b="1">
+                <a:solidFill>
+                  <a:srgbClr val="008000"/>
+                </a:solidFill>
+              </a:defRPr>
+            </a:pPr>
+            <a:r>
+              <a:t>Vorteile ✅</a:t>
+            </a:r>
+          </a:p>
+          <a:p>
+            <a:pPr>
+              <a:spcAft>
+                <a:spcPts val="600"/>
+              </a:spcAft>
+              <a:defRPr sz="1400"/>
+            </a:pPr>
+            <a:r>
+              <a:t>• Vollständige Audit Trail automatisch</a:t>
+            </a:r>
+          </a:p>
+          <a:p>
+            <a:pPr>
+              <a:spcAft>
+                <a:spcPts val="600"/>
+              </a:spcAft>
+              <a:defRPr sz="1400"/>
+            </a:pPr>
+            <a:r>
+              <a:t>• Time Travel und Event Replay möglich</a:t>
+            </a:r>
+          </a:p>
+          <a:p>
+            <a:pPr>
+              <a:spcAft>
+                <a:spcPts val="600"/>
+              </a:spcAft>
+              <a:defRPr sz="1400"/>
+            </a:pPr>
+            <a:r>
+              <a:t>• Debugging durch Event History</a:t>
+            </a:r>
+          </a:p>
+          <a:p>
+            <a:pPr>
+              <a:spcAft>
+                <a:spcPts val="600"/>
+              </a:spcAft>
+              <a:defRPr sz="1400"/>
+            </a:pPr>
+            <a:r>
+              <a:t>• Integration mit CQRS natural</a:t>
+            </a:r>
+          </a:p>
+        </p:txBody>
+      </p:sp>
+      <p:sp>
+        <p:nvSpPr>
+          <p:cNvPr id="5" name="TextBox 4"/>
+          <p:cNvSpPr txBox="1"/>
+          <p:nvPr/>
+        </p:nvSpPr>
+        <p:spPr>
+          <a:xfrm>
+            <a:off x="4754880" y="1371600"/>
+            <a:ext cx="4114800" cy="5029200"/>
+          </a:xfrm>
+          <a:prstGeom prst="rect">
+            <a:avLst/>
+          </a:prstGeom>
+          <a:noFill/>
+        </p:spPr>
+        <p:txBody>
+          <a:bodyPr wrap="none">
+            <a:spAutoFit/>
+          </a:bodyPr>
+          <a:lstStyle/>
+          <a:p>
+            <a:pPr>
+              <a:defRPr sz="2000" b="1">
+                <a:solidFill>
+                  <a:srgbClr val="FF0000"/>
+                </a:solidFill>
+              </a:defRPr>
+            </a:pPr>
+            <a:r>
+              <a:t>Nachteile ❌</a:t>
+            </a:r>
+          </a:p>
+          <a:p>
+            <a:pPr>
+              <a:spcAft>
+                <a:spcPts val="600"/>
+              </a:spcAft>
+              <a:defRPr sz="1400"/>
+            </a:pPr>
+            <a:r>
+              <a:t>• Event Store Management komplex</a:t>
+            </a:r>
+          </a:p>
+          <a:p>
+            <a:pPr>
+              <a:spcAft>
+                <a:spcPts val="600"/>
+              </a:spcAft>
+              <a:defRPr sz="1400"/>
+            </a:pPr>
+            <a:r>
+              <a:t>• Schema Evolution schwierig</a:t>
+            </a:r>
+          </a:p>
+          <a:p>
+            <a:pPr>
+              <a:spcAft>
+                <a:spcPts val="600"/>
+              </a:spcAft>
+              <a:defRPr sz="1400"/>
+            </a:pPr>
+            <a:r>
+              <a:t>• Snapshot Management erforderlich</a:t>
+            </a:r>
+          </a:p>
+          <a:p>
+            <a:pPr>
+              <a:spcAft>
+                <a:spcPts val="600"/>
+              </a:spcAft>
+              <a:defRPr sz="1400"/>
+            </a:pPr>
+            <a:r>
+              <a:t>• GDPR Compliance herausfordernd</a:t>
+            </a:r>
+          </a:p>
         </p:txBody>
       </p:sp>
     </p:spTree>
@@ -14894,7 +14175,7 @@
             <a:spLocks noGrp="1"/>
           </p:cNvSpPr>
           <p:nvPr>
-            <p:ph type="title"/>
+            <p:ph type="ctrTitle"/>
           </p:nvPr>
         </p:nvSpPr>
         <p:spPr/>
@@ -14910,12 +14191,12 @@
       </p:sp>
       <p:sp>
         <p:nvSpPr>
-          <p:cNvPr id="3" name="Content Placeholder 2"/>
-          <p:cNvSpPr>
-            <a:spLocks noGrp="1"/>
-          </p:cNvSpPr>
-          <p:nvPr>
-            <p:ph idx="1"/>
+          <p:cNvPr id="3" name="Subtitle 2"/>
+          <p:cNvSpPr>
+            <a:spLocks noGrp="1"/>
+          </p:cNvSpPr>
+          <p:nvPr>
+            <p:ph type="subTitle" idx="1"/>
           </p:nvPr>
         </p:nvSpPr>
         <p:spPr/>
@@ -14923,6 +14204,164 @@
           <a:bodyPr/>
           <a:lstStyle/>
           <a:p/>
+        </p:txBody>
+      </p:sp>
+      <p:sp>
+        <p:nvSpPr>
+          <p:cNvPr id="4" name="TextBox 3"/>
+          <p:cNvSpPr txBox="1"/>
+          <p:nvPr/>
+        </p:nvSpPr>
+        <p:spPr>
+          <a:xfrm>
+            <a:off x="457200" y="1371600"/>
+            <a:ext cx="4114800" cy="5029200"/>
+          </a:xfrm>
+          <a:prstGeom prst="rect">
+            <a:avLst/>
+          </a:prstGeom>
+          <a:noFill/>
+        </p:spPr>
+        <p:txBody>
+          <a:bodyPr wrap="none">
+            <a:spAutoFit/>
+          </a:bodyPr>
+          <a:lstStyle/>
+          <a:p>
+            <a:pPr>
+              <a:defRPr sz="2000" b="1">
+                <a:solidFill>
+                  <a:srgbClr val="008000"/>
+                </a:solidFill>
+              </a:defRPr>
+            </a:pPr>
+            <a:r>
+              <a:t>Vorteile ✅</a:t>
+            </a:r>
+          </a:p>
+          <a:p>
+            <a:pPr>
+              <a:spcAft>
+                <a:spcPts val="600"/>
+              </a:spcAft>
+              <a:defRPr sz="1400"/>
+            </a:pPr>
+            <a:r>
+              <a:t>• Schnelles Fail-Fast Verhalten</a:t>
+            </a:r>
+          </a:p>
+          <a:p>
+            <a:pPr>
+              <a:spcAft>
+                <a:spcPts val="600"/>
+              </a:spcAft>
+              <a:defRPr sz="1400"/>
+            </a:pPr>
+            <a:r>
+              <a:t>• System Stabilität bei Ausfällen</a:t>
+            </a:r>
+          </a:p>
+          <a:p>
+            <a:pPr>
+              <a:spcAft>
+                <a:spcPts val="600"/>
+              </a:spcAft>
+              <a:defRPr sz="1400"/>
+            </a:pPr>
+            <a:r>
+              <a:t>• Automatische Recovery Mechanismen</a:t>
+            </a:r>
+          </a:p>
+          <a:p>
+            <a:pPr>
+              <a:spcAft>
+                <a:spcPts val="600"/>
+              </a:spcAft>
+              <a:defRPr sz="1400"/>
+            </a:pPr>
+            <a:r>
+              <a:t>• Cascading Failures Prevention</a:t>
+            </a:r>
+          </a:p>
+        </p:txBody>
+      </p:sp>
+      <p:sp>
+        <p:nvSpPr>
+          <p:cNvPr id="5" name="TextBox 4"/>
+          <p:cNvSpPr txBox="1"/>
+          <p:nvPr/>
+        </p:nvSpPr>
+        <p:spPr>
+          <a:xfrm>
+            <a:off x="4754880" y="1371600"/>
+            <a:ext cx="4114800" cy="5029200"/>
+          </a:xfrm>
+          <a:prstGeom prst="rect">
+            <a:avLst/>
+          </a:prstGeom>
+          <a:noFill/>
+        </p:spPr>
+        <p:txBody>
+          <a:bodyPr wrap="none">
+            <a:spAutoFit/>
+          </a:bodyPr>
+          <a:lstStyle/>
+          <a:p>
+            <a:pPr>
+              <a:defRPr sz="2000" b="1">
+                <a:solidFill>
+                  <a:srgbClr val="FF0000"/>
+                </a:solidFill>
+              </a:defRPr>
+            </a:pPr>
+            <a:r>
+              <a:t>Nachteile ❌</a:t>
+            </a:r>
+          </a:p>
+          <a:p>
+            <a:pPr>
+              <a:spcAft>
+                <a:spcPts val="600"/>
+              </a:spcAft>
+              <a:defRPr sz="1400"/>
+            </a:pPr>
+            <a:r>
+              <a:t>• Threshold Tuning erforderlich</a:t>
+            </a:r>
+          </a:p>
+          <a:p>
+            <a:pPr>
+              <a:spcAft>
+                <a:spcPts val="600"/>
+              </a:spcAft>
+              <a:defRPr sz="1400"/>
+            </a:pPr>
+            <a:r>
+              <a:t>• False Positives möglich</a:t>
+            </a:r>
+          </a:p>
+          <a:p>
+            <a:pPr>
+              <a:spcAft>
+                <a:spcPts val="600"/>
+              </a:spcAft>
+              <a:defRPr sz="1400"/>
+            </a:pPr>
+            <a:r>
+              <a:t>• Additional Monitoring Layer</a:t>
+            </a:r>
+          </a:p>
+          <a:p>
+            <a:pPr>
+              <a:spcAft>
+                <a:spcPts val="600"/>
+              </a:spcAft>
+              <a:defRPr sz="1400"/>
+            </a:pPr>
+            <a:r>
+              <a:t>• Complexity in Error Handling</a:t>
+            </a:r>
+          </a:p>
         </p:txBody>
       </p:sp>
     </p:spTree>
@@ -15204,7 +14643,7 @@
             <a:spLocks noGrp="1"/>
           </p:cNvSpPr>
           <p:nvPr>
-            <p:ph type="title"/>
+            <p:ph type="ctrTitle"/>
           </p:nvPr>
         </p:nvSpPr>
         <p:spPr/>
@@ -15220,12 +14659,12 @@
       </p:sp>
       <p:sp>
         <p:nvSpPr>
-          <p:cNvPr id="3" name="Content Placeholder 2"/>
-          <p:cNvSpPr>
-            <a:spLocks noGrp="1"/>
-          </p:cNvSpPr>
-          <p:nvPr>
-            <p:ph idx="1"/>
+          <p:cNvPr id="3" name="Subtitle 2"/>
+          <p:cNvSpPr>
+            <a:spLocks noGrp="1"/>
+          </p:cNvSpPr>
+          <p:nvPr>
+            <p:ph type="subTitle" idx="1"/>
           </p:nvPr>
         </p:nvSpPr>
         <p:spPr/>
@@ -15233,6 +14672,164 @@
           <a:bodyPr/>
           <a:lstStyle/>
           <a:p/>
+        </p:txBody>
+      </p:sp>
+      <p:sp>
+        <p:nvSpPr>
+          <p:cNvPr id="4" name="TextBox 3"/>
+          <p:cNvSpPr txBox="1"/>
+          <p:nvPr/>
+        </p:nvSpPr>
+        <p:spPr>
+          <a:xfrm>
+            <a:off x="457200" y="1371600"/>
+            <a:ext cx="4114800" cy="5029200"/>
+          </a:xfrm>
+          <a:prstGeom prst="rect">
+            <a:avLst/>
+          </a:prstGeom>
+          <a:noFill/>
+        </p:spPr>
+        <p:txBody>
+          <a:bodyPr wrap="none">
+            <a:spAutoFit/>
+          </a:bodyPr>
+          <a:lstStyle/>
+          <a:p>
+            <a:pPr>
+              <a:defRPr sz="2000" b="1">
+                <a:solidFill>
+                  <a:srgbClr val="008000"/>
+                </a:solidFill>
+              </a:defRPr>
+            </a:pPr>
+            <a:r>
+              <a:t>Vorteile ✅</a:t>
+            </a:r>
+          </a:p>
+          <a:p>
+            <a:pPr>
+              <a:spcAft>
+                <a:spcPts val="600"/>
+              </a:spcAft>
+              <a:defRPr sz="1400"/>
+            </a:pPr>
+            <a:r>
+              <a:t>• Distributed Transaction Management</a:t>
+            </a:r>
+          </a:p>
+          <a:p>
+            <a:pPr>
+              <a:spcAft>
+                <a:spcPts val="600"/>
+              </a:spcAft>
+              <a:defRPr sz="1400"/>
+            </a:pPr>
+            <a:r>
+              <a:t>• Compensation Logic für Rollbacks</a:t>
+            </a:r>
+          </a:p>
+          <a:p>
+            <a:pPr>
+              <a:spcAft>
+                <a:spcPts val="600"/>
+              </a:spcAft>
+              <a:defRPr sz="1400"/>
+            </a:pPr>
+            <a:r>
+              <a:t>• Keine 2PC Lock Requirements</a:t>
+            </a:r>
+          </a:p>
+          <a:p>
+            <a:pPr>
+              <a:spcAft>
+                <a:spcPts val="600"/>
+              </a:spcAft>
+              <a:defRPr sz="1400"/>
+            </a:pPr>
+            <a:r>
+              <a:t>• Bessere Performance als 2PC</a:t>
+            </a:r>
+          </a:p>
+        </p:txBody>
+      </p:sp>
+      <p:sp>
+        <p:nvSpPr>
+          <p:cNvPr id="5" name="TextBox 4"/>
+          <p:cNvSpPr txBox="1"/>
+          <p:nvPr/>
+        </p:nvSpPr>
+        <p:spPr>
+          <a:xfrm>
+            <a:off x="4754880" y="1371600"/>
+            <a:ext cx="4114800" cy="5029200"/>
+          </a:xfrm>
+          <a:prstGeom prst="rect">
+            <a:avLst/>
+          </a:prstGeom>
+          <a:noFill/>
+        </p:spPr>
+        <p:txBody>
+          <a:bodyPr wrap="none">
+            <a:spAutoFit/>
+          </a:bodyPr>
+          <a:lstStyle/>
+          <a:p>
+            <a:pPr>
+              <a:defRPr sz="2000" b="1">
+                <a:solidFill>
+                  <a:srgbClr val="FF0000"/>
+                </a:solidFill>
+              </a:defRPr>
+            </a:pPr>
+            <a:r>
+              <a:t>Nachteile ❌</a:t>
+            </a:r>
+          </a:p>
+          <a:p>
+            <a:pPr>
+              <a:spcAft>
+                <a:spcPts val="600"/>
+              </a:spcAft>
+              <a:defRPr sz="1400"/>
+            </a:pPr>
+            <a:r>
+              <a:t>• Komplexe Compensation Logic</a:t>
+            </a:r>
+          </a:p>
+          <a:p>
+            <a:pPr>
+              <a:spcAft>
+                <a:spcPts val="600"/>
+              </a:spcAft>
+              <a:defRPr sz="1400"/>
+            </a:pPr>
+            <a:r>
+              <a:t>• Debugging schwierig</a:t>
+            </a:r>
+          </a:p>
+          <a:p>
+            <a:pPr>
+              <a:spcAft>
+                <a:spcPts val="600"/>
+              </a:spcAft>
+              <a:defRPr sz="1400"/>
+            </a:pPr>
+            <a:r>
+              <a:t>• Partial Failure Handling</a:t>
+            </a:r>
+          </a:p>
+          <a:p>
+            <a:pPr>
+              <a:spcAft>
+                <a:spcPts val="600"/>
+              </a:spcAft>
+              <a:defRPr sz="1400"/>
+            </a:pPr>
+            <a:r>
+              <a:t>• Testing der Compensation</a:t>
+            </a:r>
+          </a:p>
         </p:txBody>
       </p:sp>
     </p:spTree>
@@ -15260,7 +14857,7 @@
             <a:spLocks noGrp="1"/>
           </p:cNvSpPr>
           <p:nvPr>
-            <p:ph type="title"/>
+            <p:ph type="ctrTitle"/>
           </p:nvPr>
         </p:nvSpPr>
         <p:spPr/>
@@ -15276,12 +14873,12 @@
       </p:sp>
       <p:sp>
         <p:nvSpPr>
-          <p:cNvPr id="3" name="Content Placeholder 2"/>
-          <p:cNvSpPr>
-            <a:spLocks noGrp="1"/>
-          </p:cNvSpPr>
-          <p:nvPr>
-            <p:ph idx="1"/>
+          <p:cNvPr id="3" name="Subtitle 2"/>
+          <p:cNvSpPr>
+            <a:spLocks noGrp="1"/>
+          </p:cNvSpPr>
+          <p:nvPr>
+            <p:ph type="subTitle" idx="1"/>
           </p:nvPr>
         </p:nvSpPr>
         <p:spPr/>
@@ -15289,6 +14886,164 @@
           <a:bodyPr/>
           <a:lstStyle/>
           <a:p/>
+        </p:txBody>
+      </p:sp>
+      <p:sp>
+        <p:nvSpPr>
+          <p:cNvPr id="4" name="TextBox 3"/>
+          <p:cNvSpPr txBox="1"/>
+          <p:nvPr/>
+        </p:nvSpPr>
+        <p:spPr>
+          <a:xfrm>
+            <a:off x="457200" y="1371600"/>
+            <a:ext cx="4114800" cy="5029200"/>
+          </a:xfrm>
+          <a:prstGeom prst="rect">
+            <a:avLst/>
+          </a:prstGeom>
+          <a:noFill/>
+        </p:spPr>
+        <p:txBody>
+          <a:bodyPr wrap="none">
+            <a:spAutoFit/>
+          </a:bodyPr>
+          <a:lstStyle/>
+          <a:p>
+            <a:pPr>
+              <a:defRPr sz="2000" b="1">
+                <a:solidFill>
+                  <a:srgbClr val="008000"/>
+                </a:solidFill>
+              </a:defRPr>
+            </a:pPr>
+            <a:r>
+              <a:t>Vorteile ✅</a:t>
+            </a:r>
+          </a:p>
+          <a:p>
+            <a:pPr>
+              <a:spcAft>
+                <a:spcPts val="600"/>
+              </a:spcAft>
+              <a:defRPr sz="1400"/>
+            </a:pPr>
+            <a:r>
+              <a:t>• Single Entry Point für Clients</a:t>
+            </a:r>
+          </a:p>
+          <a:p>
+            <a:pPr>
+              <a:spcAft>
+                <a:spcPts val="600"/>
+              </a:spcAft>
+              <a:defRPr sz="1400"/>
+            </a:pPr>
+            <a:r>
+              <a:t>• Cross-Cutting Concerns zentral</a:t>
+            </a:r>
+          </a:p>
+          <a:p>
+            <a:pPr>
+              <a:spcAft>
+                <a:spcPts val="600"/>
+              </a:spcAft>
+              <a:defRPr sz="1400"/>
+            </a:pPr>
+            <a:r>
+              <a:t>• API Composition möglich</a:t>
+            </a:r>
+          </a:p>
+          <a:p>
+            <a:pPr>
+              <a:spcAft>
+                <a:spcPts val="600"/>
+              </a:spcAft>
+              <a:defRPr sz="1400"/>
+            </a:pPr>
+            <a:r>
+              <a:t>• Backend Service Abstraktion</a:t>
+            </a:r>
+          </a:p>
+        </p:txBody>
+      </p:sp>
+      <p:sp>
+        <p:nvSpPr>
+          <p:cNvPr id="5" name="TextBox 4"/>
+          <p:cNvSpPr txBox="1"/>
+          <p:nvPr/>
+        </p:nvSpPr>
+        <p:spPr>
+          <a:xfrm>
+            <a:off x="4754880" y="1371600"/>
+            <a:ext cx="4114800" cy="5029200"/>
+          </a:xfrm>
+          <a:prstGeom prst="rect">
+            <a:avLst/>
+          </a:prstGeom>
+          <a:noFill/>
+        </p:spPr>
+        <p:txBody>
+          <a:bodyPr wrap="none">
+            <a:spAutoFit/>
+          </a:bodyPr>
+          <a:lstStyle/>
+          <a:p>
+            <a:pPr>
+              <a:defRPr sz="2000" b="1">
+                <a:solidFill>
+                  <a:srgbClr val="FF0000"/>
+                </a:solidFill>
+              </a:defRPr>
+            </a:pPr>
+            <a:r>
+              <a:t>Nachteile ❌</a:t>
+            </a:r>
+          </a:p>
+          <a:p>
+            <a:pPr>
+              <a:spcAft>
+                <a:spcPts val="600"/>
+              </a:spcAft>
+              <a:defRPr sz="1400"/>
+            </a:pPr>
+            <a:r>
+              <a:t>• Single Point of Failure</a:t>
+            </a:r>
+          </a:p>
+          <a:p>
+            <a:pPr>
+              <a:spcAft>
+                <a:spcPts val="600"/>
+              </a:spcAft>
+              <a:defRPr sz="1400"/>
+            </a:pPr>
+            <a:r>
+              <a:t>• Additional Latency Layer</a:t>
+            </a:r>
+          </a:p>
+          <a:p>
+            <a:pPr>
+              <a:spcAft>
+                <a:spcPts val="600"/>
+              </a:spcAft>
+              <a:defRPr sz="1400"/>
+            </a:pPr>
+            <a:r>
+              <a:t>• Deployment Koordination</a:t>
+            </a:r>
+          </a:p>
+          <a:p>
+            <a:pPr>
+              <a:spcAft>
+                <a:spcPts val="600"/>
+              </a:spcAft>
+              <a:defRPr sz="1400"/>
+            </a:pPr>
+            <a:r>
+              <a:t>• Gateway Bottleneck möglich</a:t>
+            </a:r>
+          </a:p>
         </p:txBody>
       </p:sp>
     </p:spTree>
@@ -15316,7 +15071,7 @@
             <a:spLocks noGrp="1"/>
           </p:cNvSpPr>
           <p:nvPr>
-            <p:ph type="title"/>
+            <p:ph type="ctrTitle"/>
           </p:nvPr>
         </p:nvSpPr>
         <p:spPr/>
@@ -15332,12 +15087,12 @@
       </p:sp>
       <p:sp>
         <p:nvSpPr>
-          <p:cNvPr id="3" name="Content Placeholder 2"/>
-          <p:cNvSpPr>
-            <a:spLocks noGrp="1"/>
-          </p:cNvSpPr>
-          <p:nvPr>
-            <p:ph idx="1"/>
+          <p:cNvPr id="3" name="Subtitle 2"/>
+          <p:cNvSpPr>
+            <a:spLocks noGrp="1"/>
+          </p:cNvSpPr>
+          <p:nvPr>
+            <p:ph type="subTitle" idx="1"/>
           </p:nvPr>
         </p:nvSpPr>
         <p:spPr/>
@@ -15345,6 +15100,164 @@
           <a:bodyPr/>
           <a:lstStyle/>
           <a:p/>
+        </p:txBody>
+      </p:sp>
+      <p:sp>
+        <p:nvSpPr>
+          <p:cNvPr id="4" name="TextBox 3"/>
+          <p:cNvSpPr txBox="1"/>
+          <p:nvPr/>
+        </p:nvSpPr>
+        <p:spPr>
+          <a:xfrm>
+            <a:off x="457200" y="1371600"/>
+            <a:ext cx="4114800" cy="5029200"/>
+          </a:xfrm>
+          <a:prstGeom prst="rect">
+            <a:avLst/>
+          </a:prstGeom>
+          <a:noFill/>
+        </p:spPr>
+        <p:txBody>
+          <a:bodyPr wrap="none">
+            <a:spAutoFit/>
+          </a:bodyPr>
+          <a:lstStyle/>
+          <a:p>
+            <a:pPr>
+              <a:defRPr sz="2000" b="1">
+                <a:solidFill>
+                  <a:srgbClr val="008000"/>
+                </a:solidFill>
+              </a:defRPr>
+            </a:pPr>
+            <a:r>
+              <a:t>Vorteile ✅</a:t>
+            </a:r>
+          </a:p>
+          <a:p>
+            <a:pPr>
+              <a:spcAft>
+                <a:spcPts val="600"/>
+              </a:spcAft>
+              <a:defRPr sz="1400"/>
+            </a:pPr>
+            <a:r>
+              <a:t>• Service-to-Service Security</a:t>
+            </a:r>
+          </a:p>
+          <a:p>
+            <a:pPr>
+              <a:spcAft>
+                <a:spcPts val="600"/>
+              </a:spcAft>
+              <a:defRPr sz="1400"/>
+            </a:pPr>
+            <a:r>
+              <a:t>• Automatic Load Balancing</a:t>
+            </a:r>
+          </a:p>
+          <a:p>
+            <a:pPr>
+              <a:spcAft>
+                <a:spcPts val="600"/>
+              </a:spcAft>
+              <a:defRPr sz="1400"/>
+            </a:pPr>
+            <a:r>
+              <a:t>• Observability out-of-the-box</a:t>
+            </a:r>
+          </a:p>
+          <a:p>
+            <a:pPr>
+              <a:spcAft>
+                <a:spcPts val="600"/>
+              </a:spcAft>
+              <a:defRPr sz="1400"/>
+            </a:pPr>
+            <a:r>
+              <a:t>• Traffic Management Features</a:t>
+            </a:r>
+          </a:p>
+        </p:txBody>
+      </p:sp>
+      <p:sp>
+        <p:nvSpPr>
+          <p:cNvPr id="5" name="TextBox 4"/>
+          <p:cNvSpPr txBox="1"/>
+          <p:nvPr/>
+        </p:nvSpPr>
+        <p:spPr>
+          <a:xfrm>
+            <a:off x="4754880" y="1371600"/>
+            <a:ext cx="4114800" cy="5029200"/>
+          </a:xfrm>
+          <a:prstGeom prst="rect">
+            <a:avLst/>
+          </a:prstGeom>
+          <a:noFill/>
+        </p:spPr>
+        <p:txBody>
+          <a:bodyPr wrap="none">
+            <a:spAutoFit/>
+          </a:bodyPr>
+          <a:lstStyle/>
+          <a:p>
+            <a:pPr>
+              <a:defRPr sz="2000" b="1">
+                <a:solidFill>
+                  <a:srgbClr val="FF0000"/>
+                </a:solidFill>
+              </a:defRPr>
+            </a:pPr>
+            <a:r>
+              <a:t>Nachteile ❌</a:t>
+            </a:r>
+          </a:p>
+          <a:p>
+            <a:pPr>
+              <a:spcAft>
+                <a:spcPts val="600"/>
+              </a:spcAft>
+              <a:defRPr sz="1400"/>
+            </a:pPr>
+            <a:r>
+              <a:t>• Operational Overhead</a:t>
+            </a:r>
+          </a:p>
+          <a:p>
+            <a:pPr>
+              <a:spcAft>
+                <a:spcPts val="600"/>
+              </a:spcAft>
+              <a:defRPr sz="1400"/>
+            </a:pPr>
+            <a:r>
+              <a:t>• Resource Consumption (Sidecars)</a:t>
+            </a:r>
+          </a:p>
+          <a:p>
+            <a:pPr>
+              <a:spcAft>
+                <a:spcPts val="600"/>
+              </a:spcAft>
+              <a:defRPr sz="1400"/>
+            </a:pPr>
+            <a:r>
+              <a:t>• Learning Curve hoch</a:t>
+            </a:r>
+          </a:p>
+          <a:p>
+            <a:pPr>
+              <a:spcAft>
+                <a:spcPts val="600"/>
+              </a:spcAft>
+              <a:defRPr sz="1400"/>
+            </a:pPr>
+            <a:r>
+              <a:t>• Debugging Complexity</a:t>
+            </a:r>
+          </a:p>
         </p:txBody>
       </p:sp>
     </p:spTree>
@@ -15372,7 +15285,7 @@
             <a:spLocks noGrp="1"/>
           </p:cNvSpPr>
           <p:nvPr>
-            <p:ph type="title"/>
+            <p:ph type="ctrTitle"/>
           </p:nvPr>
         </p:nvSpPr>
         <p:spPr/>
@@ -15388,12 +15301,12 @@
       </p:sp>
       <p:sp>
         <p:nvSpPr>
-          <p:cNvPr id="3" name="Content Placeholder 2"/>
-          <p:cNvSpPr>
-            <a:spLocks noGrp="1"/>
-          </p:cNvSpPr>
-          <p:nvPr>
-            <p:ph idx="1"/>
+          <p:cNvPr id="3" name="Subtitle 2"/>
+          <p:cNvSpPr>
+            <a:spLocks noGrp="1"/>
+          </p:cNvSpPr>
+          <p:nvPr>
+            <p:ph type="subTitle" idx="1"/>
           </p:nvPr>
         </p:nvSpPr>
         <p:spPr/>
@@ -15401,6 +15314,164 @@
           <a:bodyPr/>
           <a:lstStyle/>
           <a:p/>
+        </p:txBody>
+      </p:sp>
+      <p:sp>
+        <p:nvSpPr>
+          <p:cNvPr id="4" name="TextBox 3"/>
+          <p:cNvSpPr txBox="1"/>
+          <p:nvPr/>
+        </p:nvSpPr>
+        <p:spPr>
+          <a:xfrm>
+            <a:off x="457200" y="1371600"/>
+            <a:ext cx="4114800" cy="5029200"/>
+          </a:xfrm>
+          <a:prstGeom prst="rect">
+            <a:avLst/>
+          </a:prstGeom>
+          <a:noFill/>
+        </p:spPr>
+        <p:txBody>
+          <a:bodyPr wrap="none">
+            <a:spAutoFit/>
+          </a:bodyPr>
+          <a:lstStyle/>
+          <a:p>
+            <a:pPr>
+              <a:defRPr sz="2000" b="1">
+                <a:solidFill>
+                  <a:srgbClr val="008000"/>
+                </a:solidFill>
+              </a:defRPr>
+            </a:pPr>
+            <a:r>
+              <a:t>Vorteile ✅</a:t>
+            </a:r>
+          </a:p>
+          <a:p>
+            <a:pPr>
+              <a:spcAft>
+                <a:spcPts val="600"/>
+              </a:spcAft>
+              <a:defRPr sz="1400"/>
+            </a:pPr>
+            <a:r>
+              <a:t>• Fault Isolation zwischen Components</a:t>
+            </a:r>
+          </a:p>
+          <a:p>
+            <a:pPr>
+              <a:spcAft>
+                <a:spcPts val="600"/>
+              </a:spcAft>
+              <a:defRPr sz="1400"/>
+            </a:pPr>
+            <a:r>
+              <a:t>• Resource Protection</a:t>
+            </a:r>
+          </a:p>
+          <a:p>
+            <a:pPr>
+              <a:spcAft>
+                <a:spcPts val="600"/>
+              </a:spcAft>
+              <a:defRPr sz="1400"/>
+            </a:pPr>
+            <a:r>
+              <a:t>• Predictable Performance</a:t>
+            </a:r>
+          </a:p>
+          <a:p>
+            <a:pPr>
+              <a:spcAft>
+                <a:spcPts val="600"/>
+              </a:spcAft>
+              <a:defRPr sz="1400"/>
+            </a:pPr>
+            <a:r>
+              <a:t>• Prevents Resource Exhaustion</a:t>
+            </a:r>
+          </a:p>
+        </p:txBody>
+      </p:sp>
+      <p:sp>
+        <p:nvSpPr>
+          <p:cNvPr id="5" name="TextBox 4"/>
+          <p:cNvSpPr txBox="1"/>
+          <p:nvPr/>
+        </p:nvSpPr>
+        <p:spPr>
+          <a:xfrm>
+            <a:off x="4754880" y="1371600"/>
+            <a:ext cx="4114800" cy="5029200"/>
+          </a:xfrm>
+          <a:prstGeom prst="rect">
+            <a:avLst/>
+          </a:prstGeom>
+          <a:noFill/>
+        </p:spPr>
+        <p:txBody>
+          <a:bodyPr wrap="none">
+            <a:spAutoFit/>
+          </a:bodyPr>
+          <a:lstStyle/>
+          <a:p>
+            <a:pPr>
+              <a:defRPr sz="2000" b="1">
+                <a:solidFill>
+                  <a:srgbClr val="FF0000"/>
+                </a:solidFill>
+              </a:defRPr>
+            </a:pPr>
+            <a:r>
+              <a:t>Nachteile ❌</a:t>
+            </a:r>
+          </a:p>
+          <a:p>
+            <a:pPr>
+              <a:spcAft>
+                <a:spcPts val="600"/>
+              </a:spcAft>
+              <a:defRPr sz="1400"/>
+            </a:pPr>
+            <a:r>
+              <a:t>• Resource Underutilization möglich</a:t>
+            </a:r>
+          </a:p>
+          <a:p>
+            <a:pPr>
+              <a:spcAft>
+                <a:spcPts val="600"/>
+              </a:spcAft>
+              <a:defRPr sz="1400"/>
+            </a:pPr>
+            <a:r>
+              <a:t>• Configuration Complexity</a:t>
+            </a:r>
+          </a:p>
+          <a:p>
+            <a:pPr>
+              <a:spcAft>
+                <a:spcPts val="600"/>
+              </a:spcAft>
+              <a:defRPr sz="1400"/>
+            </a:pPr>
+            <a:r>
+              <a:t>• More Infrastructure Required</a:t>
+            </a:r>
+          </a:p>
+          <a:p>
+            <a:pPr>
+              <a:spcAft>
+                <a:spcPts val="600"/>
+              </a:spcAft>
+              <a:defRPr sz="1400"/>
+            </a:pPr>
+            <a:r>
+              <a:t>• Monitoring Overhead</a:t>
+            </a:r>
+          </a:p>
         </p:txBody>
       </p:sp>
     </p:spTree>
@@ -15428,7 +15499,7 @@
             <a:spLocks noGrp="1"/>
           </p:cNvSpPr>
           <p:nvPr>
-            <p:ph type="title"/>
+            <p:ph type="ctrTitle"/>
           </p:nvPr>
         </p:nvSpPr>
         <p:spPr/>
@@ -15444,12 +15515,12 @@
       </p:sp>
       <p:sp>
         <p:nvSpPr>
-          <p:cNvPr id="3" name="Content Placeholder 2"/>
-          <p:cNvSpPr>
-            <a:spLocks noGrp="1"/>
-          </p:cNvSpPr>
-          <p:nvPr>
-            <p:ph idx="1"/>
+          <p:cNvPr id="3" name="Subtitle 2"/>
+          <p:cNvSpPr>
+            <a:spLocks noGrp="1"/>
+          </p:cNvSpPr>
+          <p:nvPr>
+            <p:ph type="subTitle" idx="1"/>
           </p:nvPr>
         </p:nvSpPr>
         <p:spPr/>
@@ -15457,6 +15528,229 @@
           <a:bodyPr/>
           <a:lstStyle/>
           <a:p/>
+        </p:txBody>
+      </p:sp>
+      <p:sp>
+        <p:nvSpPr>
+          <p:cNvPr id="4" name="TextBox 3"/>
+          <p:cNvSpPr txBox="1"/>
+          <p:nvPr/>
+        </p:nvSpPr>
+        <p:spPr>
+          <a:xfrm>
+            <a:off x="457200" y="1371600"/>
+            <a:ext cx="4114800" cy="5029200"/>
+          </a:xfrm>
+          <a:prstGeom prst="rect">
+            <a:avLst/>
+          </a:prstGeom>
+          <a:noFill/>
+        </p:spPr>
+        <p:txBody>
+          <a:bodyPr wrap="none">
+            <a:spAutoFit/>
+          </a:bodyPr>
+          <a:lstStyle/>
+          <a:p>
+            <a:pPr>
+              <a:defRPr sz="2000" b="1">
+                <a:solidFill>
+                  <a:srgbClr val="008000"/>
+                </a:solidFill>
+              </a:defRPr>
+            </a:pPr>
+            <a:r>
+              <a:t>Vorteile ✅</a:t>
+            </a:r>
+          </a:p>
+          <a:p>
+            <a:pPr>
+              <a:spcAft>
+                <a:spcPts val="600"/>
+              </a:spcAft>
+              <a:defRPr sz="1400"/>
+            </a:pPr>
+            <a:r>
+              <a:t>• Klare Bounded Contexts</a:t>
+            </a:r>
+          </a:p>
+          <a:p>
+            <a:pPr>
+              <a:spcAft>
+                <a:spcPts val="600"/>
+              </a:spcAft>
+              <a:defRPr sz="1400"/>
+            </a:pPr>
+            <a:r>
+              <a:t>• Ubiquitous Language etabliert</a:t>
+            </a:r>
+          </a:p>
+          <a:p>
+            <a:pPr>
+              <a:spcAft>
+                <a:spcPts val="600"/>
+              </a:spcAft>
+              <a:defRPr sz="1400"/>
+            </a:pPr>
+            <a:r>
+              <a:t>• Business-IT Alignment</a:t>
+            </a:r>
+          </a:p>
+          <a:p>
+            <a:pPr>
+              <a:spcAft>
+                <a:spcPts val="600"/>
+              </a:spcAft>
+              <a:defRPr sz="1400"/>
+            </a:pPr>
+            <a:r>
+              <a:t>• Modulare Struktur</a:t>
+            </a:r>
+          </a:p>
+        </p:txBody>
+      </p:sp>
+      <p:sp>
+        <p:nvSpPr>
+          <p:cNvPr id="5" name="TextBox 4"/>
+          <p:cNvSpPr txBox="1"/>
+          <p:nvPr/>
+        </p:nvSpPr>
+        <p:spPr>
+          <a:xfrm>
+            <a:off x="4754880" y="1371600"/>
+            <a:ext cx="4114800" cy="5029200"/>
+          </a:xfrm>
+          <a:prstGeom prst="rect">
+            <a:avLst/>
+          </a:prstGeom>
+          <a:noFill/>
+        </p:spPr>
+        <p:txBody>
+          <a:bodyPr wrap="none">
+            <a:spAutoFit/>
+          </a:bodyPr>
+          <a:lstStyle/>
+          <a:p>
+            <a:pPr>
+              <a:defRPr sz="2000" b="1">
+                <a:solidFill>
+                  <a:srgbClr val="FF0000"/>
+                </a:solidFill>
+              </a:defRPr>
+            </a:pPr>
+            <a:r>
+              <a:t>Nachteile ❌</a:t>
+            </a:r>
+          </a:p>
+          <a:p>
+            <a:pPr>
+              <a:spcAft>
+                <a:spcPts val="600"/>
+              </a:spcAft>
+              <a:defRPr sz="1400"/>
+            </a:pPr>
+            <a:r>
+              <a:t>• Steile Learning Curve</a:t>
+            </a:r>
+          </a:p>
+          <a:p>
+            <a:pPr>
+              <a:spcAft>
+                <a:spcPts val="600"/>
+              </a:spcAft>
+              <a:defRPr sz="1400"/>
+            </a:pPr>
+            <a:r>
+              <a:t>• Upfront Design Investment</a:t>
+            </a:r>
+          </a:p>
+          <a:p>
+            <a:pPr>
+              <a:spcAft>
+                <a:spcPts val="600"/>
+              </a:spcAft>
+              <a:defRPr sz="1400"/>
+            </a:pPr>
+            <a:r>
+              <a:t>• Domain Expert Availability</a:t>
+            </a:r>
+          </a:p>
+          <a:p>
+            <a:pPr>
+              <a:spcAft>
+                <a:spcPts val="600"/>
+              </a:spcAft>
+              <a:defRPr sz="1400"/>
+            </a:pPr>
+            <a:r>
+              <a:t>• Over-Engineering Gefahr</a:t>
+            </a:r>
+          </a:p>
+        </p:txBody>
+      </p:sp>
+    </p:spTree>
+  </p:cSld>
+  <p:clrMapOvr>
+    <a:masterClrMapping/>
+  </p:clrMapOvr>
+</p:sld>
+</file>
+
+<file path=ppt/slides/slide4.xml><?xml version="1.0" encoding="utf-8"?>
+<p:sld xmlns:a="http://schemas.openxmlformats.org/drawingml/2006/main" xmlns:r="http://schemas.openxmlformats.org/officeDocument/2006/relationships" xmlns:p="http://schemas.openxmlformats.org/presentationml/2006/main">
+  <p:cSld>
+    <p:spTree>
+      <p:nvGrpSpPr>
+        <p:cNvPr id="1" name=""/>
+        <p:cNvGrpSpPr/>
+        <p:nvPr/>
+      </p:nvGrpSpPr>
+      <p:grpSpPr>
+        <a:xfrm>
+          <a:off x="0" y="0"/>
+          <a:ext cx="0" cy="0"/>
+          <a:chOff x="0" y="0"/>
+          <a:chExt cx="0" cy="0"/>
+        </a:xfrm>
+      </p:grpSpPr>
+      <p:sp>
+        <p:nvSpPr>
+          <p:cNvPr id="2" name="Title 1"/>
+          <p:cNvSpPr>
+            <a:spLocks noGrp="1"/>
+          </p:cNvSpPr>
+          <p:nvPr>
+            <p:ph type="ctrTitle"/>
+          </p:nvPr>
+        </p:nvSpPr>
+        <p:spPr/>
+        <p:txBody>
+          <a:bodyPr/>
+          <a:lstStyle/>
+          <a:p>
+            <a:r>
+              <a:t>Event Sourcing</a:t>
+            </a:r>
+          </a:p>
+        </p:txBody>
+      </p:sp>
+      <p:sp>
+        <p:nvSpPr>
+          <p:cNvPr id="3" name="Subtitle 2"/>
+          <p:cNvSpPr>
+            <a:spLocks noGrp="1"/>
+          </p:cNvSpPr>
+          <p:nvPr>
+            <p:ph type="subTitle" idx="1"/>
+          </p:nvPr>
+        </p:nvSpPr>
+        <p:spPr/>
+        <p:txBody>
+          <a:bodyPr/>
+          <a:lstStyle/>
+          <a:p>
+            <a:endParaRPr/>
+          </a:p>
         </p:txBody>
       </p:sp>
     </p:spTree>
@@ -15491,7 +15785,7 @@
             <a:spLocks noGrp="1"/>
           </p:cNvSpPr>
           <p:nvPr>
-            <p:ph type="ctrTitle"/>
+            <p:ph type="title"/>
           </p:nvPr>
         </p:nvSpPr>
         <p:spPr/>
@@ -15500,27 +15794,240 @@
           <a:lstStyle/>
           <a:p>
             <a:r>
-              <a:t>Event Sourcing</a:t>
-            </a:r>
-          </a:p>
-        </p:txBody>
-      </p:sp>
-      <p:sp>
-        <p:nvSpPr>
-          <p:cNvPr id="3" name="Subtitle 2"/>
-          <p:cNvSpPr>
-            <a:spLocks noGrp="1"/>
-          </p:cNvSpPr>
-          <p:nvPr>
-            <p:ph type="subTitle" idx="1"/>
+              <a:t>Event Sourcing Pattern</a:t>
+            </a:r>
+          </a:p>
+        </p:txBody>
+      </p:sp>
+      <p:sp>
+        <p:nvSpPr>
+          <p:cNvPr id="3" name="Content Placeholder 2"/>
+          <p:cNvSpPr>
+            <a:spLocks noGrp="1"/>
+          </p:cNvSpPr>
+          <p:nvPr>
+            <p:ph idx="1"/>
           </p:nvPr>
         </p:nvSpPr>
         <p:spPr/>
         <p:txBody>
-          <a:bodyPr/>
+          <a:bodyPr>
+            <a:normAutofit/>
+          </a:bodyPr>
           <a:lstStyle/>
           <a:p>
-            <a:endParaRPr/>
+            <a:pPr>
+              <a:lnSpc>
+                <a:spcPct val="100000"/>
+              </a:lnSpc>
+              <a:spcBef>
+                <a:spcPts val="0"/>
+              </a:spcBef>
+              <a:spcAft>
+                <a:spcPts val="0"/>
+              </a:spcAft>
+            </a:pPr>
+            <a:r>
+              <a:rPr dirty="0">
+                <a:latin typeface="Consolas"/>
+              </a:rPr>
+              <a:t>Commands            Events              Current State</a:t>
+            </a:r>
+            <a:br>
+              <a:rPr sz="6600" dirty="0"/>
+            </a:br>
+            <a:r>
+              <a:rPr dirty="0">
+                <a:latin typeface="Consolas"/>
+              </a:rPr>
+              <a:t>┌───────────┐    ┌───────────</a:t>
+            </a:r>
+            <a:r>
+              <a:rPr lang="en-US" dirty="0">
+                <a:latin typeface="Consolas"/>
+              </a:rPr>
+              <a:t>─</a:t>
+            </a:r>
+            <a:r>
+              <a:rPr dirty="0">
+                <a:latin typeface="Consolas"/>
+              </a:rPr>
+              <a:t>──┐    ┌─────────────────┐</a:t>
+            </a:r>
+            <a:br>
+              <a:rPr sz="6600" dirty="0"/>
+            </a:br>
+            <a:r>
+              <a:rPr dirty="0">
+                <a:latin typeface="Consolas"/>
+              </a:rPr>
+              <a:t>│ Create    │───&gt;│ </a:t>
+            </a:r>
+            <a:r>
+              <a:rPr dirty="0" err="1">
+                <a:latin typeface="Consolas"/>
+              </a:rPr>
+              <a:t>DeviceCreated</a:t>
+            </a:r>
+            <a:r>
+              <a:rPr dirty="0">
+                <a:latin typeface="Consolas"/>
+              </a:rPr>
+              <a:t>│───&gt;│                 │</a:t>
+            </a:r>
+            <a:br>
+              <a:rPr sz="6600" dirty="0"/>
+            </a:br>
+            <a:r>
+              <a:rPr dirty="0">
+                <a:latin typeface="Consolas"/>
+              </a:rPr>
+              <a:t>│ Device    │    │   Event    </a:t>
+            </a:r>
+            <a:r>
+              <a:rPr lang="en-US" dirty="0">
+                <a:latin typeface="Consolas"/>
+              </a:rPr>
+              <a:t> </a:t>
+            </a:r>
+            <a:r>
+              <a:rPr dirty="0">
+                <a:latin typeface="Consolas"/>
+              </a:rPr>
+              <a:t> │    │     Current     │</a:t>
+            </a:r>
+            <a:br>
+              <a:rPr sz="6600" dirty="0"/>
+            </a:br>
+            <a:r>
+              <a:rPr dirty="0">
+                <a:latin typeface="Consolas"/>
+              </a:rPr>
+              <a:t>└───────────┘    └───────────</a:t>
+            </a:r>
+            <a:r>
+              <a:rPr lang="en-US" dirty="0">
+                <a:latin typeface="Consolas"/>
+              </a:rPr>
+              <a:t>─</a:t>
+            </a:r>
+            <a:r>
+              <a:rPr dirty="0">
+                <a:latin typeface="Consolas"/>
+              </a:rPr>
+              <a:t>──┘    │      State      │</a:t>
+            </a:r>
+            <a:br>
+              <a:rPr sz="6600" dirty="0"/>
+            </a:br>
+            <a:r>
+              <a:rPr dirty="0">
+                <a:latin typeface="Consolas"/>
+              </a:rPr>
+              <a:t>                                     │                 │</a:t>
+            </a:r>
+            <a:br>
+              <a:rPr sz="6600" dirty="0"/>
+            </a:br>
+            <a:r>
+              <a:rPr dirty="0">
+                <a:latin typeface="Consolas"/>
+              </a:rPr>
+              <a:t>┌───────────┐    ┌─────────────</a:t>
+            </a:r>
+            <a:r>
+              <a:rPr lang="en-US" dirty="0">
+                <a:latin typeface="Consolas"/>
+              </a:rPr>
+              <a:t>─</a:t>
+            </a:r>
+            <a:r>
+              <a:rPr dirty="0">
+                <a:latin typeface="Consolas"/>
+              </a:rPr>
+              <a:t>┐    │   (Projection   │</a:t>
+            </a:r>
+            <a:br>
+              <a:rPr sz="6600" dirty="0"/>
+            </a:br>
+            <a:r>
+              <a:rPr dirty="0">
+                <a:latin typeface="Consolas"/>
+              </a:rPr>
+              <a:t>│ Configure │───&gt;│</a:t>
+            </a:r>
+            <a:r>
+              <a:rPr dirty="0" err="1">
+                <a:latin typeface="Consolas"/>
+              </a:rPr>
+              <a:t>ConfigChanged</a:t>
+            </a:r>
+            <a:r>
+              <a:rPr lang="en-US" dirty="0">
+                <a:latin typeface="Consolas"/>
+              </a:rPr>
+              <a:t> </a:t>
+            </a:r>
+            <a:r>
+              <a:rPr dirty="0">
+                <a:latin typeface="Consolas"/>
+              </a:rPr>
+              <a:t>│───&gt;│   from Events)  │</a:t>
+            </a:r>
+            <a:br>
+              <a:rPr sz="6600" dirty="0"/>
+            </a:br>
+            <a:r>
+              <a:rPr dirty="0">
+                <a:latin typeface="Consolas"/>
+              </a:rPr>
+              <a:t>│ Device    │    │   Event     </a:t>
+            </a:r>
+            <a:r>
+              <a:rPr lang="en-US" dirty="0">
+                <a:latin typeface="Consolas"/>
+              </a:rPr>
+              <a:t> </a:t>
+            </a:r>
+            <a:r>
+              <a:rPr dirty="0">
+                <a:latin typeface="Consolas"/>
+              </a:rPr>
+              <a:t>│    │                 │</a:t>
+            </a:r>
+            <a:br>
+              <a:rPr sz="6600" dirty="0"/>
+            </a:br>
+            <a:r>
+              <a:rPr dirty="0">
+                <a:latin typeface="Consolas"/>
+              </a:rPr>
+              <a:t>└───────────┘    └─────────────</a:t>
+            </a:r>
+            <a:r>
+              <a:rPr lang="en-US" dirty="0">
+                <a:latin typeface="Consolas"/>
+              </a:rPr>
+              <a:t>─</a:t>
+            </a:r>
+            <a:r>
+              <a:rPr dirty="0">
+                <a:latin typeface="Consolas"/>
+              </a:rPr>
+              <a:t>┘   </a:t>
+            </a:r>
+            <a:r>
+              <a:rPr lang="en-US" dirty="0">
+                <a:latin typeface="Consolas"/>
+              </a:rPr>
+              <a:t> </a:t>
+            </a:r>
+            <a:r>
+              <a:rPr dirty="0">
+                <a:latin typeface="Consolas"/>
+              </a:rPr>
+              <a:t>└─────────────────┘</a:t>
+            </a:r>
           </a:p>
         </p:txBody>
       </p:sp>
@@ -15556,7 +16063,7 @@
             <a:spLocks noGrp="1"/>
           </p:cNvSpPr>
           <p:nvPr>
-            <p:ph type="title"/>
+            <p:ph type="ctrTitle"/>
           </p:nvPr>
         </p:nvSpPr>
         <p:spPr/>
@@ -15565,240 +16072,27 @@
           <a:lstStyle/>
           <a:p>
             <a:r>
-              <a:t>Event Sourcing Pattern</a:t>
-            </a:r>
-          </a:p>
-        </p:txBody>
-      </p:sp>
-      <p:sp>
-        <p:nvSpPr>
-          <p:cNvPr id="3" name="Content Placeholder 2"/>
-          <p:cNvSpPr>
-            <a:spLocks noGrp="1"/>
-          </p:cNvSpPr>
-          <p:nvPr>
-            <p:ph idx="1"/>
+              <a:t>Circuit Breaker Pattern</a:t>
+            </a:r>
+          </a:p>
+        </p:txBody>
+      </p:sp>
+      <p:sp>
+        <p:nvSpPr>
+          <p:cNvPr id="3" name="Subtitle 2"/>
+          <p:cNvSpPr>
+            <a:spLocks noGrp="1"/>
+          </p:cNvSpPr>
+          <p:nvPr>
+            <p:ph type="subTitle" idx="1"/>
           </p:nvPr>
         </p:nvSpPr>
         <p:spPr/>
         <p:txBody>
-          <a:bodyPr>
-            <a:normAutofit/>
-          </a:bodyPr>
+          <a:bodyPr/>
           <a:lstStyle/>
           <a:p>
-            <a:pPr>
-              <a:lnSpc>
-                <a:spcPct val="100000"/>
-              </a:lnSpc>
-              <a:spcBef>
-                <a:spcPts val="0"/>
-              </a:spcBef>
-              <a:spcAft>
-                <a:spcPts val="0"/>
-              </a:spcAft>
-            </a:pPr>
-            <a:r>
-              <a:rPr dirty="0">
-                <a:latin typeface="Consolas"/>
-              </a:rPr>
-              <a:t>Commands            Events              Current State</a:t>
-            </a:r>
-            <a:br>
-              <a:rPr sz="6600" dirty="0"/>
-            </a:br>
-            <a:r>
-              <a:rPr dirty="0">
-                <a:latin typeface="Consolas"/>
-              </a:rPr>
-              <a:t>┌───────────┐    ┌───────────</a:t>
-            </a:r>
-            <a:r>
-              <a:rPr lang="en-US" dirty="0">
-                <a:latin typeface="Consolas"/>
-              </a:rPr>
-              <a:t>─</a:t>
-            </a:r>
-            <a:r>
-              <a:rPr dirty="0">
-                <a:latin typeface="Consolas"/>
-              </a:rPr>
-              <a:t>──┐    ┌─────────────────┐</a:t>
-            </a:r>
-            <a:br>
-              <a:rPr sz="6600" dirty="0"/>
-            </a:br>
-            <a:r>
-              <a:rPr dirty="0">
-                <a:latin typeface="Consolas"/>
-              </a:rPr>
-              <a:t>│ Create    │───&gt;│ </a:t>
-            </a:r>
-            <a:r>
-              <a:rPr dirty="0" err="1">
-                <a:latin typeface="Consolas"/>
-              </a:rPr>
-              <a:t>DeviceCreated</a:t>
-            </a:r>
-            <a:r>
-              <a:rPr dirty="0">
-                <a:latin typeface="Consolas"/>
-              </a:rPr>
-              <a:t>│───&gt;│                 │</a:t>
-            </a:r>
-            <a:br>
-              <a:rPr sz="6600" dirty="0"/>
-            </a:br>
-            <a:r>
-              <a:rPr dirty="0">
-                <a:latin typeface="Consolas"/>
-              </a:rPr>
-              <a:t>│ Device    │    │   Event    </a:t>
-            </a:r>
-            <a:r>
-              <a:rPr lang="en-US" dirty="0">
-                <a:latin typeface="Consolas"/>
-              </a:rPr>
-              <a:t> </a:t>
-            </a:r>
-            <a:r>
-              <a:rPr dirty="0">
-                <a:latin typeface="Consolas"/>
-              </a:rPr>
-              <a:t> │    │     Current     │</a:t>
-            </a:r>
-            <a:br>
-              <a:rPr sz="6600" dirty="0"/>
-            </a:br>
-            <a:r>
-              <a:rPr dirty="0">
-                <a:latin typeface="Consolas"/>
-              </a:rPr>
-              <a:t>└───────────┘    └───────────</a:t>
-            </a:r>
-            <a:r>
-              <a:rPr lang="en-US" dirty="0">
-                <a:latin typeface="Consolas"/>
-              </a:rPr>
-              <a:t>─</a:t>
-            </a:r>
-            <a:r>
-              <a:rPr dirty="0">
-                <a:latin typeface="Consolas"/>
-              </a:rPr>
-              <a:t>──┘    │      State      │</a:t>
-            </a:r>
-            <a:br>
-              <a:rPr sz="6600" dirty="0"/>
-            </a:br>
-            <a:r>
-              <a:rPr dirty="0">
-                <a:latin typeface="Consolas"/>
-              </a:rPr>
-              <a:t>                                     │                 │</a:t>
-            </a:r>
-            <a:br>
-              <a:rPr sz="6600" dirty="0"/>
-            </a:br>
-            <a:r>
-              <a:rPr dirty="0">
-                <a:latin typeface="Consolas"/>
-              </a:rPr>
-              <a:t>┌───────────┐    ┌─────────────</a:t>
-            </a:r>
-            <a:r>
-              <a:rPr lang="en-US" dirty="0">
-                <a:latin typeface="Consolas"/>
-              </a:rPr>
-              <a:t>─</a:t>
-            </a:r>
-            <a:r>
-              <a:rPr dirty="0">
-                <a:latin typeface="Consolas"/>
-              </a:rPr>
-              <a:t>┐    │   (Projection   │</a:t>
-            </a:r>
-            <a:br>
-              <a:rPr sz="6600" dirty="0"/>
-            </a:br>
-            <a:r>
-              <a:rPr dirty="0">
-                <a:latin typeface="Consolas"/>
-              </a:rPr>
-              <a:t>│ Configure │───&gt;│</a:t>
-            </a:r>
-            <a:r>
-              <a:rPr dirty="0" err="1">
-                <a:latin typeface="Consolas"/>
-              </a:rPr>
-              <a:t>ConfigChanged</a:t>
-            </a:r>
-            <a:r>
-              <a:rPr lang="en-US" dirty="0">
-                <a:latin typeface="Consolas"/>
-              </a:rPr>
-              <a:t> </a:t>
-            </a:r>
-            <a:r>
-              <a:rPr dirty="0">
-                <a:latin typeface="Consolas"/>
-              </a:rPr>
-              <a:t>│───&gt;│   from Events)  │</a:t>
-            </a:r>
-            <a:br>
-              <a:rPr sz="6600" dirty="0"/>
-            </a:br>
-            <a:r>
-              <a:rPr dirty="0">
-                <a:latin typeface="Consolas"/>
-              </a:rPr>
-              <a:t>│ Device    │    │   Event     </a:t>
-            </a:r>
-            <a:r>
-              <a:rPr lang="en-US" dirty="0">
-                <a:latin typeface="Consolas"/>
-              </a:rPr>
-              <a:t> </a:t>
-            </a:r>
-            <a:r>
-              <a:rPr dirty="0">
-                <a:latin typeface="Consolas"/>
-              </a:rPr>
-              <a:t>│    │                 │</a:t>
-            </a:r>
-            <a:br>
-              <a:rPr sz="6600" dirty="0"/>
-            </a:br>
-            <a:r>
-              <a:rPr dirty="0">
-                <a:latin typeface="Consolas"/>
-              </a:rPr>
-              <a:t>└───────────┘    └─────────────</a:t>
-            </a:r>
-            <a:r>
-              <a:rPr lang="en-US" dirty="0">
-                <a:latin typeface="Consolas"/>
-              </a:rPr>
-              <a:t>─</a:t>
-            </a:r>
-            <a:r>
-              <a:rPr dirty="0">
-                <a:latin typeface="Consolas"/>
-              </a:rPr>
-              <a:t>┘   </a:t>
-            </a:r>
-            <a:r>
-              <a:rPr lang="en-US" dirty="0">
-                <a:latin typeface="Consolas"/>
-              </a:rPr>
-              <a:t> </a:t>
-            </a:r>
-            <a:r>
-              <a:rPr dirty="0">
-                <a:latin typeface="Consolas"/>
-              </a:rPr>
-              <a:t>└─────────────────┘</a:t>
-            </a:r>
+            <a:endParaRPr/>
           </a:p>
         </p:txBody>
       </p:sp>
@@ -15834,7 +16128,7 @@
             <a:spLocks noGrp="1"/>
           </p:cNvSpPr>
           <p:nvPr>
-            <p:ph type="ctrTitle"/>
+            <p:ph type="title"/>
           </p:nvPr>
         </p:nvSpPr>
         <p:spPr/>
@@ -15843,27 +16137,135 @@
           <a:lstStyle/>
           <a:p>
             <a:r>
-              <a:t>Circuit Breaker Pattern</a:t>
-            </a:r>
-          </a:p>
-        </p:txBody>
-      </p:sp>
-      <p:sp>
-        <p:nvSpPr>
-          <p:cNvPr id="3" name="Subtitle 2"/>
-          <p:cNvSpPr>
-            <a:spLocks noGrp="1"/>
-          </p:cNvSpPr>
-          <p:nvPr>
-            <p:ph type="subTitle" idx="1"/>
+              <a:t>Circuit Breaker State Machine</a:t>
+            </a:r>
+          </a:p>
+        </p:txBody>
+      </p:sp>
+      <p:sp>
+        <p:nvSpPr>
+          <p:cNvPr id="3" name="Content Placeholder 2"/>
+          <p:cNvSpPr>
+            <a:spLocks noGrp="1"/>
+          </p:cNvSpPr>
+          <p:nvPr>
+            <p:ph idx="1"/>
           </p:nvPr>
         </p:nvSpPr>
         <p:spPr/>
         <p:txBody>
-          <a:bodyPr/>
+          <a:bodyPr>
+            <a:normAutofit/>
+          </a:bodyPr>
           <a:lstStyle/>
           <a:p>
-            <a:endParaRPr/>
+            <a:pPr>
+              <a:lnSpc>
+                <a:spcPct val="100000"/>
+              </a:lnSpc>
+              <a:spcBef>
+                <a:spcPts val="0"/>
+              </a:spcBef>
+              <a:spcAft>
+                <a:spcPts val="0"/>
+              </a:spcAft>
+            </a:pPr>
+            <a:r>
+              <a:rPr sz="2000" dirty="0">
+                <a:latin typeface="Consolas"/>
+              </a:rPr>
+              <a:t>CLOSED                    OPEN                    HALF-OPEN</a:t>
+            </a:r>
+            <a:br>
+              <a:rPr sz="6000" dirty="0"/>
+            </a:br>
+            <a:r>
+              <a:rPr sz="2000" dirty="0">
+                <a:latin typeface="Consolas"/>
+              </a:rPr>
+              <a:t>┌─────────────────┐      ┌─────────────────┐      ┌─────────────────┐</a:t>
+            </a:r>
+            <a:br>
+              <a:rPr sz="6000" dirty="0"/>
+            </a:br>
+            <a:r>
+              <a:rPr sz="2000" dirty="0">
+                <a:latin typeface="Consolas"/>
+              </a:rPr>
+              <a:t>│ Normal          │      │ Service Down    │      │ Testing         │</a:t>
+            </a:r>
+            <a:br>
+              <a:rPr sz="6000" dirty="0"/>
+            </a:br>
+            <a:r>
+              <a:rPr sz="2000" dirty="0">
+                <a:latin typeface="Consolas"/>
+              </a:rPr>
+              <a:t>│ Operation       │─────&gt;│ Fast Fail       │─────&gt;│ Recovery        │</a:t>
+            </a:r>
+            <a:br>
+              <a:rPr sz="6000" dirty="0"/>
+            </a:br>
+            <a:r>
+              <a:rPr sz="2000" dirty="0">
+                <a:latin typeface="Consolas"/>
+              </a:rPr>
+              <a:t>│                 │      │                 │      │                 │</a:t>
+            </a:r>
+            <a:br>
+              <a:rPr sz="6000" dirty="0"/>
+            </a:br>
+            <a:r>
+              <a:rPr sz="2000" dirty="0">
+                <a:latin typeface="Consolas"/>
+              </a:rPr>
+              <a:t>│ Success Rate    │      │ Timeout Period  │      │ Limited Calls   │</a:t>
+            </a:r>
+            <a:br>
+              <a:rPr sz="6000" dirty="0"/>
+            </a:br>
+            <a:r>
+              <a:rPr sz="2000" dirty="0">
+                <a:latin typeface="Consolas"/>
+              </a:rPr>
+              <a:t>│ &gt; Threshold     │      │ Elapsed         │      │                 │</a:t>
+            </a:r>
+            <a:br>
+              <a:rPr sz="6000" dirty="0"/>
+            </a:br>
+            <a:r>
+              <a:rPr sz="2000" dirty="0">
+                <a:latin typeface="Consolas"/>
+              </a:rPr>
+              <a:t>└─────────────────┘      └─────────────────┘      └─────────────────┘</a:t>
+            </a:r>
+            <a:br>
+              <a:rPr sz="6000" dirty="0"/>
+            </a:br>
+            <a:r>
+              <a:rPr sz="2000" dirty="0">
+                <a:latin typeface="Consolas"/>
+              </a:rPr>
+              <a:t>         ▲                                                  │</a:t>
+            </a:r>
+            <a:br>
+              <a:rPr sz="6000" dirty="0"/>
+            </a:br>
+            <a:r>
+              <a:rPr sz="2000" dirty="0">
+                <a:latin typeface="Consolas"/>
+              </a:rPr>
+              <a:t>         └──────────────────────────────────────────────────┘</a:t>
+            </a:r>
+            <a:br>
+              <a:rPr sz="6000" dirty="0"/>
+            </a:br>
+            <a:r>
+              <a:rPr sz="2000" dirty="0">
+                <a:latin typeface="Consolas"/>
+              </a:rPr>
+              <a:t>                         Success Rate &gt; Threshold</a:t>
+            </a:r>
           </a:p>
         </p:txBody>
       </p:sp>
@@ -15899,7 +16301,7 @@
             <a:spLocks noGrp="1"/>
           </p:cNvSpPr>
           <p:nvPr>
-            <p:ph type="title"/>
+            <p:ph type="ctrTitle"/>
           </p:nvPr>
         </p:nvSpPr>
         <p:spPr/>
@@ -15908,135 +16310,27 @@
           <a:lstStyle/>
           <a:p>
             <a:r>
-              <a:t>Circuit Breaker State Machine</a:t>
-            </a:r>
-          </a:p>
-        </p:txBody>
-      </p:sp>
-      <p:sp>
-        <p:nvSpPr>
-          <p:cNvPr id="3" name="Content Placeholder 2"/>
-          <p:cNvSpPr>
-            <a:spLocks noGrp="1"/>
-          </p:cNvSpPr>
-          <p:nvPr>
-            <p:ph idx="1"/>
+              <a:t>Saga Pattern</a:t>
+            </a:r>
+          </a:p>
+        </p:txBody>
+      </p:sp>
+      <p:sp>
+        <p:nvSpPr>
+          <p:cNvPr id="3" name="Subtitle 2"/>
+          <p:cNvSpPr>
+            <a:spLocks noGrp="1"/>
+          </p:cNvSpPr>
+          <p:nvPr>
+            <p:ph type="subTitle" idx="1"/>
           </p:nvPr>
         </p:nvSpPr>
         <p:spPr/>
         <p:txBody>
-          <a:bodyPr>
-            <a:normAutofit/>
-          </a:bodyPr>
+          <a:bodyPr/>
           <a:lstStyle/>
           <a:p>
-            <a:pPr>
-              <a:lnSpc>
-                <a:spcPct val="100000"/>
-              </a:lnSpc>
-              <a:spcBef>
-                <a:spcPts val="0"/>
-              </a:spcBef>
-              <a:spcAft>
-                <a:spcPts val="0"/>
-              </a:spcAft>
-            </a:pPr>
-            <a:r>
-              <a:rPr sz="2000" dirty="0">
-                <a:latin typeface="Consolas"/>
-              </a:rPr>
-              <a:t>CLOSED                    OPEN                    HALF-OPEN</a:t>
-            </a:r>
-            <a:br>
-              <a:rPr sz="6000" dirty="0"/>
-            </a:br>
-            <a:r>
-              <a:rPr sz="2000" dirty="0">
-                <a:latin typeface="Consolas"/>
-              </a:rPr>
-              <a:t>┌─────────────────┐      ┌─────────────────┐      ┌─────────────────┐</a:t>
-            </a:r>
-            <a:br>
-              <a:rPr sz="6000" dirty="0"/>
-            </a:br>
-            <a:r>
-              <a:rPr sz="2000" dirty="0">
-                <a:latin typeface="Consolas"/>
-              </a:rPr>
-              <a:t>│ Normal          │      │ Service Down    │      │ Testing         │</a:t>
-            </a:r>
-            <a:br>
-              <a:rPr sz="6000" dirty="0"/>
-            </a:br>
-            <a:r>
-              <a:rPr sz="2000" dirty="0">
-                <a:latin typeface="Consolas"/>
-              </a:rPr>
-              <a:t>│ Operation       │─────&gt;│ Fast Fail       │─────&gt;│ Recovery        │</a:t>
-            </a:r>
-            <a:br>
-              <a:rPr sz="6000" dirty="0"/>
-            </a:br>
-            <a:r>
-              <a:rPr sz="2000" dirty="0">
-                <a:latin typeface="Consolas"/>
-              </a:rPr>
-              <a:t>│                 │      │                 │      │                 │</a:t>
-            </a:r>
-            <a:br>
-              <a:rPr sz="6000" dirty="0"/>
-            </a:br>
-            <a:r>
-              <a:rPr sz="2000" dirty="0">
-                <a:latin typeface="Consolas"/>
-              </a:rPr>
-              <a:t>│ Success Rate    │      │ Timeout Period  │      │ Limited Calls   │</a:t>
-            </a:r>
-            <a:br>
-              <a:rPr sz="6000" dirty="0"/>
-            </a:br>
-            <a:r>
-              <a:rPr sz="2000" dirty="0">
-                <a:latin typeface="Consolas"/>
-              </a:rPr>
-              <a:t>│ &gt; Threshold     │      │ Elapsed         │      │                 │</a:t>
-            </a:r>
-            <a:br>
-              <a:rPr sz="6000" dirty="0"/>
-            </a:br>
-            <a:r>
-              <a:rPr sz="2000" dirty="0">
-                <a:latin typeface="Consolas"/>
-              </a:rPr>
-              <a:t>└─────────────────┘      └─────────────────┘      └─────────────────┘</a:t>
-            </a:r>
-            <a:br>
-              <a:rPr sz="6000" dirty="0"/>
-            </a:br>
-            <a:r>
-              <a:rPr sz="2000" dirty="0">
-                <a:latin typeface="Consolas"/>
-              </a:rPr>
-              <a:t>         ▲                                                  │</a:t>
-            </a:r>
-            <a:br>
-              <a:rPr sz="6000" dirty="0"/>
-            </a:br>
-            <a:r>
-              <a:rPr sz="2000" dirty="0">
-                <a:latin typeface="Consolas"/>
-              </a:rPr>
-              <a:t>         └──────────────────────────────────────────────────┘</a:t>
-            </a:r>
-            <a:br>
-              <a:rPr sz="6000" dirty="0"/>
-            </a:br>
-            <a:r>
-              <a:rPr sz="2000" dirty="0">
-                <a:latin typeface="Consolas"/>
-              </a:rPr>
-              <a:t>                         Success Rate &gt; Threshold</a:t>
-            </a:r>
+            <a:endParaRPr/>
           </a:p>
         </p:txBody>
       </p:sp>
@@ -16072,7 +16366,7 @@
             <a:spLocks noGrp="1"/>
           </p:cNvSpPr>
           <p:nvPr>
-            <p:ph type="ctrTitle"/>
+            <p:ph type="title"/>
           </p:nvPr>
         </p:nvSpPr>
         <p:spPr/>
@@ -16081,27 +16375,183 @@
           <a:lstStyle/>
           <a:p>
             <a:r>
-              <a:t>Saga Pattern</a:t>
-            </a:r>
-          </a:p>
-        </p:txBody>
-      </p:sp>
-      <p:sp>
-        <p:nvSpPr>
-          <p:cNvPr id="3" name="Subtitle 2"/>
-          <p:cNvSpPr>
-            <a:spLocks noGrp="1"/>
-          </p:cNvSpPr>
-          <p:nvPr>
-            <p:ph type="subTitle" idx="1"/>
+              <a:t>Saga Pattern Types</a:t>
+            </a:r>
+          </a:p>
+        </p:txBody>
+      </p:sp>
+      <p:sp>
+        <p:nvSpPr>
+          <p:cNvPr id="3" name="Content Placeholder 2"/>
+          <p:cNvSpPr>
+            <a:spLocks noGrp="1"/>
+          </p:cNvSpPr>
+          <p:nvPr>
+            <p:ph idx="1"/>
           </p:nvPr>
         </p:nvSpPr>
         <p:spPr/>
         <p:txBody>
-          <a:bodyPr/>
+          <a:bodyPr>
+            <a:normAutofit lnSpcReduction="10000"/>
+          </a:bodyPr>
           <a:lstStyle/>
           <a:p>
-            <a:endParaRPr/>
+            <a:pPr>
+              <a:lnSpc>
+                <a:spcPct val="100000"/>
+              </a:lnSpc>
+              <a:spcBef>
+                <a:spcPts val="0"/>
+              </a:spcBef>
+              <a:spcAft>
+                <a:spcPts val="0"/>
+              </a:spcAft>
+            </a:pPr>
+            <a:r>
+              <a:rPr dirty="0">
+                <a:latin typeface="Consolas"/>
+              </a:rPr>
+              <a:t>Choreography Saga:           Orchestration Saga:</a:t>
+            </a:r>
+            <a:br>
+              <a:rPr sz="6600" dirty="0"/>
+            </a:br>
+            <a:r>
+              <a:rPr dirty="0">
+                <a:latin typeface="Consolas"/>
+              </a:rPr>
+              <a:t>                            </a:t>
+            </a:r>
+            <a:br>
+              <a:rPr sz="6600" dirty="0"/>
+            </a:br>
+            <a:r>
+              <a:rPr dirty="0">
+                <a:latin typeface="Consolas"/>
+              </a:rPr>
+              <a:t>Service A ──&gt; Service B      ┌─────────────────┐</a:t>
+            </a:r>
+            <a:br>
+              <a:rPr sz="6600" dirty="0"/>
+            </a:br>
+            <a:r>
+              <a:rPr dirty="0">
+                <a:latin typeface="Consolas"/>
+              </a:rPr>
+              <a:t>    │             │          │ Saga Manager   </a:t>
+            </a:r>
+            <a:r>
+              <a:rPr lang="en-US" dirty="0">
+                <a:latin typeface="Consolas"/>
+              </a:rPr>
+              <a:t> </a:t>
+            </a:r>
+            <a:r>
+              <a:rPr dirty="0">
+                <a:latin typeface="Consolas"/>
+              </a:rPr>
+              <a:t>│</a:t>
+            </a:r>
+            <a:br>
+              <a:rPr sz="6600" dirty="0"/>
+            </a:br>
+            <a:r>
+              <a:rPr dirty="0">
+                <a:latin typeface="Consolas"/>
+              </a:rPr>
+              <a:t>    ▼             ▼         </a:t>
+            </a:r>
+            <a:r>
+              <a:rPr lang="en-US" sz="2000" dirty="0">
+                <a:latin typeface="Consolas"/>
+              </a:rPr>
+              <a:t> </a:t>
+            </a:r>
+            <a:r>
+              <a:rPr lang="en-US" dirty="0">
+                <a:latin typeface="Consolas"/>
+              </a:rPr>
+              <a:t>│</a:t>
+            </a:r>
+            <a:r>
+              <a:rPr dirty="0">
+                <a:latin typeface="Consolas"/>
+              </a:rPr>
+              <a:t>                 │</a:t>
+            </a:r>
+            <a:br>
+              <a:rPr sz="6600" dirty="0"/>
+            </a:br>
+            <a:r>
+              <a:rPr dirty="0">
+                <a:latin typeface="Consolas"/>
+              </a:rPr>
+              <a:t>Service C ──&gt; Service D      │ 1. Service A    │</a:t>
+            </a:r>
+            <a:br>
+              <a:rPr sz="6600" dirty="0"/>
+            </a:br>
+            <a:r>
+              <a:rPr dirty="0">
+                <a:latin typeface="Consolas"/>
+              </a:rPr>
+              <a:t>                             │ 2. Service B    │</a:t>
+            </a:r>
+            <a:br>
+              <a:rPr sz="6600" dirty="0"/>
+            </a:br>
+            <a:r>
+              <a:rPr dirty="0">
+                <a:latin typeface="Consolas"/>
+              </a:rPr>
+              <a:t>Event-driven,                │ 3. Service C    │</a:t>
+            </a:r>
+            <a:br>
+              <a:rPr sz="6600" dirty="0"/>
+            </a:br>
+            <a:r>
+              <a:rPr dirty="0">
+                <a:latin typeface="Consolas"/>
+              </a:rPr>
+              <a:t>Distributed control          │ 4. Rollback?    │</a:t>
+            </a:r>
+            <a:br>
+              <a:rPr sz="6600" dirty="0"/>
+            </a:br>
+            <a:r>
+              <a:rPr dirty="0">
+                <a:latin typeface="Consolas"/>
+              </a:rPr>
+              <a:t>                             └─────────────────┘</a:t>
+            </a:r>
+            <a:br>
+              <a:rPr sz="6600" dirty="0"/>
+            </a:br>
+            <a:r>
+              <a:rPr dirty="0">
+                <a:latin typeface="Consolas"/>
+              </a:rPr>
+              <a:t>                             </a:t>
+            </a:r>
+            <a:br>
+              <a:rPr sz="6600" dirty="0"/>
+            </a:br>
+            <a:r>
+              <a:rPr dirty="0">
+                <a:latin typeface="Consolas"/>
+              </a:rPr>
+              <a:t>                             Centralized control,</a:t>
+            </a:r>
+            <a:br>
+              <a:rPr sz="6600" dirty="0"/>
+            </a:br>
+            <a:r>
+              <a:rPr dirty="0">
+                <a:latin typeface="Consolas"/>
+              </a:rPr>
+              <a:t>                             Explicit workflow</a:t>
+            </a:r>
           </a:p>
         </p:txBody>
       </p:sp>

--- a/presentations/powerpoint/arch-patterns-part2.pptx
+++ b/presentations/powerpoint/arch-patterns-part2.pptx
@@ -21,24 +21,14 @@
     <p:sldId id="270" r:id="rId16"/>
     <p:sldId id="271" r:id="rId17"/>
     <p:sldId id="272" r:id="rId18"/>
-    <p:sldId id="273" r:id="rId31"/>
-    <p:sldId id="274" r:id="rId30"/>
-    <p:sldId id="275" r:id="rId29"/>
-    <p:sldId id="276" r:id="rId28"/>
-    <p:sldId id="277" r:id="rId27"/>
-    <p:sldId id="278" r:id="rId26"/>
-    <p:sldId id="279" r:id="rId24"/>
-    <p:sldId id="280" r:id="rId23"/>
-    <p:sldId id="281" r:id="rId5"/>
-    <p:sldId id="282" r:id="rId41"/>
-    <p:sldId id="283" r:id="rId42"/>
-    <p:sldId id="284" r:id="rId43"/>
-    <p:sldId id="285" r:id="rId44"/>
-    <p:sldId id="286" r:id="rId45"/>
-    <p:sldId id="287" r:id="rId46"/>
-    <p:sldId id="288" r:id="rId47"/>
-    <p:sldId id="289" r:id="rId48"/>
-    <p:sldId id="290" r:id="rId49"/>
+    <p:sldId id="273" r:id="rId50"/>
+    <p:sldId id="274" r:id="rId51"/>
+    <p:sldId id="275" r:id="rId52"/>
+    <p:sldId id="276" r:id="rId53"/>
+    <p:sldId id="277" r:id="rId54"/>
+    <p:sldId id="278" r:id="rId55"/>
+    <p:sldId id="279" r:id="rId56"/>
+    <p:sldId id="280" r:id="rId57"/>
   </p:sldIdLst>
   <p:sldSz cx="12192000" cy="6858000"/>
   <p:notesSz cx="6858000" cy="9144000"/>
@@ -12971,19 +12961,40 @@
           <a:lstStyle/>
           <a:p>
             <a:r>
-              <a:t>CQRS - Trade-offs</a:t>
-            </a:r>
-          </a:p>
-        </p:txBody>
-      </p:sp>
-      <p:sp>
-        <p:nvSpPr>
-          <p:cNvPr id="3" name="Content Placeholder 2"/>
-          <p:cNvSpPr>
-            <a:spLocks noGrp="1"/>
-          </p:cNvSpPr>
-          <p:nvPr>
-            <p:ph idx="1"/>
+              <a:t>CQRS - Vorteile/Nachteile</a:t>
+            </a:r>
+          </a:p>
+        </p:txBody>
+      </p:sp>
+      <p:sp>
+        <p:nvSpPr>
+          <p:cNvPr id="3" name="Text Placeholder 2"/>
+          <p:cNvSpPr>
+            <a:spLocks noGrp="1"/>
+          </p:cNvSpPr>
+          <p:nvPr>
+            <p:ph type="body" idx="1"/>
+          </p:nvPr>
+        </p:nvSpPr>
+        <p:spPr/>
+        <p:txBody>
+          <a:bodyPr/>
+          <a:lstStyle/>
+          <a:p>
+            <a:r>
+              <a:t>Vorteile ✅</a:t>
+            </a:r>
+          </a:p>
+        </p:txBody>
+      </p:sp>
+      <p:sp>
+        <p:nvSpPr>
+          <p:cNvPr id="4" name="Content Placeholder 3"/>
+          <p:cNvSpPr>
+            <a:spLocks noGrp="1"/>
+          </p:cNvSpPr>
+          <p:nvPr>
+            <p:ph idx="2" sz="half"/>
           </p:nvPr>
         </p:nvSpPr>
         <p:spPr/>
@@ -12991,6 +13002,239 @@
           <a:bodyPr/>
           <a:lstStyle/>
           <a:p/>
+          <a:p>
+            <a:r>
+              <a:t>Optimierte Read und Write Models</a:t>
+            </a:r>
+          </a:p>
+          <a:p>
+            <a:r>
+              <a:t>Unabhängige Skalierung von Queries und Commands</a:t>
+            </a:r>
+          </a:p>
+          <a:p>
+            <a:r>
+              <a:t>Bessere Performance durch spezialisierte Datenmodelle</a:t>
+            </a:r>
+          </a:p>
+          <a:p>
+            <a:r>
+              <a:t>Event Sourcing Integration möglich</a:t>
+            </a:r>
+          </a:p>
+        </p:txBody>
+      </p:sp>
+      <p:sp>
+        <p:nvSpPr>
+          <p:cNvPr id="5" name="Text Placeholder 4"/>
+          <p:cNvSpPr>
+            <a:spLocks noGrp="1"/>
+          </p:cNvSpPr>
+          <p:nvPr>
+            <p:ph type="body" idx="3" sz="quarter"/>
+          </p:nvPr>
+        </p:nvSpPr>
+        <p:spPr/>
+        <p:txBody>
+          <a:bodyPr/>
+          <a:lstStyle/>
+          <a:p>
+            <a:r>
+              <a:t>Nachteile ❌</a:t>
+            </a:r>
+          </a:p>
+        </p:txBody>
+      </p:sp>
+      <p:sp>
+        <p:nvSpPr>
+          <p:cNvPr id="6" name="Content Placeholder 5"/>
+          <p:cNvSpPr>
+            <a:spLocks noGrp="1"/>
+          </p:cNvSpPr>
+          <p:nvPr>
+            <p:ph idx="4" sz="quarter"/>
+          </p:nvPr>
+        </p:nvSpPr>
+        <p:spPr/>
+        <p:txBody>
+          <a:bodyPr/>
+          <a:lstStyle/>
+          <a:p/>
+          <a:p>
+            <a:r>
+              <a:t>Erhöhte Komplexität der Architektur</a:t>
+            </a:r>
+          </a:p>
+          <a:p>
+            <a:r>
+              <a:t>Eventual Consistency zwischen Read/Write</a:t>
+            </a:r>
+          </a:p>
+          <a:p>
+            <a:r>
+              <a:t>Synchronisation der Models erforderlich</a:t>
+            </a:r>
+          </a:p>
+          <a:p>
+            <a:r>
+              <a:t>Mehr Code und Infrastruktur</a:t>
+            </a:r>
+          </a:p>
+        </p:txBody>
+      </p:sp>
+    </p:spTree>
+  </p:cSld>
+  <p:clrMapOvr>
+    <a:masterClrMapping/>
+  </p:clrMapOvr>
+</p:sld>
+</file>
+
+<file path=ppt/slides/slide17.xml><?xml version="1.0" encoding="utf-8"?>
+<p:sld xmlns:a="http://schemas.openxmlformats.org/drawingml/2006/main" xmlns:p="http://schemas.openxmlformats.org/presentationml/2006/main" xmlns:r="http://schemas.openxmlformats.org/officeDocument/2006/relationships">
+  <p:cSld>
+    <p:spTree>
+      <p:nvGrpSpPr>
+        <p:cNvPr id="1" name=""/>
+        <p:cNvGrpSpPr/>
+        <p:nvPr/>
+      </p:nvGrpSpPr>
+      <p:grpSpPr/>
+      <p:sp>
+        <p:nvSpPr>
+          <p:cNvPr id="2" name="Title 1"/>
+          <p:cNvSpPr>
+            <a:spLocks noGrp="1"/>
+          </p:cNvSpPr>
+          <p:nvPr>
+            <p:ph type="title"/>
+          </p:nvPr>
+        </p:nvSpPr>
+        <p:spPr/>
+        <p:txBody>
+          <a:bodyPr/>
+          <a:lstStyle/>
+          <a:p>
+            <a:r>
+              <a:t>CQRS - Vorteile/Nachteile</a:t>
+            </a:r>
+          </a:p>
+        </p:txBody>
+      </p:sp>
+      <p:sp>
+        <p:nvSpPr>
+          <p:cNvPr id="3" name="Text Placeholder 2"/>
+          <p:cNvSpPr>
+            <a:spLocks noGrp="1"/>
+          </p:cNvSpPr>
+          <p:nvPr>
+            <p:ph type="body" idx="1"/>
+          </p:nvPr>
+        </p:nvSpPr>
+        <p:spPr/>
+        <p:txBody>
+          <a:bodyPr/>
+          <a:lstStyle/>
+          <a:p>
+            <a:r>
+              <a:t>Vorteile ✅</a:t>
+            </a:r>
+          </a:p>
+        </p:txBody>
+      </p:sp>
+      <p:sp>
+        <p:nvSpPr>
+          <p:cNvPr id="4" name="Content Placeholder 3"/>
+          <p:cNvSpPr>
+            <a:spLocks noGrp="1"/>
+          </p:cNvSpPr>
+          <p:nvPr>
+            <p:ph idx="2" sz="half"/>
+          </p:nvPr>
+        </p:nvSpPr>
+        <p:spPr/>
+        <p:txBody>
+          <a:bodyPr/>
+          <a:lstStyle/>
+          <a:p/>
+          <a:p>
+            <a:r>
+              <a:t>Optimierte Read und Write Models</a:t>
+            </a:r>
+          </a:p>
+          <a:p>
+            <a:r>
+              <a:t>Unabhängige Skalierung von Queries und Commands</a:t>
+            </a:r>
+          </a:p>
+          <a:p>
+            <a:r>
+              <a:t>Bessere Performance durch spezialisierte Datenmodelle</a:t>
+            </a:r>
+          </a:p>
+          <a:p>
+            <a:r>
+              <a:t>Event Sourcing Integration möglich</a:t>
+            </a:r>
+          </a:p>
+        </p:txBody>
+      </p:sp>
+      <p:sp>
+        <p:nvSpPr>
+          <p:cNvPr id="5" name="Text Placeholder 4"/>
+          <p:cNvSpPr>
+            <a:spLocks noGrp="1"/>
+          </p:cNvSpPr>
+          <p:nvPr>
+            <p:ph type="body" idx="3" sz="quarter"/>
+          </p:nvPr>
+        </p:nvSpPr>
+        <p:spPr/>
+        <p:txBody>
+          <a:bodyPr/>
+          <a:lstStyle/>
+          <a:p>
+            <a:r>
+              <a:t>Nachteile ❌</a:t>
+            </a:r>
+          </a:p>
+        </p:txBody>
+      </p:sp>
+      <p:sp>
+        <p:nvSpPr>
+          <p:cNvPr id="6" name="Content Placeholder 5"/>
+          <p:cNvSpPr>
+            <a:spLocks noGrp="1"/>
+          </p:cNvSpPr>
+          <p:nvPr>
+            <p:ph idx="4" sz="quarter"/>
+          </p:nvPr>
+        </p:nvSpPr>
+        <p:spPr/>
+        <p:txBody>
+          <a:bodyPr/>
+          <a:lstStyle/>
+          <a:p/>
+          <a:p>
+            <a:r>
+              <a:t>Erhöhte Komplexität der Architektur</a:t>
+            </a:r>
+          </a:p>
+          <a:p>
+            <a:r>
+              <a:t>Eventual Consistency zwischen Read/Write</a:t>
+            </a:r>
+          </a:p>
+          <a:p>
+            <a:r>
+              <a:t>Synchronisation der Models erforderlich</a:t>
+            </a:r>
+          </a:p>
+          <a:p>
+            <a:r>
+              <a:t>Mehr Code und Infrastruktur</a:t>
+            </a:r>
+          </a:p>
         </p:txBody>
       </p:sp>
     </p:spTree>
@@ -13027,19 +13271,40 @@
           <a:lstStyle/>
           <a:p>
             <a:r>
-              <a:t>CQRS - Vorteile/Nachteile</a:t>
-            </a:r>
-          </a:p>
-        </p:txBody>
-      </p:sp>
-      <p:sp>
-        <p:nvSpPr>
-          <p:cNvPr id="3" name="Content Placeholder 2"/>
-          <p:cNvSpPr>
-            <a:spLocks noGrp="1"/>
-          </p:cNvSpPr>
-          <p:nvPr>
-            <p:ph idx="1"/>
+              <a:t>Event Sourcing - Vorteile/Nachteile</a:t>
+            </a:r>
+          </a:p>
+        </p:txBody>
+      </p:sp>
+      <p:sp>
+        <p:nvSpPr>
+          <p:cNvPr id="3" name="Text Placeholder 2"/>
+          <p:cNvSpPr>
+            <a:spLocks noGrp="1"/>
+          </p:cNvSpPr>
+          <p:nvPr>
+            <p:ph type="body" idx="1"/>
+          </p:nvPr>
+        </p:nvSpPr>
+        <p:spPr/>
+        <p:txBody>
+          <a:bodyPr/>
+          <a:lstStyle/>
+          <a:p>
+            <a:r>
+              <a:t>Vorteile ✅</a:t>
+            </a:r>
+          </a:p>
+        </p:txBody>
+      </p:sp>
+      <p:sp>
+        <p:nvSpPr>
+          <p:cNvPr id="4" name="Content Placeholder 3"/>
+          <p:cNvSpPr>
+            <a:spLocks noGrp="1"/>
+          </p:cNvSpPr>
+          <p:nvPr>
+            <p:ph idx="2" sz="half"/>
           </p:nvPr>
         </p:nvSpPr>
         <p:spPr/>
@@ -13047,6 +13312,239 @@
           <a:bodyPr/>
           <a:lstStyle/>
           <a:p/>
+          <a:p>
+            <a:r>
+              <a:t>Vollständige Audit Trail automatisch</a:t>
+            </a:r>
+          </a:p>
+          <a:p>
+            <a:r>
+              <a:t>Time Travel und Event Replay möglich</a:t>
+            </a:r>
+          </a:p>
+          <a:p>
+            <a:r>
+              <a:t>Debugging durch Event History</a:t>
+            </a:r>
+          </a:p>
+          <a:p>
+            <a:r>
+              <a:t>Integration mit CQRS natural</a:t>
+            </a:r>
+          </a:p>
+        </p:txBody>
+      </p:sp>
+      <p:sp>
+        <p:nvSpPr>
+          <p:cNvPr id="5" name="Text Placeholder 4"/>
+          <p:cNvSpPr>
+            <a:spLocks noGrp="1"/>
+          </p:cNvSpPr>
+          <p:nvPr>
+            <p:ph type="body" idx="3" sz="quarter"/>
+          </p:nvPr>
+        </p:nvSpPr>
+        <p:spPr/>
+        <p:txBody>
+          <a:bodyPr/>
+          <a:lstStyle/>
+          <a:p>
+            <a:r>
+              <a:t>Nachteile ❌</a:t>
+            </a:r>
+          </a:p>
+        </p:txBody>
+      </p:sp>
+      <p:sp>
+        <p:nvSpPr>
+          <p:cNvPr id="6" name="Content Placeholder 5"/>
+          <p:cNvSpPr>
+            <a:spLocks noGrp="1"/>
+          </p:cNvSpPr>
+          <p:nvPr>
+            <p:ph idx="4" sz="quarter"/>
+          </p:nvPr>
+        </p:nvSpPr>
+        <p:spPr/>
+        <p:txBody>
+          <a:bodyPr/>
+          <a:lstStyle/>
+          <a:p/>
+          <a:p>
+            <a:r>
+              <a:t>Event Store Management komplex</a:t>
+            </a:r>
+          </a:p>
+          <a:p>
+            <a:r>
+              <a:t>Schema Evolution schwierig</a:t>
+            </a:r>
+          </a:p>
+          <a:p>
+            <a:r>
+              <a:t>Snapshot Management erforderlich</a:t>
+            </a:r>
+          </a:p>
+          <a:p>
+            <a:r>
+              <a:t>GDPR Compliance herausfordernd</a:t>
+            </a:r>
+          </a:p>
+        </p:txBody>
+      </p:sp>
+    </p:spTree>
+  </p:cSld>
+  <p:clrMapOvr>
+    <a:masterClrMapping/>
+  </p:clrMapOvr>
+</p:sld>
+</file>
+
+<file path=ppt/slides/slide18.xml><?xml version="1.0" encoding="utf-8"?>
+<p:sld xmlns:a="http://schemas.openxmlformats.org/drawingml/2006/main" xmlns:p="http://schemas.openxmlformats.org/presentationml/2006/main" xmlns:r="http://schemas.openxmlformats.org/officeDocument/2006/relationships">
+  <p:cSld>
+    <p:spTree>
+      <p:nvGrpSpPr>
+        <p:cNvPr id="1" name=""/>
+        <p:cNvGrpSpPr/>
+        <p:nvPr/>
+      </p:nvGrpSpPr>
+      <p:grpSpPr/>
+      <p:sp>
+        <p:nvSpPr>
+          <p:cNvPr id="2" name="Title 1"/>
+          <p:cNvSpPr>
+            <a:spLocks noGrp="1"/>
+          </p:cNvSpPr>
+          <p:nvPr>
+            <p:ph type="title"/>
+          </p:nvPr>
+        </p:nvSpPr>
+        <p:spPr/>
+        <p:txBody>
+          <a:bodyPr/>
+          <a:lstStyle/>
+          <a:p>
+            <a:r>
+              <a:t>Event Sourcing - Vorteile/Nachteile</a:t>
+            </a:r>
+          </a:p>
+        </p:txBody>
+      </p:sp>
+      <p:sp>
+        <p:nvSpPr>
+          <p:cNvPr id="3" name="Text Placeholder 2"/>
+          <p:cNvSpPr>
+            <a:spLocks noGrp="1"/>
+          </p:cNvSpPr>
+          <p:nvPr>
+            <p:ph type="body" idx="1"/>
+          </p:nvPr>
+        </p:nvSpPr>
+        <p:spPr/>
+        <p:txBody>
+          <a:bodyPr/>
+          <a:lstStyle/>
+          <a:p>
+            <a:r>
+              <a:t>Vorteile ✅</a:t>
+            </a:r>
+          </a:p>
+        </p:txBody>
+      </p:sp>
+      <p:sp>
+        <p:nvSpPr>
+          <p:cNvPr id="4" name="Content Placeholder 3"/>
+          <p:cNvSpPr>
+            <a:spLocks noGrp="1"/>
+          </p:cNvSpPr>
+          <p:nvPr>
+            <p:ph idx="2" sz="half"/>
+          </p:nvPr>
+        </p:nvSpPr>
+        <p:spPr/>
+        <p:txBody>
+          <a:bodyPr/>
+          <a:lstStyle/>
+          <a:p/>
+          <a:p>
+            <a:r>
+              <a:t>Vollständige Audit Trail automatisch</a:t>
+            </a:r>
+          </a:p>
+          <a:p>
+            <a:r>
+              <a:t>Time Travel und Event Replay möglich</a:t>
+            </a:r>
+          </a:p>
+          <a:p>
+            <a:r>
+              <a:t>Debugging durch Event History</a:t>
+            </a:r>
+          </a:p>
+          <a:p>
+            <a:r>
+              <a:t>Integration mit CQRS natural</a:t>
+            </a:r>
+          </a:p>
+        </p:txBody>
+      </p:sp>
+      <p:sp>
+        <p:nvSpPr>
+          <p:cNvPr id="5" name="Text Placeholder 4"/>
+          <p:cNvSpPr>
+            <a:spLocks noGrp="1"/>
+          </p:cNvSpPr>
+          <p:nvPr>
+            <p:ph type="body" idx="3" sz="quarter"/>
+          </p:nvPr>
+        </p:nvSpPr>
+        <p:spPr/>
+        <p:txBody>
+          <a:bodyPr/>
+          <a:lstStyle/>
+          <a:p>
+            <a:r>
+              <a:t>Nachteile ❌</a:t>
+            </a:r>
+          </a:p>
+        </p:txBody>
+      </p:sp>
+      <p:sp>
+        <p:nvSpPr>
+          <p:cNvPr id="6" name="Content Placeholder 5"/>
+          <p:cNvSpPr>
+            <a:spLocks noGrp="1"/>
+          </p:cNvSpPr>
+          <p:nvPr>
+            <p:ph idx="4" sz="quarter"/>
+          </p:nvPr>
+        </p:nvSpPr>
+        <p:spPr/>
+        <p:txBody>
+          <a:bodyPr/>
+          <a:lstStyle/>
+          <a:p/>
+          <a:p>
+            <a:r>
+              <a:t>Event Store Management komplex</a:t>
+            </a:r>
+          </a:p>
+          <a:p>
+            <a:r>
+              <a:t>Schema Evolution schwierig</a:t>
+            </a:r>
+          </a:p>
+          <a:p>
+            <a:r>
+              <a:t>Snapshot Management erforderlich</a:t>
+            </a:r>
+          </a:p>
+          <a:p>
+            <a:r>
+              <a:t>GDPR Compliance herausfordernd</a:t>
+            </a:r>
+          </a:p>
         </p:txBody>
       </p:sp>
     </p:spTree>
@@ -13083,19 +13581,40 @@
           <a:lstStyle/>
           <a:p>
             <a:r>
-              <a:t>Event Sourcing - Vorteile/Nachteile</a:t>
-            </a:r>
-          </a:p>
-        </p:txBody>
-      </p:sp>
-      <p:sp>
-        <p:nvSpPr>
-          <p:cNvPr id="3" name="Content Placeholder 2"/>
-          <p:cNvSpPr>
-            <a:spLocks noGrp="1"/>
-          </p:cNvSpPr>
-          <p:nvPr>
-            <p:ph idx="1"/>
+              <a:t>Circuit Breaker - Vorteile/Nachteile</a:t>
+            </a:r>
+          </a:p>
+        </p:txBody>
+      </p:sp>
+      <p:sp>
+        <p:nvSpPr>
+          <p:cNvPr id="3" name="Text Placeholder 2"/>
+          <p:cNvSpPr>
+            <a:spLocks noGrp="1"/>
+          </p:cNvSpPr>
+          <p:nvPr>
+            <p:ph type="body" idx="1"/>
+          </p:nvPr>
+        </p:nvSpPr>
+        <p:spPr/>
+        <p:txBody>
+          <a:bodyPr/>
+          <a:lstStyle/>
+          <a:p>
+            <a:r>
+              <a:t>Vorteile ✅</a:t>
+            </a:r>
+          </a:p>
+        </p:txBody>
+      </p:sp>
+      <p:sp>
+        <p:nvSpPr>
+          <p:cNvPr id="4" name="Content Placeholder 3"/>
+          <p:cNvSpPr>
+            <a:spLocks noGrp="1"/>
+          </p:cNvSpPr>
+          <p:nvPr>
+            <p:ph idx="2" sz="half"/>
           </p:nvPr>
         </p:nvSpPr>
         <p:spPr/>
@@ -13103,6 +13622,239 @@
           <a:bodyPr/>
           <a:lstStyle/>
           <a:p/>
+          <a:p>
+            <a:r>
+              <a:t>Schnelles Fail-Fast Verhalten</a:t>
+            </a:r>
+          </a:p>
+          <a:p>
+            <a:r>
+              <a:t>System Stabilität bei Ausfällen</a:t>
+            </a:r>
+          </a:p>
+          <a:p>
+            <a:r>
+              <a:t>Automatische Recovery Mechanismen</a:t>
+            </a:r>
+          </a:p>
+          <a:p>
+            <a:r>
+              <a:t>Cascading Failures Prevention</a:t>
+            </a:r>
+          </a:p>
+        </p:txBody>
+      </p:sp>
+      <p:sp>
+        <p:nvSpPr>
+          <p:cNvPr id="5" name="Text Placeholder 4"/>
+          <p:cNvSpPr>
+            <a:spLocks noGrp="1"/>
+          </p:cNvSpPr>
+          <p:nvPr>
+            <p:ph type="body" idx="3" sz="quarter"/>
+          </p:nvPr>
+        </p:nvSpPr>
+        <p:spPr/>
+        <p:txBody>
+          <a:bodyPr/>
+          <a:lstStyle/>
+          <a:p>
+            <a:r>
+              <a:t>Nachteile ❌</a:t>
+            </a:r>
+          </a:p>
+        </p:txBody>
+      </p:sp>
+      <p:sp>
+        <p:nvSpPr>
+          <p:cNvPr id="6" name="Content Placeholder 5"/>
+          <p:cNvSpPr>
+            <a:spLocks noGrp="1"/>
+          </p:cNvSpPr>
+          <p:nvPr>
+            <p:ph idx="4" sz="quarter"/>
+          </p:nvPr>
+        </p:nvSpPr>
+        <p:spPr/>
+        <p:txBody>
+          <a:bodyPr/>
+          <a:lstStyle/>
+          <a:p/>
+          <a:p>
+            <a:r>
+              <a:t>Threshold Tuning erforderlich</a:t>
+            </a:r>
+          </a:p>
+          <a:p>
+            <a:r>
+              <a:t>False Positives möglich</a:t>
+            </a:r>
+          </a:p>
+          <a:p>
+            <a:r>
+              <a:t>Additional Monitoring Layer</a:t>
+            </a:r>
+          </a:p>
+          <a:p>
+            <a:r>
+              <a:t>Complexity in Error Handling</a:t>
+            </a:r>
+          </a:p>
+        </p:txBody>
+      </p:sp>
+    </p:spTree>
+  </p:cSld>
+  <p:clrMapOvr>
+    <a:masterClrMapping/>
+  </p:clrMapOvr>
+</p:sld>
+</file>
+
+<file path=ppt/slides/slide19.xml><?xml version="1.0" encoding="utf-8"?>
+<p:sld xmlns:a="http://schemas.openxmlformats.org/drawingml/2006/main" xmlns:p="http://schemas.openxmlformats.org/presentationml/2006/main" xmlns:r="http://schemas.openxmlformats.org/officeDocument/2006/relationships">
+  <p:cSld>
+    <p:spTree>
+      <p:nvGrpSpPr>
+        <p:cNvPr id="1" name=""/>
+        <p:cNvGrpSpPr/>
+        <p:nvPr/>
+      </p:nvGrpSpPr>
+      <p:grpSpPr/>
+      <p:sp>
+        <p:nvSpPr>
+          <p:cNvPr id="2" name="Title 1"/>
+          <p:cNvSpPr>
+            <a:spLocks noGrp="1"/>
+          </p:cNvSpPr>
+          <p:nvPr>
+            <p:ph type="title"/>
+          </p:nvPr>
+        </p:nvSpPr>
+        <p:spPr/>
+        <p:txBody>
+          <a:bodyPr/>
+          <a:lstStyle/>
+          <a:p>
+            <a:r>
+              <a:t>Circuit Breaker - Vorteile/Nachteile</a:t>
+            </a:r>
+          </a:p>
+        </p:txBody>
+      </p:sp>
+      <p:sp>
+        <p:nvSpPr>
+          <p:cNvPr id="3" name="Text Placeholder 2"/>
+          <p:cNvSpPr>
+            <a:spLocks noGrp="1"/>
+          </p:cNvSpPr>
+          <p:nvPr>
+            <p:ph type="body" idx="1"/>
+          </p:nvPr>
+        </p:nvSpPr>
+        <p:spPr/>
+        <p:txBody>
+          <a:bodyPr/>
+          <a:lstStyle/>
+          <a:p>
+            <a:r>
+              <a:t>Vorteile ✅</a:t>
+            </a:r>
+          </a:p>
+        </p:txBody>
+      </p:sp>
+      <p:sp>
+        <p:nvSpPr>
+          <p:cNvPr id="4" name="Content Placeholder 3"/>
+          <p:cNvSpPr>
+            <a:spLocks noGrp="1"/>
+          </p:cNvSpPr>
+          <p:nvPr>
+            <p:ph idx="2" sz="half"/>
+          </p:nvPr>
+        </p:nvSpPr>
+        <p:spPr/>
+        <p:txBody>
+          <a:bodyPr/>
+          <a:lstStyle/>
+          <a:p/>
+          <a:p>
+            <a:r>
+              <a:t>Schnelles Fail-Fast Verhalten</a:t>
+            </a:r>
+          </a:p>
+          <a:p>
+            <a:r>
+              <a:t>System Stabilität bei Ausfällen</a:t>
+            </a:r>
+          </a:p>
+          <a:p>
+            <a:r>
+              <a:t>Automatische Recovery Mechanismen</a:t>
+            </a:r>
+          </a:p>
+          <a:p>
+            <a:r>
+              <a:t>Cascading Failures Prevention</a:t>
+            </a:r>
+          </a:p>
+        </p:txBody>
+      </p:sp>
+      <p:sp>
+        <p:nvSpPr>
+          <p:cNvPr id="5" name="Text Placeholder 4"/>
+          <p:cNvSpPr>
+            <a:spLocks noGrp="1"/>
+          </p:cNvSpPr>
+          <p:nvPr>
+            <p:ph type="body" idx="3" sz="quarter"/>
+          </p:nvPr>
+        </p:nvSpPr>
+        <p:spPr/>
+        <p:txBody>
+          <a:bodyPr/>
+          <a:lstStyle/>
+          <a:p>
+            <a:r>
+              <a:t>Nachteile ❌</a:t>
+            </a:r>
+          </a:p>
+        </p:txBody>
+      </p:sp>
+      <p:sp>
+        <p:nvSpPr>
+          <p:cNvPr id="6" name="Content Placeholder 5"/>
+          <p:cNvSpPr>
+            <a:spLocks noGrp="1"/>
+          </p:cNvSpPr>
+          <p:nvPr>
+            <p:ph idx="4" sz="quarter"/>
+          </p:nvPr>
+        </p:nvSpPr>
+        <p:spPr/>
+        <p:txBody>
+          <a:bodyPr/>
+          <a:lstStyle/>
+          <a:p/>
+          <a:p>
+            <a:r>
+              <a:t>Threshold Tuning erforderlich</a:t>
+            </a:r>
+          </a:p>
+          <a:p>
+            <a:r>
+              <a:t>False Positives möglich</a:t>
+            </a:r>
+          </a:p>
+          <a:p>
+            <a:r>
+              <a:t>Additional Monitoring Layer</a:t>
+            </a:r>
+          </a:p>
+          <a:p>
+            <a:r>
+              <a:t>Complexity in Error Handling</a:t>
+            </a:r>
+          </a:p>
         </p:txBody>
       </p:sp>
     </p:spTree>
@@ -13206,19 +13958,40 @@
           <a:lstStyle/>
           <a:p>
             <a:r>
-              <a:t>Circuit Breaker - Vorteile/Nachteile</a:t>
-            </a:r>
-          </a:p>
-        </p:txBody>
-      </p:sp>
-      <p:sp>
-        <p:nvSpPr>
-          <p:cNvPr id="3" name="Content Placeholder 2"/>
-          <p:cNvSpPr>
-            <a:spLocks noGrp="1"/>
-          </p:cNvSpPr>
-          <p:nvPr>
-            <p:ph idx="1"/>
+              <a:t>Saga Pattern - Vorteile/Nachteile</a:t>
+            </a:r>
+          </a:p>
+        </p:txBody>
+      </p:sp>
+      <p:sp>
+        <p:nvSpPr>
+          <p:cNvPr id="3" name="Text Placeholder 2"/>
+          <p:cNvSpPr>
+            <a:spLocks noGrp="1"/>
+          </p:cNvSpPr>
+          <p:nvPr>
+            <p:ph type="body" idx="1"/>
+          </p:nvPr>
+        </p:nvSpPr>
+        <p:spPr/>
+        <p:txBody>
+          <a:bodyPr/>
+          <a:lstStyle/>
+          <a:p>
+            <a:r>
+              <a:t>Vorteile ✅</a:t>
+            </a:r>
+          </a:p>
+        </p:txBody>
+      </p:sp>
+      <p:sp>
+        <p:nvSpPr>
+          <p:cNvPr id="4" name="Content Placeholder 3"/>
+          <p:cNvSpPr>
+            <a:spLocks noGrp="1"/>
+          </p:cNvSpPr>
+          <p:nvPr>
+            <p:ph idx="2" sz="half"/>
           </p:nvPr>
         </p:nvSpPr>
         <p:spPr/>
@@ -13226,6 +13999,239 @@
           <a:bodyPr/>
           <a:lstStyle/>
           <a:p/>
+          <a:p>
+            <a:r>
+              <a:t>Distributed Transaction Management</a:t>
+            </a:r>
+          </a:p>
+          <a:p>
+            <a:r>
+              <a:t>Compensation Logic für Rollbacks</a:t>
+            </a:r>
+          </a:p>
+          <a:p>
+            <a:r>
+              <a:t>Keine 2PC Lock Requirements</a:t>
+            </a:r>
+          </a:p>
+          <a:p>
+            <a:r>
+              <a:t>Bessere Performance als 2PC</a:t>
+            </a:r>
+          </a:p>
+        </p:txBody>
+      </p:sp>
+      <p:sp>
+        <p:nvSpPr>
+          <p:cNvPr id="5" name="Text Placeholder 4"/>
+          <p:cNvSpPr>
+            <a:spLocks noGrp="1"/>
+          </p:cNvSpPr>
+          <p:nvPr>
+            <p:ph type="body" idx="3" sz="quarter"/>
+          </p:nvPr>
+        </p:nvSpPr>
+        <p:spPr/>
+        <p:txBody>
+          <a:bodyPr/>
+          <a:lstStyle/>
+          <a:p>
+            <a:r>
+              <a:t>Nachteile ❌</a:t>
+            </a:r>
+          </a:p>
+        </p:txBody>
+      </p:sp>
+      <p:sp>
+        <p:nvSpPr>
+          <p:cNvPr id="6" name="Content Placeholder 5"/>
+          <p:cNvSpPr>
+            <a:spLocks noGrp="1"/>
+          </p:cNvSpPr>
+          <p:nvPr>
+            <p:ph idx="4" sz="quarter"/>
+          </p:nvPr>
+        </p:nvSpPr>
+        <p:spPr/>
+        <p:txBody>
+          <a:bodyPr/>
+          <a:lstStyle/>
+          <a:p/>
+          <a:p>
+            <a:r>
+              <a:t>Komplexe Compensation Logic</a:t>
+            </a:r>
+          </a:p>
+          <a:p>
+            <a:r>
+              <a:t>Debugging schwierig</a:t>
+            </a:r>
+          </a:p>
+          <a:p>
+            <a:r>
+              <a:t>Partial Failure Handling</a:t>
+            </a:r>
+          </a:p>
+          <a:p>
+            <a:r>
+              <a:t>Testing der Compensation</a:t>
+            </a:r>
+          </a:p>
+        </p:txBody>
+      </p:sp>
+    </p:spTree>
+  </p:cSld>
+  <p:clrMapOvr>
+    <a:masterClrMapping/>
+  </p:clrMapOvr>
+</p:sld>
+</file>
+
+<file path=ppt/slides/slide20.xml><?xml version="1.0" encoding="utf-8"?>
+<p:sld xmlns:a="http://schemas.openxmlformats.org/drawingml/2006/main" xmlns:p="http://schemas.openxmlformats.org/presentationml/2006/main" xmlns:r="http://schemas.openxmlformats.org/officeDocument/2006/relationships">
+  <p:cSld>
+    <p:spTree>
+      <p:nvGrpSpPr>
+        <p:cNvPr id="1" name=""/>
+        <p:cNvGrpSpPr/>
+        <p:nvPr/>
+      </p:nvGrpSpPr>
+      <p:grpSpPr/>
+      <p:sp>
+        <p:nvSpPr>
+          <p:cNvPr id="2" name="Title 1"/>
+          <p:cNvSpPr>
+            <a:spLocks noGrp="1"/>
+          </p:cNvSpPr>
+          <p:nvPr>
+            <p:ph type="title"/>
+          </p:nvPr>
+        </p:nvSpPr>
+        <p:spPr/>
+        <p:txBody>
+          <a:bodyPr/>
+          <a:lstStyle/>
+          <a:p>
+            <a:r>
+              <a:t>Saga Pattern - Vorteile/Nachteile</a:t>
+            </a:r>
+          </a:p>
+        </p:txBody>
+      </p:sp>
+      <p:sp>
+        <p:nvSpPr>
+          <p:cNvPr id="3" name="Text Placeholder 2"/>
+          <p:cNvSpPr>
+            <a:spLocks noGrp="1"/>
+          </p:cNvSpPr>
+          <p:nvPr>
+            <p:ph type="body" idx="1"/>
+          </p:nvPr>
+        </p:nvSpPr>
+        <p:spPr/>
+        <p:txBody>
+          <a:bodyPr/>
+          <a:lstStyle/>
+          <a:p>
+            <a:r>
+              <a:t>Vorteile ✅</a:t>
+            </a:r>
+          </a:p>
+        </p:txBody>
+      </p:sp>
+      <p:sp>
+        <p:nvSpPr>
+          <p:cNvPr id="4" name="Content Placeholder 3"/>
+          <p:cNvSpPr>
+            <a:spLocks noGrp="1"/>
+          </p:cNvSpPr>
+          <p:nvPr>
+            <p:ph idx="2" sz="half"/>
+          </p:nvPr>
+        </p:nvSpPr>
+        <p:spPr/>
+        <p:txBody>
+          <a:bodyPr/>
+          <a:lstStyle/>
+          <a:p/>
+          <a:p>
+            <a:r>
+              <a:t>Distributed Transaction Management</a:t>
+            </a:r>
+          </a:p>
+          <a:p>
+            <a:r>
+              <a:t>Compensation Logic für Rollbacks</a:t>
+            </a:r>
+          </a:p>
+          <a:p>
+            <a:r>
+              <a:t>Keine 2PC Lock Requirements</a:t>
+            </a:r>
+          </a:p>
+          <a:p>
+            <a:r>
+              <a:t>Bessere Performance als 2PC</a:t>
+            </a:r>
+          </a:p>
+        </p:txBody>
+      </p:sp>
+      <p:sp>
+        <p:nvSpPr>
+          <p:cNvPr id="5" name="Text Placeholder 4"/>
+          <p:cNvSpPr>
+            <a:spLocks noGrp="1"/>
+          </p:cNvSpPr>
+          <p:nvPr>
+            <p:ph type="body" idx="3" sz="quarter"/>
+          </p:nvPr>
+        </p:nvSpPr>
+        <p:spPr/>
+        <p:txBody>
+          <a:bodyPr/>
+          <a:lstStyle/>
+          <a:p>
+            <a:r>
+              <a:t>Nachteile ❌</a:t>
+            </a:r>
+          </a:p>
+        </p:txBody>
+      </p:sp>
+      <p:sp>
+        <p:nvSpPr>
+          <p:cNvPr id="6" name="Content Placeholder 5"/>
+          <p:cNvSpPr>
+            <a:spLocks noGrp="1"/>
+          </p:cNvSpPr>
+          <p:nvPr>
+            <p:ph idx="4" sz="quarter"/>
+          </p:nvPr>
+        </p:nvSpPr>
+        <p:spPr/>
+        <p:txBody>
+          <a:bodyPr/>
+          <a:lstStyle/>
+          <a:p/>
+          <a:p>
+            <a:r>
+              <a:t>Komplexe Compensation Logic</a:t>
+            </a:r>
+          </a:p>
+          <a:p>
+            <a:r>
+              <a:t>Debugging schwierig</a:t>
+            </a:r>
+          </a:p>
+          <a:p>
+            <a:r>
+              <a:t>Partial Failure Handling</a:t>
+            </a:r>
+          </a:p>
+          <a:p>
+            <a:r>
+              <a:t>Testing der Compensation</a:t>
+            </a:r>
+          </a:p>
         </p:txBody>
       </p:sp>
     </p:spTree>
@@ -13262,19 +14268,40 @@
           <a:lstStyle/>
           <a:p>
             <a:r>
-              <a:t>Saga Pattern - Vorteile/Nachteile</a:t>
-            </a:r>
-          </a:p>
-        </p:txBody>
-      </p:sp>
-      <p:sp>
-        <p:nvSpPr>
-          <p:cNvPr id="3" name="Content Placeholder 2"/>
-          <p:cNvSpPr>
-            <a:spLocks noGrp="1"/>
-          </p:cNvSpPr>
-          <p:nvPr>
-            <p:ph idx="1"/>
+              <a:t>API Gateway - Vorteile/Nachteile</a:t>
+            </a:r>
+          </a:p>
+        </p:txBody>
+      </p:sp>
+      <p:sp>
+        <p:nvSpPr>
+          <p:cNvPr id="3" name="Text Placeholder 2"/>
+          <p:cNvSpPr>
+            <a:spLocks noGrp="1"/>
+          </p:cNvSpPr>
+          <p:nvPr>
+            <p:ph type="body" idx="1"/>
+          </p:nvPr>
+        </p:nvSpPr>
+        <p:spPr/>
+        <p:txBody>
+          <a:bodyPr/>
+          <a:lstStyle/>
+          <a:p>
+            <a:r>
+              <a:t>Vorteile ✅</a:t>
+            </a:r>
+          </a:p>
+        </p:txBody>
+      </p:sp>
+      <p:sp>
+        <p:nvSpPr>
+          <p:cNvPr id="4" name="Content Placeholder 3"/>
+          <p:cNvSpPr>
+            <a:spLocks noGrp="1"/>
+          </p:cNvSpPr>
+          <p:nvPr>
+            <p:ph idx="2" sz="half"/>
           </p:nvPr>
         </p:nvSpPr>
         <p:spPr/>
@@ -13282,6 +14309,239 @@
           <a:bodyPr/>
           <a:lstStyle/>
           <a:p/>
+          <a:p>
+            <a:r>
+              <a:t>Single Entry Point für Clients</a:t>
+            </a:r>
+          </a:p>
+          <a:p>
+            <a:r>
+              <a:t>Cross-Cutting Concerns zentral</a:t>
+            </a:r>
+          </a:p>
+          <a:p>
+            <a:r>
+              <a:t>API Composition möglich</a:t>
+            </a:r>
+          </a:p>
+          <a:p>
+            <a:r>
+              <a:t>Backend Service Abstraktion</a:t>
+            </a:r>
+          </a:p>
+        </p:txBody>
+      </p:sp>
+      <p:sp>
+        <p:nvSpPr>
+          <p:cNvPr id="5" name="Text Placeholder 4"/>
+          <p:cNvSpPr>
+            <a:spLocks noGrp="1"/>
+          </p:cNvSpPr>
+          <p:nvPr>
+            <p:ph type="body" idx="3" sz="quarter"/>
+          </p:nvPr>
+        </p:nvSpPr>
+        <p:spPr/>
+        <p:txBody>
+          <a:bodyPr/>
+          <a:lstStyle/>
+          <a:p>
+            <a:r>
+              <a:t>Nachteile ❌</a:t>
+            </a:r>
+          </a:p>
+        </p:txBody>
+      </p:sp>
+      <p:sp>
+        <p:nvSpPr>
+          <p:cNvPr id="6" name="Content Placeholder 5"/>
+          <p:cNvSpPr>
+            <a:spLocks noGrp="1"/>
+          </p:cNvSpPr>
+          <p:nvPr>
+            <p:ph idx="4" sz="quarter"/>
+          </p:nvPr>
+        </p:nvSpPr>
+        <p:spPr/>
+        <p:txBody>
+          <a:bodyPr/>
+          <a:lstStyle/>
+          <a:p/>
+          <a:p>
+            <a:r>
+              <a:t>Single Point of Failure</a:t>
+            </a:r>
+          </a:p>
+          <a:p>
+            <a:r>
+              <a:t>Additional Latency Layer</a:t>
+            </a:r>
+          </a:p>
+          <a:p>
+            <a:r>
+              <a:t>Deployment Koordination</a:t>
+            </a:r>
+          </a:p>
+          <a:p>
+            <a:r>
+              <a:t>Gateway Bottleneck möglich</a:t>
+            </a:r>
+          </a:p>
+        </p:txBody>
+      </p:sp>
+    </p:spTree>
+  </p:cSld>
+  <p:clrMapOvr>
+    <a:masterClrMapping/>
+  </p:clrMapOvr>
+</p:sld>
+</file>
+
+<file path=ppt/slides/slide21.xml><?xml version="1.0" encoding="utf-8"?>
+<p:sld xmlns:a="http://schemas.openxmlformats.org/drawingml/2006/main" xmlns:p="http://schemas.openxmlformats.org/presentationml/2006/main" xmlns:r="http://schemas.openxmlformats.org/officeDocument/2006/relationships">
+  <p:cSld>
+    <p:spTree>
+      <p:nvGrpSpPr>
+        <p:cNvPr id="1" name=""/>
+        <p:cNvGrpSpPr/>
+        <p:nvPr/>
+      </p:nvGrpSpPr>
+      <p:grpSpPr/>
+      <p:sp>
+        <p:nvSpPr>
+          <p:cNvPr id="2" name="Title 1"/>
+          <p:cNvSpPr>
+            <a:spLocks noGrp="1"/>
+          </p:cNvSpPr>
+          <p:nvPr>
+            <p:ph type="title"/>
+          </p:nvPr>
+        </p:nvSpPr>
+        <p:spPr/>
+        <p:txBody>
+          <a:bodyPr/>
+          <a:lstStyle/>
+          <a:p>
+            <a:r>
+              <a:t>API Gateway - Vorteile/Nachteile</a:t>
+            </a:r>
+          </a:p>
+        </p:txBody>
+      </p:sp>
+      <p:sp>
+        <p:nvSpPr>
+          <p:cNvPr id="3" name="Text Placeholder 2"/>
+          <p:cNvSpPr>
+            <a:spLocks noGrp="1"/>
+          </p:cNvSpPr>
+          <p:nvPr>
+            <p:ph type="body" idx="1"/>
+          </p:nvPr>
+        </p:nvSpPr>
+        <p:spPr/>
+        <p:txBody>
+          <a:bodyPr/>
+          <a:lstStyle/>
+          <a:p>
+            <a:r>
+              <a:t>Vorteile ✅</a:t>
+            </a:r>
+          </a:p>
+        </p:txBody>
+      </p:sp>
+      <p:sp>
+        <p:nvSpPr>
+          <p:cNvPr id="4" name="Content Placeholder 3"/>
+          <p:cNvSpPr>
+            <a:spLocks noGrp="1"/>
+          </p:cNvSpPr>
+          <p:nvPr>
+            <p:ph idx="2" sz="half"/>
+          </p:nvPr>
+        </p:nvSpPr>
+        <p:spPr/>
+        <p:txBody>
+          <a:bodyPr/>
+          <a:lstStyle/>
+          <a:p/>
+          <a:p>
+            <a:r>
+              <a:t>Single Entry Point für Clients</a:t>
+            </a:r>
+          </a:p>
+          <a:p>
+            <a:r>
+              <a:t>Cross-Cutting Concerns zentral</a:t>
+            </a:r>
+          </a:p>
+          <a:p>
+            <a:r>
+              <a:t>API Composition möglich</a:t>
+            </a:r>
+          </a:p>
+          <a:p>
+            <a:r>
+              <a:t>Backend Service Abstraktion</a:t>
+            </a:r>
+          </a:p>
+        </p:txBody>
+      </p:sp>
+      <p:sp>
+        <p:nvSpPr>
+          <p:cNvPr id="5" name="Text Placeholder 4"/>
+          <p:cNvSpPr>
+            <a:spLocks noGrp="1"/>
+          </p:cNvSpPr>
+          <p:nvPr>
+            <p:ph type="body" idx="3" sz="quarter"/>
+          </p:nvPr>
+        </p:nvSpPr>
+        <p:spPr/>
+        <p:txBody>
+          <a:bodyPr/>
+          <a:lstStyle/>
+          <a:p>
+            <a:r>
+              <a:t>Nachteile ❌</a:t>
+            </a:r>
+          </a:p>
+        </p:txBody>
+      </p:sp>
+      <p:sp>
+        <p:nvSpPr>
+          <p:cNvPr id="6" name="Content Placeholder 5"/>
+          <p:cNvSpPr>
+            <a:spLocks noGrp="1"/>
+          </p:cNvSpPr>
+          <p:nvPr>
+            <p:ph idx="4" sz="quarter"/>
+          </p:nvPr>
+        </p:nvSpPr>
+        <p:spPr/>
+        <p:txBody>
+          <a:bodyPr/>
+          <a:lstStyle/>
+          <a:p/>
+          <a:p>
+            <a:r>
+              <a:t>Single Point of Failure</a:t>
+            </a:r>
+          </a:p>
+          <a:p>
+            <a:r>
+              <a:t>Additional Latency Layer</a:t>
+            </a:r>
+          </a:p>
+          <a:p>
+            <a:r>
+              <a:t>Deployment Koordination</a:t>
+            </a:r>
+          </a:p>
+          <a:p>
+            <a:r>
+              <a:t>Gateway Bottleneck möglich</a:t>
+            </a:r>
+          </a:p>
         </p:txBody>
       </p:sp>
     </p:spTree>
@@ -13318,19 +14578,40 @@
           <a:lstStyle/>
           <a:p>
             <a:r>
-              <a:t>API Gateway - Vorteile/Nachteile</a:t>
-            </a:r>
-          </a:p>
-        </p:txBody>
-      </p:sp>
-      <p:sp>
-        <p:nvSpPr>
-          <p:cNvPr id="3" name="Content Placeholder 2"/>
-          <p:cNvSpPr>
-            <a:spLocks noGrp="1"/>
-          </p:cNvSpPr>
-          <p:nvPr>
-            <p:ph idx="1"/>
+              <a:t>Service Mesh - Vorteile/Nachteile</a:t>
+            </a:r>
+          </a:p>
+        </p:txBody>
+      </p:sp>
+      <p:sp>
+        <p:nvSpPr>
+          <p:cNvPr id="3" name="Text Placeholder 2"/>
+          <p:cNvSpPr>
+            <a:spLocks noGrp="1"/>
+          </p:cNvSpPr>
+          <p:nvPr>
+            <p:ph type="body" idx="1"/>
+          </p:nvPr>
+        </p:nvSpPr>
+        <p:spPr/>
+        <p:txBody>
+          <a:bodyPr/>
+          <a:lstStyle/>
+          <a:p>
+            <a:r>
+              <a:t>Vorteile ✅</a:t>
+            </a:r>
+          </a:p>
+        </p:txBody>
+      </p:sp>
+      <p:sp>
+        <p:nvSpPr>
+          <p:cNvPr id="4" name="Content Placeholder 3"/>
+          <p:cNvSpPr>
+            <a:spLocks noGrp="1"/>
+          </p:cNvSpPr>
+          <p:nvPr>
+            <p:ph idx="2" sz="half"/>
           </p:nvPr>
         </p:nvSpPr>
         <p:spPr/>
@@ -13338,6 +14619,239 @@
           <a:bodyPr/>
           <a:lstStyle/>
           <a:p/>
+          <a:p>
+            <a:r>
+              <a:t>Service-to-Service Security</a:t>
+            </a:r>
+          </a:p>
+          <a:p>
+            <a:r>
+              <a:t>Automatic Load Balancing</a:t>
+            </a:r>
+          </a:p>
+          <a:p>
+            <a:r>
+              <a:t>Observability out-of-the-box</a:t>
+            </a:r>
+          </a:p>
+          <a:p>
+            <a:r>
+              <a:t>Traffic Management Features</a:t>
+            </a:r>
+          </a:p>
+        </p:txBody>
+      </p:sp>
+      <p:sp>
+        <p:nvSpPr>
+          <p:cNvPr id="5" name="Text Placeholder 4"/>
+          <p:cNvSpPr>
+            <a:spLocks noGrp="1"/>
+          </p:cNvSpPr>
+          <p:nvPr>
+            <p:ph type="body" idx="3" sz="quarter"/>
+          </p:nvPr>
+        </p:nvSpPr>
+        <p:spPr/>
+        <p:txBody>
+          <a:bodyPr/>
+          <a:lstStyle/>
+          <a:p>
+            <a:r>
+              <a:t>Nachteile ❌</a:t>
+            </a:r>
+          </a:p>
+        </p:txBody>
+      </p:sp>
+      <p:sp>
+        <p:nvSpPr>
+          <p:cNvPr id="6" name="Content Placeholder 5"/>
+          <p:cNvSpPr>
+            <a:spLocks noGrp="1"/>
+          </p:cNvSpPr>
+          <p:nvPr>
+            <p:ph idx="4" sz="quarter"/>
+          </p:nvPr>
+        </p:nvSpPr>
+        <p:spPr/>
+        <p:txBody>
+          <a:bodyPr/>
+          <a:lstStyle/>
+          <a:p/>
+          <a:p>
+            <a:r>
+              <a:t>Operational Overhead</a:t>
+            </a:r>
+          </a:p>
+          <a:p>
+            <a:r>
+              <a:t>Resource Consumption (Sidecars)</a:t>
+            </a:r>
+          </a:p>
+          <a:p>
+            <a:r>
+              <a:t>Learning Curve hoch</a:t>
+            </a:r>
+          </a:p>
+          <a:p>
+            <a:r>
+              <a:t>Debugging Complexity</a:t>
+            </a:r>
+          </a:p>
+        </p:txBody>
+      </p:sp>
+    </p:spTree>
+  </p:cSld>
+  <p:clrMapOvr>
+    <a:masterClrMapping/>
+  </p:clrMapOvr>
+</p:sld>
+</file>
+
+<file path=ppt/slides/slide22.xml><?xml version="1.0" encoding="utf-8"?>
+<p:sld xmlns:a="http://schemas.openxmlformats.org/drawingml/2006/main" xmlns:p="http://schemas.openxmlformats.org/presentationml/2006/main" xmlns:r="http://schemas.openxmlformats.org/officeDocument/2006/relationships">
+  <p:cSld>
+    <p:spTree>
+      <p:nvGrpSpPr>
+        <p:cNvPr id="1" name=""/>
+        <p:cNvGrpSpPr/>
+        <p:nvPr/>
+      </p:nvGrpSpPr>
+      <p:grpSpPr/>
+      <p:sp>
+        <p:nvSpPr>
+          <p:cNvPr id="2" name="Title 1"/>
+          <p:cNvSpPr>
+            <a:spLocks noGrp="1"/>
+          </p:cNvSpPr>
+          <p:nvPr>
+            <p:ph type="title"/>
+          </p:nvPr>
+        </p:nvSpPr>
+        <p:spPr/>
+        <p:txBody>
+          <a:bodyPr/>
+          <a:lstStyle/>
+          <a:p>
+            <a:r>
+              <a:t>Service Mesh - Vorteile/Nachteile</a:t>
+            </a:r>
+          </a:p>
+        </p:txBody>
+      </p:sp>
+      <p:sp>
+        <p:nvSpPr>
+          <p:cNvPr id="3" name="Text Placeholder 2"/>
+          <p:cNvSpPr>
+            <a:spLocks noGrp="1"/>
+          </p:cNvSpPr>
+          <p:nvPr>
+            <p:ph type="body" idx="1"/>
+          </p:nvPr>
+        </p:nvSpPr>
+        <p:spPr/>
+        <p:txBody>
+          <a:bodyPr/>
+          <a:lstStyle/>
+          <a:p>
+            <a:r>
+              <a:t>Vorteile ✅</a:t>
+            </a:r>
+          </a:p>
+        </p:txBody>
+      </p:sp>
+      <p:sp>
+        <p:nvSpPr>
+          <p:cNvPr id="4" name="Content Placeholder 3"/>
+          <p:cNvSpPr>
+            <a:spLocks noGrp="1"/>
+          </p:cNvSpPr>
+          <p:nvPr>
+            <p:ph idx="2" sz="half"/>
+          </p:nvPr>
+        </p:nvSpPr>
+        <p:spPr/>
+        <p:txBody>
+          <a:bodyPr/>
+          <a:lstStyle/>
+          <a:p/>
+          <a:p>
+            <a:r>
+              <a:t>Service-to-Service Security</a:t>
+            </a:r>
+          </a:p>
+          <a:p>
+            <a:r>
+              <a:t>Automatic Load Balancing</a:t>
+            </a:r>
+          </a:p>
+          <a:p>
+            <a:r>
+              <a:t>Observability out-of-the-box</a:t>
+            </a:r>
+          </a:p>
+          <a:p>
+            <a:r>
+              <a:t>Traffic Management Features</a:t>
+            </a:r>
+          </a:p>
+        </p:txBody>
+      </p:sp>
+      <p:sp>
+        <p:nvSpPr>
+          <p:cNvPr id="5" name="Text Placeholder 4"/>
+          <p:cNvSpPr>
+            <a:spLocks noGrp="1"/>
+          </p:cNvSpPr>
+          <p:nvPr>
+            <p:ph type="body" idx="3" sz="quarter"/>
+          </p:nvPr>
+        </p:nvSpPr>
+        <p:spPr/>
+        <p:txBody>
+          <a:bodyPr/>
+          <a:lstStyle/>
+          <a:p>
+            <a:r>
+              <a:t>Nachteile ❌</a:t>
+            </a:r>
+          </a:p>
+        </p:txBody>
+      </p:sp>
+      <p:sp>
+        <p:nvSpPr>
+          <p:cNvPr id="6" name="Content Placeholder 5"/>
+          <p:cNvSpPr>
+            <a:spLocks noGrp="1"/>
+          </p:cNvSpPr>
+          <p:nvPr>
+            <p:ph idx="4" sz="quarter"/>
+          </p:nvPr>
+        </p:nvSpPr>
+        <p:spPr/>
+        <p:txBody>
+          <a:bodyPr/>
+          <a:lstStyle/>
+          <a:p/>
+          <a:p>
+            <a:r>
+              <a:t>Operational Overhead</a:t>
+            </a:r>
+          </a:p>
+          <a:p>
+            <a:r>
+              <a:t>Resource Consumption (Sidecars)</a:t>
+            </a:r>
+          </a:p>
+          <a:p>
+            <a:r>
+              <a:t>Learning Curve hoch</a:t>
+            </a:r>
+          </a:p>
+          <a:p>
+            <a:r>
+              <a:t>Debugging Complexity</a:t>
+            </a:r>
+          </a:p>
         </p:txBody>
       </p:sp>
     </p:spTree>
@@ -13374,19 +14888,40 @@
           <a:lstStyle/>
           <a:p>
             <a:r>
-              <a:t>Service Mesh - Vorteile/Nachteile</a:t>
-            </a:r>
-          </a:p>
-        </p:txBody>
-      </p:sp>
-      <p:sp>
-        <p:nvSpPr>
-          <p:cNvPr id="3" name="Content Placeholder 2"/>
-          <p:cNvSpPr>
-            <a:spLocks noGrp="1"/>
-          </p:cNvSpPr>
-          <p:nvPr>
-            <p:ph idx="1"/>
+              <a:t>Bulkhead Pattern - Vorteile/Nachteile</a:t>
+            </a:r>
+          </a:p>
+        </p:txBody>
+      </p:sp>
+      <p:sp>
+        <p:nvSpPr>
+          <p:cNvPr id="3" name="Text Placeholder 2"/>
+          <p:cNvSpPr>
+            <a:spLocks noGrp="1"/>
+          </p:cNvSpPr>
+          <p:nvPr>
+            <p:ph type="body" idx="1"/>
+          </p:nvPr>
+        </p:nvSpPr>
+        <p:spPr/>
+        <p:txBody>
+          <a:bodyPr/>
+          <a:lstStyle/>
+          <a:p>
+            <a:r>
+              <a:t>Vorteile ✅</a:t>
+            </a:r>
+          </a:p>
+        </p:txBody>
+      </p:sp>
+      <p:sp>
+        <p:nvSpPr>
+          <p:cNvPr id="4" name="Content Placeholder 3"/>
+          <p:cNvSpPr>
+            <a:spLocks noGrp="1"/>
+          </p:cNvSpPr>
+          <p:nvPr>
+            <p:ph idx="2" sz="half"/>
           </p:nvPr>
         </p:nvSpPr>
         <p:spPr/>
@@ -13394,6 +14929,239 @@
           <a:bodyPr/>
           <a:lstStyle/>
           <a:p/>
+          <a:p>
+            <a:r>
+              <a:t>Fault Isolation zwischen Components</a:t>
+            </a:r>
+          </a:p>
+          <a:p>
+            <a:r>
+              <a:t>Resource Protection</a:t>
+            </a:r>
+          </a:p>
+          <a:p>
+            <a:r>
+              <a:t>Predictable Performance</a:t>
+            </a:r>
+          </a:p>
+          <a:p>
+            <a:r>
+              <a:t>Prevents Resource Exhaustion</a:t>
+            </a:r>
+          </a:p>
+        </p:txBody>
+      </p:sp>
+      <p:sp>
+        <p:nvSpPr>
+          <p:cNvPr id="5" name="Text Placeholder 4"/>
+          <p:cNvSpPr>
+            <a:spLocks noGrp="1"/>
+          </p:cNvSpPr>
+          <p:nvPr>
+            <p:ph type="body" idx="3" sz="quarter"/>
+          </p:nvPr>
+        </p:nvSpPr>
+        <p:spPr/>
+        <p:txBody>
+          <a:bodyPr/>
+          <a:lstStyle/>
+          <a:p>
+            <a:r>
+              <a:t>Nachteile ❌</a:t>
+            </a:r>
+          </a:p>
+        </p:txBody>
+      </p:sp>
+      <p:sp>
+        <p:nvSpPr>
+          <p:cNvPr id="6" name="Content Placeholder 5"/>
+          <p:cNvSpPr>
+            <a:spLocks noGrp="1"/>
+          </p:cNvSpPr>
+          <p:nvPr>
+            <p:ph idx="4" sz="quarter"/>
+          </p:nvPr>
+        </p:nvSpPr>
+        <p:spPr/>
+        <p:txBody>
+          <a:bodyPr/>
+          <a:lstStyle/>
+          <a:p/>
+          <a:p>
+            <a:r>
+              <a:t>Resource Underutilization möglich</a:t>
+            </a:r>
+          </a:p>
+          <a:p>
+            <a:r>
+              <a:t>Configuration Complexity</a:t>
+            </a:r>
+          </a:p>
+          <a:p>
+            <a:r>
+              <a:t>More Infrastructure Required</a:t>
+            </a:r>
+          </a:p>
+          <a:p>
+            <a:r>
+              <a:t>Monitoring Overhead</a:t>
+            </a:r>
+          </a:p>
+        </p:txBody>
+      </p:sp>
+    </p:spTree>
+  </p:cSld>
+  <p:clrMapOvr>
+    <a:masterClrMapping/>
+  </p:clrMapOvr>
+</p:sld>
+</file>
+
+<file path=ppt/slides/slide23.xml><?xml version="1.0" encoding="utf-8"?>
+<p:sld xmlns:a="http://schemas.openxmlformats.org/drawingml/2006/main" xmlns:p="http://schemas.openxmlformats.org/presentationml/2006/main" xmlns:r="http://schemas.openxmlformats.org/officeDocument/2006/relationships">
+  <p:cSld>
+    <p:spTree>
+      <p:nvGrpSpPr>
+        <p:cNvPr id="1" name=""/>
+        <p:cNvGrpSpPr/>
+        <p:nvPr/>
+      </p:nvGrpSpPr>
+      <p:grpSpPr/>
+      <p:sp>
+        <p:nvSpPr>
+          <p:cNvPr id="2" name="Title 1"/>
+          <p:cNvSpPr>
+            <a:spLocks noGrp="1"/>
+          </p:cNvSpPr>
+          <p:nvPr>
+            <p:ph type="title"/>
+          </p:nvPr>
+        </p:nvSpPr>
+        <p:spPr/>
+        <p:txBody>
+          <a:bodyPr/>
+          <a:lstStyle/>
+          <a:p>
+            <a:r>
+              <a:t>Bulkhead Pattern - Vorteile/Nachteile</a:t>
+            </a:r>
+          </a:p>
+        </p:txBody>
+      </p:sp>
+      <p:sp>
+        <p:nvSpPr>
+          <p:cNvPr id="3" name="Text Placeholder 2"/>
+          <p:cNvSpPr>
+            <a:spLocks noGrp="1"/>
+          </p:cNvSpPr>
+          <p:nvPr>
+            <p:ph type="body" idx="1"/>
+          </p:nvPr>
+        </p:nvSpPr>
+        <p:spPr/>
+        <p:txBody>
+          <a:bodyPr/>
+          <a:lstStyle/>
+          <a:p>
+            <a:r>
+              <a:t>Vorteile ✅</a:t>
+            </a:r>
+          </a:p>
+        </p:txBody>
+      </p:sp>
+      <p:sp>
+        <p:nvSpPr>
+          <p:cNvPr id="4" name="Content Placeholder 3"/>
+          <p:cNvSpPr>
+            <a:spLocks noGrp="1"/>
+          </p:cNvSpPr>
+          <p:nvPr>
+            <p:ph idx="2" sz="half"/>
+          </p:nvPr>
+        </p:nvSpPr>
+        <p:spPr/>
+        <p:txBody>
+          <a:bodyPr/>
+          <a:lstStyle/>
+          <a:p/>
+          <a:p>
+            <a:r>
+              <a:t>Fault Isolation zwischen Components</a:t>
+            </a:r>
+          </a:p>
+          <a:p>
+            <a:r>
+              <a:t>Resource Protection</a:t>
+            </a:r>
+          </a:p>
+          <a:p>
+            <a:r>
+              <a:t>Predictable Performance</a:t>
+            </a:r>
+          </a:p>
+          <a:p>
+            <a:r>
+              <a:t>Prevents Resource Exhaustion</a:t>
+            </a:r>
+          </a:p>
+        </p:txBody>
+      </p:sp>
+      <p:sp>
+        <p:nvSpPr>
+          <p:cNvPr id="5" name="Text Placeholder 4"/>
+          <p:cNvSpPr>
+            <a:spLocks noGrp="1"/>
+          </p:cNvSpPr>
+          <p:nvPr>
+            <p:ph type="body" idx="3" sz="quarter"/>
+          </p:nvPr>
+        </p:nvSpPr>
+        <p:spPr/>
+        <p:txBody>
+          <a:bodyPr/>
+          <a:lstStyle/>
+          <a:p>
+            <a:r>
+              <a:t>Nachteile ❌</a:t>
+            </a:r>
+          </a:p>
+        </p:txBody>
+      </p:sp>
+      <p:sp>
+        <p:nvSpPr>
+          <p:cNvPr id="6" name="Content Placeholder 5"/>
+          <p:cNvSpPr>
+            <a:spLocks noGrp="1"/>
+          </p:cNvSpPr>
+          <p:nvPr>
+            <p:ph idx="4" sz="quarter"/>
+          </p:nvPr>
+        </p:nvSpPr>
+        <p:spPr/>
+        <p:txBody>
+          <a:bodyPr/>
+          <a:lstStyle/>
+          <a:p/>
+          <a:p>
+            <a:r>
+              <a:t>Resource Underutilization möglich</a:t>
+            </a:r>
+          </a:p>
+          <a:p>
+            <a:r>
+              <a:t>Configuration Complexity</a:t>
+            </a:r>
+          </a:p>
+          <a:p>
+            <a:r>
+              <a:t>More Infrastructure Required</a:t>
+            </a:r>
+          </a:p>
+          <a:p>
+            <a:r>
+              <a:t>Monitoring Overhead</a:t>
+            </a:r>
+          </a:p>
         </p:txBody>
       </p:sp>
     </p:spTree>
@@ -13430,19 +15198,40 @@
           <a:lstStyle/>
           <a:p>
             <a:r>
-              <a:t>Bulkhead Pattern - Vorteile/Nachteile</a:t>
-            </a:r>
-          </a:p>
-        </p:txBody>
-      </p:sp>
-      <p:sp>
-        <p:nvSpPr>
-          <p:cNvPr id="3" name="Content Placeholder 2"/>
-          <p:cNvSpPr>
-            <a:spLocks noGrp="1"/>
-          </p:cNvSpPr>
-          <p:nvPr>
-            <p:ph idx="1"/>
+              <a:t>Domain-Driven Design - Vorteile/Nachteile</a:t>
+            </a:r>
+          </a:p>
+        </p:txBody>
+      </p:sp>
+      <p:sp>
+        <p:nvSpPr>
+          <p:cNvPr id="3" name="Text Placeholder 2"/>
+          <p:cNvSpPr>
+            <a:spLocks noGrp="1"/>
+          </p:cNvSpPr>
+          <p:nvPr>
+            <p:ph type="body" idx="1"/>
+          </p:nvPr>
+        </p:nvSpPr>
+        <p:spPr/>
+        <p:txBody>
+          <a:bodyPr/>
+          <a:lstStyle/>
+          <a:p>
+            <a:r>
+              <a:t>Vorteile ✅</a:t>
+            </a:r>
+          </a:p>
+        </p:txBody>
+      </p:sp>
+      <p:sp>
+        <p:nvSpPr>
+          <p:cNvPr id="4" name="Content Placeholder 3"/>
+          <p:cNvSpPr>
+            <a:spLocks noGrp="1"/>
+          </p:cNvSpPr>
+          <p:nvPr>
+            <p:ph idx="2" sz="half"/>
           </p:nvPr>
         </p:nvSpPr>
         <p:spPr/>
@@ -13450,6 +15239,239 @@
           <a:bodyPr/>
           <a:lstStyle/>
           <a:p/>
+          <a:p>
+            <a:r>
+              <a:t>Klare Bounded Contexts</a:t>
+            </a:r>
+          </a:p>
+          <a:p>
+            <a:r>
+              <a:t>Ubiquitous Language etabliert</a:t>
+            </a:r>
+          </a:p>
+          <a:p>
+            <a:r>
+              <a:t>Business-IT Alignment</a:t>
+            </a:r>
+          </a:p>
+          <a:p>
+            <a:r>
+              <a:t>Modulare Struktur</a:t>
+            </a:r>
+          </a:p>
+        </p:txBody>
+      </p:sp>
+      <p:sp>
+        <p:nvSpPr>
+          <p:cNvPr id="5" name="Text Placeholder 4"/>
+          <p:cNvSpPr>
+            <a:spLocks noGrp="1"/>
+          </p:cNvSpPr>
+          <p:nvPr>
+            <p:ph type="body" idx="3" sz="quarter"/>
+          </p:nvPr>
+        </p:nvSpPr>
+        <p:spPr/>
+        <p:txBody>
+          <a:bodyPr/>
+          <a:lstStyle/>
+          <a:p>
+            <a:r>
+              <a:t>Nachteile ❌</a:t>
+            </a:r>
+          </a:p>
+        </p:txBody>
+      </p:sp>
+      <p:sp>
+        <p:nvSpPr>
+          <p:cNvPr id="6" name="Content Placeholder 5"/>
+          <p:cNvSpPr>
+            <a:spLocks noGrp="1"/>
+          </p:cNvSpPr>
+          <p:nvPr>
+            <p:ph idx="4" sz="quarter"/>
+          </p:nvPr>
+        </p:nvSpPr>
+        <p:spPr/>
+        <p:txBody>
+          <a:bodyPr/>
+          <a:lstStyle/>
+          <a:p/>
+          <a:p>
+            <a:r>
+              <a:t>Steile Learning Curve</a:t>
+            </a:r>
+          </a:p>
+          <a:p>
+            <a:r>
+              <a:t>Upfront Design Investment</a:t>
+            </a:r>
+          </a:p>
+          <a:p>
+            <a:r>
+              <a:t>Domain Expert Availability</a:t>
+            </a:r>
+          </a:p>
+          <a:p>
+            <a:r>
+              <a:t>Over-Engineering Gefahr</a:t>
+            </a:r>
+          </a:p>
+        </p:txBody>
+      </p:sp>
+    </p:spTree>
+  </p:cSld>
+  <p:clrMapOvr>
+    <a:masterClrMapping/>
+  </p:clrMapOvr>
+</p:sld>
+</file>
+
+<file path=ppt/slides/slide24.xml><?xml version="1.0" encoding="utf-8"?>
+<p:sld xmlns:a="http://schemas.openxmlformats.org/drawingml/2006/main" xmlns:p="http://schemas.openxmlformats.org/presentationml/2006/main" xmlns:r="http://schemas.openxmlformats.org/officeDocument/2006/relationships">
+  <p:cSld>
+    <p:spTree>
+      <p:nvGrpSpPr>
+        <p:cNvPr id="1" name=""/>
+        <p:cNvGrpSpPr/>
+        <p:nvPr/>
+      </p:nvGrpSpPr>
+      <p:grpSpPr/>
+      <p:sp>
+        <p:nvSpPr>
+          <p:cNvPr id="2" name="Title 1"/>
+          <p:cNvSpPr>
+            <a:spLocks noGrp="1"/>
+          </p:cNvSpPr>
+          <p:nvPr>
+            <p:ph type="title"/>
+          </p:nvPr>
+        </p:nvSpPr>
+        <p:spPr/>
+        <p:txBody>
+          <a:bodyPr/>
+          <a:lstStyle/>
+          <a:p>
+            <a:r>
+              <a:t>Domain-Driven Design - Vorteile/Nachteile</a:t>
+            </a:r>
+          </a:p>
+        </p:txBody>
+      </p:sp>
+      <p:sp>
+        <p:nvSpPr>
+          <p:cNvPr id="3" name="Text Placeholder 2"/>
+          <p:cNvSpPr>
+            <a:spLocks noGrp="1"/>
+          </p:cNvSpPr>
+          <p:nvPr>
+            <p:ph type="body" idx="1"/>
+          </p:nvPr>
+        </p:nvSpPr>
+        <p:spPr/>
+        <p:txBody>
+          <a:bodyPr/>
+          <a:lstStyle/>
+          <a:p>
+            <a:r>
+              <a:t>Vorteile ✅</a:t>
+            </a:r>
+          </a:p>
+        </p:txBody>
+      </p:sp>
+      <p:sp>
+        <p:nvSpPr>
+          <p:cNvPr id="4" name="Content Placeholder 3"/>
+          <p:cNvSpPr>
+            <a:spLocks noGrp="1"/>
+          </p:cNvSpPr>
+          <p:nvPr>
+            <p:ph idx="2" sz="half"/>
+          </p:nvPr>
+        </p:nvSpPr>
+        <p:spPr/>
+        <p:txBody>
+          <a:bodyPr/>
+          <a:lstStyle/>
+          <a:p/>
+          <a:p>
+            <a:r>
+              <a:t>Klare Bounded Contexts</a:t>
+            </a:r>
+          </a:p>
+          <a:p>
+            <a:r>
+              <a:t>Ubiquitous Language etabliert</a:t>
+            </a:r>
+          </a:p>
+          <a:p>
+            <a:r>
+              <a:t>Business-IT Alignment</a:t>
+            </a:r>
+          </a:p>
+          <a:p>
+            <a:r>
+              <a:t>Modulare Struktur</a:t>
+            </a:r>
+          </a:p>
+        </p:txBody>
+      </p:sp>
+      <p:sp>
+        <p:nvSpPr>
+          <p:cNvPr id="5" name="Text Placeholder 4"/>
+          <p:cNvSpPr>
+            <a:spLocks noGrp="1"/>
+          </p:cNvSpPr>
+          <p:nvPr>
+            <p:ph type="body" idx="3" sz="quarter"/>
+          </p:nvPr>
+        </p:nvSpPr>
+        <p:spPr/>
+        <p:txBody>
+          <a:bodyPr/>
+          <a:lstStyle/>
+          <a:p>
+            <a:r>
+              <a:t>Nachteile ❌</a:t>
+            </a:r>
+          </a:p>
+        </p:txBody>
+      </p:sp>
+      <p:sp>
+        <p:nvSpPr>
+          <p:cNvPr id="6" name="Content Placeholder 5"/>
+          <p:cNvSpPr>
+            <a:spLocks noGrp="1"/>
+          </p:cNvSpPr>
+          <p:nvPr>
+            <p:ph idx="4" sz="quarter"/>
+          </p:nvPr>
+        </p:nvSpPr>
+        <p:spPr/>
+        <p:txBody>
+          <a:bodyPr/>
+          <a:lstStyle/>
+          <a:p/>
+          <a:p>
+            <a:r>
+              <a:t>Steile Learning Curve</a:t>
+            </a:r>
+          </a:p>
+          <a:p>
+            <a:r>
+              <a:t>Upfront Design Investment</a:t>
+            </a:r>
+          </a:p>
+          <a:p>
+            <a:r>
+              <a:t>Domain Expert Availability</a:t>
+            </a:r>
+          </a:p>
+          <a:p>
+            <a:r>
+              <a:t>Over-Engineering Gefahr</a:t>
+            </a:r>
+          </a:p>
         </p:txBody>
       </p:sp>
     </p:spTree>
